--- a/submission/AlphaVault-Presentation.pptx
+++ b/submission/AlphaVault-Presentation.pptx
@@ -2,22 +2,22 @@
 <file path=ppt/presentation.xml><?xml version="1.0" encoding="utf-8"?>
 <p:presentation xmlns:p="http://schemas.openxmlformats.org/presentationml/2006/main">
   <p:sldMasterIdLst>
-    <p:sldMasterId xmlns:r="http://schemas.openxmlformats.org/officeDocument/2006/relationships" id="2147483648" r:id="R8eb5638866e24786"/>
+    <p:sldMasterId xmlns:r="http://schemas.openxmlformats.org/officeDocument/2006/relationships" id="2147483648" r:id="R44bc541ab706427c"/>
   </p:sldMasterIdLst>
   <p:notesMasterIdLst>
-    <p:notesMasterId xmlns:r="http://schemas.openxmlformats.org/officeDocument/2006/relationships" r:id="R56f5f33280a34888"/>
+    <p:notesMasterId xmlns:r="http://schemas.openxmlformats.org/officeDocument/2006/relationships" r:id="Ra16646cc356d4b5a"/>
   </p:notesMasterIdLst>
   <p:sldIdLst>
-    <p:sldId xmlns:r="http://schemas.openxmlformats.org/officeDocument/2006/relationships" id="256" r:id="Red0f8b035d024776"/>
-    <p:sldId xmlns:r="http://schemas.openxmlformats.org/officeDocument/2006/relationships" id="257" r:id="Ra66f2590a4344789"/>
-    <p:sldId xmlns:r="http://schemas.openxmlformats.org/officeDocument/2006/relationships" id="258" r:id="Rcb5ecc6a3b4e49ac"/>
-    <p:sldId xmlns:r="http://schemas.openxmlformats.org/officeDocument/2006/relationships" id="259" r:id="R582967f64ad44652"/>
-    <p:sldId xmlns:r="http://schemas.openxmlformats.org/officeDocument/2006/relationships" id="260" r:id="R50355b4d119d4468"/>
-    <p:sldId xmlns:r="http://schemas.openxmlformats.org/officeDocument/2006/relationships" id="261" r:id="Rad3ef3f3c20144c7"/>
-    <p:sldId xmlns:r="http://schemas.openxmlformats.org/officeDocument/2006/relationships" id="262" r:id="R4cb63c38f75e4201"/>
-    <p:sldId xmlns:r="http://schemas.openxmlformats.org/officeDocument/2006/relationships" id="263" r:id="R6e243aba10b546d9"/>
-    <p:sldId xmlns:r="http://schemas.openxmlformats.org/officeDocument/2006/relationships" id="264" r:id="R26d782b84aa14154"/>
-    <p:sldId xmlns:r="http://schemas.openxmlformats.org/officeDocument/2006/relationships" id="265" r:id="R27f0299a562b4444"/>
+    <p:sldId xmlns:r="http://schemas.openxmlformats.org/officeDocument/2006/relationships" id="256" r:id="R4be15f1744694366"/>
+    <p:sldId xmlns:r="http://schemas.openxmlformats.org/officeDocument/2006/relationships" id="257" r:id="Rc40f81d3bb654201"/>
+    <p:sldId xmlns:r="http://schemas.openxmlformats.org/officeDocument/2006/relationships" id="258" r:id="Rbdfa5ff04bfc48f4"/>
+    <p:sldId xmlns:r="http://schemas.openxmlformats.org/officeDocument/2006/relationships" id="259" r:id="R583697f2ecde4347"/>
+    <p:sldId xmlns:r="http://schemas.openxmlformats.org/officeDocument/2006/relationships" id="260" r:id="R74aa7a3eaa084bf0"/>
+    <p:sldId xmlns:r="http://schemas.openxmlformats.org/officeDocument/2006/relationships" id="261" r:id="R3b4cb079103d4f5f"/>
+    <p:sldId xmlns:r="http://schemas.openxmlformats.org/officeDocument/2006/relationships" id="262" r:id="Rc3db6be84fd14189"/>
+    <p:sldId xmlns:r="http://schemas.openxmlformats.org/officeDocument/2006/relationships" id="263" r:id="R57c7f4ab30ff4677"/>
+    <p:sldId xmlns:r="http://schemas.openxmlformats.org/officeDocument/2006/relationships" id="264" r:id="Re206162601fd4d28"/>
+    <p:sldId xmlns:r="http://schemas.openxmlformats.org/officeDocument/2006/relationships" id="265" r:id="R8cec3040682547dc"/>
   </p:sldIdLst>
   <p:sldSz cx="12192000" cy="6858000"/>
   <p:notesSz cx="6858000" cy="9144000"/>
@@ -521,7 +521,7 @@
           <a:lstStyle xmlns:a="http://schemas.openxmlformats.org/drawingml/2006/main"/>
           <a:p xmlns:a="http://schemas.openxmlformats.org/drawingml/2006/main">
             <a:r>
-              <a:t>20 seconds. Explain the next engineering steps without claiming they already exist. Replace trusted mock reports and exchange with suitable production integrations, test actual market data and net trading, then strengthen governance and audit. Before course submission fill identity, align rubric, check repo access and verify source if required. Sources: report sections on limitations and docs/REQUIREMENTS.md.</a:t>
+              <a:t>20 seconds. Explain the next engineering steps without claiming they already exist. Replace trusted mock reports and exchange with suitable production integrations, test actual market data and net trading, then strengthen governance and audit. Before course submission align rubric, check repo access and verify source if required. Sources: report sections on limitations and docs/REQUIREMENTS.md.</a:t>
             </a:r>
           </a:p>
         </p:txBody>
@@ -1128,7 +1128,7 @@
           <p:cNvPr id="3" name="Title">
             <a:extLst xmlns:a="http://schemas.openxmlformats.org/drawingml/2006/main">
               <a:ext uri="{FF2B5EF4-FFF2-40B4-BE49-F238E27FC236}">
-                <a16:creationId xmlns:a16="http://schemas.microsoft.com/office/drawing/2014/main" id="{B804704F-E7BC-402A-A8E0-84464B7135B1}"/>
+                <a16:creationId xmlns:a16="http://schemas.microsoft.com/office/drawing/2014/main" id="{48477FF1-05AA-45C7-A991-BD8EA206B196}"/>
               </a:ext>
             </a:extLst>
           </p:cNvPr>
@@ -1285,7 +1285,7 @@
           <p:cNvPr id="2" name="Subtitle">
             <a:extLst xmlns:a="http://schemas.openxmlformats.org/drawingml/2006/main">
               <a:ext uri="{FF2B5EF4-FFF2-40B4-BE49-F238E27FC236}">
-                <a16:creationId xmlns:a16="http://schemas.microsoft.com/office/drawing/2014/main" id="{B958EDE5-E90F-4B35-A872-B0DFC4DAB00A}"/>
+                <a16:creationId xmlns:a16="http://schemas.microsoft.com/office/drawing/2014/main" id="{954A50AE-7FAD-479C-8B1B-0249D4A1F7A3}"/>
               </a:ext>
             </a:extLst>
           </p:cNvPr>
@@ -1459,7 +1459,7 @@
           <p:cNvPr id="2" name="Section title">
             <a:extLst xmlns:a="http://schemas.openxmlformats.org/drawingml/2006/main">
               <a:ext uri="{FF2B5EF4-FFF2-40B4-BE49-F238E27FC236}">
-                <a16:creationId xmlns:a16="http://schemas.microsoft.com/office/drawing/2014/main" id="{ACFADCE0-8FEE-4D68-915D-DBEAB9D1E35C}"/>
+                <a16:creationId xmlns:a16="http://schemas.microsoft.com/office/drawing/2014/main" id="{CAE2664A-B8C2-4190-A773-E916B1250301}"/>
               </a:ext>
             </a:extLst>
           </p:cNvPr>
@@ -1633,7 +1633,7 @@
           <p:cNvPr id="3" name="Title">
             <a:extLst xmlns:a="http://schemas.openxmlformats.org/drawingml/2006/main">
               <a:ext uri="{FF2B5EF4-FFF2-40B4-BE49-F238E27FC236}">
-                <a16:creationId xmlns:a16="http://schemas.microsoft.com/office/drawing/2014/main" id="{B026ED8B-2B59-4E05-BEC1-80751E1B2E59}"/>
+                <a16:creationId xmlns:a16="http://schemas.microsoft.com/office/drawing/2014/main" id="{C58D7F92-AFB0-4727-A815-950AA6C2D810}"/>
               </a:ext>
             </a:extLst>
           </p:cNvPr>
@@ -1790,7 +1790,7 @@
           <p:cNvPr id="2" name="Body">
             <a:extLst xmlns:a="http://schemas.openxmlformats.org/drawingml/2006/main">
               <a:ext uri="{FF2B5EF4-FFF2-40B4-BE49-F238E27FC236}">
-                <a16:creationId xmlns:a16="http://schemas.microsoft.com/office/drawing/2014/main" id="{31B38317-BE7B-4A03-8602-87AF6F231F6A}"/>
+                <a16:creationId xmlns:a16="http://schemas.microsoft.com/office/drawing/2014/main" id="{4E795905-07FA-4177-9173-07E97326E7E2}"/>
               </a:ext>
             </a:extLst>
           </p:cNvPr>
@@ -1964,7 +1964,7 @@
           <p:cNvPr id="4" name="Title">
             <a:extLst xmlns:a="http://schemas.openxmlformats.org/drawingml/2006/main">
               <a:ext uri="{FF2B5EF4-FFF2-40B4-BE49-F238E27FC236}">
-                <a16:creationId xmlns:a16="http://schemas.microsoft.com/office/drawing/2014/main" id="{917541F9-3696-4F84-A135-6FE4A7AB1337}"/>
+                <a16:creationId xmlns:a16="http://schemas.microsoft.com/office/drawing/2014/main" id="{BB1286D1-5E1F-46A6-A2EE-6BB34DBD0B07}"/>
               </a:ext>
             </a:extLst>
           </p:cNvPr>
@@ -2121,7 +2121,7 @@
           <p:cNvPr id="2" name="Left column">
             <a:extLst xmlns:a="http://schemas.openxmlformats.org/drawingml/2006/main">
               <a:ext uri="{FF2B5EF4-FFF2-40B4-BE49-F238E27FC236}">
-                <a16:creationId xmlns:a16="http://schemas.microsoft.com/office/drawing/2014/main" id="{3E63A75A-3B85-4FE3-A3CB-3E4FDA84FD10}"/>
+                <a16:creationId xmlns:a16="http://schemas.microsoft.com/office/drawing/2014/main" id="{30B44328-EF64-4538-9AD9-743C0F70E61A}"/>
               </a:ext>
             </a:extLst>
           </p:cNvPr>
@@ -2278,7 +2278,7 @@
           <p:cNvPr id="3" name="Right column">
             <a:extLst xmlns:a="http://schemas.openxmlformats.org/drawingml/2006/main">
               <a:ext uri="{FF2B5EF4-FFF2-40B4-BE49-F238E27FC236}">
-                <a16:creationId xmlns:a16="http://schemas.microsoft.com/office/drawing/2014/main" id="{6B1B7646-CFCE-4AC3-90B8-48CFE682A13A}"/>
+                <a16:creationId xmlns:a16="http://schemas.microsoft.com/office/drawing/2014/main" id="{4BC9F280-4574-43D8-8211-E748C5858E04}"/>
               </a:ext>
             </a:extLst>
           </p:cNvPr>
@@ -2452,7 +2452,7 @@
           <p:cNvPr id="3" name="Title">
             <a:extLst xmlns:a="http://schemas.openxmlformats.org/drawingml/2006/main">
               <a:ext uri="{FF2B5EF4-FFF2-40B4-BE49-F238E27FC236}">
-                <a16:creationId xmlns:a16="http://schemas.microsoft.com/office/drawing/2014/main" id="{10EFCD41-057D-46F2-B6D1-156EC9C3593C}"/>
+                <a16:creationId xmlns:a16="http://schemas.microsoft.com/office/drawing/2014/main" id="{4A5BDBAB-E4CC-4EE2-AC6D-33B2E2ECC8C8}"/>
               </a:ext>
             </a:extLst>
           </p:cNvPr>
@@ -2609,7 +2609,7 @@
           <p:cNvPr id="2" name="Left column">
             <a:extLst xmlns:a="http://schemas.openxmlformats.org/drawingml/2006/main">
               <a:ext uri="{FF2B5EF4-FFF2-40B4-BE49-F238E27FC236}">
-                <a16:creationId xmlns:a16="http://schemas.microsoft.com/office/drawing/2014/main" id="{0316189B-35A2-4E15-87D6-4F7210319F3B}"/>
+                <a16:creationId xmlns:a16="http://schemas.microsoft.com/office/drawing/2014/main" id="{A6F1EF0F-A4DF-469F-9583-D75C89C026D0}"/>
               </a:ext>
             </a:extLst>
           </p:cNvPr>
@@ -2804,12 +2804,12 @@
   </p:cSld>
   <p:clrMap bg1="lt1" tx1="dk1" bg2="lt2" tx2="dk2" accent1="accent1" accent2="accent2" accent3="accent3" accent4="accent4" accent5="accent5" accent6="accent6" hlink="hlink" folHlink="folHlink"/>
   <p:sldLayoutIdLst>
-    <p:sldLayoutId xmlns:r="http://schemas.openxmlformats.org/officeDocument/2006/relationships" id="2147483649" r:id="Rf8fac33c0b9f4be4"/>
-    <p:sldLayoutId xmlns:r="http://schemas.openxmlformats.org/officeDocument/2006/relationships" id="2147483650" r:id="Re386bbc85a924689"/>
-    <p:sldLayoutId xmlns:r="http://schemas.openxmlformats.org/officeDocument/2006/relationships" id="2147483651" r:id="Rd93d4881e0e44728"/>
-    <p:sldLayoutId xmlns:r="http://schemas.openxmlformats.org/officeDocument/2006/relationships" id="2147483652" r:id="Rf1a25639a5524a06"/>
-    <p:sldLayoutId xmlns:r="http://schemas.openxmlformats.org/officeDocument/2006/relationships" id="2147483653" r:id="R260bf855c81e4ef1"/>
-    <p:sldLayoutId xmlns:r="http://schemas.openxmlformats.org/officeDocument/2006/relationships" id="2147483654" r:id="Rf3d585f723a24281"/>
+    <p:sldLayoutId xmlns:r="http://schemas.openxmlformats.org/officeDocument/2006/relationships" id="2147483649" r:id="R2e67f5c80a524b0e"/>
+    <p:sldLayoutId xmlns:r="http://schemas.openxmlformats.org/officeDocument/2006/relationships" id="2147483650" r:id="R6d8b84ed907c440d"/>
+    <p:sldLayoutId xmlns:r="http://schemas.openxmlformats.org/officeDocument/2006/relationships" id="2147483651" r:id="R8d6d0e43a5cc4ed4"/>
+    <p:sldLayoutId xmlns:r="http://schemas.openxmlformats.org/officeDocument/2006/relationships" id="2147483652" r:id="R4bb68f3197994181"/>
+    <p:sldLayoutId xmlns:r="http://schemas.openxmlformats.org/officeDocument/2006/relationships" id="2147483653" r:id="R557d1233b1ba4d86"/>
+    <p:sldLayoutId xmlns:r="http://schemas.openxmlformats.org/officeDocument/2006/relationships" id="2147483654" r:id="R5ec288db0c8b487c"/>
   </p:sldLayoutIdLst>
   <p:txStyles>
     <p:titleStyle>
@@ -6570,7 +6570,7 @@
           <p:cNvPr id="5" name="">
             <a:extLst xmlns:a="http://schemas.openxmlformats.org/drawingml/2006/main">
               <a:ext uri="{FF2B5EF4-FFF2-40B4-BE49-F238E27FC236}">
-                <a16:creationId xmlns:a16="http://schemas.microsoft.com/office/drawing/2014/main" id="{F3639FFC-CB6B-4473-A54C-BC39E65828D3}"/>
+                <a16:creationId xmlns:a16="http://schemas.microsoft.com/office/drawing/2014/main" id="{48E330AF-BEE5-43A0-A4A8-162E73A9DF3A}"/>
               </a:ext>
             </a:extLst>
           </p:cNvPr>
@@ -6636,7 +6636,7 @@
           <p:cNvPr id="2" name="">
             <a:extLst xmlns:a="http://schemas.openxmlformats.org/drawingml/2006/main">
               <a:ext uri="{FF2B5EF4-FFF2-40B4-BE49-F238E27FC236}">
-                <a16:creationId xmlns:a16="http://schemas.microsoft.com/office/drawing/2014/main" id="{F80462B5-8E0A-49BD-BCF1-07E5A8CF6CA3}"/>
+                <a16:creationId xmlns:a16="http://schemas.microsoft.com/office/drawing/2014/main" id="{6EE2B03A-976C-43F7-B403-F36690A6C63B}"/>
               </a:ext>
             </a:extLst>
           </p:cNvPr>
@@ -6725,7 +6725,7 @@
           <p:cNvPr id="3" name="">
             <a:extLst xmlns:a="http://schemas.openxmlformats.org/drawingml/2006/main">
               <a:ext uri="{FF2B5EF4-FFF2-40B4-BE49-F238E27FC236}">
-                <a16:creationId xmlns:a16="http://schemas.microsoft.com/office/drawing/2014/main" id="{B0DF2F29-4B41-48C9-B4F3-8632D10DF0CB}"/>
+                <a16:creationId xmlns:a16="http://schemas.microsoft.com/office/drawing/2014/main" id="{7CEC4142-11DC-4B02-9EE3-9367F5C98E20}"/>
               </a:ext>
             </a:extLst>
           </p:cNvPr>
@@ -6791,7 +6791,7 @@
           <p:cNvPr id="4" name="">
             <a:extLst xmlns:a="http://schemas.openxmlformats.org/drawingml/2006/main">
               <a:ext uri="{FF2B5EF4-FFF2-40B4-BE49-F238E27FC236}">
-                <a16:creationId xmlns:a16="http://schemas.microsoft.com/office/drawing/2014/main" id="{2BB895AC-A27D-45FF-AA08-A9311F83E678}"/>
+                <a16:creationId xmlns:a16="http://schemas.microsoft.com/office/drawing/2014/main" id="{B9C75D9A-FBB7-46B1-91A9-845FD5F3AD70}"/>
               </a:ext>
             </a:extLst>
           </p:cNvPr>
@@ -6847,7 +6847,7 @@
                 <a:ea typeface="Arial"/>
                 <a:cs typeface="Arial"/>
               </a:rPr>
-              <a:t>SC6113 project demonstration</a:t>
+              <a:t>Du zhuotong  |  SC6113 project demonstration</a:t>
             </a:r>
           </a:p>
           <a:p xmlns:a="http://schemas.openxmlformats.org/drawingml/2006/main">
@@ -6878,7 +6878,7 @@
     </p:spTree>
     <p:extLst>
       <p:ext uri="{BB962C8B-B14F-4D97-AF65-F5344CB8AC3E}">
-        <p14:creationId xmlns:p14="http://schemas.microsoft.com/office/powerpoint/2010/main" val="944998850"/>
+        <p14:creationId xmlns:p14="http://schemas.microsoft.com/office/powerpoint/2010/main" val="1348722437"/>
       </p:ext>
     </p:extLst>
   </p:cSld>
@@ -6909,7 +6909,7 @@
           <p:cNvPr id="6" name="">
             <a:extLst xmlns:a="http://schemas.openxmlformats.org/drawingml/2006/main">
               <a:ext uri="{FF2B5EF4-FFF2-40B4-BE49-F238E27FC236}">
-                <a16:creationId xmlns:a16="http://schemas.microsoft.com/office/drawing/2014/main" id="{29865196-CDD8-4E2E-9B30-B4CF8AD38A79}"/>
+                <a16:creationId xmlns:a16="http://schemas.microsoft.com/office/drawing/2014/main" id="{6B18E0FE-11A9-4F45-B33A-1C8B992827D7}"/>
               </a:ext>
             </a:extLst>
           </p:cNvPr>
@@ -6975,7 +6975,7 @@
           <p:cNvPr id="2" name="">
             <a:extLst xmlns:a="http://schemas.openxmlformats.org/drawingml/2006/main">
               <a:ext uri="{FF2B5EF4-FFF2-40B4-BE49-F238E27FC236}">
-                <a16:creationId xmlns:a16="http://schemas.microsoft.com/office/drawing/2014/main" id="{B7A6060E-21B4-44B2-8395-1F8AD8C5983E}"/>
+                <a16:creationId xmlns:a16="http://schemas.microsoft.com/office/drawing/2014/main" id="{95659D87-7D44-48AA-9814-AFB40CC85770}"/>
               </a:ext>
             </a:extLst>
           </p:cNvPr>
@@ -7041,7 +7041,7 @@
           <p:cNvPr id="3" name="">
             <a:extLst xmlns:a="http://schemas.openxmlformats.org/drawingml/2006/main">
               <a:ext uri="{FF2B5EF4-FFF2-40B4-BE49-F238E27FC236}">
-                <a16:creationId xmlns:a16="http://schemas.microsoft.com/office/drawing/2014/main" id="{54A288F4-3127-4BF2-9259-5C3AC0FF4DF5}"/>
+                <a16:creationId xmlns:a16="http://schemas.microsoft.com/office/drawing/2014/main" id="{2E6C0CBD-D1B7-4104-901C-932E94525634}"/>
               </a:ext>
             </a:extLst>
           </p:cNvPr>
@@ -7153,7 +7153,7 @@
           <p:cNvPr id="4" name="">
             <a:extLst xmlns:a="http://schemas.openxmlformats.org/drawingml/2006/main">
               <a:ext uri="{FF2B5EF4-FFF2-40B4-BE49-F238E27FC236}">
-                <a16:creationId xmlns:a16="http://schemas.microsoft.com/office/drawing/2014/main" id="{FEFA5774-FEFD-4A25-92CA-0922CED24A13}"/>
+                <a16:creationId xmlns:a16="http://schemas.microsoft.com/office/drawing/2014/main" id="{F9B5659B-E37D-4529-B6F4-ABAECCD418E4}"/>
               </a:ext>
             </a:extLst>
           </p:cNvPr>
@@ -7219,7 +7219,7 @@
           <p:cNvPr id="5" name="">
             <a:extLst xmlns:a="http://schemas.openxmlformats.org/drawingml/2006/main">
               <a:ext uri="{FF2B5EF4-FFF2-40B4-BE49-F238E27FC236}">
-                <a16:creationId xmlns:a16="http://schemas.microsoft.com/office/drawing/2014/main" id="{D5EF9893-F9E0-48E6-A38D-80627A45A43B}"/>
+                <a16:creationId xmlns:a16="http://schemas.microsoft.com/office/drawing/2014/main" id="{401A5CBA-38C6-4126-92EF-DBB9F4C7E945}"/>
               </a:ext>
             </a:extLst>
           </p:cNvPr>
@@ -7283,7 +7283,7 @@
     </p:spTree>
     <p:extLst>
       <p:ext uri="{BB962C8B-B14F-4D97-AF65-F5344CB8AC3E}">
-        <p14:creationId xmlns:p14="http://schemas.microsoft.com/office/powerpoint/2010/main" val="404643679"/>
+        <p14:creationId xmlns:p14="http://schemas.microsoft.com/office/powerpoint/2010/main" val="2060134819"/>
       </p:ext>
     </p:extLst>
   </p:cSld>
@@ -7314,7 +7314,7 @@
           <p:cNvPr id="4" name="">
             <a:extLst xmlns:a="http://schemas.openxmlformats.org/drawingml/2006/main">
               <a:ext uri="{FF2B5EF4-FFF2-40B4-BE49-F238E27FC236}">
-                <a16:creationId xmlns:a16="http://schemas.microsoft.com/office/drawing/2014/main" id="{D30A0999-BE39-43FC-A9B1-9488FE5C3940}"/>
+                <a16:creationId xmlns:a16="http://schemas.microsoft.com/office/drawing/2014/main" id="{86EE79A8-9541-4A6F-A1A7-B3376763E394}"/>
               </a:ext>
             </a:extLst>
           </p:cNvPr>
@@ -7380,7 +7380,7 @@
           <p:cNvPr id="2" name="">
             <a:extLst xmlns:a="http://schemas.openxmlformats.org/drawingml/2006/main">
               <a:ext uri="{FF2B5EF4-FFF2-40B4-BE49-F238E27FC236}">
-                <a16:creationId xmlns:a16="http://schemas.microsoft.com/office/drawing/2014/main" id="{5AF381E6-AC5E-43ED-8CBA-C7095A9CA6C1}"/>
+                <a16:creationId xmlns:a16="http://schemas.microsoft.com/office/drawing/2014/main" id="{9C0BDD56-B7C4-4E13-B821-1A3F1CED32F5}"/>
               </a:ext>
             </a:extLst>
           </p:cNvPr>
@@ -7658,7 +7658,7 @@
           <p:cNvPr id="3" name="">
             <a:extLst xmlns:a="http://schemas.openxmlformats.org/drawingml/2006/main">
               <a:ext uri="{FF2B5EF4-FFF2-40B4-BE49-F238E27FC236}">
-                <a16:creationId xmlns:a16="http://schemas.microsoft.com/office/drawing/2014/main" id="{5B56221E-540A-42EB-B623-0AC29A12D60D}"/>
+                <a16:creationId xmlns:a16="http://schemas.microsoft.com/office/drawing/2014/main" id="{57535E0A-9B66-4D18-B93D-5E75B6F70665}"/>
               </a:ext>
             </a:extLst>
           </p:cNvPr>
@@ -7722,7 +7722,7 @@
     </p:spTree>
     <p:extLst>
       <p:ext uri="{BB962C8B-B14F-4D97-AF65-F5344CB8AC3E}">
-        <p14:creationId xmlns:p14="http://schemas.microsoft.com/office/powerpoint/2010/main" val="1968300675"/>
+        <p14:creationId xmlns:p14="http://schemas.microsoft.com/office/powerpoint/2010/main" val="319411937"/>
       </p:ext>
     </p:extLst>
   </p:cSld>
@@ -7753,7 +7753,7 @@
           <p:cNvPr id="4" name="">
             <a:extLst xmlns:a="http://schemas.openxmlformats.org/drawingml/2006/main">
               <a:ext uri="{FF2B5EF4-FFF2-40B4-BE49-F238E27FC236}">
-                <a16:creationId xmlns:a16="http://schemas.microsoft.com/office/drawing/2014/main" id="{43497390-84F8-4FC1-B9FB-53B70860EF5C}"/>
+                <a16:creationId xmlns:a16="http://schemas.microsoft.com/office/drawing/2014/main" id="{B9306FC9-F44D-4636-95AC-03479F4FEA51}"/>
               </a:ext>
             </a:extLst>
           </p:cNvPr>
@@ -7819,7 +7819,7 @@
           <p:cNvPr id="2" name="">
             <a:extLst xmlns:a="http://schemas.openxmlformats.org/drawingml/2006/main">
               <a:ext uri="{FF2B5EF4-FFF2-40B4-BE49-F238E27FC236}">
-                <a16:creationId xmlns:a16="http://schemas.microsoft.com/office/drawing/2014/main" id="{1DCEF373-AA98-463B-891A-4B97B65F4678}"/>
+                <a16:creationId xmlns:a16="http://schemas.microsoft.com/office/drawing/2014/main" id="{98945E39-FAEE-481C-AF21-88B19A0AE9F7}"/>
               </a:ext>
             </a:extLst>
           </p:cNvPr>
@@ -8157,7 +8157,7 @@
           <p:cNvPr id="3" name="">
             <a:extLst xmlns:a="http://schemas.openxmlformats.org/drawingml/2006/main">
               <a:ext uri="{FF2B5EF4-FFF2-40B4-BE49-F238E27FC236}">
-                <a16:creationId xmlns:a16="http://schemas.microsoft.com/office/drawing/2014/main" id="{762A71C0-32E1-4626-A775-26D6DD792769}"/>
+                <a16:creationId xmlns:a16="http://schemas.microsoft.com/office/drawing/2014/main" id="{E18943B0-117D-433A-ACC0-BE0B1F38D915}"/>
               </a:ext>
             </a:extLst>
           </p:cNvPr>
@@ -8221,7 +8221,7 @@
     </p:spTree>
     <p:extLst>
       <p:ext uri="{BB962C8B-B14F-4D97-AF65-F5344CB8AC3E}">
-        <p14:creationId xmlns:p14="http://schemas.microsoft.com/office/powerpoint/2010/main" val="1468288052"/>
+        <p14:creationId xmlns:p14="http://schemas.microsoft.com/office/powerpoint/2010/main" val="440581810"/>
       </p:ext>
     </p:extLst>
   </p:cSld>
@@ -8252,7 +8252,7 @@
           <p:cNvPr id="4" name="">
             <a:extLst xmlns:a="http://schemas.openxmlformats.org/drawingml/2006/main">
               <a:ext uri="{FF2B5EF4-FFF2-40B4-BE49-F238E27FC236}">
-                <a16:creationId xmlns:a16="http://schemas.microsoft.com/office/drawing/2014/main" id="{B553D65F-6165-43B0-A755-A1B0A2D2D192}"/>
+                <a16:creationId xmlns:a16="http://schemas.microsoft.com/office/drawing/2014/main" id="{F084107F-D092-4A15-A403-BE3127D55ADA}"/>
               </a:ext>
             </a:extLst>
           </p:cNvPr>
@@ -8318,7 +8318,7 @@
           <p:cNvPr id="2" name="">
             <a:extLst xmlns:a="http://schemas.openxmlformats.org/drawingml/2006/main">
               <a:ext uri="{FF2B5EF4-FFF2-40B4-BE49-F238E27FC236}">
-                <a16:creationId xmlns:a16="http://schemas.microsoft.com/office/drawing/2014/main" id="{645AF872-0188-4343-B0BD-A072E8BAF4E8}"/>
+                <a16:creationId xmlns:a16="http://schemas.microsoft.com/office/drawing/2014/main" id="{BBA3FF65-1F04-4F5C-B765-EE9762ACACAE}"/>
               </a:ext>
             </a:extLst>
           </p:cNvPr>
@@ -8546,7 +8546,7 @@
           <p:cNvPr id="3" name="">
             <a:extLst xmlns:a="http://schemas.openxmlformats.org/drawingml/2006/main">
               <a:ext uri="{FF2B5EF4-FFF2-40B4-BE49-F238E27FC236}">
-                <a16:creationId xmlns:a16="http://schemas.microsoft.com/office/drawing/2014/main" id="{AD646BC8-133C-4A9A-9DBF-7AFC10BAE67D}"/>
+                <a16:creationId xmlns:a16="http://schemas.microsoft.com/office/drawing/2014/main" id="{16DF749F-96DF-43D4-9968-692A4199F2C5}"/>
               </a:ext>
             </a:extLst>
           </p:cNvPr>
@@ -8610,7 +8610,7 @@
     </p:spTree>
     <p:extLst>
       <p:ext uri="{BB962C8B-B14F-4D97-AF65-F5344CB8AC3E}">
-        <p14:creationId xmlns:p14="http://schemas.microsoft.com/office/powerpoint/2010/main" val="256521819"/>
+        <p14:creationId xmlns:p14="http://schemas.microsoft.com/office/powerpoint/2010/main" val="1953545721"/>
       </p:ext>
     </p:extLst>
   </p:cSld>
@@ -8641,7 +8641,7 @@
           <p:cNvPr id="7" name="">
             <a:extLst xmlns:a="http://schemas.openxmlformats.org/drawingml/2006/main">
               <a:ext uri="{FF2B5EF4-FFF2-40B4-BE49-F238E27FC236}">
-                <a16:creationId xmlns:a16="http://schemas.microsoft.com/office/drawing/2014/main" id="{1A75A2C8-C705-43B7-A548-65FEAF2EE059}"/>
+                <a16:creationId xmlns:a16="http://schemas.microsoft.com/office/drawing/2014/main" id="{2292F441-C022-4359-AF41-4772C790050B}"/>
               </a:ext>
             </a:extLst>
           </p:cNvPr>
@@ -8707,7 +8707,7 @@
           <p:cNvPr id="2" name="">
             <a:extLst xmlns:a="http://schemas.openxmlformats.org/drawingml/2006/main">
               <a:ext uri="{FF2B5EF4-FFF2-40B4-BE49-F238E27FC236}">
-                <a16:creationId xmlns:a16="http://schemas.microsoft.com/office/drawing/2014/main" id="{6EFA0A4B-D6E9-4E38-81FD-9E2FDA6123C1}"/>
+                <a16:creationId xmlns:a16="http://schemas.microsoft.com/office/drawing/2014/main" id="{2EA1C4F6-07CD-41EE-9F28-877B07EA41AD}"/>
               </a:ext>
             </a:extLst>
           </p:cNvPr>
@@ -8773,7 +8773,7 @@
           <p:cNvPr id="3" name="">
             <a:extLst xmlns:a="http://schemas.openxmlformats.org/drawingml/2006/main">
               <a:ext uri="{FF2B5EF4-FFF2-40B4-BE49-F238E27FC236}">
-                <a16:creationId xmlns:a16="http://schemas.microsoft.com/office/drawing/2014/main" id="{103C70ED-8EF0-4FF7-B377-D9EA42EE7DAC}"/>
+                <a16:creationId xmlns:a16="http://schemas.microsoft.com/office/drawing/2014/main" id="{B1A87FE8-1982-46E9-9CEF-86B4D78F4E71}"/>
               </a:ext>
             </a:extLst>
           </p:cNvPr>
@@ -8908,7 +8908,7 @@
           <p:cNvPr id="4" name="">
             <a:extLst xmlns:a="http://schemas.openxmlformats.org/drawingml/2006/main">
               <a:ext uri="{FF2B5EF4-FFF2-40B4-BE49-F238E27FC236}">
-                <a16:creationId xmlns:a16="http://schemas.microsoft.com/office/drawing/2014/main" id="{6638057C-22FA-4612-9A52-E7FE7A5FBD11}"/>
+                <a16:creationId xmlns:a16="http://schemas.microsoft.com/office/drawing/2014/main" id="{000CAD36-2313-474A-B62E-DE5F0E729D3D}"/>
               </a:ext>
             </a:extLst>
           </p:cNvPr>
@@ -8974,7 +8974,7 @@
           <p:cNvPr id="5" name="">
             <a:extLst xmlns:a="http://schemas.openxmlformats.org/drawingml/2006/main">
               <a:ext uri="{FF2B5EF4-FFF2-40B4-BE49-F238E27FC236}">
-                <a16:creationId xmlns:a16="http://schemas.microsoft.com/office/drawing/2014/main" id="{D3C9D08B-BDB4-4802-B626-3255B4DDDEB8}"/>
+                <a16:creationId xmlns:a16="http://schemas.microsoft.com/office/drawing/2014/main" id="{172DD296-3453-4445-9A7B-CB9E5D75FE35}"/>
               </a:ext>
             </a:extLst>
           </p:cNvPr>
@@ -9086,7 +9086,7 @@
           <p:cNvPr id="6" name="">
             <a:extLst xmlns:a="http://schemas.openxmlformats.org/drawingml/2006/main">
               <a:ext uri="{FF2B5EF4-FFF2-40B4-BE49-F238E27FC236}">
-                <a16:creationId xmlns:a16="http://schemas.microsoft.com/office/drawing/2014/main" id="{1D378DFD-F4DE-4576-B550-3BA3D3BAB73C}"/>
+                <a16:creationId xmlns:a16="http://schemas.microsoft.com/office/drawing/2014/main" id="{E7E8A183-F368-4A31-9191-6CF2FDE3884B}"/>
               </a:ext>
             </a:extLst>
           </p:cNvPr>
@@ -9150,7 +9150,7 @@
     </p:spTree>
     <p:extLst>
       <p:ext uri="{BB962C8B-B14F-4D97-AF65-F5344CB8AC3E}">
-        <p14:creationId xmlns:p14="http://schemas.microsoft.com/office/powerpoint/2010/main" val="1559525895"/>
+        <p14:creationId xmlns:p14="http://schemas.microsoft.com/office/powerpoint/2010/main" val="1692014357"/>
       </p:ext>
     </p:extLst>
   </p:cSld>
@@ -9181,7 +9181,7 @@
           <p:cNvPr id="6" name="">
             <a:extLst xmlns:a="http://schemas.openxmlformats.org/drawingml/2006/main">
               <a:ext uri="{FF2B5EF4-FFF2-40B4-BE49-F238E27FC236}">
-                <a16:creationId xmlns:a16="http://schemas.microsoft.com/office/drawing/2014/main" id="{684C8691-6DB4-4A7D-BE35-A38A9AF1B9A5}"/>
+                <a16:creationId xmlns:a16="http://schemas.microsoft.com/office/drawing/2014/main" id="{EC7AC48A-D342-45D5-A28C-8161FA260D5B}"/>
               </a:ext>
             </a:extLst>
           </p:cNvPr>
@@ -9247,7 +9247,7 @@
           <p:cNvPr id="2" name="Chart">
             <a:extLst xmlns:a="http://schemas.openxmlformats.org/drawingml/2006/main">
               <a:ext uri="{FF2B5EF4-FFF2-40B4-BE49-F238E27FC236}">
-                <a16:creationId xmlns:a16="http://schemas.microsoft.com/office/drawing/2014/main" id="{601F931C-4652-4FA6-9A6D-2E3CD5E72231}"/>
+                <a16:creationId xmlns:a16="http://schemas.microsoft.com/office/drawing/2014/main" id="{17C05F86-F79E-49C0-809E-D5D861A265CB}"/>
               </a:ext>
             </a:extLst>
           </p:cNvPr>
@@ -9260,7 +9260,7 @@
         </p:xfrm>
         <a:graphic xmlns:a="http://schemas.openxmlformats.org/drawingml/2006/main">
           <a:graphicData uri="http://schemas.openxmlformats.org/drawingml/2006/chart">
-            <c:chart xmlns:r="http://schemas.openxmlformats.org/officeDocument/2006/relationships" xmlns:c="http://schemas.openxmlformats.org/drawingml/2006/chart" r:id="R656d5e1339a14b81"/>
+            <c:chart xmlns:r="http://schemas.openxmlformats.org/officeDocument/2006/relationships" xmlns:c="http://schemas.openxmlformats.org/drawingml/2006/chart" r:id="Re504628e81824d5b"/>
           </a:graphicData>
         </a:graphic>
       </p:graphicFrame>
@@ -9269,7 +9269,7 @@
           <p:cNvPr id="3" name="">
             <a:extLst xmlns:a="http://schemas.openxmlformats.org/drawingml/2006/main">
               <a:ext uri="{FF2B5EF4-FFF2-40B4-BE49-F238E27FC236}">
-                <a16:creationId xmlns:a16="http://schemas.microsoft.com/office/drawing/2014/main" id="{BA91A604-253A-49D0-995F-8B3A3ED09BD1}"/>
+                <a16:creationId xmlns:a16="http://schemas.microsoft.com/office/drawing/2014/main" id="{1A05E781-A8B0-4EF3-90AC-262805634BFA}"/>
               </a:ext>
             </a:extLst>
           </p:cNvPr>
@@ -9335,7 +9335,7 @@
           <p:cNvPr id="4" name="">
             <a:extLst xmlns:a="http://schemas.openxmlformats.org/drawingml/2006/main">
               <a:ext uri="{FF2B5EF4-FFF2-40B4-BE49-F238E27FC236}">
-                <a16:creationId xmlns:a16="http://schemas.microsoft.com/office/drawing/2014/main" id="{320D7F03-108D-41F6-ADC5-84E97C975166}"/>
+                <a16:creationId xmlns:a16="http://schemas.microsoft.com/office/drawing/2014/main" id="{52639FE2-7D62-42A4-ABAC-EF5B3CB016FF}"/>
               </a:ext>
             </a:extLst>
           </p:cNvPr>
@@ -9447,7 +9447,7 @@
           <p:cNvPr id="5" name="">
             <a:extLst xmlns:a="http://schemas.openxmlformats.org/drawingml/2006/main">
               <a:ext uri="{FF2B5EF4-FFF2-40B4-BE49-F238E27FC236}">
-                <a16:creationId xmlns:a16="http://schemas.microsoft.com/office/drawing/2014/main" id="{2FCEB659-D08C-4794-B3E8-0D554418AE68}"/>
+                <a16:creationId xmlns:a16="http://schemas.microsoft.com/office/drawing/2014/main" id="{707E8136-7A44-42AA-833E-72216180999A}"/>
               </a:ext>
             </a:extLst>
           </p:cNvPr>
@@ -9511,7 +9511,7 @@
     </p:spTree>
     <p:extLst>
       <p:ext uri="{BB962C8B-B14F-4D97-AF65-F5344CB8AC3E}">
-        <p14:creationId xmlns:p14="http://schemas.microsoft.com/office/powerpoint/2010/main" val="501492124"/>
+        <p14:creationId xmlns:p14="http://schemas.microsoft.com/office/powerpoint/2010/main" val="1639815905"/>
       </p:ext>
     </p:extLst>
   </p:cSld>
@@ -9542,7 +9542,7 @@
           <p:cNvPr id="6" name="">
             <a:extLst xmlns:a="http://schemas.openxmlformats.org/drawingml/2006/main">
               <a:ext uri="{FF2B5EF4-FFF2-40B4-BE49-F238E27FC236}">
-                <a16:creationId xmlns:a16="http://schemas.microsoft.com/office/drawing/2014/main" id="{BDFB734F-D774-4D8D-86F9-BF1B2C22C4CE}"/>
+                <a16:creationId xmlns:a16="http://schemas.microsoft.com/office/drawing/2014/main" id="{6A7F7D2D-9CE8-4F93-9A1D-7AD0A26EC994}"/>
               </a:ext>
             </a:extLst>
           </p:cNvPr>
@@ -9608,7 +9608,7 @@
           <p:cNvPr id="2" name="">
             <a:extLst xmlns:a="http://schemas.openxmlformats.org/drawingml/2006/main">
               <a:ext uri="{FF2B5EF4-FFF2-40B4-BE49-F238E27FC236}">
-                <a16:creationId xmlns:a16="http://schemas.microsoft.com/office/drawing/2014/main" id="{337AA4E8-2ADE-4762-BF06-4F9ABDCA7B19}"/>
+                <a16:creationId xmlns:a16="http://schemas.microsoft.com/office/drawing/2014/main" id="{35144AD8-50AA-4153-ABDA-25732CAF519E}"/>
               </a:ext>
             </a:extLst>
           </p:cNvPr>
@@ -9674,7 +9674,7 @@
           <p:cNvPr id="3" name="">
             <a:extLst xmlns:a="http://schemas.openxmlformats.org/drawingml/2006/main">
               <a:ext uri="{FF2B5EF4-FFF2-40B4-BE49-F238E27FC236}">
-                <a16:creationId xmlns:a16="http://schemas.microsoft.com/office/drawing/2014/main" id="{CCEA5656-0C86-4CD6-B804-8B7E6BEDD1EA}"/>
+                <a16:creationId xmlns:a16="http://schemas.microsoft.com/office/drawing/2014/main" id="{E2FCF62B-C1CF-4A60-8256-93DA3655352F}"/>
               </a:ext>
             </a:extLst>
           </p:cNvPr>
@@ -9763,7 +9763,7 @@
           <p:cNvPr id="4" name="">
             <a:extLst xmlns:a="http://schemas.openxmlformats.org/drawingml/2006/main">
               <a:ext uri="{FF2B5EF4-FFF2-40B4-BE49-F238E27FC236}">
-                <a16:creationId xmlns:a16="http://schemas.microsoft.com/office/drawing/2014/main" id="{3DF8510A-72BE-44D2-B032-3BDE0A881FBC}"/>
+                <a16:creationId xmlns:a16="http://schemas.microsoft.com/office/drawing/2014/main" id="{8899B8CD-4E10-4FFB-820B-E3990AB10C16}"/>
               </a:ext>
             </a:extLst>
           </p:cNvPr>
@@ -9829,7 +9829,7 @@
           <p:cNvPr id="5" name="">
             <a:extLst xmlns:a="http://schemas.openxmlformats.org/drawingml/2006/main">
               <a:ext uri="{FF2B5EF4-FFF2-40B4-BE49-F238E27FC236}">
-                <a16:creationId xmlns:a16="http://schemas.microsoft.com/office/drawing/2014/main" id="{B7102E5A-937D-41BA-99C2-EA02824245F6}"/>
+                <a16:creationId xmlns:a16="http://schemas.microsoft.com/office/drawing/2014/main" id="{D1836AC1-7EED-43C1-BF5A-CC6882A96B18}"/>
               </a:ext>
             </a:extLst>
           </p:cNvPr>
@@ -9916,7 +9916,7 @@
     </p:spTree>
     <p:extLst>
       <p:ext uri="{BB962C8B-B14F-4D97-AF65-F5344CB8AC3E}">
-        <p14:creationId xmlns:p14="http://schemas.microsoft.com/office/powerpoint/2010/main" val="666144972"/>
+        <p14:creationId xmlns:p14="http://schemas.microsoft.com/office/powerpoint/2010/main" val="62820365"/>
       </p:ext>
     </p:extLst>
   </p:cSld>
@@ -9947,7 +9947,7 @@
           <p:cNvPr id="4" name="">
             <a:extLst xmlns:a="http://schemas.openxmlformats.org/drawingml/2006/main">
               <a:ext uri="{FF2B5EF4-FFF2-40B4-BE49-F238E27FC236}">
-                <a16:creationId xmlns:a16="http://schemas.microsoft.com/office/drawing/2014/main" id="{9775C78B-A776-4BA1-AF24-7DCF291F9AE6}"/>
+                <a16:creationId xmlns:a16="http://schemas.microsoft.com/office/drawing/2014/main" id="{A2C4AA25-657D-4E96-A1FB-909E3897C17C}"/>
               </a:ext>
             </a:extLst>
           </p:cNvPr>
@@ -10013,7 +10013,7 @@
           <p:cNvPr id="2" name="">
             <a:extLst xmlns:a="http://schemas.openxmlformats.org/drawingml/2006/main">
               <a:ext uri="{FF2B5EF4-FFF2-40B4-BE49-F238E27FC236}">
-                <a16:creationId xmlns:a16="http://schemas.microsoft.com/office/drawing/2014/main" id="{6E590E1C-3E41-46A3-B6ED-F3CE6B182268}"/>
+                <a16:creationId xmlns:a16="http://schemas.microsoft.com/office/drawing/2014/main" id="{D9D70178-3369-4651-82CF-A0E3D8AF5230}"/>
               </a:ext>
             </a:extLst>
           </p:cNvPr>
@@ -10338,7 +10338,7 @@
           <p:cNvPr id="3" name="">
             <a:extLst xmlns:a="http://schemas.openxmlformats.org/drawingml/2006/main">
               <a:ext uri="{FF2B5EF4-FFF2-40B4-BE49-F238E27FC236}">
-                <a16:creationId xmlns:a16="http://schemas.microsoft.com/office/drawing/2014/main" id="{04DF56A4-BC1E-45C8-863C-C7B887D8020A}"/>
+                <a16:creationId xmlns:a16="http://schemas.microsoft.com/office/drawing/2014/main" id="{CD3FDD71-197B-469F-8BF8-36A5D63A915C}"/>
               </a:ext>
             </a:extLst>
           </p:cNvPr>
@@ -10425,7 +10425,7 @@
     </p:spTree>
     <p:extLst>
       <p:ext uri="{BB962C8B-B14F-4D97-AF65-F5344CB8AC3E}">
-        <p14:creationId xmlns:p14="http://schemas.microsoft.com/office/powerpoint/2010/main" val="1852941735"/>
+        <p14:creationId xmlns:p14="http://schemas.microsoft.com/office/powerpoint/2010/main" val="1080685892"/>
       </p:ext>
     </p:extLst>
   </p:cSld>
@@ -10456,7 +10456,7 @@
           <p:cNvPr id="4" name="">
             <a:extLst xmlns:a="http://schemas.openxmlformats.org/drawingml/2006/main">
               <a:ext uri="{FF2B5EF4-FFF2-40B4-BE49-F238E27FC236}">
-                <a16:creationId xmlns:a16="http://schemas.microsoft.com/office/drawing/2014/main" id="{CF3E46A0-D5CC-4314-9ED1-06B8D2163B53}"/>
+                <a16:creationId xmlns:a16="http://schemas.microsoft.com/office/drawing/2014/main" id="{342070F9-32D0-4D87-975F-9DFB6BB5674B}"/>
               </a:ext>
             </a:extLst>
           </p:cNvPr>
@@ -10522,7 +10522,7 @@
           <p:cNvPr id="2" name="">
             <a:extLst xmlns:a="http://schemas.openxmlformats.org/drawingml/2006/main">
               <a:ext uri="{FF2B5EF4-FFF2-40B4-BE49-F238E27FC236}">
-                <a16:creationId xmlns:a16="http://schemas.microsoft.com/office/drawing/2014/main" id="{D0E3E948-F167-4847-923A-80441F722D04}"/>
+                <a16:creationId xmlns:a16="http://schemas.microsoft.com/office/drawing/2014/main" id="{A97C67AF-DE39-4929-B89D-DE457AF83A0C}"/>
               </a:ext>
             </a:extLst>
           </p:cNvPr>
@@ -10800,7 +10800,7 @@
           <p:cNvPr id="3" name="">
             <a:extLst xmlns:a="http://schemas.openxmlformats.org/drawingml/2006/main">
               <a:ext uri="{FF2B5EF4-FFF2-40B4-BE49-F238E27FC236}">
-                <a16:creationId xmlns:a16="http://schemas.microsoft.com/office/drawing/2014/main" id="{3846EBB6-26BA-447B-A22D-8B32737B882C}"/>
+                <a16:creationId xmlns:a16="http://schemas.microsoft.com/office/drawing/2014/main" id="{FDDECB37-A6FA-480A-9A82-D3338C80D0BB}"/>
               </a:ext>
             </a:extLst>
           </p:cNvPr>
@@ -10864,7 +10864,7 @@
     </p:spTree>
     <p:extLst>
       <p:ext uri="{BB962C8B-B14F-4D97-AF65-F5344CB8AC3E}">
-        <p14:creationId xmlns:p14="http://schemas.microsoft.com/office/powerpoint/2010/main" val="1506148383"/>
+        <p14:creationId xmlns:p14="http://schemas.microsoft.com/office/powerpoint/2010/main" val="1760200533"/>
       </p:ext>
     </p:extLst>
   </p:cSld>

--- a/submission/AlphaVault-Presentation.pptx
+++ b/submission/AlphaVault-Presentation.pptx
@@ -2,22 +2,24 @@
 <file path=ppt/presentation.xml><?xml version="1.0" encoding="utf-8"?>
 <p:presentation xmlns:p="http://schemas.openxmlformats.org/presentationml/2006/main">
   <p:sldMasterIdLst>
-    <p:sldMasterId xmlns:r="http://schemas.openxmlformats.org/officeDocument/2006/relationships" id="2147483648" r:id="R44bc541ab706427c"/>
+    <p:sldMasterId xmlns:r="http://schemas.openxmlformats.org/officeDocument/2006/relationships" id="2147483648" r:id="Rb310d442b94b4b92"/>
   </p:sldMasterIdLst>
   <p:notesMasterIdLst>
-    <p:notesMasterId xmlns:r="http://schemas.openxmlformats.org/officeDocument/2006/relationships" r:id="Ra16646cc356d4b5a"/>
+    <p:notesMasterId xmlns:r="http://schemas.openxmlformats.org/officeDocument/2006/relationships" r:id="R46d5ab7ce2fd46f9"/>
   </p:notesMasterIdLst>
   <p:sldIdLst>
-    <p:sldId xmlns:r="http://schemas.openxmlformats.org/officeDocument/2006/relationships" id="256" r:id="R4be15f1744694366"/>
-    <p:sldId xmlns:r="http://schemas.openxmlformats.org/officeDocument/2006/relationships" id="257" r:id="Rc40f81d3bb654201"/>
-    <p:sldId xmlns:r="http://schemas.openxmlformats.org/officeDocument/2006/relationships" id="258" r:id="Rbdfa5ff04bfc48f4"/>
-    <p:sldId xmlns:r="http://schemas.openxmlformats.org/officeDocument/2006/relationships" id="259" r:id="R583697f2ecde4347"/>
-    <p:sldId xmlns:r="http://schemas.openxmlformats.org/officeDocument/2006/relationships" id="260" r:id="R74aa7a3eaa084bf0"/>
-    <p:sldId xmlns:r="http://schemas.openxmlformats.org/officeDocument/2006/relationships" id="261" r:id="R3b4cb079103d4f5f"/>
-    <p:sldId xmlns:r="http://schemas.openxmlformats.org/officeDocument/2006/relationships" id="262" r:id="Rc3db6be84fd14189"/>
-    <p:sldId xmlns:r="http://schemas.openxmlformats.org/officeDocument/2006/relationships" id="263" r:id="R57c7f4ab30ff4677"/>
-    <p:sldId xmlns:r="http://schemas.openxmlformats.org/officeDocument/2006/relationships" id="264" r:id="Re206162601fd4d28"/>
-    <p:sldId xmlns:r="http://schemas.openxmlformats.org/officeDocument/2006/relationships" id="265" r:id="R8cec3040682547dc"/>
+    <p:sldId xmlns:r="http://schemas.openxmlformats.org/officeDocument/2006/relationships" id="256" r:id="R0e4f70de742740a2"/>
+    <p:sldId xmlns:r="http://schemas.openxmlformats.org/officeDocument/2006/relationships" id="257" r:id="R34dc6d6458d946c5"/>
+    <p:sldId xmlns:r="http://schemas.openxmlformats.org/officeDocument/2006/relationships" id="258" r:id="Ra53262d7109e4b75"/>
+    <p:sldId xmlns:r="http://schemas.openxmlformats.org/officeDocument/2006/relationships" id="259" r:id="R6e2da4232ca143e1"/>
+    <p:sldId xmlns:r="http://schemas.openxmlformats.org/officeDocument/2006/relationships" id="260" r:id="R41fb08e627124e9e"/>
+    <p:sldId xmlns:r="http://schemas.openxmlformats.org/officeDocument/2006/relationships" id="261" r:id="R886491b66d684c11"/>
+    <p:sldId xmlns:r="http://schemas.openxmlformats.org/officeDocument/2006/relationships" id="262" r:id="Rb3359ff5e07a4e31"/>
+    <p:sldId xmlns:r="http://schemas.openxmlformats.org/officeDocument/2006/relationships" id="263" r:id="Rb32e7893935f4fc9"/>
+    <p:sldId xmlns:r="http://schemas.openxmlformats.org/officeDocument/2006/relationships" id="264" r:id="R3761ce16d6e64dc7"/>
+    <p:sldId xmlns:r="http://schemas.openxmlformats.org/officeDocument/2006/relationships" id="265" r:id="R04e975cb953745b5"/>
+    <p:sldId xmlns:r="http://schemas.openxmlformats.org/officeDocument/2006/relationships" id="266" r:id="R041ea3e7b7e04fec"/>
+    <p:sldId xmlns:r="http://schemas.openxmlformats.org/officeDocument/2006/relationships" id="267" r:id="R4fe4ca9e1fef4d95"/>
   </p:sldIdLst>
   <p:sldSz cx="12192000" cy="6858000"/>
   <p:notesSz cx="6858000" cy="9144000"/>
@@ -451,7 +453,12 @@
           <a:lstStyle xmlns:a="http://schemas.openxmlformats.org/drawingml/2006/main"/>
           <a:p xmlns:a="http://schemas.openxmlformats.org/drawingml/2006/main">
             <a:r>
-              <a:t>20 seconds. Introduce the SC6113 DApp: quantitative portfolio management with on-chain policy checks. This is a course prototype with mock assets and manually reported prices. Do not claim real investment returns. Sources: contracts/*.sol; docs/REQUIREMENTS.md.</a:t>
+              <a:t>0–20 seconds. Welcome to AlphaVault, a quantitative portfolio management and risk controlled rebalancing application by Du zhuotong. This ten minute demonstration explains the problem, system design, actual application workflow, and measured results. The project uses mock assets on a local chain and the Sepolia test network.</a:t>
+            </a:r>
+          </a:p>
+          <a:p xmlns:a="http://schemas.openxmlformats.org/drawingml/2006/main">
+            <a:r>
+              <a:t>Source: Technical report pp. 1–2.</a:t>
             </a:r>
           </a:p>
         </p:txBody>
@@ -521,7 +528,162 @@
           <a:lstStyle xmlns:a="http://schemas.openxmlformats.org/drawingml/2006/main"/>
           <a:p xmlns:a="http://schemas.openxmlformats.org/drawingml/2006/main">
             <a:r>
-              <a:t>20 seconds. Explain the next engineering steps without claiming they already exist. Replace trusted mock reports and exchange with suitable production integrations, test actual market data and net trading, then strengthen governance and audit. Before course submission align rubric, check repo access and verify source if required. Sources: report sections on limitations and docs/REQUIREMENTS.md.</a:t>
+              <a:t>478–528 seconds. The latest full automated run passes sixty four tests with zero failures. Tests cover contract permissions, accounting, rollback, price freshness, pause behavior, API preparation and persistence. A new public acceptance check also passes: the service is in wallet mode, uses PostgreSQL, points to the expected Sepolia vault, and exposes ten verified transaction types. The earlier restart experiment provides a stronger storage check than event replay alone. A non chain jobs record remained identical after the Render service restarted. Because that record is not reconstructed from blockchain events, its retention demonstrates persistence across that observed restart. This is a specific acceptance result, not an uptime guarantee. The free service can still sleep.</a:t>
+            </a:r>
+          </a:p>
+          <a:p xmlns:a="http://schemas.openxmlformats.org/drawingml/2006/main">
+            <a:r>
+              <a:t>Source: evidence/submission-tests.tap, submission-hosted-check.json, hosted-jobs-*.json.</a:t>
+            </a:r>
+          </a:p>
+        </p:txBody>
+      </p:sp>
+      <p:sp>
+        <p:nvSpPr>
+          <p:cNvPr id="4" name="Slide Number Placeholder 3"/>
+          <p:cNvSpPr>
+            <a:spLocks xmlns:a="http://schemas.openxmlformats.org/drawingml/2006/main" noGrp="1"/>
+          </p:cNvSpPr>
+          <p:nvPr>
+            <p:ph type="sldNum" idx="5"/>
+          </p:nvPr>
+        </p:nvSpPr>
+        <p:spPr/>
+        <p:txBody>
+          <a:bodyPr xmlns:a="http://schemas.openxmlformats.org/drawingml/2006/main"/>
+          <a:lstStyle xmlns:a="http://schemas.openxmlformats.org/drawingml/2006/main"/>
+          <a:p xmlns:a="http://schemas.openxmlformats.org/drawingml/2006/main"/>
+        </p:txBody>
+      </p:sp>
+    </p:spTree>
+  </p:cSld>
+  <p:clrMapOvr>
+    <a:masterClrMapping xmlns:a="http://schemas.openxmlformats.org/drawingml/2006/main"/>
+  </p:clrMapOvr>
+</p:notes>
+</file>
+
+<file path=ppt/notesSlides/notesSlide11.xml><?xml version="1.0" encoding="utf-8"?>
+<p:notes xmlns:p="http://schemas.openxmlformats.org/presentationml/2006/main">
+  <p:cSld>
+    <p:spTree>
+      <p:nvGrpSpPr>
+        <p:cNvPr id="1" name=""/>
+        <p:cNvGrpSpPr/>
+        <p:nvPr/>
+      </p:nvGrpSpPr>
+      <p:grpSpPr>
+        <a:xfrm xmlns:a="http://schemas.openxmlformats.org/drawingml/2006/main"/>
+      </p:grpSpPr>
+      <p:sp>
+        <p:nvSpPr>
+          <p:cNvPr id="2" name="Slide Image Placeholder 1"/>
+          <p:cNvSpPr>
+            <a:spLocks xmlns:a="http://schemas.openxmlformats.org/drawingml/2006/main" noGrp="1"/>
+          </p:cNvSpPr>
+          <p:nvPr>
+            <p:ph type="sldImg" idx="0"/>
+          </p:nvPr>
+        </p:nvSpPr>
+        <p:spPr/>
+      </p:sp>
+      <p:sp>
+        <p:nvSpPr>
+          <p:cNvPr id="3" name="Notes Placeholder 2"/>
+          <p:cNvSpPr>
+            <a:spLocks xmlns:a="http://schemas.openxmlformats.org/drawingml/2006/main" noGrp="1"/>
+          </p:cNvSpPr>
+          <p:nvPr>
+            <p:ph type="body" idx="1"/>
+          </p:nvPr>
+        </p:nvSpPr>
+        <p:spPr/>
+        <p:txBody>
+          <a:bodyPr xmlns:a="http://schemas.openxmlformats.org/drawingml/2006/main"/>
+          <a:lstStyle xmlns:a="http://schemas.openxmlformats.org/drawingml/2006/main"/>
+          <a:p xmlns:a="http://schemas.openxmlformats.org/drawingml/2006/main">
+            <a:r>
+              <a:t>528–573 seconds. The project delivers contracts, a REST service, persistent storage, a wallet capable dashboard, tests, deployment evidence and submission materials. The individual contribution report maps those responsibilities to artifacts and meaningful Git checkpoints. Several engineering boundaries remain. Prices are manually reported, assets and the exchange are simulated, and the administrator can reassign roles. There is no external security audit or field usability study. Unattended Keeper execution was tested locally; the public rebalance was manually signed. Explorer source verification is separate from deployment receipt checks. These limits guide the next development priorities and the interpretation of the evidence.</a:t>
+            </a:r>
+          </a:p>
+          <a:p xmlns:a="http://schemas.openxmlformats.org/drawingml/2006/main">
+            <a:r>
+              <a:t>Source: Technical report pp. 6, 12–14; Individual contribution report.</a:t>
+            </a:r>
+          </a:p>
+        </p:txBody>
+      </p:sp>
+      <p:sp>
+        <p:nvSpPr>
+          <p:cNvPr id="4" name="Slide Number Placeholder 3"/>
+          <p:cNvSpPr>
+            <a:spLocks xmlns:a="http://schemas.openxmlformats.org/drawingml/2006/main" noGrp="1"/>
+          </p:cNvSpPr>
+          <p:nvPr>
+            <p:ph type="sldNum" idx="5"/>
+          </p:nvPr>
+        </p:nvSpPr>
+        <p:spPr/>
+        <p:txBody>
+          <a:bodyPr xmlns:a="http://schemas.openxmlformats.org/drawingml/2006/main"/>
+          <a:lstStyle xmlns:a="http://schemas.openxmlformats.org/drawingml/2006/main"/>
+          <a:p xmlns:a="http://schemas.openxmlformats.org/drawingml/2006/main"/>
+        </p:txBody>
+      </p:sp>
+    </p:spTree>
+  </p:cSld>
+  <p:clrMapOvr>
+    <a:masterClrMapping xmlns:a="http://schemas.openxmlformats.org/drawingml/2006/main"/>
+  </p:clrMapOvr>
+</p:notes>
+</file>
+
+<file path=ppt/notesSlides/notesSlide12.xml><?xml version="1.0" encoding="utf-8"?>
+<p:notes xmlns:p="http://schemas.openxmlformats.org/presentationml/2006/main">
+  <p:cSld>
+    <p:spTree>
+      <p:nvGrpSpPr>
+        <p:cNvPr id="1" name=""/>
+        <p:cNvGrpSpPr/>
+        <p:nvPr/>
+      </p:nvGrpSpPr>
+      <p:grpSpPr>
+        <a:xfrm xmlns:a="http://schemas.openxmlformats.org/drawingml/2006/main"/>
+      </p:grpSpPr>
+      <p:sp>
+        <p:nvSpPr>
+          <p:cNvPr id="2" name="Slide Image Placeholder 1"/>
+          <p:cNvSpPr>
+            <a:spLocks xmlns:a="http://schemas.openxmlformats.org/drawingml/2006/main" noGrp="1"/>
+          </p:cNvSpPr>
+          <p:nvPr>
+            <p:ph type="sldImg" idx="0"/>
+          </p:nvPr>
+        </p:nvSpPr>
+        <p:spPr/>
+      </p:sp>
+      <p:sp>
+        <p:nvSpPr>
+          <p:cNvPr id="3" name="Notes Placeholder 2"/>
+          <p:cNvSpPr>
+            <a:spLocks xmlns:a="http://schemas.openxmlformats.org/drawingml/2006/main" noGrp="1"/>
+          </p:cNvSpPr>
+          <p:nvPr>
+            <p:ph type="body" idx="1"/>
+          </p:nvPr>
+        </p:nvSpPr>
+        <p:spPr/>
+        <p:txBody>
+          <a:bodyPr xmlns:a="http://schemas.openxmlformats.org/drawingml/2006/main"/>
+          <a:lstStyle xmlns:a="http://schemas.openxmlformats.org/drawingml/2006/main"/>
+          <a:p xmlns:a="http://schemas.openxmlformats.org/drawingml/2006/main">
+            <a:r>
+              <a:t>573–600 seconds. The submission contains a fourteen page technical report with five diagrams, a user manual, an individual contribution report, slides, source code and this ten minute demonstration. The report connects the problem and stakeholder needs to measured prototype results. The repository and public deployment links are shown here. AlphaVault demonstrates constrained, traceable portfolio operations with an explicit investor exit path. Thank you for watching.</a:t>
+            </a:r>
+          </a:p>
+          <a:p xmlns:a="http://schemas.openxmlformats.org/drawingml/2006/main">
+            <a:r>
+              <a:t>Source: docs/SUBMISSION_MAP.md and submission/ deliverables.</a:t>
             </a:r>
           </a:p>
         </p:txBody>
@@ -591,7 +753,12 @@
           <a:lstStyle xmlns:a="http://schemas.openxmlformats.org/drawingml/2006/main"/>
           <a:p xmlns:a="http://schemas.openxmlformats.org/drawingml/2006/main">
             <a:r>
-              <a:t>35 seconds. The investor deposits, the manager selects a rule, the risk officer sets policy and reports mock markets, and the Keeper submits eligible execution. Wallet A has investor/admin/Keeper responsibilities. B and C are separate manager and risk-officer wallets. Admin can reassign roles, so this is centrally administered rather than DAO governance. Sources: contracts/RiskManager.sol; docs/SEPOLIA_RESULTS.md.</a:t>
+              <a:t>20–65 seconds. Consider a small token treasury that delegates allocation decisions to a manager. Contributors want to see where assets are held, understand who can change the rules, and retain an exit when trading is paused. A spreadsheet can describe an allocation, but it cannot enforce that allocation during a transfer. AlphaVault separates the investor, strategy manager, risk officer, and Keeper. Their incentives can conflict: the manager may seek exposure while the risk officer limits it. The design makes those permissions inspectable. This is a prototype scenario, not a completed user study. Reduced operating effort remains a future research question rather than a measured benefit.</a:t>
+            </a:r>
+          </a:p>
+          <a:p xmlns:a="http://schemas.openxmlformats.org/drawingml/2006/main">
+            <a:r>
+              <a:t>Source: Technical report p. 2.</a:t>
             </a:r>
           </a:p>
         </p:txBody>
@@ -661,7 +828,12 @@
           <a:lstStyle xmlns:a="http://schemas.openxmlformats.org/drawingml/2006/main"/>
           <a:p xmlns:a="http://schemas.openxmlformats.org/drawingml/2006/main">
             <a:r>
-              <a:t>45 seconds. Walk through the contracts in order. PortfolioVault calls StrategyEngine.validatedWeights. StrategyEngine computes weights then invokes RiskManager.validate. The vault also uses RiskManager for roles, prices and limits. MockExchange transfers assets using mock reports. Solidity checks remain authoritative even if the UI is bypassed. Source: contracts/PortfolioVault.sol, StrategyEngine.sol, RiskManager.sol and MockExchange.sol.</a:t>
+              <a:t>65–105 seconds. The dashboard reads portfolio data through a same origin REST API. For public transactions, the API prepares unsigned calldata and MetaMask signs with the user's account. The hosted server does not hold a signing key. PortfolioVault holds tokens, StrategyEngine calculates target weights, and RiskManager enforces policy. MockExchange performs test token swaps. An off chain Keeper can submit an eligible rebalance, but all contract checks still apply. The backend indexes blockchain events into PostgreSQL in the public deployment, or SQLite locally. The database provides observations and evidence; the chain remains authoritative for custody.</a:t>
+            </a:r>
+          </a:p>
+          <a:p xmlns:a="http://schemas.openxmlformats.org/drawingml/2006/main">
+            <a:r>
+              <a:t>Source: Technical report p. 3; contracts/ and server/.</a:t>
             </a:r>
           </a:p>
         </p:txBody>
@@ -731,7 +903,12 @@
           <a:lstStyle xmlns:a="http://schemas.openxmlformats.org/drawingml/2006/main"/>
           <a:p xmlns:a="http://schemas.openxmlformats.org/drawingml/2006/main">
             <a:r>
-              <a:t>40 seconds. Equal Weight splits the risky sleeve. Momentum tilts 75/25 toward the stronger signal and holds cash if both signals are nonpositive. Volatility Target reduces risky exposure using average reported volatility. The risk manager then applies policy. No covariance optimization or trained alpha model is claimed. Sources: contracts/StrategyEngine.sol; server/quant.mjs.</a:t>
+              <a:t>105–140 seconds. A rebalance starts with an authorized Keeper request. The vault checks roles, pause state, fresh prices, timing and bounds. It then asks StrategyEngine for validated weights. The strategy calls RiskManager before returning those weights. The vault sells risky holdings to mock cash, buys the target assets, and checks the final loss in net asset value. These operations share one atomic transaction. If a bound fails, the swaps and timestamp roll back together. A failed gas estimate is not a successful on chain transaction and is not included in the evidence count.</a:t>
+            </a:r>
+          </a:p>
+          <a:p xmlns:a="http://schemas.openxmlformats.org/drawingml/2006/main">
+            <a:r>
+              <a:t>Source: Technical report p. 5; PortfolioVault.rebalance.</a:t>
             </a:r>
           </a:p>
         </p:txBody>
@@ -801,7 +978,12 @@
           <a:lstStyle xmlns:a="http://schemas.openxmlformats.org/drawingml/2006/main"/>
           <a:p xmlns:a="http://schemas.openxmlformats.org/drawingml/2006/main">
             <a:r>
-              <a:t>45 seconds. Explain target cap, cash floor and weighted-volatility bound. Freshness, deadline, cooldown and loss checks gate execution. Revert rolls back all transfers. Pause intentionally leaves in-kind redemption open and does not promise a cash withdrawal at a current valuation. Virtual shares use a consistent entry/exit denominator to mitigate donation rounding. Source: contracts/*.sol; test/contracts.test.mjs.</a:t>
+              <a:t>140–175 seconds. Eight tables support the application. Events are identified by deployment scope, transaction hash and log index. Snapshots store observed portfolio values, while prices and strategies retain per block observations. Cursors store index progress and block hashes so the service can detect a chain rollback. Receipts hold verified evidence, and jobs track execution outcomes. Backtests are keyed by strategy and identify their synthetic source. Deployment scope combines chain ID and vault address. These are logical relationships, not SQL foreign key constraints. Large on chain amounts are stored as strings to avoid numeric precision loss.</a:t>
+            </a:r>
+          </a:p>
+          <a:p xmlns:a="http://schemas.openxmlformats.org/drawingml/2006/main">
+            <a:r>
+              <a:t>Source: Technical report p. 7; server/store.mjs, postgres-store.mjs.</a:t>
             </a:r>
           </a:p>
         </p:txBody>
@@ -871,7 +1053,12 @@
           <a:lstStyle xmlns:a="http://schemas.openxmlformats.org/drawingml/2006/main"/>
           <a:p xmlns:a="http://schemas.openxmlformats.org/drawingml/2006/main">
             <a:r>
-              <a:t>45 seconds. This native chart uses saved deterministic synthetic data, not live history. It covers 160 return intervals after a 20-day lookback, with a seven-day rebalance schedule and 20 basis point fees on sell and buy legs. All strategies lose money on this fixture. Volatility Target has the smallest drawdown but no profitability claim follows. Sources: evidence/backtests.json and server/quant.mjs.</a:t>
+              <a:t>175–205 seconds. The user chooses an action, the API prepares calldata, and the wallet asks for confirmation. Smart contracts then enforce the account's authority and the relevant state checks. After success, the service indexes events and refreshes the dashboard. Approval and deposit are separate transactions. Selecting a strategy does not execute a trade. Rebalancing needs a separate Keeper request. A pause blocks deposits and trading, but investors can still redeem their proportional asset basket. That exit does not depend on fresh market prices.</a:t>
+            </a:r>
+          </a:p>
+          <a:p xmlns:a="http://schemas.openxmlformats.org/drawingml/2006/main">
+            <a:r>
+              <a:t>Source: Technical report p. 8; public/app.js and server/actions.mjs.</a:t>
             </a:r>
           </a:p>
         </p:txBody>
@@ -941,7 +1128,12 @@
           <a:lstStyle xmlns:a="http://schemas.openxmlformats.org/drawingml/2006/main"/>
           <a:p xmlns:a="http://schemas.openxmlformats.org/drawingml/2006/main">
             <a:r>
-              <a:t>120 seconds. Open https://alphavault-sepolia.onrender.com to show public hosting, current portfolio and stale-price disclosure. Use the separate local demo for reversible role changes, selection, rebalance, risk pause and redemption. Clearly state the local chain ID 31337. Show Activity ledger and synthetic research. Public Sepolia transactions already exist and are presented as historical evidence rather than new signatures. Source: docs/DEMO_SCRIPT.md; evidence/hosted-acceptance.json.</a:t>
+              <a:t>205–230 seconds. Overview shows portfolio value and investor actions. Strategies separates allocation choice from execution. Risk controls contains policy and emergency pause. Activity ledger links actions to evidence. The local role selector chooses test accounts. In public mode, the connected wallet determines authority. We now move to the recorded workflow.</a:t>
+            </a:r>
+          </a:p>
+          <a:p xmlns:a="http://schemas.openxmlformats.org/drawingml/2006/main">
+            <a:r>
+              <a:t>Source: Technical report p. 9; public/index.html and app.js.</a:t>
             </a:r>
           </a:p>
         </p:txBody>
@@ -1011,7 +1203,12 @@
           <a:lstStyle xmlns:a="http://schemas.openxmlformats.org/drawingml/2006/main"/>
           <a:p xmlns:a="http://schemas.openxmlformats.org/drawingml/2006/main">
             <a:r>
-              <a:t>40 seconds. The 12 successful receipts cover ten methods including ERC20 approval and nine core methods. Deposits minted 1000 displayed shares. The first rebalance loses 1.60 mUSD to mock fees. Redeeming 250 shares lowers vault NAV by a withdrawal rather than trading loss. The investor retains 750 shares. Keeper signed this transaction manually. Source: docs/SEPOLIA_RESULTS.md and evidence/sepolia-business-evidence.json.</a:t>
+              <a:t>230–433 seconds. Show the recorded workflow from local approval and deposit through public Sepolia evidence. Local figures are distinct from public figures.</a:t>
+            </a:r>
+          </a:p>
+          <a:p xmlns:a="http://schemas.openxmlformats.org/drawingml/2006/main">
+            <a:r>
+              <a:t>Source: evidence/video-recording.json; recorded local actions and public historical state.</a:t>
             </a:r>
           </a:p>
         </p:txBody>
@@ -1081,7 +1278,12 @@
           <a:lstStyle xmlns:a="http://schemas.openxmlformats.org/drawingml/2006/main"/>
           <a:p xmlns:a="http://schemas.openxmlformats.org/drawingml/2006/main">
             <a:r>
-              <a:t>25 seconds. The full suite passed 64 before the CA fix and the PostgreSQL subset passed seven afterwards. The deployed Linux Docker build succeeded. Explain why a non-chain sentinel is stronger restart evidence than replayable events alone. No new public-origin signing or continuous cloud Keeper was tested. Sources: evidence/free-hosting-tests.tap, postgres-tests.tap and hosted-acceptance.json.</a:t>
+              <a:t>433–478 seconds. The strategy experiment compares rules on the same deterministic price fixture and fee assumptions. Volatility Target has a maximum drawdown of five point eight two percent, compared with nine point zero four percent for Equal Weight. That is about three point two two percentage points lower. Annualized volatility is also lower, but both returns remain negative. These results do not establish real market profitability. Functional evidence is separate: six selected unauthorized privileged calls were rejected in the tests, and a public redemption succeeded while trading was paused. The public rebalance cost one point six zero mock dollars in exchange fees, with network gas paid separately.</a:t>
+            </a:r>
+          </a:p>
+          <a:p xmlns:a="http://schemas.openxmlformats.org/drawingml/2006/main">
+            <a:r>
+              <a:t>Source: Technical report pp. 10–12; evidence/backtests.json; test/contracts.test.mjs.</a:t>
             </a:r>
           </a:p>
         </p:txBody>
@@ -1128,7 +1330,7 @@
           <p:cNvPr id="3" name="Title">
             <a:extLst xmlns:a="http://schemas.openxmlformats.org/drawingml/2006/main">
               <a:ext uri="{FF2B5EF4-FFF2-40B4-BE49-F238E27FC236}">
-                <a16:creationId xmlns:a16="http://schemas.microsoft.com/office/drawing/2014/main" id="{48477FF1-05AA-45C7-A991-BD8EA206B196}"/>
+                <a16:creationId xmlns:a16="http://schemas.microsoft.com/office/drawing/2014/main" id="{481690E9-AA6A-4679-BE4F-98C76EA79C45}"/>
               </a:ext>
             </a:extLst>
           </p:cNvPr>
@@ -1285,7 +1487,7 @@
           <p:cNvPr id="2" name="Subtitle">
             <a:extLst xmlns:a="http://schemas.openxmlformats.org/drawingml/2006/main">
               <a:ext uri="{FF2B5EF4-FFF2-40B4-BE49-F238E27FC236}">
-                <a16:creationId xmlns:a16="http://schemas.microsoft.com/office/drawing/2014/main" id="{954A50AE-7FAD-479C-8B1B-0249D4A1F7A3}"/>
+                <a16:creationId xmlns:a16="http://schemas.microsoft.com/office/drawing/2014/main" id="{34196B3A-4D41-435B-906F-CC5F807E681E}"/>
               </a:ext>
             </a:extLst>
           </p:cNvPr>
@@ -1459,7 +1661,7 @@
           <p:cNvPr id="2" name="Section title">
             <a:extLst xmlns:a="http://schemas.openxmlformats.org/drawingml/2006/main">
               <a:ext uri="{FF2B5EF4-FFF2-40B4-BE49-F238E27FC236}">
-                <a16:creationId xmlns:a16="http://schemas.microsoft.com/office/drawing/2014/main" id="{CAE2664A-B8C2-4190-A773-E916B1250301}"/>
+                <a16:creationId xmlns:a16="http://schemas.microsoft.com/office/drawing/2014/main" id="{45E4476E-492E-4952-A41B-E8A8F5C71D1C}"/>
               </a:ext>
             </a:extLst>
           </p:cNvPr>
@@ -1633,7 +1835,7 @@
           <p:cNvPr id="3" name="Title">
             <a:extLst xmlns:a="http://schemas.openxmlformats.org/drawingml/2006/main">
               <a:ext uri="{FF2B5EF4-FFF2-40B4-BE49-F238E27FC236}">
-                <a16:creationId xmlns:a16="http://schemas.microsoft.com/office/drawing/2014/main" id="{C58D7F92-AFB0-4727-A815-950AA6C2D810}"/>
+                <a16:creationId xmlns:a16="http://schemas.microsoft.com/office/drawing/2014/main" id="{9AA0D517-AA5C-4309-B800-0FD668C79478}"/>
               </a:ext>
             </a:extLst>
           </p:cNvPr>
@@ -1790,7 +1992,7 @@
           <p:cNvPr id="2" name="Body">
             <a:extLst xmlns:a="http://schemas.openxmlformats.org/drawingml/2006/main">
               <a:ext uri="{FF2B5EF4-FFF2-40B4-BE49-F238E27FC236}">
-                <a16:creationId xmlns:a16="http://schemas.microsoft.com/office/drawing/2014/main" id="{4E795905-07FA-4177-9173-07E97326E7E2}"/>
+                <a16:creationId xmlns:a16="http://schemas.microsoft.com/office/drawing/2014/main" id="{3E918968-9305-4780-A662-220F980E3067}"/>
               </a:ext>
             </a:extLst>
           </p:cNvPr>
@@ -1964,7 +2166,7 @@
           <p:cNvPr id="4" name="Title">
             <a:extLst xmlns:a="http://schemas.openxmlformats.org/drawingml/2006/main">
               <a:ext uri="{FF2B5EF4-FFF2-40B4-BE49-F238E27FC236}">
-                <a16:creationId xmlns:a16="http://schemas.microsoft.com/office/drawing/2014/main" id="{BB1286D1-5E1F-46A6-A2EE-6BB34DBD0B07}"/>
+                <a16:creationId xmlns:a16="http://schemas.microsoft.com/office/drawing/2014/main" id="{BFB42CBF-A35E-413A-803F-43F278710B5F}"/>
               </a:ext>
             </a:extLst>
           </p:cNvPr>
@@ -2121,7 +2323,7 @@
           <p:cNvPr id="2" name="Left column">
             <a:extLst xmlns:a="http://schemas.openxmlformats.org/drawingml/2006/main">
               <a:ext uri="{FF2B5EF4-FFF2-40B4-BE49-F238E27FC236}">
-                <a16:creationId xmlns:a16="http://schemas.microsoft.com/office/drawing/2014/main" id="{30B44328-EF64-4538-9AD9-743C0F70E61A}"/>
+                <a16:creationId xmlns:a16="http://schemas.microsoft.com/office/drawing/2014/main" id="{C5A2805E-C94F-404B-B903-074C2FFE74C1}"/>
               </a:ext>
             </a:extLst>
           </p:cNvPr>
@@ -2278,7 +2480,7 @@
           <p:cNvPr id="3" name="Right column">
             <a:extLst xmlns:a="http://schemas.openxmlformats.org/drawingml/2006/main">
               <a:ext uri="{FF2B5EF4-FFF2-40B4-BE49-F238E27FC236}">
-                <a16:creationId xmlns:a16="http://schemas.microsoft.com/office/drawing/2014/main" id="{4BC9F280-4574-43D8-8211-E748C5858E04}"/>
+                <a16:creationId xmlns:a16="http://schemas.microsoft.com/office/drawing/2014/main" id="{51D2295E-2AC7-40E6-87CE-D09D8F735F60}"/>
               </a:ext>
             </a:extLst>
           </p:cNvPr>
@@ -2452,7 +2654,7 @@
           <p:cNvPr id="3" name="Title">
             <a:extLst xmlns:a="http://schemas.openxmlformats.org/drawingml/2006/main">
               <a:ext uri="{FF2B5EF4-FFF2-40B4-BE49-F238E27FC236}">
-                <a16:creationId xmlns:a16="http://schemas.microsoft.com/office/drawing/2014/main" id="{4A5BDBAB-E4CC-4EE2-AC6D-33B2E2ECC8C8}"/>
+                <a16:creationId xmlns:a16="http://schemas.microsoft.com/office/drawing/2014/main" id="{31E41049-5EA2-4725-AEA5-9ACEE47E9378}"/>
               </a:ext>
             </a:extLst>
           </p:cNvPr>
@@ -2609,7 +2811,7 @@
           <p:cNvPr id="2" name="Left column">
             <a:extLst xmlns:a="http://schemas.openxmlformats.org/drawingml/2006/main">
               <a:ext uri="{FF2B5EF4-FFF2-40B4-BE49-F238E27FC236}">
-                <a16:creationId xmlns:a16="http://schemas.microsoft.com/office/drawing/2014/main" id="{A6F1EF0F-A4DF-469F-9583-D75C89C026D0}"/>
+                <a16:creationId xmlns:a16="http://schemas.microsoft.com/office/drawing/2014/main" id="{09D32AEA-E6A6-4A77-90A3-7E4AF04E7B6D}"/>
               </a:ext>
             </a:extLst>
           </p:cNvPr>
@@ -2804,12 +3006,12 @@
   </p:cSld>
   <p:clrMap bg1="lt1" tx1="dk1" bg2="lt2" tx2="dk2" accent1="accent1" accent2="accent2" accent3="accent3" accent4="accent4" accent5="accent5" accent6="accent6" hlink="hlink" folHlink="folHlink"/>
   <p:sldLayoutIdLst>
-    <p:sldLayoutId xmlns:r="http://schemas.openxmlformats.org/officeDocument/2006/relationships" id="2147483649" r:id="R2e67f5c80a524b0e"/>
-    <p:sldLayoutId xmlns:r="http://schemas.openxmlformats.org/officeDocument/2006/relationships" id="2147483650" r:id="R6d8b84ed907c440d"/>
-    <p:sldLayoutId xmlns:r="http://schemas.openxmlformats.org/officeDocument/2006/relationships" id="2147483651" r:id="R8d6d0e43a5cc4ed4"/>
-    <p:sldLayoutId xmlns:r="http://schemas.openxmlformats.org/officeDocument/2006/relationships" id="2147483652" r:id="R4bb68f3197994181"/>
-    <p:sldLayoutId xmlns:r="http://schemas.openxmlformats.org/officeDocument/2006/relationships" id="2147483653" r:id="R557d1233b1ba4d86"/>
-    <p:sldLayoutId xmlns:r="http://schemas.openxmlformats.org/officeDocument/2006/relationships" id="2147483654" r:id="R5ec288db0c8b487c"/>
+    <p:sldLayoutId xmlns:r="http://schemas.openxmlformats.org/officeDocument/2006/relationships" id="2147483649" r:id="Rad52270d19ac49b5"/>
+    <p:sldLayoutId xmlns:r="http://schemas.openxmlformats.org/officeDocument/2006/relationships" id="2147483650" r:id="R7934a89b3ed24b71"/>
+    <p:sldLayoutId xmlns:r="http://schemas.openxmlformats.org/officeDocument/2006/relationships" id="2147483651" r:id="Rafea1ca58fbd45b2"/>
+    <p:sldLayoutId xmlns:r="http://schemas.openxmlformats.org/officeDocument/2006/relationships" id="2147483652" r:id="R93cc497d6bf84a1d"/>
+    <p:sldLayoutId xmlns:r="http://schemas.openxmlformats.org/officeDocument/2006/relationships" id="2147483653" r:id="Rd2320585865542b9"/>
+    <p:sldLayoutId xmlns:r="http://schemas.openxmlformats.org/officeDocument/2006/relationships" id="2147483654" r:id="Rd0d25dd5b1ec494b"/>
   </p:sldLayoutIdLst>
   <p:txStyles>
     <p:titleStyle>
@@ -4349,12 +4551,12 @@
           <c:idx val="1"/>
           <c:order val="1"/>
           <c:tx>
-            <c:v>Momentum</c:v>
+            <c:v>Volatility Target</c:v>
           </c:tx>
           <c:spPr>
             <a:ln xmlns:a="http://schemas.openxmlformats.org/drawingml/2006/main" w="28575">
               <a:solidFill>
-                <a:srgbClr val="B45B3A"/>
+                <a:srgbClr val="429D78"/>
               </a:solidFill>
             </a:ln>
           </c:spPr>
@@ -4856,1007 +5058,6 @@
           <c:val>
             <c:numRef>
               <c:f>'Chart Data'!$D$2:$D$162</c:f>
-              <c:numCache>
-                <c:formatCode>General</c:formatCode>
-                <c:ptCount val="161"/>
-                <c:pt idx="0">
-                  <c:v>100</c:v>
-                </c:pt>
-                <c:pt idx="1">
-                  <c:v>100</c:v>
-                </c:pt>
-                <c:pt idx="2">
-                  <c:v>100</c:v>
-                </c:pt>
-                <c:pt idx="3">
-                  <c:v>100</c:v>
-                </c:pt>
-                <c:pt idx="4">
-                  <c:v>100</c:v>
-                </c:pt>
-                <c:pt idx="5">
-                  <c:v>100</c:v>
-                </c:pt>
-                <c:pt idx="6">
-                  <c:v>100</c:v>
-                </c:pt>
-                <c:pt idx="7">
-                  <c:v>99.84</c:v>
-                </c:pt>
-                <c:pt idx="8">
-                  <c:v>100.173423</c:v>
-                </c:pt>
-                <c:pt idx="9">
-                  <c:v>101.163264</c:v>
-                </c:pt>
-                <c:pt idx="10">
-                  <c:v>102.03792</c:v>
-                </c:pt>
-                <c:pt idx="11">
-                  <c:v>101.850488</c:v>
-                </c:pt>
-                <c:pt idx="12">
-                  <c:v>100.62883</c:v>
-                </c:pt>
-                <c:pt idx="13">
-                  <c:v>99.448629</c:v>
-                </c:pt>
-                <c:pt idx="14">
-                  <c:v>98.892442</c:v>
-                </c:pt>
-                <c:pt idx="15">
-                  <c:v>99.375701</c:v>
-                </c:pt>
-                <c:pt idx="16">
-                  <c:v>99.667707</c:v>
-                </c:pt>
-                <c:pt idx="17">
-                  <c:v>99.200836</c:v>
-                </c:pt>
-                <c:pt idx="18">
-                  <c:v>98.212307</c:v>
-                </c:pt>
-                <c:pt idx="19">
-                  <c:v>97.210043</c:v>
-                </c:pt>
-                <c:pt idx="20">
-                  <c:v>96.421372</c:v>
-                </c:pt>
-                <c:pt idx="21">
-                  <c:v>95.566839</c:v>
-                </c:pt>
-                <c:pt idx="22">
-                  <c:v>94.195296</c:v>
-                </c:pt>
-                <c:pt idx="23">
-                  <c:v>93.729724</c:v>
-                </c:pt>
-                <c:pt idx="24">
-                  <c:v>94.298515</c:v>
-                </c:pt>
-                <c:pt idx="25">
-                  <c:v>94.540717</c:v>
-                </c:pt>
-                <c:pt idx="26">
-                  <c:v>93.571335</c:v>
-                </c:pt>
-                <c:pt idx="27">
-                  <c:v>92.417127</c:v>
-                </c:pt>
-                <c:pt idx="28">
-                  <c:v>92.449091</c:v>
-                </c:pt>
-                <c:pt idx="29">
-                  <c:v>92.449091</c:v>
-                </c:pt>
-                <c:pt idx="30">
-                  <c:v>92.449091</c:v>
-                </c:pt>
-                <c:pt idx="31">
-                  <c:v>92.449091</c:v>
-                </c:pt>
-                <c:pt idx="32">
-                  <c:v>92.449091</c:v>
-                </c:pt>
-                <c:pt idx="33">
-                  <c:v>92.449091</c:v>
-                </c:pt>
-                <c:pt idx="34">
-                  <c:v>92.449091</c:v>
-                </c:pt>
-                <c:pt idx="35">
-                  <c:v>92.449091</c:v>
-                </c:pt>
-                <c:pt idx="36">
-                  <c:v>92.449091</c:v>
-                </c:pt>
-                <c:pt idx="37">
-                  <c:v>92.449091</c:v>
-                </c:pt>
-                <c:pt idx="38">
-                  <c:v>92.449091</c:v>
-                </c:pt>
-                <c:pt idx="39">
-                  <c:v>92.449091</c:v>
-                </c:pt>
-                <c:pt idx="40">
-                  <c:v>92.449091</c:v>
-                </c:pt>
-                <c:pt idx="41">
-                  <c:v>92.449091</c:v>
-                </c:pt>
-                <c:pt idx="42">
-                  <c:v>92.301173</c:v>
-                </c:pt>
-                <c:pt idx="43">
-                  <c:v>93.341315</c:v>
-                </c:pt>
-                <c:pt idx="44">
-                  <c:v>94.128588</c:v>
-                </c:pt>
-                <c:pt idx="45">
-                  <c:v>93.817074</c:v>
-                </c:pt>
-                <c:pt idx="46">
-                  <c:v>92.64951</c:v>
-                </c:pt>
-                <c:pt idx="47">
-                  <c:v>91.631448</c:v>
-                </c:pt>
-                <c:pt idx="48">
-                  <c:v>91.383935</c:v>
-                </c:pt>
-                <c:pt idx="49">
-                  <c:v>91.338751</c:v>
-                </c:pt>
-                <c:pt idx="50">
-                  <c:v>91.439272</c:v>
-                </c:pt>
-                <c:pt idx="51">
-                  <c:v>91.125671</c:v>
-                </c:pt>
-                <c:pt idx="52">
-                  <c:v>90.512075</c:v>
-                </c:pt>
-                <c:pt idx="53">
-                  <c:v>89.739621</c:v>
-                </c:pt>
-                <c:pt idx="54">
-                  <c:v>88.88928</c:v>
-                </c:pt>
-                <c:pt idx="55">
-                  <c:v>88.223371</c:v>
-                </c:pt>
-                <c:pt idx="56">
-                  <c:v>88.023112</c:v>
-                </c:pt>
-                <c:pt idx="57">
-                  <c:v>88.023112</c:v>
-                </c:pt>
-                <c:pt idx="58">
-                  <c:v>88.023112</c:v>
-                </c:pt>
-                <c:pt idx="59">
-                  <c:v>88.023112</c:v>
-                </c:pt>
-                <c:pt idx="60">
-                  <c:v>88.023112</c:v>
-                </c:pt>
-                <c:pt idx="61">
-                  <c:v>88.023112</c:v>
-                </c:pt>
-                <c:pt idx="62">
-                  <c:v>88.023112</c:v>
-                </c:pt>
-                <c:pt idx="63">
-                  <c:v>88.023112</c:v>
-                </c:pt>
-                <c:pt idx="64">
-                  <c:v>88.023112</c:v>
-                </c:pt>
-                <c:pt idx="65">
-                  <c:v>88.023112</c:v>
-                </c:pt>
-                <c:pt idx="66">
-                  <c:v>88.023112</c:v>
-                </c:pt>
-                <c:pt idx="67">
-                  <c:v>88.023112</c:v>
-                </c:pt>
-                <c:pt idx="68">
-                  <c:v>88.023112</c:v>
-                </c:pt>
-                <c:pt idx="69">
-                  <c:v>88.023112</c:v>
-                </c:pt>
-                <c:pt idx="70">
-                  <c:v>87.882275</c:v>
-                </c:pt>
-                <c:pt idx="71">
-                  <c:v>87.843085</c:v>
-                </c:pt>
-                <c:pt idx="72">
-                  <c:v>88.577993</c:v>
-                </c:pt>
-                <c:pt idx="73">
-                  <c:v>88.787202</c:v>
-                </c:pt>
-                <c:pt idx="74">
-                  <c:v>87.710428</c:v>
-                </c:pt>
-                <c:pt idx="75">
-                  <c:v>86.396535</c:v>
-                </c:pt>
-                <c:pt idx="76">
-                  <c:v>86.23947</c:v>
-                </c:pt>
-                <c:pt idx="77">
-                  <c:v>86.772066</c:v>
-                </c:pt>
-                <c:pt idx="78">
-                  <c:v>87.553539</c:v>
-                </c:pt>
-                <c:pt idx="79">
-                  <c:v>87.40308</c:v>
-                </c:pt>
-                <c:pt idx="80">
-                  <c:v>86.662765</c:v>
-                </c:pt>
-                <c:pt idx="81">
-                  <c:v>86.120328</c:v>
-                </c:pt>
-                <c:pt idx="82">
-                  <c:v>86.137644</c:v>
-                </c:pt>
-                <c:pt idx="83">
-                  <c:v>86.472731</c:v>
-                </c:pt>
-                <c:pt idx="84">
-                  <c:v>86.518888</c:v>
-                </c:pt>
-                <c:pt idx="85">
-                  <c:v>86.712993</c:v>
-                </c:pt>
-                <c:pt idx="86">
-                  <c:v>86.696815</c:v>
-                </c:pt>
-                <c:pt idx="87">
-                  <c:v>86.287609</c:v>
-                </c:pt>
-                <c:pt idx="88">
-                  <c:v>85.509781</c:v>
-                </c:pt>
-                <c:pt idx="89">
-                  <c:v>84.878538</c:v>
-                </c:pt>
-                <c:pt idx="90">
-                  <c:v>84.984317</c:v>
-                </c:pt>
-                <c:pt idx="91">
-                  <c:v>85.435579</c:v>
-                </c:pt>
-                <c:pt idx="92">
-                  <c:v>85.872904</c:v>
-                </c:pt>
-                <c:pt idx="93">
-                  <c:v>85.357913</c:v>
-                </c:pt>
-                <c:pt idx="94">
-                  <c:v>84.224357</c:v>
-                </c:pt>
-                <c:pt idx="95">
-                  <c:v>83.426278</c:v>
-                </c:pt>
-                <c:pt idx="96">
-                  <c:v>83.455683</c:v>
-                </c:pt>
-                <c:pt idx="97">
-                  <c:v>83.933425</c:v>
-                </c:pt>
-                <c:pt idx="98">
-                  <c:v>83.938145</c:v>
-                </c:pt>
-                <c:pt idx="99">
-                  <c:v>82.931084</c:v>
-                </c:pt>
-                <c:pt idx="100">
-                  <c:v>82.619323</c:v>
-                </c:pt>
-                <c:pt idx="101">
-                  <c:v>82.926313</c:v>
-                </c:pt>
-                <c:pt idx="102">
-                  <c:v>82.73688</c:v>
-                </c:pt>
-                <c:pt idx="103">
-                  <c:v>81.693887</c:v>
-                </c:pt>
-                <c:pt idx="104">
-                  <c:v>80.865399</c:v>
-                </c:pt>
-                <c:pt idx="105">
-                  <c:v>80.869003</c:v>
-                </c:pt>
-                <c:pt idx="106">
-                  <c:v>81.591371</c:v>
-                </c:pt>
-                <c:pt idx="107">
-                  <c:v>81.4568</c:v>
-                </c:pt>
-                <c:pt idx="108">
-                  <c:v>80.403011</c:v>
-                </c:pt>
-                <c:pt idx="109">
-                  <c:v>79.805207</c:v>
-                </c:pt>
-                <c:pt idx="110">
-                  <c:v>80.533457</c:v>
-                </c:pt>
-                <c:pt idx="111">
-                  <c:v>81.791134</c:v>
-                </c:pt>
-                <c:pt idx="112">
-                  <c:v>81.9516</c:v>
-                </c:pt>
-                <c:pt idx="113">
-                  <c:v>82.163948</c:v>
-                </c:pt>
-                <c:pt idx="114">
-                  <c:v>81.994832</c:v>
-                </c:pt>
-                <c:pt idx="115">
-                  <c:v>81.948969</c:v>
-                </c:pt>
-                <c:pt idx="116">
-                  <c:v>82.174126</c:v>
-                </c:pt>
-                <c:pt idx="117">
-                  <c:v>82.552356</c:v>
-                </c:pt>
-                <c:pt idx="118">
-                  <c:v>83.067729</c:v>
-                </c:pt>
-                <c:pt idx="119">
-                  <c:v>83.406864</c:v>
-                </c:pt>
-                <c:pt idx="120">
-                  <c:v>83.736221</c:v>
-                </c:pt>
-                <c:pt idx="121">
-                  <c:v>83.374097</c:v>
-                </c:pt>
-                <c:pt idx="122">
-                  <c:v>82.449855</c:v>
-                </c:pt>
-                <c:pt idx="123">
-                  <c:v>81.734147</c:v>
-                </c:pt>
-                <c:pt idx="124">
-                  <c:v>81.826936</c:v>
-                </c:pt>
-                <c:pt idx="125">
-                  <c:v>82.42115</c:v>
-                </c:pt>
-                <c:pt idx="126">
-                  <c:v>82.319362</c:v>
-                </c:pt>
-                <c:pt idx="127">
-                  <c:v>81.168203</c:v>
-                </c:pt>
-                <c:pt idx="128">
-                  <c:v>79.845542</c:v>
-                </c:pt>
-                <c:pt idx="129">
-                  <c:v>79.503206</c:v>
-                </c:pt>
-                <c:pt idx="130">
-                  <c:v>79.795992</c:v>
-                </c:pt>
-                <c:pt idx="131">
-                  <c:v>79.526716</c:v>
-                </c:pt>
-                <c:pt idx="132">
-                  <c:v>78.496227</c:v>
-                </c:pt>
-                <c:pt idx="133">
-                  <c:v>77.498519</c:v>
-                </c:pt>
-                <c:pt idx="134">
-                  <c:v>77.659513</c:v>
-                </c:pt>
-                <c:pt idx="135">
-                  <c:v>78.03747</c:v>
-                </c:pt>
-                <c:pt idx="136">
-                  <c:v>77.639705</c:v>
-                </c:pt>
-                <c:pt idx="137">
-                  <c:v>76.802401</c:v>
-                </c:pt>
-                <c:pt idx="138">
-                  <c:v>76.778055</c:v>
-                </c:pt>
-                <c:pt idx="139">
-                  <c:v>77.887433</c:v>
-                </c:pt>
-                <c:pt idx="140">
-                  <c:v>78.851019</c:v>
-                </c:pt>
-                <c:pt idx="141">
-                  <c:v>78.851019</c:v>
-                </c:pt>
-                <c:pt idx="142">
-                  <c:v>78.851019</c:v>
-                </c:pt>
-                <c:pt idx="143">
-                  <c:v>78.851019</c:v>
-                </c:pt>
-                <c:pt idx="144">
-                  <c:v>78.851019</c:v>
-                </c:pt>
-                <c:pt idx="145">
-                  <c:v>78.851019</c:v>
-                </c:pt>
-                <c:pt idx="146">
-                  <c:v>78.851019</c:v>
-                </c:pt>
-                <c:pt idx="147">
-                  <c:v>78.851019</c:v>
-                </c:pt>
-                <c:pt idx="148">
-                  <c:v>78.851019</c:v>
-                </c:pt>
-                <c:pt idx="149">
-                  <c:v>78.851019</c:v>
-                </c:pt>
-                <c:pt idx="150">
-                  <c:v>78.851019</c:v>
-                </c:pt>
-                <c:pt idx="151">
-                  <c:v>78.851019</c:v>
-                </c:pt>
-                <c:pt idx="152">
-                  <c:v>78.851019</c:v>
-                </c:pt>
-                <c:pt idx="153">
-                  <c:v>78.851019</c:v>
-                </c:pt>
-                <c:pt idx="154">
-                  <c:v>78.724858</c:v>
-                </c:pt>
-                <c:pt idx="155">
-                  <c:v>78.251799</c:v>
-                </c:pt>
-                <c:pt idx="156">
-                  <c:v>77.253574</c:v>
-                </c:pt>
-                <c:pt idx="157">
-                  <c:v>76.603771</c:v>
-                </c:pt>
-                <c:pt idx="158">
-                  <c:v>76.762637</c:v>
-                </c:pt>
-                <c:pt idx="159">
-                  <c:v>77.299881</c:v>
-                </c:pt>
-                <c:pt idx="160">
-                  <c:v>77.40604</c:v>
-                </c:pt>
-              </c:numCache>
-            </c:numRef>
-          </c:val>
-        </c:ser>
-        <c:ser>
-          <c:idx val="2"/>
-          <c:order val="2"/>
-          <c:tx>
-            <c:v>Volatility Target</c:v>
-          </c:tx>
-          <c:spPr>
-            <a:ln xmlns:a="http://schemas.openxmlformats.org/drawingml/2006/main" w="28575">
-              <a:solidFill>
-                <a:srgbClr val="429D78"/>
-              </a:solidFill>
-            </a:ln>
-          </c:spPr>
-          <c:marker>
-            <c:symbol val="none"/>
-          </c:marker>
-          <c:cat>
-            <c:numRef>
-              <c:f>'Chart Data'!$E$2:$E$162</c:f>
-              <c:numCache>
-                <c:formatCode>General</c:formatCode>
-                <c:ptCount val="161"/>
-                <c:pt idx="0">
-                  <c:v>20</c:v>
-                </c:pt>
-                <c:pt idx="1">
-                  <c:v>21</c:v>
-                </c:pt>
-                <c:pt idx="2">
-                  <c:v>22</c:v>
-                </c:pt>
-                <c:pt idx="3">
-                  <c:v>23</c:v>
-                </c:pt>
-                <c:pt idx="4">
-                  <c:v>24</c:v>
-                </c:pt>
-                <c:pt idx="5">
-                  <c:v>25</c:v>
-                </c:pt>
-                <c:pt idx="6">
-                  <c:v>26</c:v>
-                </c:pt>
-                <c:pt idx="7">
-                  <c:v>27</c:v>
-                </c:pt>
-                <c:pt idx="8">
-                  <c:v>28</c:v>
-                </c:pt>
-                <c:pt idx="9">
-                  <c:v>29</c:v>
-                </c:pt>
-                <c:pt idx="10">
-                  <c:v>30</c:v>
-                </c:pt>
-                <c:pt idx="11">
-                  <c:v>31</c:v>
-                </c:pt>
-                <c:pt idx="12">
-                  <c:v>32</c:v>
-                </c:pt>
-                <c:pt idx="13">
-                  <c:v>33</c:v>
-                </c:pt>
-                <c:pt idx="14">
-                  <c:v>34</c:v>
-                </c:pt>
-                <c:pt idx="15">
-                  <c:v>35</c:v>
-                </c:pt>
-                <c:pt idx="16">
-                  <c:v>36</c:v>
-                </c:pt>
-                <c:pt idx="17">
-                  <c:v>37</c:v>
-                </c:pt>
-                <c:pt idx="18">
-                  <c:v>38</c:v>
-                </c:pt>
-                <c:pt idx="19">
-                  <c:v>39</c:v>
-                </c:pt>
-                <c:pt idx="20">
-                  <c:v>40</c:v>
-                </c:pt>
-                <c:pt idx="21">
-                  <c:v>41</c:v>
-                </c:pt>
-                <c:pt idx="22">
-                  <c:v>42</c:v>
-                </c:pt>
-                <c:pt idx="23">
-                  <c:v>43</c:v>
-                </c:pt>
-                <c:pt idx="24">
-                  <c:v>44</c:v>
-                </c:pt>
-                <c:pt idx="25">
-                  <c:v>45</c:v>
-                </c:pt>
-                <c:pt idx="26">
-                  <c:v>46</c:v>
-                </c:pt>
-                <c:pt idx="27">
-                  <c:v>47</c:v>
-                </c:pt>
-                <c:pt idx="28">
-                  <c:v>48</c:v>
-                </c:pt>
-                <c:pt idx="29">
-                  <c:v>49</c:v>
-                </c:pt>
-                <c:pt idx="30">
-                  <c:v>50</c:v>
-                </c:pt>
-                <c:pt idx="31">
-                  <c:v>51</c:v>
-                </c:pt>
-                <c:pt idx="32">
-                  <c:v>52</c:v>
-                </c:pt>
-                <c:pt idx="33">
-                  <c:v>53</c:v>
-                </c:pt>
-                <c:pt idx="34">
-                  <c:v>54</c:v>
-                </c:pt>
-                <c:pt idx="35">
-                  <c:v>55</c:v>
-                </c:pt>
-                <c:pt idx="36">
-                  <c:v>56</c:v>
-                </c:pt>
-                <c:pt idx="37">
-                  <c:v>57</c:v>
-                </c:pt>
-                <c:pt idx="38">
-                  <c:v>58</c:v>
-                </c:pt>
-                <c:pt idx="39">
-                  <c:v>59</c:v>
-                </c:pt>
-                <c:pt idx="40">
-                  <c:v>60</c:v>
-                </c:pt>
-                <c:pt idx="41">
-                  <c:v>61</c:v>
-                </c:pt>
-                <c:pt idx="42">
-                  <c:v>62</c:v>
-                </c:pt>
-                <c:pt idx="43">
-                  <c:v>63</c:v>
-                </c:pt>
-                <c:pt idx="44">
-                  <c:v>64</c:v>
-                </c:pt>
-                <c:pt idx="45">
-                  <c:v>65</c:v>
-                </c:pt>
-                <c:pt idx="46">
-                  <c:v>66</c:v>
-                </c:pt>
-                <c:pt idx="47">
-                  <c:v>67</c:v>
-                </c:pt>
-                <c:pt idx="48">
-                  <c:v>68</c:v>
-                </c:pt>
-                <c:pt idx="49">
-                  <c:v>69</c:v>
-                </c:pt>
-                <c:pt idx="50">
-                  <c:v>70</c:v>
-                </c:pt>
-                <c:pt idx="51">
-                  <c:v>71</c:v>
-                </c:pt>
-                <c:pt idx="52">
-                  <c:v>72</c:v>
-                </c:pt>
-                <c:pt idx="53">
-                  <c:v>73</c:v>
-                </c:pt>
-                <c:pt idx="54">
-                  <c:v>74</c:v>
-                </c:pt>
-                <c:pt idx="55">
-                  <c:v>75</c:v>
-                </c:pt>
-                <c:pt idx="56">
-                  <c:v>76</c:v>
-                </c:pt>
-                <c:pt idx="57">
-                  <c:v>77</c:v>
-                </c:pt>
-                <c:pt idx="58">
-                  <c:v>78</c:v>
-                </c:pt>
-                <c:pt idx="59">
-                  <c:v>79</c:v>
-                </c:pt>
-                <c:pt idx="60">
-                  <c:v>80</c:v>
-                </c:pt>
-                <c:pt idx="61">
-                  <c:v>81</c:v>
-                </c:pt>
-                <c:pt idx="62">
-                  <c:v>82</c:v>
-                </c:pt>
-                <c:pt idx="63">
-                  <c:v>83</c:v>
-                </c:pt>
-                <c:pt idx="64">
-                  <c:v>84</c:v>
-                </c:pt>
-                <c:pt idx="65">
-                  <c:v>85</c:v>
-                </c:pt>
-                <c:pt idx="66">
-                  <c:v>86</c:v>
-                </c:pt>
-                <c:pt idx="67">
-                  <c:v>87</c:v>
-                </c:pt>
-                <c:pt idx="68">
-                  <c:v>88</c:v>
-                </c:pt>
-                <c:pt idx="69">
-                  <c:v>89</c:v>
-                </c:pt>
-                <c:pt idx="70">
-                  <c:v>90</c:v>
-                </c:pt>
-                <c:pt idx="71">
-                  <c:v>91</c:v>
-                </c:pt>
-                <c:pt idx="72">
-                  <c:v>92</c:v>
-                </c:pt>
-                <c:pt idx="73">
-                  <c:v>93</c:v>
-                </c:pt>
-                <c:pt idx="74">
-                  <c:v>94</c:v>
-                </c:pt>
-                <c:pt idx="75">
-                  <c:v>95</c:v>
-                </c:pt>
-                <c:pt idx="76">
-                  <c:v>96</c:v>
-                </c:pt>
-                <c:pt idx="77">
-                  <c:v>97</c:v>
-                </c:pt>
-                <c:pt idx="78">
-                  <c:v>98</c:v>
-                </c:pt>
-                <c:pt idx="79">
-                  <c:v>99</c:v>
-                </c:pt>
-                <c:pt idx="80">
-                  <c:v>100</c:v>
-                </c:pt>
-                <c:pt idx="81">
-                  <c:v>101</c:v>
-                </c:pt>
-                <c:pt idx="82">
-                  <c:v>102</c:v>
-                </c:pt>
-                <c:pt idx="83">
-                  <c:v>103</c:v>
-                </c:pt>
-                <c:pt idx="84">
-                  <c:v>104</c:v>
-                </c:pt>
-                <c:pt idx="85">
-                  <c:v>105</c:v>
-                </c:pt>
-                <c:pt idx="86">
-                  <c:v>106</c:v>
-                </c:pt>
-                <c:pt idx="87">
-                  <c:v>107</c:v>
-                </c:pt>
-                <c:pt idx="88">
-                  <c:v>108</c:v>
-                </c:pt>
-                <c:pt idx="89">
-                  <c:v>109</c:v>
-                </c:pt>
-                <c:pt idx="90">
-                  <c:v>110</c:v>
-                </c:pt>
-                <c:pt idx="91">
-                  <c:v>111</c:v>
-                </c:pt>
-                <c:pt idx="92">
-                  <c:v>112</c:v>
-                </c:pt>
-                <c:pt idx="93">
-                  <c:v>113</c:v>
-                </c:pt>
-                <c:pt idx="94">
-                  <c:v>114</c:v>
-                </c:pt>
-                <c:pt idx="95">
-                  <c:v>115</c:v>
-                </c:pt>
-                <c:pt idx="96">
-                  <c:v>116</c:v>
-                </c:pt>
-                <c:pt idx="97">
-                  <c:v>117</c:v>
-                </c:pt>
-                <c:pt idx="98">
-                  <c:v>118</c:v>
-                </c:pt>
-                <c:pt idx="99">
-                  <c:v>119</c:v>
-                </c:pt>
-                <c:pt idx="100">
-                  <c:v>120</c:v>
-                </c:pt>
-                <c:pt idx="101">
-                  <c:v>121</c:v>
-                </c:pt>
-                <c:pt idx="102">
-                  <c:v>122</c:v>
-                </c:pt>
-                <c:pt idx="103">
-                  <c:v>123</c:v>
-                </c:pt>
-                <c:pt idx="104">
-                  <c:v>124</c:v>
-                </c:pt>
-                <c:pt idx="105">
-                  <c:v>125</c:v>
-                </c:pt>
-                <c:pt idx="106">
-                  <c:v>126</c:v>
-                </c:pt>
-                <c:pt idx="107">
-                  <c:v>127</c:v>
-                </c:pt>
-                <c:pt idx="108">
-                  <c:v>128</c:v>
-                </c:pt>
-                <c:pt idx="109">
-                  <c:v>129</c:v>
-                </c:pt>
-                <c:pt idx="110">
-                  <c:v>130</c:v>
-                </c:pt>
-                <c:pt idx="111">
-                  <c:v>131</c:v>
-                </c:pt>
-                <c:pt idx="112">
-                  <c:v>132</c:v>
-                </c:pt>
-                <c:pt idx="113">
-                  <c:v>133</c:v>
-                </c:pt>
-                <c:pt idx="114">
-                  <c:v>134</c:v>
-                </c:pt>
-                <c:pt idx="115">
-                  <c:v>135</c:v>
-                </c:pt>
-                <c:pt idx="116">
-                  <c:v>136</c:v>
-                </c:pt>
-                <c:pt idx="117">
-                  <c:v>137</c:v>
-                </c:pt>
-                <c:pt idx="118">
-                  <c:v>138</c:v>
-                </c:pt>
-                <c:pt idx="119">
-                  <c:v>139</c:v>
-                </c:pt>
-                <c:pt idx="120">
-                  <c:v>140</c:v>
-                </c:pt>
-                <c:pt idx="121">
-                  <c:v>141</c:v>
-                </c:pt>
-                <c:pt idx="122">
-                  <c:v>142</c:v>
-                </c:pt>
-                <c:pt idx="123">
-                  <c:v>143</c:v>
-                </c:pt>
-                <c:pt idx="124">
-                  <c:v>144</c:v>
-                </c:pt>
-                <c:pt idx="125">
-                  <c:v>145</c:v>
-                </c:pt>
-                <c:pt idx="126">
-                  <c:v>146</c:v>
-                </c:pt>
-                <c:pt idx="127">
-                  <c:v>147</c:v>
-                </c:pt>
-                <c:pt idx="128">
-                  <c:v>148</c:v>
-                </c:pt>
-                <c:pt idx="129">
-                  <c:v>149</c:v>
-                </c:pt>
-                <c:pt idx="130">
-                  <c:v>150</c:v>
-                </c:pt>
-                <c:pt idx="131">
-                  <c:v>151</c:v>
-                </c:pt>
-                <c:pt idx="132">
-                  <c:v>152</c:v>
-                </c:pt>
-                <c:pt idx="133">
-                  <c:v>153</c:v>
-                </c:pt>
-                <c:pt idx="134">
-                  <c:v>154</c:v>
-                </c:pt>
-                <c:pt idx="135">
-                  <c:v>155</c:v>
-                </c:pt>
-                <c:pt idx="136">
-                  <c:v>156</c:v>
-                </c:pt>
-                <c:pt idx="137">
-                  <c:v>157</c:v>
-                </c:pt>
-                <c:pt idx="138">
-                  <c:v>158</c:v>
-                </c:pt>
-                <c:pt idx="139">
-                  <c:v>159</c:v>
-                </c:pt>
-                <c:pt idx="140">
-                  <c:v>160</c:v>
-                </c:pt>
-                <c:pt idx="141">
-                  <c:v>161</c:v>
-                </c:pt>
-                <c:pt idx="142">
-                  <c:v>162</c:v>
-                </c:pt>
-                <c:pt idx="143">
-                  <c:v>163</c:v>
-                </c:pt>
-                <c:pt idx="144">
-                  <c:v>164</c:v>
-                </c:pt>
-                <c:pt idx="145">
-                  <c:v>165</c:v>
-                </c:pt>
-                <c:pt idx="146">
-                  <c:v>166</c:v>
-                </c:pt>
-                <c:pt idx="147">
-                  <c:v>167</c:v>
-                </c:pt>
-                <c:pt idx="148">
-                  <c:v>168</c:v>
-                </c:pt>
-                <c:pt idx="149">
-                  <c:v>169</c:v>
-                </c:pt>
-                <c:pt idx="150">
-                  <c:v>170</c:v>
-                </c:pt>
-                <c:pt idx="151">
-                  <c:v>171</c:v>
-                </c:pt>
-                <c:pt idx="152">
-                  <c:v>172</c:v>
-                </c:pt>
-                <c:pt idx="153">
-                  <c:v>173</c:v>
-                </c:pt>
-                <c:pt idx="154">
-                  <c:v>174</c:v>
-                </c:pt>
-                <c:pt idx="155">
-                  <c:v>175</c:v>
-                </c:pt>
-                <c:pt idx="156">
-                  <c:v>176</c:v>
-                </c:pt>
-                <c:pt idx="157">
-                  <c:v>177</c:v>
-                </c:pt>
-                <c:pt idx="158">
-                  <c:v>178</c:v>
-                </c:pt>
-                <c:pt idx="159">
-                  <c:v>179</c:v>
-                </c:pt>
-                <c:pt idx="160">
-                  <c:v>180</c:v>
-                </c:pt>
-              </c:numCache>
-            </c:numRef>
-          </c:cat>
-          <c:val>
-            <c:numRef>
-              <c:f>'Chart Data'!$F$2:$F$162</c:f>
               <c:numCache>
                 <c:formatCode>General</c:formatCode>
                 <c:ptCount val="161"/>
@@ -6445,7 +5646,7 @@
         <c:scaling>
           <c:orientation val="minMax"/>
           <c:max val="105"/>
-          <c:min val="70"/>
+          <c:min val="90"/>
         </c:scaling>
         <c:delete val="0"/>
         <c:axPos val="l"/>
@@ -6470,7 +5671,7 @@
                     <a:ea typeface="Arial"/>
                     <a:cs typeface="Arial"/>
                   </a:rPr>
-                  <a:t>NAV index, start = 100</a:t>
+                  <a:t>NAV index</a:t>
                 </a:r>
               </a:p>
             </c:rich>
@@ -6529,7 +5730,7 @@
         <a:lstStyle xmlns:a="http://schemas.openxmlformats.org/drawingml/2006/main"/>
         <a:p xmlns:a="http://schemas.openxmlformats.org/drawingml/2006/main">
           <a:pPr>
-            <a:defRPr sz="1575">
+            <a:defRPr sz="1650">
               <a:latin typeface="Arial"/>
               <a:ea typeface="Arial"/>
               <a:cs typeface="Arial"/>
@@ -6567,10 +5768,10 @@
       </p:grpSpPr>
       <p:sp>
         <p:nvSpPr>
-          <p:cNvPr id="5" name="">
+          <p:cNvPr id="6" name="">
             <a:extLst xmlns:a="http://schemas.openxmlformats.org/drawingml/2006/main">
               <a:ext uri="{FF2B5EF4-FFF2-40B4-BE49-F238E27FC236}">
-                <a16:creationId xmlns:a16="http://schemas.microsoft.com/office/drawing/2014/main" id="{48E330AF-BEE5-43A0-A4A8-162E73A9DF3A}"/>
+                <a16:creationId xmlns:a16="http://schemas.microsoft.com/office/drawing/2014/main" id="{0F89C895-799E-42B9-8FBA-D458452B34B2}"/>
               </a:ext>
             </a:extLst>
           </p:cNvPr>
@@ -6581,8 +5782,8 @@
         </p:nvSpPr>
         <p:spPr>
           <a:xfrm xmlns:a="http://schemas.openxmlformats.org/drawingml/2006/main">
-            <a:off x="609600" y="457200"/>
-            <a:ext cx="10972800" cy="933450"/>
+            <a:off x="552450" y="333375"/>
+            <a:ext cx="11087100" cy="838200"/>
           </a:xfrm>
           <a:prstGeom xmlns:a="http://schemas.openxmlformats.org/drawingml/2006/main" prst="rect">
             <a:avLst/>
@@ -6596,9 +5797,9 @@
           <a:bodyPr xmlns:a="http://schemas.openxmlformats.org/drawingml/2006/main"/>
           <a:lstStyle xmlns:a="http://schemas.openxmlformats.org/drawingml/2006/main">
             <a:defPPr>
-              <a:defRPr sz="3300" b="1">
-                <a:solidFill>
-                  <a:srgbClr val="123442"/>
+              <a:defRPr sz="3150" b="1">
+                <a:solidFill>
+                  <a:srgbClr val="173F50"/>
                 </a:solidFill>
                 <a:latin typeface="Arial"/>
                 <a:ea typeface="Arial"/>
@@ -6608,9 +5809,9 @@
           </a:lstStyle>
           <a:p xmlns:a="http://schemas.openxmlformats.org/drawingml/2006/main">
             <a:pPr>
-              <a:defRPr sz="3300" b="1">
-                <a:solidFill>
-                  <a:srgbClr val="123442"/>
+              <a:defRPr sz="3150" b="1">
+                <a:solidFill>
+                  <a:srgbClr val="173F50"/>
                 </a:solidFill>
                 <a:latin typeface="Arial"/>
                 <a:ea typeface="Arial"/>
@@ -6618,9 +5819,9 @@
               </a:defRPr>
             </a:pPr>
             <a:r>
-              <a:rPr sz="3300" b="1">
-                <a:solidFill>
-                  <a:srgbClr val="123442"/>
+              <a:rPr sz="3150" b="1">
+                <a:solidFill>
+                  <a:srgbClr val="173F50"/>
                 </a:solidFill>
                 <a:latin typeface="Arial"/>
                 <a:ea typeface="Arial"/>
@@ -6636,7 +5837,7 @@
           <p:cNvPr id="2" name="">
             <a:extLst xmlns:a="http://schemas.openxmlformats.org/drawingml/2006/main">
               <a:ext uri="{FF2B5EF4-FFF2-40B4-BE49-F238E27FC236}">
-                <a16:creationId xmlns:a16="http://schemas.microsoft.com/office/drawing/2014/main" id="{6EE2B03A-976C-43F7-B403-F36690A6C63B}"/>
+                <a16:creationId xmlns:a16="http://schemas.microsoft.com/office/drawing/2014/main" id="{C9C24825-3A93-4695-B5B3-A0525397E07D}"/>
               </a:ext>
             </a:extLst>
           </p:cNvPr>
@@ -6647,8 +5848,8 @@
         </p:nvSpPr>
         <p:spPr>
           <a:xfrm xmlns:a="http://schemas.openxmlformats.org/drawingml/2006/main">
-            <a:off x="609600" y="1952625"/>
-            <a:ext cx="10477500" cy="1428750"/>
+            <a:off x="552450" y="6477000"/>
+            <a:ext cx="11087100" cy="266700"/>
           </a:xfrm>
           <a:prstGeom xmlns:a="http://schemas.openxmlformats.org/drawingml/2006/main" prst="rect">
             <a:avLst/>
@@ -6662,9 +5863,9 @@
           <a:bodyPr xmlns:a="http://schemas.openxmlformats.org/drawingml/2006/main"/>
           <a:lstStyle xmlns:a="http://schemas.openxmlformats.org/drawingml/2006/main">
             <a:defPPr>
-              <a:defRPr sz="4200" b="1">
-                <a:solidFill>
-                  <a:srgbClr val="123442"/>
+              <a:defRPr sz="1275" b="0">
+                <a:solidFill>
+                  <a:srgbClr val="173F50"/>
                 </a:solidFill>
                 <a:latin typeface="Arial"/>
                 <a:ea typeface="Arial"/>
@@ -6674,9 +5875,9 @@
           </a:lstStyle>
           <a:p xmlns:a="http://schemas.openxmlformats.org/drawingml/2006/main">
             <a:pPr>
-              <a:defRPr sz="4200" b="1">
-                <a:solidFill>
-                  <a:srgbClr val="123442"/>
+              <a:defRPr sz="1275" b="0">
+                <a:solidFill>
+                  <a:srgbClr val="173F50"/>
                 </a:solidFill>
                 <a:latin typeface="Arial"/>
                 <a:ea typeface="Arial"/>
@@ -6684,38 +5885,15 @@
               </a:defRPr>
             </a:pPr>
             <a:r>
-              <a:rPr sz="4200" b="1">
-                <a:solidFill>
-                  <a:srgbClr val="123442"/>
+              <a:rPr sz="1275" b="0">
+                <a:solidFill>
+                  <a:srgbClr val="173F50"/>
                 </a:solidFill>
                 <a:latin typeface="Arial"/>
                 <a:ea typeface="Arial"/>
                 <a:cs typeface="Arial"/>
               </a:rPr>
-              <a:t>Decentralized Quantitative</a:t>
-            </a:r>
-          </a:p>
-          <a:p xmlns:a="http://schemas.openxmlformats.org/drawingml/2006/main">
-            <a:pPr>
-              <a:defRPr sz="4200" b="1">
-                <a:solidFill>
-                  <a:srgbClr val="123442"/>
-                </a:solidFill>
-                <a:latin typeface="Arial"/>
-                <a:ea typeface="Arial"/>
-                <a:cs typeface="Arial"/>
-              </a:defRPr>
-            </a:pPr>
-            <a:r>
-              <a:rPr sz="4200" b="1">
-                <a:solidFill>
-                  <a:srgbClr val="123442"/>
-                </a:solidFill>
-                <a:latin typeface="Arial"/>
-                <a:ea typeface="Arial"/>
-                <a:cs typeface="Arial"/>
-              </a:rPr>
-              <a:t>Portfolio Management</a:t>
+              <a:t>AlphaVault  /  Du zhuotong  /  1 of 12</a:t>
             </a:r>
           </a:p>
         </p:txBody>
@@ -6725,7 +5903,7 @@
           <p:cNvPr id="3" name="">
             <a:extLst xmlns:a="http://schemas.openxmlformats.org/drawingml/2006/main">
               <a:ext uri="{FF2B5EF4-FFF2-40B4-BE49-F238E27FC236}">
-                <a16:creationId xmlns:a16="http://schemas.microsoft.com/office/drawing/2014/main" id="{7CEC4142-11DC-4B02-9EE3-9367F5C98E20}"/>
+                <a16:creationId xmlns:a16="http://schemas.microsoft.com/office/drawing/2014/main" id="{D1765612-B461-4C8D-AD4A-6D7545318FE4}"/>
               </a:ext>
             </a:extLst>
           </p:cNvPr>
@@ -6736,8 +5914,97 @@
         </p:nvSpPr>
         <p:spPr>
           <a:xfrm xmlns:a="http://schemas.openxmlformats.org/drawingml/2006/main">
-            <a:off x="609600" y="3771900"/>
-            <a:ext cx="10477500" cy="619125"/>
+            <a:off x="552450" y="1905000"/>
+            <a:ext cx="11087100" cy="1428750"/>
+          </a:xfrm>
+          <a:prstGeom xmlns:a="http://schemas.openxmlformats.org/drawingml/2006/main" prst="rect">
+            <a:avLst/>
+          </a:prstGeom>
+          <a:noFill xmlns:a="http://schemas.openxmlformats.org/drawingml/2006/main"/>
+          <a:ln xmlns:a="http://schemas.openxmlformats.org/drawingml/2006/main" w="0">
+            <a:noFill/>
+          </a:ln>
+        </p:spPr>
+        <p:txBody>
+          <a:bodyPr xmlns:a="http://schemas.openxmlformats.org/drawingml/2006/main"/>
+          <a:lstStyle xmlns:a="http://schemas.openxmlformats.org/drawingml/2006/main">
+            <a:defPPr>
+              <a:defRPr sz="4125" b="1">
+                <a:solidFill>
+                  <a:srgbClr val="173F50"/>
+                </a:solidFill>
+                <a:latin typeface="Arial"/>
+                <a:ea typeface="Arial"/>
+                <a:cs typeface="Arial"/>
+              </a:defRPr>
+            </a:defPPr>
+          </a:lstStyle>
+          <a:p xmlns:a="http://schemas.openxmlformats.org/drawingml/2006/main">
+            <a:pPr>
+              <a:defRPr sz="4125" b="1">
+                <a:solidFill>
+                  <a:srgbClr val="173F50"/>
+                </a:solidFill>
+                <a:latin typeface="Arial"/>
+                <a:ea typeface="Arial"/>
+                <a:cs typeface="Arial"/>
+              </a:defRPr>
+            </a:pPr>
+            <a:r>
+              <a:rPr sz="4125" b="1">
+                <a:solidFill>
+                  <a:srgbClr val="173F50"/>
+                </a:solidFill>
+                <a:latin typeface="Arial"/>
+                <a:ea typeface="Arial"/>
+                <a:cs typeface="Arial"/>
+              </a:rPr>
+              <a:t>Decentralized Quantitative</a:t>
+            </a:r>
+          </a:p>
+          <a:p xmlns:a="http://schemas.openxmlformats.org/drawingml/2006/main">
+            <a:pPr>
+              <a:defRPr sz="4125" b="1">
+                <a:solidFill>
+                  <a:srgbClr val="173F50"/>
+                </a:solidFill>
+                <a:latin typeface="Arial"/>
+                <a:ea typeface="Arial"/>
+                <a:cs typeface="Arial"/>
+              </a:defRPr>
+            </a:pPr>
+            <a:r>
+              <a:rPr sz="4125" b="1">
+                <a:solidFill>
+                  <a:srgbClr val="173F50"/>
+                </a:solidFill>
+                <a:latin typeface="Arial"/>
+                <a:ea typeface="Arial"/>
+                <a:cs typeface="Arial"/>
+              </a:rPr>
+              <a:t>Portfolio Management</a:t>
+            </a:r>
+          </a:p>
+        </p:txBody>
+      </p:sp>
+      <p:sp>
+        <p:nvSpPr>
+          <p:cNvPr id="4" name="">
+            <a:extLst xmlns:a="http://schemas.openxmlformats.org/drawingml/2006/main">
+              <a:ext uri="{FF2B5EF4-FFF2-40B4-BE49-F238E27FC236}">
+                <a16:creationId xmlns:a16="http://schemas.microsoft.com/office/drawing/2014/main" id="{2AFB83D0-5AD4-4904-9283-7C7024274AF2}"/>
+              </a:ext>
+            </a:extLst>
+          </p:cNvPr>
+          <p:cNvSpPr>
+            <a:spLocks xmlns:a="http://schemas.openxmlformats.org/drawingml/2006/main" noGrp="1"/>
+          </p:cNvSpPr>
+          <p:nvPr/>
+        </p:nvSpPr>
+        <p:spPr>
+          <a:xfrm xmlns:a="http://schemas.openxmlformats.org/drawingml/2006/main">
+            <a:off x="552450" y="3810000"/>
+            <a:ext cx="11087100" cy="666750"/>
           </a:xfrm>
           <a:prstGeom xmlns:a="http://schemas.openxmlformats.org/drawingml/2006/main" prst="rect">
             <a:avLst/>
@@ -6788,10 +6055,10 @@
       </p:sp>
       <p:sp>
         <p:nvSpPr>
-          <p:cNvPr id="4" name="">
+          <p:cNvPr id="5" name="">
             <a:extLst xmlns:a="http://schemas.openxmlformats.org/drawingml/2006/main">
               <a:ext uri="{FF2B5EF4-FFF2-40B4-BE49-F238E27FC236}">
-                <a16:creationId xmlns:a16="http://schemas.microsoft.com/office/drawing/2014/main" id="{B9C75D9A-FBB7-46B1-91A9-845FD5F3AD70}"/>
+                <a16:creationId xmlns:a16="http://schemas.microsoft.com/office/drawing/2014/main" id="{BB8AADA0-606A-4765-9AB4-E5679D657902}"/>
               </a:ext>
             </a:extLst>
           </p:cNvPr>
@@ -6802,8 +6069,8 @@
         </p:nvSpPr>
         <p:spPr>
           <a:xfrm xmlns:a="http://schemas.openxmlformats.org/drawingml/2006/main">
-            <a:off x="609600" y="5476875"/>
-            <a:ext cx="10477500" cy="857250"/>
+            <a:off x="552450" y="5191125"/>
+            <a:ext cx="11087100" cy="904875"/>
           </a:xfrm>
           <a:prstGeom xmlns:a="http://schemas.openxmlformats.org/drawingml/2006/main" prst="rect">
             <a:avLst/>
@@ -6817,9 +6084,9 @@
           <a:bodyPr xmlns:a="http://schemas.openxmlformats.org/drawingml/2006/main"/>
           <a:lstStyle xmlns:a="http://schemas.openxmlformats.org/drawingml/2006/main">
             <a:defPPr>
-              <a:defRPr sz="1875" b="0">
-                <a:solidFill>
-                  <a:srgbClr val="526873"/>
+              <a:defRPr sz="2100" b="0">
+                <a:solidFill>
+                  <a:srgbClr val="173F50"/>
                 </a:solidFill>
                 <a:latin typeface="Arial"/>
                 <a:ea typeface="Arial"/>
@@ -6829,9 +6096,9 @@
           </a:lstStyle>
           <a:p xmlns:a="http://schemas.openxmlformats.org/drawingml/2006/main">
             <a:pPr>
-              <a:defRPr sz="1875" b="0">
-                <a:solidFill>
-                  <a:srgbClr val="526873"/>
+              <a:defRPr sz="2100" b="0">
+                <a:solidFill>
+                  <a:srgbClr val="173F50"/>
                 </a:solidFill>
                 <a:latin typeface="Arial"/>
                 <a:ea typeface="Arial"/>
@@ -6839,22 +6106,22 @@
               </a:defRPr>
             </a:pPr>
             <a:r>
-              <a:rPr sz="1875" b="0">
-                <a:solidFill>
-                  <a:srgbClr val="526873"/>
+              <a:rPr sz="2100" b="0">
+                <a:solidFill>
+                  <a:srgbClr val="173F50"/>
                 </a:solidFill>
                 <a:latin typeface="Arial"/>
                 <a:ea typeface="Arial"/>
                 <a:cs typeface="Arial"/>
               </a:rPr>
-              <a:t>Du zhuotong  |  SC6113 project demonstration</a:t>
+              <a:t>Du zhuotong  |  SC6113</a:t>
             </a:r>
           </a:p>
           <a:p xmlns:a="http://schemas.openxmlformats.org/drawingml/2006/main">
             <a:pPr>
-              <a:defRPr sz="1875" b="0">
-                <a:solidFill>
-                  <a:srgbClr val="526873"/>
+              <a:defRPr sz="2100" b="0">
+                <a:solidFill>
+                  <a:srgbClr val="173F50"/>
                 </a:solidFill>
                 <a:latin typeface="Arial"/>
                 <a:ea typeface="Arial"/>
@@ -6862,15 +6129,15 @@
               </a:defRPr>
             </a:pPr>
             <a:r>
-              <a:rPr sz="1875" b="0">
-                <a:solidFill>
-                  <a:srgbClr val="526873"/>
+              <a:rPr sz="2100" b="0">
+                <a:solidFill>
+                  <a:srgbClr val="173F50"/>
                 </a:solidFill>
                 <a:latin typeface="Arial"/>
                 <a:ea typeface="Arial"/>
                 <a:cs typeface="Arial"/>
               </a:rPr>
-              <a:t>18 October 2026</a:t>
+              <a:t>Ten-minute project demonstration</a:t>
             </a:r>
           </a:p>
         </p:txBody>
@@ -6878,7 +6145,7 @@
     </p:spTree>
     <p:extLst>
       <p:ext uri="{BB962C8B-B14F-4D97-AF65-F5344CB8AC3E}">
-        <p14:creationId xmlns:p14="http://schemas.microsoft.com/office/powerpoint/2010/main" val="1348722437"/>
+        <p14:creationId xmlns:p14="http://schemas.microsoft.com/office/powerpoint/2010/main" val="267604934"/>
       </p:ext>
     </p:extLst>
   </p:cSld>
@@ -6906,10 +6173,10 @@
       </p:grpSpPr>
       <p:sp>
         <p:nvSpPr>
-          <p:cNvPr id="6" name="">
+          <p:cNvPr id="4" name="">
             <a:extLst xmlns:a="http://schemas.openxmlformats.org/drawingml/2006/main">
               <a:ext uri="{FF2B5EF4-FFF2-40B4-BE49-F238E27FC236}">
-                <a16:creationId xmlns:a16="http://schemas.microsoft.com/office/drawing/2014/main" id="{6B18E0FE-11A9-4F45-B33A-1C8B992827D7}"/>
+                <a16:creationId xmlns:a16="http://schemas.microsoft.com/office/drawing/2014/main" id="{3296DC30-76B5-4E3B-A5BC-EAB2B245AB9B}"/>
               </a:ext>
             </a:extLst>
           </p:cNvPr>
@@ -6920,8 +6187,8 @@
         </p:nvSpPr>
         <p:spPr>
           <a:xfrm xmlns:a="http://schemas.openxmlformats.org/drawingml/2006/main">
-            <a:off x="609600" y="457200"/>
-            <a:ext cx="10972800" cy="933450"/>
+            <a:off x="552450" y="333375"/>
+            <a:ext cx="11087100" cy="838200"/>
           </a:xfrm>
           <a:prstGeom xmlns:a="http://schemas.openxmlformats.org/drawingml/2006/main" prst="rect">
             <a:avLst/>
@@ -6935,9 +6202,9 @@
           <a:bodyPr xmlns:a="http://schemas.openxmlformats.org/drawingml/2006/main"/>
           <a:lstStyle xmlns:a="http://schemas.openxmlformats.org/drawingml/2006/main">
             <a:defPPr>
-              <a:defRPr sz="3300" b="1">
-                <a:solidFill>
-                  <a:srgbClr val="123442"/>
+              <a:defRPr sz="3150" b="1">
+                <a:solidFill>
+                  <a:srgbClr val="173F50"/>
                 </a:solidFill>
                 <a:latin typeface="Arial"/>
                 <a:ea typeface="Arial"/>
@@ -6947,9 +6214,9 @@
           </a:lstStyle>
           <a:p xmlns:a="http://schemas.openxmlformats.org/drawingml/2006/main">
             <a:pPr>
-              <a:defRPr sz="3300" b="1">
-                <a:solidFill>
-                  <a:srgbClr val="123442"/>
+              <a:defRPr sz="3150" b="1">
+                <a:solidFill>
+                  <a:srgbClr val="173F50"/>
                 </a:solidFill>
                 <a:latin typeface="Arial"/>
                 <a:ea typeface="Arial"/>
@@ -6957,15 +6224,15 @@
               </a:defRPr>
             </a:pPr>
             <a:r>
-              <a:rPr sz="3300" b="1">
-                <a:solidFill>
-                  <a:srgbClr val="123442"/>
+              <a:rPr sz="3150" b="1">
+                <a:solidFill>
+                  <a:srgbClr val="173F50"/>
                 </a:solidFill>
                 <a:latin typeface="Arial"/>
                 <a:ea typeface="Arial"/>
                 <a:cs typeface="Arial"/>
               </a:rPr>
-              <a:t>Limitations and next development</a:t>
+              <a:t>Tests and persistent hosting</a:t>
             </a:r>
           </a:p>
         </p:txBody>
@@ -6975,7 +6242,7 @@
           <p:cNvPr id="2" name="">
             <a:extLst xmlns:a="http://schemas.openxmlformats.org/drawingml/2006/main">
               <a:ext uri="{FF2B5EF4-FFF2-40B4-BE49-F238E27FC236}">
-                <a16:creationId xmlns:a16="http://schemas.microsoft.com/office/drawing/2014/main" id="{95659D87-7D44-48AA-9814-AFB40CC85770}"/>
+                <a16:creationId xmlns:a16="http://schemas.microsoft.com/office/drawing/2014/main" id="{1D129130-16D7-4840-B038-AA1E93B43CBD}"/>
               </a:ext>
             </a:extLst>
           </p:cNvPr>
@@ -6986,8 +6253,1068 @@
         </p:nvSpPr>
         <p:spPr>
           <a:xfrm xmlns:a="http://schemas.openxmlformats.org/drawingml/2006/main">
-            <a:off x="609600" y="1762125"/>
-            <a:ext cx="10477500" cy="523875"/>
+            <a:off x="552450" y="6477000"/>
+            <a:ext cx="11087100" cy="266700"/>
+          </a:xfrm>
+          <a:prstGeom xmlns:a="http://schemas.openxmlformats.org/drawingml/2006/main" prst="rect">
+            <a:avLst/>
+          </a:prstGeom>
+          <a:noFill xmlns:a="http://schemas.openxmlformats.org/drawingml/2006/main"/>
+          <a:ln xmlns:a="http://schemas.openxmlformats.org/drawingml/2006/main" w="0">
+            <a:noFill/>
+          </a:ln>
+        </p:spPr>
+        <p:txBody>
+          <a:bodyPr xmlns:a="http://schemas.openxmlformats.org/drawingml/2006/main"/>
+          <a:lstStyle xmlns:a="http://schemas.openxmlformats.org/drawingml/2006/main">
+            <a:defPPr>
+              <a:defRPr sz="1275" b="0">
+                <a:solidFill>
+                  <a:srgbClr val="173F50"/>
+                </a:solidFill>
+                <a:latin typeface="Arial"/>
+                <a:ea typeface="Arial"/>
+                <a:cs typeface="Arial"/>
+              </a:defRPr>
+            </a:defPPr>
+          </a:lstStyle>
+          <a:p xmlns:a="http://schemas.openxmlformats.org/drawingml/2006/main">
+            <a:pPr>
+              <a:defRPr sz="1275" b="0">
+                <a:solidFill>
+                  <a:srgbClr val="173F50"/>
+                </a:solidFill>
+                <a:latin typeface="Arial"/>
+                <a:ea typeface="Arial"/>
+                <a:cs typeface="Arial"/>
+              </a:defRPr>
+            </a:pPr>
+            <a:r>
+              <a:rPr sz="1275" b="0">
+                <a:solidFill>
+                  <a:srgbClr val="173F50"/>
+                </a:solidFill>
+                <a:latin typeface="Arial"/>
+                <a:ea typeface="Arial"/>
+                <a:cs typeface="Arial"/>
+              </a:rPr>
+              <a:t>AlphaVault  /  Du zhuotong  /  10 of 12</a:t>
+            </a:r>
+          </a:p>
+        </p:txBody>
+      </p:sp>
+      <p:graphicFrame>
+        <p:nvGraphicFramePr>
+          <p:cNvPr id="3" name="">
+            <a:extLst xmlns:a="http://schemas.openxmlformats.org/drawingml/2006/main">
+              <a:ext uri="{FF2B5EF4-FFF2-40B4-BE49-F238E27FC236}">
+                <a16:creationId xmlns:a16="http://schemas.microsoft.com/office/drawing/2014/main" id="{874B7543-EA19-4640-BE72-476EF4FF0D34}"/>
+              </a:ext>
+            </a:extLst>
+          </p:cNvPr>
+          <p:cNvGraphicFramePr/>
+          <p:nvPr/>
+        </p:nvGraphicFramePr>
+        <p:xfrm>
+          <a:off xmlns:a="http://schemas.openxmlformats.org/drawingml/2006/main" x="552450" y="1619250"/>
+          <a:ext xmlns:a="http://schemas.openxmlformats.org/drawingml/2006/main" cx="11087100" cy="3810000"/>
+        </p:xfrm>
+        <a:graphic xmlns:a="http://schemas.openxmlformats.org/drawingml/2006/main">
+          <a:graphicData uri="http://schemas.openxmlformats.org/drawingml/2006/table">
+            <a:tbl>
+              <a:tblPr/>
+              <a:tblGrid>
+                <a:gridCol w="3714750"/>
+                <a:gridCol w="7372350"/>
+              </a:tblGrid>
+              <a:tr h="635000">
+                <a:tc>
+                  <a:txBody>
+                    <a:bodyPr/>
+                    <a:lstStyle/>
+                    <a:p>
+                      <a:r>
+                        <a:rPr sz="1800" b="1">
+                          <a:solidFill>
+                            <a:srgbClr val="FFFFFF"/>
+                          </a:solidFill>
+                          <a:latin typeface="Arial"/>
+                          <a:ea typeface="Arial"/>
+                          <a:cs typeface="Arial"/>
+                        </a:rPr>
+                        <a:t>Check</a:t>
+                      </a:r>
+                    </a:p>
+                  </a:txBody>
+                  <a:tcPr marL="91440" marR="91440" marT="45720" marB="45720">
+                    <a:solidFill>
+                      <a:srgbClr val="173F50"/>
+                    </a:solidFill>
+                  </a:tcPr>
+                </a:tc>
+                <a:tc>
+                  <a:txBody>
+                    <a:bodyPr/>
+                    <a:lstStyle/>
+                    <a:p>
+                      <a:r>
+                        <a:rPr sz="1800" b="1">
+                          <a:solidFill>
+                            <a:srgbClr val="FFFFFF"/>
+                          </a:solidFill>
+                          <a:latin typeface="Arial"/>
+                          <a:ea typeface="Arial"/>
+                          <a:cs typeface="Arial"/>
+                        </a:rPr>
+                        <a:t>Observed result</a:t>
+                      </a:r>
+                    </a:p>
+                  </a:txBody>
+                  <a:tcPr marL="91440" marR="91440" marT="45720" marB="45720">
+                    <a:solidFill>
+                      <a:srgbClr val="173F50"/>
+                    </a:solidFill>
+                  </a:tcPr>
+                </a:tc>
+              </a:tr>
+              <a:tr h="635000">
+                <a:tc>
+                  <a:txBody>
+                    <a:bodyPr/>
+                    <a:lstStyle/>
+                    <a:p>
+                      <a:r>
+                        <a:rPr sz="1800" b="0">
+                          <a:solidFill>
+                            <a:srgbClr val="173F50"/>
+                          </a:solidFill>
+                          <a:latin typeface="Arial"/>
+                          <a:ea typeface="Arial"/>
+                          <a:cs typeface="Arial"/>
+                        </a:rPr>
+                        <a:t>Latest full suite</a:t>
+                      </a:r>
+                    </a:p>
+                  </a:txBody>
+                  <a:tcPr marL="91440" marR="91440" marT="45720" marB="45720">
+                    <a:solidFill>
+                      <a:srgbClr val="FFFFFF"/>
+                    </a:solidFill>
+                  </a:tcPr>
+                </a:tc>
+                <a:tc>
+                  <a:txBody>
+                    <a:bodyPr/>
+                    <a:lstStyle/>
+                    <a:p>
+                      <a:r>
+                        <a:rPr sz="1800" b="0">
+                          <a:solidFill>
+                            <a:srgbClr val="173F50"/>
+                          </a:solidFill>
+                          <a:latin typeface="Arial"/>
+                          <a:ea typeface="Arial"/>
+                          <a:cs typeface="Arial"/>
+                        </a:rPr>
+                        <a:t>64 passed / 0 failed</a:t>
+                      </a:r>
+                    </a:p>
+                  </a:txBody>
+                  <a:tcPr marL="91440" marR="91440" marT="45720" marB="45720">
+                    <a:solidFill>
+                      <a:srgbClr val="FFFFFF"/>
+                    </a:solidFill>
+                  </a:tcPr>
+                </a:tc>
+              </a:tr>
+              <a:tr h="635000">
+                <a:tc>
+                  <a:txBody>
+                    <a:bodyPr/>
+                    <a:lstStyle/>
+                    <a:p>
+                      <a:r>
+                        <a:rPr sz="1800" b="0">
+                          <a:solidFill>
+                            <a:srgbClr val="173F50"/>
+                          </a:solidFill>
+                          <a:latin typeface="Arial"/>
+                          <a:ea typeface="Arial"/>
+                          <a:cs typeface="Arial"/>
+                        </a:rPr>
+                        <a:t>Public API acceptance</a:t>
+                      </a:r>
+                    </a:p>
+                  </a:txBody>
+                  <a:tcPr marL="91440" marR="91440" marT="45720" marB="45720">
+                    <a:solidFill>
+                      <a:srgbClr val="F1F5F6"/>
+                    </a:solidFill>
+                  </a:tcPr>
+                </a:tc>
+                <a:tc>
+                  <a:txBody>
+                    <a:bodyPr/>
+                    <a:lstStyle/>
+                    <a:p>
+                      <a:r>
+                        <a:rPr sz="1800" b="0">
+                          <a:solidFill>
+                            <a:srgbClr val="173F50"/>
+                          </a:solidFill>
+                          <a:latin typeface="Arial"/>
+                          <a:ea typeface="Arial"/>
+                          <a:cs typeface="Arial"/>
+                        </a:rPr>
+                        <a:t>Wallet mode / PostgreSQL / expected Sepolia vault</a:t>
+                      </a:r>
+                    </a:p>
+                  </a:txBody>
+                  <a:tcPr marL="91440" marR="91440" marT="45720" marB="45720">
+                    <a:solidFill>
+                      <a:srgbClr val="F1F5F6"/>
+                    </a:solidFill>
+                  </a:tcPr>
+                </a:tc>
+              </a:tr>
+              <a:tr h="635000">
+                <a:tc>
+                  <a:txBody>
+                    <a:bodyPr/>
+                    <a:lstStyle/>
+                    <a:p>
+                      <a:r>
+                        <a:rPr sz="1800" b="0">
+                          <a:solidFill>
+                            <a:srgbClr val="173F50"/>
+                          </a:solidFill>
+                          <a:latin typeface="Arial"/>
+                          <a:ea typeface="Arial"/>
+                          <a:cs typeface="Arial"/>
+                        </a:rPr>
+                        <a:t>Public transaction evidence</a:t>
+                      </a:r>
+                    </a:p>
+                  </a:txBody>
+                  <a:tcPr marL="91440" marR="91440" marT="45720" marB="45720">
+                    <a:solidFill>
+                      <a:srgbClr val="FFFFFF"/>
+                    </a:solidFill>
+                  </a:tcPr>
+                </a:tc>
+                <a:tc>
+                  <a:txBody>
+                    <a:bodyPr/>
+                    <a:lstStyle/>
+                    <a:p>
+                      <a:r>
+                        <a:rPr sz="1800" b="0">
+                          <a:solidFill>
+                            <a:srgbClr val="173F50"/>
+                          </a:solidFill>
+                          <a:latin typeface="Arial"/>
+                          <a:ea typeface="Arial"/>
+                          <a:cs typeface="Arial"/>
+                        </a:rPr>
+                        <a:t>12 successful receipts / 10 distinct types</a:t>
+                      </a:r>
+                    </a:p>
+                  </a:txBody>
+                  <a:tcPr marL="91440" marR="91440" marT="45720" marB="45720">
+                    <a:solidFill>
+                      <a:srgbClr val="FFFFFF"/>
+                    </a:solidFill>
+                  </a:tcPr>
+                </a:tc>
+              </a:tr>
+              <a:tr h="635000">
+                <a:tc>
+                  <a:txBody>
+                    <a:bodyPr/>
+                    <a:lstStyle/>
+                    <a:p>
+                      <a:r>
+                        <a:rPr sz="1800" b="0">
+                          <a:solidFill>
+                            <a:srgbClr val="173F50"/>
+                          </a:solidFill>
+                          <a:latin typeface="Arial"/>
+                          <a:ea typeface="Arial"/>
+                          <a:cs typeface="Arial"/>
+                        </a:rPr>
+                        <a:t>Earlier restart experiment</a:t>
+                      </a:r>
+                    </a:p>
+                  </a:txBody>
+                  <a:tcPr marL="91440" marR="91440" marT="45720" marB="45720">
+                    <a:solidFill>
+                      <a:srgbClr val="F1F5F6"/>
+                    </a:solidFill>
+                  </a:tcPr>
+                </a:tc>
+                <a:tc>
+                  <a:txBody>
+                    <a:bodyPr/>
+                    <a:lstStyle/>
+                    <a:p>
+                      <a:r>
+                        <a:rPr sz="1800" b="0">
+                          <a:solidFill>
+                            <a:srgbClr val="173F50"/>
+                          </a:solidFill>
+                          <a:latin typeface="Arial"/>
+                          <a:ea typeface="Arial"/>
+                          <a:cs typeface="Arial"/>
+                        </a:rPr>
+                        <a:t>Non-chain jobs sentinel retained</a:t>
+                      </a:r>
+                    </a:p>
+                  </a:txBody>
+                  <a:tcPr marL="91440" marR="91440" marT="45720" marB="45720">
+                    <a:solidFill>
+                      <a:srgbClr val="F1F5F6"/>
+                    </a:solidFill>
+                  </a:tcPr>
+                </a:tc>
+              </a:tr>
+              <a:tr h="635000">
+                <a:tc>
+                  <a:txBody>
+                    <a:bodyPr/>
+                    <a:lstStyle/>
+                    <a:p>
+                      <a:r>
+                        <a:rPr sz="1800" b="0">
+                          <a:solidFill>
+                            <a:srgbClr val="173F50"/>
+                          </a:solidFill>
+                          <a:latin typeface="Arial"/>
+                          <a:ea typeface="Arial"/>
+                          <a:cs typeface="Arial"/>
+                        </a:rPr>
+                        <a:t>Interpretation</a:t>
+                      </a:r>
+                    </a:p>
+                  </a:txBody>
+                  <a:tcPr marL="91440" marR="91440" marT="45720" marB="45720">
+                    <a:solidFill>
+                      <a:srgbClr val="FFFFFF"/>
+                    </a:solidFill>
+                  </a:tcPr>
+                </a:tc>
+                <a:tc>
+                  <a:txBody>
+                    <a:bodyPr/>
+                    <a:lstStyle/>
+                    <a:p>
+                      <a:r>
+                        <a:rPr sz="1800" b="0">
+                          <a:solidFill>
+                            <a:srgbClr val="173F50"/>
+                          </a:solidFill>
+                          <a:latin typeface="Arial"/>
+                          <a:ea typeface="Arial"/>
+                          <a:cs typeface="Arial"/>
+                        </a:rPr>
+                        <a:t>Specific tested scenarios; no uptime or audit guarantee</a:t>
+                      </a:r>
+                    </a:p>
+                  </a:txBody>
+                  <a:tcPr marL="91440" marR="91440" marT="45720" marB="45720">
+                    <a:solidFill>
+                      <a:srgbClr val="FFFFFF"/>
+                    </a:solidFill>
+                  </a:tcPr>
+                </a:tc>
+              </a:tr>
+            </a:tbl>
+          </a:graphicData>
+        </a:graphic>
+      </p:graphicFrame>
+    </p:spTree>
+    <p:extLst>
+      <p:ext uri="{BB962C8B-B14F-4D97-AF65-F5344CB8AC3E}">
+        <p14:creationId xmlns:p14="http://schemas.microsoft.com/office/powerpoint/2010/main" val="758618456"/>
+      </p:ext>
+    </p:extLst>
+  </p:cSld>
+</p:sld>
+</file>
+
+<file path=ppt/slides/slide11.xml><?xml version="1.0" encoding="utf-8"?>
+<p:sld xmlns:p="http://schemas.openxmlformats.org/presentationml/2006/main">
+  <p:cSld>
+    <p:bg>
+      <p:bgPr>
+        <a:solidFill xmlns:a="http://schemas.openxmlformats.org/drawingml/2006/main">
+          <a:srgbClr val="FFFFFF"/>
+        </a:solidFill>
+      </p:bgPr>
+    </p:bg>
+    <p:spTree>
+      <p:nvGrpSpPr>
+        <p:cNvPr id="1" name=""/>
+        <p:cNvGrpSpPr/>
+        <p:nvPr/>
+      </p:nvGrpSpPr>
+      <p:grpSpPr>
+        <a:xfrm xmlns:a="http://schemas.openxmlformats.org/drawingml/2006/main"/>
+      </p:grpSpPr>
+      <p:sp>
+        <p:nvSpPr>
+          <p:cNvPr id="5" name="">
+            <a:extLst xmlns:a="http://schemas.openxmlformats.org/drawingml/2006/main">
+              <a:ext uri="{FF2B5EF4-FFF2-40B4-BE49-F238E27FC236}">
+                <a16:creationId xmlns:a16="http://schemas.microsoft.com/office/drawing/2014/main" id="{2E840AAA-0B7A-4412-B640-C68006E0EA3E}"/>
+              </a:ext>
+            </a:extLst>
+          </p:cNvPr>
+          <p:cNvSpPr>
+            <a:spLocks xmlns:a="http://schemas.openxmlformats.org/drawingml/2006/main" noGrp="1"/>
+          </p:cNvSpPr>
+          <p:nvPr/>
+        </p:nvSpPr>
+        <p:spPr>
+          <a:xfrm xmlns:a="http://schemas.openxmlformats.org/drawingml/2006/main">
+            <a:off x="552450" y="333375"/>
+            <a:ext cx="11087100" cy="838200"/>
+          </a:xfrm>
+          <a:prstGeom xmlns:a="http://schemas.openxmlformats.org/drawingml/2006/main" prst="rect">
+            <a:avLst/>
+          </a:prstGeom>
+          <a:noFill xmlns:a="http://schemas.openxmlformats.org/drawingml/2006/main"/>
+          <a:ln xmlns:a="http://schemas.openxmlformats.org/drawingml/2006/main" w="0">
+            <a:noFill/>
+          </a:ln>
+        </p:spPr>
+        <p:txBody>
+          <a:bodyPr xmlns:a="http://schemas.openxmlformats.org/drawingml/2006/main"/>
+          <a:lstStyle xmlns:a="http://schemas.openxmlformats.org/drawingml/2006/main">
+            <a:defPPr>
+              <a:defRPr sz="3150" b="1">
+                <a:solidFill>
+                  <a:srgbClr val="173F50"/>
+                </a:solidFill>
+                <a:latin typeface="Arial"/>
+                <a:ea typeface="Arial"/>
+                <a:cs typeface="Arial"/>
+              </a:defRPr>
+            </a:defPPr>
+          </a:lstStyle>
+          <a:p xmlns:a="http://schemas.openxmlformats.org/drawingml/2006/main">
+            <a:pPr>
+              <a:defRPr sz="3150" b="1">
+                <a:solidFill>
+                  <a:srgbClr val="173F50"/>
+                </a:solidFill>
+                <a:latin typeface="Arial"/>
+                <a:ea typeface="Arial"/>
+                <a:cs typeface="Arial"/>
+              </a:defRPr>
+            </a:pPr>
+            <a:r>
+              <a:rPr sz="3150" b="1">
+                <a:solidFill>
+                  <a:srgbClr val="173F50"/>
+                </a:solidFill>
+                <a:latin typeface="Arial"/>
+                <a:ea typeface="Arial"/>
+                <a:cs typeface="Arial"/>
+              </a:rPr>
+              <a:t>Limits and contribution record</a:t>
+            </a:r>
+          </a:p>
+        </p:txBody>
+      </p:sp>
+      <p:sp>
+        <p:nvSpPr>
+          <p:cNvPr id="2" name="">
+            <a:extLst xmlns:a="http://schemas.openxmlformats.org/drawingml/2006/main">
+              <a:ext uri="{FF2B5EF4-FFF2-40B4-BE49-F238E27FC236}">
+                <a16:creationId xmlns:a16="http://schemas.microsoft.com/office/drawing/2014/main" id="{D1272EDF-4320-4D11-B895-FDF48833E5DB}"/>
+              </a:ext>
+            </a:extLst>
+          </p:cNvPr>
+          <p:cNvSpPr>
+            <a:spLocks xmlns:a="http://schemas.openxmlformats.org/drawingml/2006/main" noGrp="1"/>
+          </p:cNvSpPr>
+          <p:nvPr/>
+        </p:nvSpPr>
+        <p:spPr>
+          <a:xfrm xmlns:a="http://schemas.openxmlformats.org/drawingml/2006/main">
+            <a:off x="552450" y="6477000"/>
+            <a:ext cx="11087100" cy="266700"/>
+          </a:xfrm>
+          <a:prstGeom xmlns:a="http://schemas.openxmlformats.org/drawingml/2006/main" prst="rect">
+            <a:avLst/>
+          </a:prstGeom>
+          <a:noFill xmlns:a="http://schemas.openxmlformats.org/drawingml/2006/main"/>
+          <a:ln xmlns:a="http://schemas.openxmlformats.org/drawingml/2006/main" w="0">
+            <a:noFill/>
+          </a:ln>
+        </p:spPr>
+        <p:txBody>
+          <a:bodyPr xmlns:a="http://schemas.openxmlformats.org/drawingml/2006/main"/>
+          <a:lstStyle xmlns:a="http://schemas.openxmlformats.org/drawingml/2006/main">
+            <a:defPPr>
+              <a:defRPr sz="1275" b="0">
+                <a:solidFill>
+                  <a:srgbClr val="173F50"/>
+                </a:solidFill>
+                <a:latin typeface="Arial"/>
+                <a:ea typeface="Arial"/>
+                <a:cs typeface="Arial"/>
+              </a:defRPr>
+            </a:defPPr>
+          </a:lstStyle>
+          <a:p xmlns:a="http://schemas.openxmlformats.org/drawingml/2006/main">
+            <a:pPr>
+              <a:defRPr sz="1275" b="0">
+                <a:solidFill>
+                  <a:srgbClr val="173F50"/>
+                </a:solidFill>
+                <a:latin typeface="Arial"/>
+                <a:ea typeface="Arial"/>
+                <a:cs typeface="Arial"/>
+              </a:defRPr>
+            </a:pPr>
+            <a:r>
+              <a:rPr sz="1275" b="0">
+                <a:solidFill>
+                  <a:srgbClr val="173F50"/>
+                </a:solidFill>
+                <a:latin typeface="Arial"/>
+                <a:ea typeface="Arial"/>
+                <a:cs typeface="Arial"/>
+              </a:rPr>
+              <a:t>AlphaVault  /  Du zhuotong  /  11 of 12</a:t>
+            </a:r>
+          </a:p>
+        </p:txBody>
+      </p:sp>
+      <p:graphicFrame>
+        <p:nvGraphicFramePr>
+          <p:cNvPr id="3" name="">
+            <a:extLst xmlns:a="http://schemas.openxmlformats.org/drawingml/2006/main">
+              <a:ext uri="{FF2B5EF4-FFF2-40B4-BE49-F238E27FC236}">
+                <a16:creationId xmlns:a16="http://schemas.microsoft.com/office/drawing/2014/main" id="{082CC478-788C-4DCD-80D0-F9E54227402F}"/>
+              </a:ext>
+            </a:extLst>
+          </p:cNvPr>
+          <p:cNvGraphicFramePr/>
+          <p:nvPr/>
+        </p:nvGraphicFramePr>
+        <p:xfrm>
+          <a:off xmlns:a="http://schemas.openxmlformats.org/drawingml/2006/main" x="552450" y="1714500"/>
+          <a:ext xmlns:a="http://schemas.openxmlformats.org/drawingml/2006/main" cx="11087100" cy="3143250"/>
+        </p:xfrm>
+        <a:graphic xmlns:a="http://schemas.openxmlformats.org/drawingml/2006/main">
+          <a:graphicData uri="http://schemas.openxmlformats.org/drawingml/2006/table">
+            <a:tbl>
+              <a:tblPr/>
+              <a:tblGrid>
+                <a:gridCol w="5143500"/>
+                <a:gridCol w="5943600"/>
+              </a:tblGrid>
+              <a:tr h="628650">
+                <a:tc>
+                  <a:txBody>
+                    <a:bodyPr/>
+                    <a:lstStyle/>
+                    <a:p>
+                      <a:r>
+                        <a:rPr sz="1800" b="1">
+                          <a:solidFill>
+                            <a:srgbClr val="FFFFFF"/>
+                          </a:solidFill>
+                          <a:latin typeface="Arial"/>
+                          <a:ea typeface="Arial"/>
+                          <a:cs typeface="Arial"/>
+                        </a:rPr>
+                        <a:t>Current boundary</a:t>
+                      </a:r>
+                    </a:p>
+                  </a:txBody>
+                  <a:tcPr marL="91440" marR="91440" marT="45720" marB="45720">
+                    <a:solidFill>
+                      <a:srgbClr val="173F50"/>
+                    </a:solidFill>
+                  </a:tcPr>
+                </a:tc>
+                <a:tc>
+                  <a:txBody>
+                    <a:bodyPr/>
+                    <a:lstStyle/>
+                    <a:p>
+                      <a:r>
+                        <a:rPr sz="1800" b="1">
+                          <a:solidFill>
+                            <a:srgbClr val="FFFFFF"/>
+                          </a:solidFill>
+                          <a:latin typeface="Arial"/>
+                          <a:ea typeface="Arial"/>
+                          <a:cs typeface="Arial"/>
+                        </a:rPr>
+                        <a:t>Next engineering step</a:t>
+                      </a:r>
+                    </a:p>
+                  </a:txBody>
+                  <a:tcPr marL="91440" marR="91440" marT="45720" marB="45720">
+                    <a:solidFill>
+                      <a:srgbClr val="173F50"/>
+                    </a:solidFill>
+                  </a:tcPr>
+                </a:tc>
+              </a:tr>
+              <a:tr h="628650">
+                <a:tc>
+                  <a:txBody>
+                    <a:bodyPr/>
+                    <a:lstStyle/>
+                    <a:p>
+                      <a:r>
+                        <a:rPr sz="1800" b="0">
+                          <a:solidFill>
+                            <a:srgbClr val="173F50"/>
+                          </a:solidFill>
+                          <a:latin typeface="Arial"/>
+                          <a:ea typeface="Arial"/>
+                          <a:cs typeface="Arial"/>
+                        </a:rPr>
+                        <a:t>Manual prices and mock exchange</a:t>
+                      </a:r>
+                    </a:p>
+                  </a:txBody>
+                  <a:tcPr marL="91440" marR="91440" marT="45720" marB="45720">
+                    <a:solidFill>
+                      <a:srgbClr val="FFFFFF"/>
+                    </a:solidFill>
+                  </a:tcPr>
+                </a:tc>
+                <a:tc>
+                  <a:txBody>
+                    <a:bodyPr/>
+                    <a:lstStyle/>
+                    <a:p>
+                      <a:r>
+                        <a:rPr sz="1800" b="0">
+                          <a:solidFill>
+                            <a:srgbClr val="173F50"/>
+                          </a:solidFill>
+                          <a:latin typeface="Arial"/>
+                          <a:ea typeface="Arial"/>
+                          <a:cs typeface="Arial"/>
+                        </a:rPr>
+                        <a:t>Independent oracle and execution integration</a:t>
+                      </a:r>
+                    </a:p>
+                  </a:txBody>
+                  <a:tcPr marL="91440" marR="91440" marT="45720" marB="45720">
+                    <a:solidFill>
+                      <a:srgbClr val="FFFFFF"/>
+                    </a:solidFill>
+                  </a:tcPr>
+                </a:tc>
+              </a:tr>
+              <a:tr h="628650">
+                <a:tc>
+                  <a:txBody>
+                    <a:bodyPr/>
+                    <a:lstStyle/>
+                    <a:p>
+                      <a:r>
+                        <a:rPr sz="1800" b="0">
+                          <a:solidFill>
+                            <a:srgbClr val="173F50"/>
+                          </a:solidFill>
+                          <a:latin typeface="Arial"/>
+                          <a:ea typeface="Arial"/>
+                          <a:cs typeface="Arial"/>
+                        </a:rPr>
+                        <a:t>Synthetic fixture only</a:t>
+                      </a:r>
+                    </a:p>
+                  </a:txBody>
+                  <a:tcPr marL="91440" marR="91440" marT="45720" marB="45720">
+                    <a:solidFill>
+                      <a:srgbClr val="F1F5F6"/>
+                    </a:solidFill>
+                  </a:tcPr>
+                </a:tc>
+                <a:tc>
+                  <a:txBody>
+                    <a:bodyPr/>
+                    <a:lstStyle/>
+                    <a:p>
+                      <a:r>
+                        <a:rPr sz="1800" b="0">
+                          <a:solidFill>
+                            <a:srgbClr val="173F50"/>
+                          </a:solidFill>
+                          <a:latin typeface="Arial"/>
+                          <a:ea typeface="Arial"/>
+                          <a:cs typeface="Arial"/>
+                        </a:rPr>
+                        <a:t>Real out-of-sample data and realistic costs</a:t>
+                      </a:r>
+                    </a:p>
+                  </a:txBody>
+                  <a:tcPr marL="91440" marR="91440" marT="45720" marB="45720">
+                    <a:solidFill>
+                      <a:srgbClr val="F1F5F6"/>
+                    </a:solidFill>
+                  </a:tcPr>
+                </a:tc>
+              </a:tr>
+              <a:tr h="628650">
+                <a:tc>
+                  <a:txBody>
+                    <a:bodyPr/>
+                    <a:lstStyle/>
+                    <a:p>
+                      <a:r>
+                        <a:rPr sz="1800" b="0">
+                          <a:solidFill>
+                            <a:srgbClr val="173F50"/>
+                          </a:solidFill>
+                          <a:latin typeface="Arial"/>
+                          <a:ea typeface="Arial"/>
+                          <a:cs typeface="Arial"/>
+                        </a:rPr>
+                        <a:t>Central role administration</a:t>
+                      </a:r>
+                    </a:p>
+                  </a:txBody>
+                  <a:tcPr marL="91440" marR="91440" marT="45720" marB="45720">
+                    <a:solidFill>
+                      <a:srgbClr val="FFFFFF"/>
+                    </a:solidFill>
+                  </a:tcPr>
+                </a:tc>
+                <a:tc>
+                  <a:txBody>
+                    <a:bodyPr/>
+                    <a:lstStyle/>
+                    <a:p>
+                      <a:r>
+                        <a:rPr sz="1800" b="0">
+                          <a:solidFill>
+                            <a:srgbClr val="173F50"/>
+                          </a:solidFill>
+                          <a:latin typeface="Arial"/>
+                          <a:ea typeface="Arial"/>
+                          <a:cs typeface="Arial"/>
+                        </a:rPr>
+                        <a:t>Stronger governance and external review</a:t>
+                      </a:r>
+                    </a:p>
+                  </a:txBody>
+                  <a:tcPr marL="91440" marR="91440" marT="45720" marB="45720">
+                    <a:solidFill>
+                      <a:srgbClr val="FFFFFF"/>
+                    </a:solidFill>
+                  </a:tcPr>
+                </a:tc>
+              </a:tr>
+              <a:tr h="628650">
+                <a:tc>
+                  <a:txBody>
+                    <a:bodyPr/>
+                    <a:lstStyle/>
+                    <a:p>
+                      <a:r>
+                        <a:rPr sz="1800" b="0">
+                          <a:solidFill>
+                            <a:srgbClr val="173F50"/>
+                          </a:solidFill>
+                          <a:latin typeface="Arial"/>
+                          <a:ea typeface="Arial"/>
+                          <a:cs typeface="Arial"/>
+                        </a:rPr>
+                        <a:t>Unattended Keeper tested locally</a:t>
+                      </a:r>
+                    </a:p>
+                  </a:txBody>
+                  <a:tcPr marL="91440" marR="91440" marT="45720" marB="45720">
+                    <a:solidFill>
+                      <a:srgbClr val="F1F5F6"/>
+                    </a:solidFill>
+                  </a:tcPr>
+                </a:tc>
+                <a:tc>
+                  <a:txBody>
+                    <a:bodyPr/>
+                    <a:lstStyle/>
+                    <a:p>
+                      <a:r>
+                        <a:rPr sz="1800" b="0">
+                          <a:solidFill>
+                            <a:srgbClr val="173F50"/>
+                          </a:solidFill>
+                          <a:latin typeface="Arial"/>
+                          <a:ea typeface="Arial"/>
+                          <a:cs typeface="Arial"/>
+                        </a:rPr>
+                        <a:t>Reliable authorized operational deployment</a:t>
+                      </a:r>
+                    </a:p>
+                  </a:txBody>
+                  <a:tcPr marL="91440" marR="91440" marT="45720" marB="45720">
+                    <a:solidFill>
+                      <a:srgbClr val="F1F5F6"/>
+                    </a:solidFill>
+                  </a:tcPr>
+                </a:tc>
+              </a:tr>
+            </a:tbl>
+          </a:graphicData>
+        </a:graphic>
+      </p:graphicFrame>
+      <p:sp>
+        <p:nvSpPr>
+          <p:cNvPr id="4" name="">
+            <a:extLst xmlns:a="http://schemas.openxmlformats.org/drawingml/2006/main">
+              <a:ext uri="{FF2B5EF4-FFF2-40B4-BE49-F238E27FC236}">
+                <a16:creationId xmlns:a16="http://schemas.microsoft.com/office/drawing/2014/main" id="{6961A65D-9EC2-43B6-8692-64885945D8A9}"/>
+              </a:ext>
+            </a:extLst>
+          </p:cNvPr>
+          <p:cNvSpPr>
+            <a:spLocks xmlns:a="http://schemas.openxmlformats.org/drawingml/2006/main" noGrp="1"/>
+          </p:cNvSpPr>
+          <p:nvPr/>
+        </p:nvSpPr>
+        <p:spPr>
+          <a:xfrm xmlns:a="http://schemas.openxmlformats.org/drawingml/2006/main">
+            <a:off x="552450" y="5429250"/>
+            <a:ext cx="11087100" cy="666750"/>
+          </a:xfrm>
+          <a:prstGeom xmlns:a="http://schemas.openxmlformats.org/drawingml/2006/main" prst="rect">
+            <a:avLst/>
+          </a:prstGeom>
+          <a:noFill xmlns:a="http://schemas.openxmlformats.org/drawingml/2006/main"/>
+          <a:ln xmlns:a="http://schemas.openxmlformats.org/drawingml/2006/main" w="0">
+            <a:noFill/>
+          </a:ln>
+        </p:spPr>
+        <p:txBody>
+          <a:bodyPr xmlns:a="http://schemas.openxmlformats.org/drawingml/2006/main"/>
+          <a:lstStyle xmlns:a="http://schemas.openxmlformats.org/drawingml/2006/main">
+            <a:defPPr>
+              <a:defRPr sz="2100" b="0">
+                <a:solidFill>
+                  <a:srgbClr val="173F50"/>
+                </a:solidFill>
+                <a:latin typeface="Arial"/>
+                <a:ea typeface="Arial"/>
+                <a:cs typeface="Arial"/>
+              </a:defRPr>
+            </a:defPPr>
+          </a:lstStyle>
+          <a:p xmlns:a="http://schemas.openxmlformats.org/drawingml/2006/main">
+            <a:pPr>
+              <a:defRPr sz="2100" b="0">
+                <a:solidFill>
+                  <a:srgbClr val="173F50"/>
+                </a:solidFill>
+                <a:latin typeface="Arial"/>
+                <a:ea typeface="Arial"/>
+                <a:cs typeface="Arial"/>
+              </a:defRPr>
+            </a:pPr>
+            <a:r>
+              <a:rPr sz="2100" b="0">
+                <a:solidFill>
+                  <a:srgbClr val="173F50"/>
+                </a:solidFill>
+                <a:latin typeface="Arial"/>
+                <a:ea typeface="Arial"/>
+                <a:cs typeface="Arial"/>
+              </a:rPr>
+              <a:t>Contribution record maps responsibilities to artifacts and Git checkpoints.</a:t>
+            </a:r>
+          </a:p>
+        </p:txBody>
+      </p:sp>
+    </p:spTree>
+    <p:extLst>
+      <p:ext uri="{BB962C8B-B14F-4D97-AF65-F5344CB8AC3E}">
+        <p14:creationId xmlns:p14="http://schemas.microsoft.com/office/powerpoint/2010/main" val="282749582"/>
+      </p:ext>
+    </p:extLst>
+  </p:cSld>
+</p:sld>
+</file>
+
+<file path=ppt/slides/slide12.xml><?xml version="1.0" encoding="utf-8"?>
+<p:sld xmlns:p="http://schemas.openxmlformats.org/presentationml/2006/main">
+  <p:cSld>
+    <p:bg>
+      <p:bgPr>
+        <a:solidFill xmlns:a="http://schemas.openxmlformats.org/drawingml/2006/main">
+          <a:srgbClr val="FFFFFF"/>
+        </a:solidFill>
+      </p:bgPr>
+    </p:bg>
+    <p:spTree>
+      <p:nvGrpSpPr>
+        <p:cNvPr id="1" name=""/>
+        <p:cNvGrpSpPr/>
+        <p:nvPr/>
+      </p:nvGrpSpPr>
+      <p:grpSpPr>
+        <a:xfrm xmlns:a="http://schemas.openxmlformats.org/drawingml/2006/main"/>
+      </p:grpSpPr>
+      <p:sp>
+        <p:nvSpPr>
+          <p:cNvPr id="7" name="">
+            <a:extLst xmlns:a="http://schemas.openxmlformats.org/drawingml/2006/main">
+              <a:ext uri="{FF2B5EF4-FFF2-40B4-BE49-F238E27FC236}">
+                <a16:creationId xmlns:a16="http://schemas.microsoft.com/office/drawing/2014/main" id="{6604213F-DB21-491B-9805-1142AD90F0E3}"/>
+              </a:ext>
+            </a:extLst>
+          </p:cNvPr>
+          <p:cNvSpPr>
+            <a:spLocks xmlns:a="http://schemas.openxmlformats.org/drawingml/2006/main" noGrp="1"/>
+          </p:cNvSpPr>
+          <p:nvPr/>
+        </p:nvSpPr>
+        <p:spPr>
+          <a:xfrm xmlns:a="http://schemas.openxmlformats.org/drawingml/2006/main">
+            <a:off x="552450" y="333375"/>
+            <a:ext cx="11087100" cy="838200"/>
+          </a:xfrm>
+          <a:prstGeom xmlns:a="http://schemas.openxmlformats.org/drawingml/2006/main" prst="rect">
+            <a:avLst/>
+          </a:prstGeom>
+          <a:noFill xmlns:a="http://schemas.openxmlformats.org/drawingml/2006/main"/>
+          <a:ln xmlns:a="http://schemas.openxmlformats.org/drawingml/2006/main" w="0">
+            <a:noFill/>
+          </a:ln>
+        </p:spPr>
+        <p:txBody>
+          <a:bodyPr xmlns:a="http://schemas.openxmlformats.org/drawingml/2006/main"/>
+          <a:lstStyle xmlns:a="http://schemas.openxmlformats.org/drawingml/2006/main">
+            <a:defPPr>
+              <a:defRPr sz="3150" b="1">
+                <a:solidFill>
+                  <a:srgbClr val="173F50"/>
+                </a:solidFill>
+                <a:latin typeface="Arial"/>
+                <a:ea typeface="Arial"/>
+                <a:cs typeface="Arial"/>
+              </a:defRPr>
+            </a:defPPr>
+          </a:lstStyle>
+          <a:p xmlns:a="http://schemas.openxmlformats.org/drawingml/2006/main">
+            <a:pPr>
+              <a:defRPr sz="3150" b="1">
+                <a:solidFill>
+                  <a:srgbClr val="173F50"/>
+                </a:solidFill>
+                <a:latin typeface="Arial"/>
+                <a:ea typeface="Arial"/>
+                <a:cs typeface="Arial"/>
+              </a:defRPr>
+            </a:pPr>
+            <a:r>
+              <a:rPr sz="3150" b="1">
+                <a:solidFill>
+                  <a:srgbClr val="173F50"/>
+                </a:solidFill>
+                <a:latin typeface="Arial"/>
+                <a:ea typeface="Arial"/>
+                <a:cs typeface="Arial"/>
+              </a:rPr>
+              <a:t>Submission and conclusion</a:t>
+            </a:r>
+          </a:p>
+        </p:txBody>
+      </p:sp>
+      <p:sp>
+        <p:nvSpPr>
+          <p:cNvPr id="2" name="">
+            <a:extLst xmlns:a="http://schemas.openxmlformats.org/drawingml/2006/main">
+              <a:ext uri="{FF2B5EF4-FFF2-40B4-BE49-F238E27FC236}">
+                <a16:creationId xmlns:a16="http://schemas.microsoft.com/office/drawing/2014/main" id="{68EBA814-4123-45D3-831A-3AE2E58804E5}"/>
+              </a:ext>
+            </a:extLst>
+          </p:cNvPr>
+          <p:cNvSpPr>
+            <a:spLocks xmlns:a="http://schemas.openxmlformats.org/drawingml/2006/main" noGrp="1"/>
+          </p:cNvSpPr>
+          <p:nvPr/>
+        </p:nvSpPr>
+        <p:spPr>
+          <a:xfrm xmlns:a="http://schemas.openxmlformats.org/drawingml/2006/main">
+            <a:off x="552450" y="6477000"/>
+            <a:ext cx="11087100" cy="266700"/>
+          </a:xfrm>
+          <a:prstGeom xmlns:a="http://schemas.openxmlformats.org/drawingml/2006/main" prst="rect">
+            <a:avLst/>
+          </a:prstGeom>
+          <a:noFill xmlns:a="http://schemas.openxmlformats.org/drawingml/2006/main"/>
+          <a:ln xmlns:a="http://schemas.openxmlformats.org/drawingml/2006/main" w="0">
+            <a:noFill/>
+          </a:ln>
+        </p:spPr>
+        <p:txBody>
+          <a:bodyPr xmlns:a="http://schemas.openxmlformats.org/drawingml/2006/main"/>
+          <a:lstStyle xmlns:a="http://schemas.openxmlformats.org/drawingml/2006/main">
+            <a:defPPr>
+              <a:defRPr sz="1275" b="0">
+                <a:solidFill>
+                  <a:srgbClr val="173F50"/>
+                </a:solidFill>
+                <a:latin typeface="Arial"/>
+                <a:ea typeface="Arial"/>
+                <a:cs typeface="Arial"/>
+              </a:defRPr>
+            </a:defPPr>
+          </a:lstStyle>
+          <a:p xmlns:a="http://schemas.openxmlformats.org/drawingml/2006/main">
+            <a:pPr>
+              <a:defRPr sz="1275" b="0">
+                <a:solidFill>
+                  <a:srgbClr val="173F50"/>
+                </a:solidFill>
+                <a:latin typeface="Arial"/>
+                <a:ea typeface="Arial"/>
+                <a:cs typeface="Arial"/>
+              </a:defRPr>
+            </a:pPr>
+            <a:r>
+              <a:rPr sz="1275" b="0">
+                <a:solidFill>
+                  <a:srgbClr val="173F50"/>
+                </a:solidFill>
+                <a:latin typeface="Arial"/>
+                <a:ea typeface="Arial"/>
+                <a:cs typeface="Arial"/>
+              </a:rPr>
+              <a:t>AlphaVault  /  Du zhuotong  /  12 of 12</a:t>
+            </a:r>
+          </a:p>
+        </p:txBody>
+      </p:sp>
+      <p:sp>
+        <p:nvSpPr>
+          <p:cNvPr id="3" name="">
+            <a:extLst xmlns:a="http://schemas.openxmlformats.org/drawingml/2006/main">
+              <a:ext uri="{FF2B5EF4-FFF2-40B4-BE49-F238E27FC236}">
+                <a16:creationId xmlns:a16="http://schemas.microsoft.com/office/drawing/2014/main" id="{04643F29-873D-4908-9963-93163F425462}"/>
+              </a:ext>
+            </a:extLst>
+          </p:cNvPr>
+          <p:cNvSpPr>
+            <a:spLocks xmlns:a="http://schemas.openxmlformats.org/drawingml/2006/main" noGrp="1"/>
+          </p:cNvSpPr>
+          <p:nvPr/>
+        </p:nvSpPr>
+        <p:spPr>
+          <a:xfrm xmlns:a="http://schemas.openxmlformats.org/drawingml/2006/main">
+            <a:off x="552450" y="1524000"/>
+            <a:ext cx="11087100" cy="523875"/>
           </a:xfrm>
           <a:prstGeom xmlns:a="http://schemas.openxmlformats.org/drawingml/2006/main" prst="rect">
             <a:avLst/>
@@ -7003,7 +7330,7 @@
             <a:defPPr>
               <a:defRPr sz="2400" b="1">
                 <a:solidFill>
-                  <a:srgbClr val="123442"/>
+                  <a:srgbClr val="173F50"/>
                 </a:solidFill>
                 <a:latin typeface="Arial"/>
                 <a:ea typeface="Arial"/>
@@ -7015,7 +7342,7 @@
             <a:pPr>
               <a:defRPr sz="2400" b="1">
                 <a:solidFill>
-                  <a:srgbClr val="123442"/>
+                  <a:srgbClr val="173F50"/>
                 </a:solidFill>
                 <a:latin typeface="Arial"/>
                 <a:ea typeface="Arial"/>
@@ -7025,23 +7352,23 @@
             <a:r>
               <a:rPr sz="2400" b="1">
                 <a:solidFill>
-                  <a:srgbClr val="123442"/>
+                  <a:srgbClr val="173F50"/>
                 </a:solidFill>
                 <a:latin typeface="Arial"/>
                 <a:ea typeface="Arial"/>
                 <a:cs typeface="Arial"/>
               </a:rPr>
-              <a:t>Current boundaries</a:t>
+              <a:t>Delivered</a:t>
             </a:r>
           </a:p>
         </p:txBody>
       </p:sp>
       <p:sp>
         <p:nvSpPr>
-          <p:cNvPr id="3" name="">
+          <p:cNvPr id="4" name="">
             <a:extLst xmlns:a="http://schemas.openxmlformats.org/drawingml/2006/main">
               <a:ext uri="{FF2B5EF4-FFF2-40B4-BE49-F238E27FC236}">
-                <a16:creationId xmlns:a16="http://schemas.microsoft.com/office/drawing/2014/main" id="{2E6C0CBD-D1B7-4104-901C-932E94525634}"/>
+                <a16:creationId xmlns:a16="http://schemas.microsoft.com/office/drawing/2014/main" id="{A9188912-DCDA-44EA-BDA6-83203F01B2A3}"/>
               </a:ext>
             </a:extLst>
           </p:cNvPr>
@@ -7052,8 +7379,8 @@
         </p:nvSpPr>
         <p:spPr>
           <a:xfrm xmlns:a="http://schemas.openxmlformats.org/drawingml/2006/main">
-            <a:off x="609600" y="2524125"/>
-            <a:ext cx="10953750" cy="1905000"/>
+            <a:off x="552450" y="2333625"/>
+            <a:ext cx="11087100" cy="1714500"/>
           </a:xfrm>
           <a:prstGeom xmlns:a="http://schemas.openxmlformats.org/drawingml/2006/main" prst="rect">
             <a:avLst/>
@@ -7067,7 +7394,7 @@
           <a:bodyPr xmlns:a="http://schemas.openxmlformats.org/drawingml/2006/main"/>
           <a:lstStyle xmlns:a="http://schemas.openxmlformats.org/drawingml/2006/main">
             <a:defPPr>
-              <a:defRPr sz="2250" b="0">
+              <a:defRPr sz="2175" b="0">
                 <a:solidFill>
                   <a:srgbClr val="173F50"/>
                 </a:solidFill>
@@ -7079,7 +7406,7 @@
           </a:lstStyle>
           <a:p xmlns:a="http://schemas.openxmlformats.org/drawingml/2006/main">
             <a:pPr>
-              <a:defRPr sz="2250" b="0">
+              <a:defRPr sz="2175" b="0">
                 <a:solidFill>
                   <a:srgbClr val="173F50"/>
                 </a:solidFill>
@@ -7089,7 +7416,7 @@
               </a:defRPr>
             </a:pPr>
             <a:r>
-              <a:rPr sz="2250" b="0">
+              <a:rPr sz="2175" b="0">
                 <a:solidFill>
                   <a:srgbClr val="173F50"/>
                 </a:solidFill>
@@ -7097,12 +7424,12 @@
                 <a:ea typeface="Arial"/>
                 <a:cs typeface="Arial"/>
               </a:rPr>
-              <a:t>Mock assets, manually reported prices and central role administration</a:t>
+              <a:t>14-page report with five diagrams</a:t>
             </a:r>
           </a:p>
           <a:p xmlns:a="http://schemas.openxmlformats.org/drawingml/2006/main">
             <a:pPr>
-              <a:defRPr sz="2250" b="0">
+              <a:defRPr sz="2175" b="0">
                 <a:solidFill>
                   <a:srgbClr val="173F50"/>
                 </a:solidFill>
@@ -7112,7 +7439,7 @@
               </a:defRPr>
             </a:pPr>
             <a:r>
-              <a:rPr sz="2250" b="0">
+              <a:rPr sz="2175" b="0">
                 <a:solidFill>
                   <a:srgbClr val="173F50"/>
                 </a:solidFill>
@@ -7120,12 +7447,12 @@
                 <a:ea typeface="Arial"/>
                 <a:cs typeface="Arial"/>
               </a:rPr>
-              <a:t>Synthetic research and no security audit</a:t>
+              <a:t>User manual and individual contribution report</a:t>
             </a:r>
           </a:p>
           <a:p xmlns:a="http://schemas.openxmlformats.org/drawingml/2006/main">
             <a:pPr>
-              <a:defRPr sz="2250" b="0">
+              <a:defRPr sz="2175" b="0">
                 <a:solidFill>
                   <a:srgbClr val="173F50"/>
                 </a:solidFill>
@@ -7135,7 +7462,7 @@
               </a:defRPr>
             </a:pPr>
             <a:r>
-              <a:rPr sz="2250" b="0">
+              <a:rPr sz="2175" b="0">
                 <a:solidFill>
                   <a:srgbClr val="173F50"/>
                 </a:solidFill>
@@ -7143,17 +7470,17 @@
                 <a:ea typeface="Arial"/>
                 <a:cs typeface="Arial"/>
               </a:rPr>
-              <a:t>Unattended Keeper verified locally only</a:t>
+              <a:t>Source, tests, deployment evidence and ten-minute video</a:t>
             </a:r>
           </a:p>
         </p:txBody>
       </p:sp>
       <p:sp>
         <p:nvSpPr>
-          <p:cNvPr id="4" name="">
+          <p:cNvPr id="5" name="">
             <a:extLst xmlns:a="http://schemas.openxmlformats.org/drawingml/2006/main">
               <a:ext uri="{FF2B5EF4-FFF2-40B4-BE49-F238E27FC236}">
-                <a16:creationId xmlns:a16="http://schemas.microsoft.com/office/drawing/2014/main" id="{F9B5659B-E37D-4529-B6F4-ABAECCD418E4}"/>
+                <a16:creationId xmlns:a16="http://schemas.microsoft.com/office/drawing/2014/main" id="{1E599176-35DB-47FA-A73C-A0411DA2E5DB}"/>
               </a:ext>
             </a:extLst>
           </p:cNvPr>
@@ -7164,8 +7491,8 @@
         </p:nvSpPr>
         <p:spPr>
           <a:xfrm xmlns:a="http://schemas.openxmlformats.org/drawingml/2006/main">
-            <a:off x="609600" y="4667250"/>
-            <a:ext cx="10477500" cy="523875"/>
+            <a:off x="552450" y="4524375"/>
+            <a:ext cx="11087100" cy="1000125"/>
           </a:xfrm>
           <a:prstGeom xmlns:a="http://schemas.openxmlformats.org/drawingml/2006/main" prst="rect">
             <a:avLst/>
@@ -7179,9 +7506,9 @@
           <a:bodyPr xmlns:a="http://schemas.openxmlformats.org/drawingml/2006/main"/>
           <a:lstStyle xmlns:a="http://schemas.openxmlformats.org/drawingml/2006/main">
             <a:defPPr>
-              <a:defRPr sz="2400" b="1">
-                <a:solidFill>
-                  <a:srgbClr val="123442"/>
+              <a:defRPr sz="2175" b="0">
+                <a:solidFill>
+                  <a:srgbClr val="173F50"/>
                 </a:solidFill>
                 <a:latin typeface="Arial"/>
                 <a:ea typeface="Arial"/>
@@ -7191,9 +7518,9 @@
           </a:lstStyle>
           <a:p xmlns:a="http://schemas.openxmlformats.org/drawingml/2006/main">
             <a:pPr>
-              <a:defRPr sz="2400" b="1">
-                <a:solidFill>
-                  <a:srgbClr val="123442"/>
+              <a:defRPr sz="2175" b="0">
+                <a:solidFill>
+                  <a:srgbClr val="173F50"/>
                 </a:solidFill>
                 <a:latin typeface="Arial"/>
                 <a:ea typeface="Arial"/>
@@ -7201,25 +7528,48 @@
               </a:defRPr>
             </a:pPr>
             <a:r>
-              <a:rPr sz="2400" b="1">
-                <a:solidFill>
-                  <a:srgbClr val="123442"/>
+              <a:rPr sz="2175" b="0">
+                <a:solidFill>
+                  <a:srgbClr val="173F50"/>
                 </a:solidFill>
                 <a:latin typeface="Arial"/>
                 <a:ea typeface="Arial"/>
                 <a:cs typeface="Arial"/>
               </a:rPr>
-              <a:t>Next engineering work</a:t>
+              <a:t>https://alphavault-sepolia.onrender.com</a:t>
+            </a:r>
+          </a:p>
+          <a:p xmlns:a="http://schemas.openxmlformats.org/drawingml/2006/main">
+            <a:pPr>
+              <a:defRPr sz="2175" b="0">
+                <a:solidFill>
+                  <a:srgbClr val="173F50"/>
+                </a:solidFill>
+                <a:latin typeface="Arial"/>
+                <a:ea typeface="Arial"/>
+                <a:cs typeface="Arial"/>
+              </a:defRPr>
+            </a:pPr>
+            <a:r>
+              <a:rPr sz="2175" b="0">
+                <a:solidFill>
+                  <a:srgbClr val="173F50"/>
+                </a:solidFill>
+                <a:latin typeface="Arial"/>
+                <a:ea typeface="Arial"/>
+                <a:cs typeface="Arial"/>
+              </a:rPr>
+              <a:t>https://github.com/qwekker/alphavault-sc6113</a:t>
             </a:r>
           </a:p>
         </p:txBody>
       </p:sp>
       <p:sp>
         <p:nvSpPr>
-          <p:cNvPr id="5" name="">
+          <p:cNvPr id="6" name="">
             <a:extLst xmlns:a="http://schemas.openxmlformats.org/drawingml/2006/main">
               <a:ext uri="{FF2B5EF4-FFF2-40B4-BE49-F238E27FC236}">
-                <a16:creationId xmlns:a16="http://schemas.microsoft.com/office/drawing/2014/main" id="{401A5CBA-38C6-4126-92EF-DBB9F4C7E945}"/>
+                <a16:creationId xmlns:a16="http://schemas.microsoft.com/office/drawing/2014/main" id="{97F21E24-A090-4E0B-81DC-AFC5022AECCE}"/>
               </a:ext>
             </a:extLst>
           </p:cNvPr>
@@ -7230,8 +7580,8 @@
         </p:nvSpPr>
         <p:spPr>
           <a:xfrm xmlns:a="http://schemas.openxmlformats.org/drawingml/2006/main">
-            <a:off x="609600" y="5381625"/>
-            <a:ext cx="10953750" cy="762000"/>
+            <a:off x="552450" y="5810250"/>
+            <a:ext cx="11087100" cy="428625"/>
           </a:xfrm>
           <a:prstGeom xmlns:a="http://schemas.openxmlformats.org/drawingml/2006/main" prst="rect">
             <a:avLst/>
@@ -7245,7 +7595,7 @@
           <a:bodyPr xmlns:a="http://schemas.openxmlformats.org/drawingml/2006/main"/>
           <a:lstStyle xmlns:a="http://schemas.openxmlformats.org/drawingml/2006/main">
             <a:defPPr>
-              <a:defRPr sz="2250" b="0">
+              <a:defRPr sz="1800" b="0">
                 <a:solidFill>
                   <a:srgbClr val="173F50"/>
                 </a:solidFill>
@@ -7257,7 +7607,7 @@
           </a:lstStyle>
           <a:p xmlns:a="http://schemas.openxmlformats.org/drawingml/2006/main">
             <a:pPr>
-              <a:defRPr sz="2250" b="0">
+              <a:defRPr sz="1800" b="0">
                 <a:solidFill>
                   <a:srgbClr val="173F50"/>
                 </a:solidFill>
@@ -7267,7 +7617,7 @@
               </a:defRPr>
             </a:pPr>
             <a:r>
-              <a:rPr sz="2250" b="0">
+              <a:rPr sz="1800" b="0">
                 <a:solidFill>
                   <a:srgbClr val="173F50"/>
                 </a:solidFill>
@@ -7275,7 +7625,7 @@
                 <a:ea typeface="Arial"/>
                 <a:cs typeface="Arial"/>
               </a:rPr>
-              <a:t>Real data evaluation, net-trade execution and stronger oracle controls</a:t>
+              <a:t>Private repository: arrange assessor access or provide the source ZIP.</a:t>
             </a:r>
           </a:p>
         </p:txBody>
@@ -7283,7 +7633,7 @@
     </p:spTree>
     <p:extLst>
       <p:ext uri="{BB962C8B-B14F-4D97-AF65-F5344CB8AC3E}">
-        <p14:creationId xmlns:p14="http://schemas.microsoft.com/office/powerpoint/2010/main" val="2060134819"/>
+        <p14:creationId xmlns:p14="http://schemas.microsoft.com/office/powerpoint/2010/main" val="1367804120"/>
       </p:ext>
     </p:extLst>
   </p:cSld>
@@ -7311,10 +7661,10 @@
       </p:grpSpPr>
       <p:sp>
         <p:nvSpPr>
-          <p:cNvPr id="4" name="">
+          <p:cNvPr id="6" name="">
             <a:extLst xmlns:a="http://schemas.openxmlformats.org/drawingml/2006/main">
               <a:ext uri="{FF2B5EF4-FFF2-40B4-BE49-F238E27FC236}">
-                <a16:creationId xmlns:a16="http://schemas.microsoft.com/office/drawing/2014/main" id="{86EE79A8-9541-4A6F-A1A7-B3376763E394}"/>
+                <a16:creationId xmlns:a16="http://schemas.microsoft.com/office/drawing/2014/main" id="{86455833-10CF-45BD-B163-02E2DB7E3EEC}"/>
               </a:ext>
             </a:extLst>
           </p:cNvPr>
@@ -7325,8 +7675,8 @@
         </p:nvSpPr>
         <p:spPr>
           <a:xfrm xmlns:a="http://schemas.openxmlformats.org/drawingml/2006/main">
-            <a:off x="609600" y="457200"/>
-            <a:ext cx="10972800" cy="933450"/>
+            <a:off x="552450" y="333375"/>
+            <a:ext cx="11087100" cy="838200"/>
           </a:xfrm>
           <a:prstGeom xmlns:a="http://schemas.openxmlformats.org/drawingml/2006/main" prst="rect">
             <a:avLst/>
@@ -7340,9 +7690,9 @@
           <a:bodyPr xmlns:a="http://schemas.openxmlformats.org/drawingml/2006/main"/>
           <a:lstStyle xmlns:a="http://schemas.openxmlformats.org/drawingml/2006/main">
             <a:defPPr>
-              <a:defRPr sz="3300" b="1">
-                <a:solidFill>
-                  <a:srgbClr val="123442"/>
+              <a:defRPr sz="3150" b="1">
+                <a:solidFill>
+                  <a:srgbClr val="173F50"/>
                 </a:solidFill>
                 <a:latin typeface="Arial"/>
                 <a:ea typeface="Arial"/>
@@ -7352,9 +7702,9 @@
           </a:lstStyle>
           <a:p xmlns:a="http://schemas.openxmlformats.org/drawingml/2006/main">
             <a:pPr>
-              <a:defRPr sz="3300" b="1">
-                <a:solidFill>
-                  <a:srgbClr val="123442"/>
+              <a:defRPr sz="3150" b="1">
+                <a:solidFill>
+                  <a:srgbClr val="173F50"/>
                 </a:solidFill>
                 <a:latin typeface="Arial"/>
                 <a:ea typeface="Arial"/>
@@ -7362,25 +7712,157 @@
               </a:defRPr>
             </a:pPr>
             <a:r>
-              <a:rPr sz="3300" b="1">
-                <a:solidFill>
-                  <a:srgbClr val="123442"/>
+              <a:rPr sz="3150" b="1">
+                <a:solidFill>
+                  <a:srgbClr val="173F50"/>
                 </a:solidFill>
                 <a:latin typeface="Arial"/>
                 <a:ea typeface="Arial"/>
                 <a:cs typeface="Arial"/>
               </a:rPr>
-              <a:t>Roles and operating workflow</a:t>
+              <a:t>Problem and stakeholders</a:t>
+            </a:r>
+          </a:p>
+        </p:txBody>
+      </p:sp>
+      <p:sp>
+        <p:nvSpPr>
+          <p:cNvPr id="2" name="">
+            <a:extLst xmlns:a="http://schemas.openxmlformats.org/drawingml/2006/main">
+              <a:ext uri="{FF2B5EF4-FFF2-40B4-BE49-F238E27FC236}">
+                <a16:creationId xmlns:a16="http://schemas.microsoft.com/office/drawing/2014/main" id="{C5E3A59B-1462-457B-80C6-319FBADEFB56}"/>
+              </a:ext>
+            </a:extLst>
+          </p:cNvPr>
+          <p:cNvSpPr>
+            <a:spLocks xmlns:a="http://schemas.openxmlformats.org/drawingml/2006/main" noGrp="1"/>
+          </p:cNvSpPr>
+          <p:nvPr/>
+        </p:nvSpPr>
+        <p:spPr>
+          <a:xfrm xmlns:a="http://schemas.openxmlformats.org/drawingml/2006/main">
+            <a:off x="552450" y="6477000"/>
+            <a:ext cx="11087100" cy="266700"/>
+          </a:xfrm>
+          <a:prstGeom xmlns:a="http://schemas.openxmlformats.org/drawingml/2006/main" prst="rect">
+            <a:avLst/>
+          </a:prstGeom>
+          <a:noFill xmlns:a="http://schemas.openxmlformats.org/drawingml/2006/main"/>
+          <a:ln xmlns:a="http://schemas.openxmlformats.org/drawingml/2006/main" w="0">
+            <a:noFill/>
+          </a:ln>
+        </p:spPr>
+        <p:txBody>
+          <a:bodyPr xmlns:a="http://schemas.openxmlformats.org/drawingml/2006/main"/>
+          <a:lstStyle xmlns:a="http://schemas.openxmlformats.org/drawingml/2006/main">
+            <a:defPPr>
+              <a:defRPr sz="1275" b="0">
+                <a:solidFill>
+                  <a:srgbClr val="173F50"/>
+                </a:solidFill>
+                <a:latin typeface="Arial"/>
+                <a:ea typeface="Arial"/>
+                <a:cs typeface="Arial"/>
+              </a:defRPr>
+            </a:defPPr>
+          </a:lstStyle>
+          <a:p xmlns:a="http://schemas.openxmlformats.org/drawingml/2006/main">
+            <a:pPr>
+              <a:defRPr sz="1275" b="0">
+                <a:solidFill>
+                  <a:srgbClr val="173F50"/>
+                </a:solidFill>
+                <a:latin typeface="Arial"/>
+                <a:ea typeface="Arial"/>
+                <a:cs typeface="Arial"/>
+              </a:defRPr>
+            </a:pPr>
+            <a:r>
+              <a:rPr sz="1275" b="0">
+                <a:solidFill>
+                  <a:srgbClr val="173F50"/>
+                </a:solidFill>
+                <a:latin typeface="Arial"/>
+                <a:ea typeface="Arial"/>
+                <a:cs typeface="Arial"/>
+              </a:rPr>
+              <a:t>AlphaVault  /  Du zhuotong  /  2 of 12</a:t>
+            </a:r>
+          </a:p>
+        </p:txBody>
+      </p:sp>
+      <p:sp>
+        <p:nvSpPr>
+          <p:cNvPr id="3" name="">
+            <a:extLst xmlns:a="http://schemas.openxmlformats.org/drawingml/2006/main">
+              <a:ext uri="{FF2B5EF4-FFF2-40B4-BE49-F238E27FC236}">
+                <a16:creationId xmlns:a16="http://schemas.microsoft.com/office/drawing/2014/main" id="{DDBC2A47-38E1-4933-9E72-576098710FBA}"/>
+              </a:ext>
+            </a:extLst>
+          </p:cNvPr>
+          <p:cNvSpPr>
+            <a:spLocks xmlns:a="http://schemas.openxmlformats.org/drawingml/2006/main" noGrp="1"/>
+          </p:cNvSpPr>
+          <p:nvPr/>
+        </p:nvSpPr>
+        <p:spPr>
+          <a:xfrm xmlns:a="http://schemas.openxmlformats.org/drawingml/2006/main">
+            <a:off x="552450" y="1238250"/>
+            <a:ext cx="11087100" cy="762000"/>
+          </a:xfrm>
+          <a:prstGeom xmlns:a="http://schemas.openxmlformats.org/drawingml/2006/main" prst="rect">
+            <a:avLst/>
+          </a:prstGeom>
+          <a:noFill xmlns:a="http://schemas.openxmlformats.org/drawingml/2006/main"/>
+          <a:ln xmlns:a="http://schemas.openxmlformats.org/drawingml/2006/main" w="0">
+            <a:noFill/>
+          </a:ln>
+        </p:spPr>
+        <p:txBody>
+          <a:bodyPr xmlns:a="http://schemas.openxmlformats.org/drawingml/2006/main"/>
+          <a:lstStyle xmlns:a="http://schemas.openxmlformats.org/drawingml/2006/main">
+            <a:defPPr>
+              <a:defRPr sz="2325" b="0">
+                <a:solidFill>
+                  <a:srgbClr val="173F50"/>
+                </a:solidFill>
+                <a:latin typeface="Arial"/>
+                <a:ea typeface="Arial"/>
+                <a:cs typeface="Arial"/>
+              </a:defRPr>
+            </a:defPPr>
+          </a:lstStyle>
+          <a:p xmlns:a="http://schemas.openxmlformats.org/drawingml/2006/main">
+            <a:pPr>
+              <a:defRPr sz="2325" b="0">
+                <a:solidFill>
+                  <a:srgbClr val="173F50"/>
+                </a:solidFill>
+                <a:latin typeface="Arial"/>
+                <a:ea typeface="Arial"/>
+                <a:cs typeface="Arial"/>
+              </a:defRPr>
+            </a:pPr>
+            <a:r>
+              <a:rPr sz="2325" b="0">
+                <a:solidFill>
+                  <a:srgbClr val="173F50"/>
+                </a:solidFill>
+                <a:latin typeface="Arial"/>
+                <a:ea typeface="Arial"/>
+                <a:cs typeface="Arial"/>
+              </a:rPr>
+              <a:t>Delegate allocation while preserving policy checks and investor exit.</a:t>
             </a:r>
           </a:p>
         </p:txBody>
       </p:sp>
       <p:graphicFrame>
         <p:nvGraphicFramePr>
-          <p:cNvPr id="2" name="">
+          <p:cNvPr id="4" name="">
             <a:extLst xmlns:a="http://schemas.openxmlformats.org/drawingml/2006/main">
               <a:ext uri="{FF2B5EF4-FFF2-40B4-BE49-F238E27FC236}">
-                <a16:creationId xmlns:a16="http://schemas.microsoft.com/office/drawing/2014/main" id="{9C0BDD56-B7C4-4E13-B821-1A3F1CED32F5}"/>
+                <a16:creationId xmlns:a16="http://schemas.microsoft.com/office/drawing/2014/main" id="{5EDBDDB5-BBB1-436B-9CBC-6BEAAB5132D0}"/>
               </a:ext>
             </a:extLst>
           </p:cNvPr>
@@ -7388,18 +7870,19 @@
           <p:nvPr/>
         </p:nvGraphicFramePr>
         <p:xfrm>
-          <a:off xmlns:a="http://schemas.openxmlformats.org/drawingml/2006/main" x="609600" y="1619250"/>
-          <a:ext xmlns:a="http://schemas.openxmlformats.org/drawingml/2006/main" cx="10972800" cy="3524250"/>
+          <a:off xmlns:a="http://schemas.openxmlformats.org/drawingml/2006/main" x="552450" y="2238375"/>
+          <a:ext xmlns:a="http://schemas.openxmlformats.org/drawingml/2006/main" cx="11087100" cy="3238500"/>
         </p:xfrm>
         <a:graphic xmlns:a="http://schemas.openxmlformats.org/drawingml/2006/main">
           <a:graphicData uri="http://schemas.openxmlformats.org/drawingml/2006/table">
             <a:tbl>
               <a:tblPr/>
               <a:tblGrid>
-                <a:gridCol w="3238500"/>
-                <a:gridCol w="7734300"/>
+                <a:gridCol w="2286000"/>
+                <a:gridCol w="4048125"/>
+                <a:gridCol w="4752975"/>
               </a:tblGrid>
-              <a:tr h="704850">
+              <a:tr h="647700">
                 <a:tc>
                   <a:txBody>
                     <a:bodyPr/>
@@ -7414,7 +7897,7 @@
                           <a:ea typeface="Arial"/>
                           <a:cs typeface="Arial"/>
                         </a:rPr>
-                        <a:t>Role</a:t>
+                        <a:t>Stakeholder</a:t>
                       </a:r>
                     </a:p>
                   </a:txBody>
@@ -7438,7 +7921,31 @@
                           <a:ea typeface="Arial"/>
                           <a:cs typeface="Arial"/>
                         </a:rPr>
-                        <a:t>On-chain authority</a:t>
+                        <a:t>Need</a:t>
+                      </a:r>
+                    </a:p>
+                  </a:txBody>
+                  <a:tcPr marL="91440" marR="91440" marT="45720" marB="45720">
+                    <a:solidFill>
+                      <a:srgbClr val="173F50"/>
+                    </a:solidFill>
+                  </a:tcPr>
+                </a:tc>
+                <a:tc>
+                  <a:txBody>
+                    <a:bodyPr/>
+                    <a:lstStyle/>
+                    <a:p>
+                      <a:r>
+                        <a:rPr sz="1800" b="1">
+                          <a:solidFill>
+                            <a:srgbClr val="FFFFFF"/>
+                          </a:solidFill>
+                          <a:latin typeface="Arial"/>
+                          <a:ea typeface="Arial"/>
+                          <a:cs typeface="Arial"/>
+                        </a:rPr>
+                        <a:t>Tension</a:t>
                       </a:r>
                     </a:p>
                   </a:txBody>
@@ -7449,7 +7956,7 @@
                   </a:tcPr>
                 </a:tc>
               </a:tr>
-              <a:tr h="704850">
+              <a:tr h="647700">
                 <a:tc>
                   <a:txBody>
                     <a:bodyPr/>
@@ -7458,7 +7965,7 @@
                       <a:r>
                         <a:rPr sz="1800" b="0">
                           <a:solidFill>
-                            <a:srgbClr val="193640"/>
+                            <a:srgbClr val="173F50"/>
                           </a:solidFill>
                           <a:latin typeface="Arial"/>
                           <a:ea typeface="Arial"/>
@@ -7482,13 +7989,37 @@
                       <a:r>
                         <a:rPr sz="1800" b="0">
                           <a:solidFill>
-                            <a:srgbClr val="193640"/>
+                            <a:srgbClr val="173F50"/>
                           </a:solidFill>
                           <a:latin typeface="Arial"/>
                           <a:ea typeface="Arial"/>
                           <a:cs typeface="Arial"/>
                         </a:rPr>
-                        <a:t>Approve, deposit and redeem own shares</a:t>
+                        <a:t>Traceable holdings and exit</a:t>
+                      </a:r>
+                    </a:p>
+                  </a:txBody>
+                  <a:tcPr marL="91440" marR="91440" marT="45720" marB="45720">
+                    <a:solidFill>
+                      <a:srgbClr val="FFFFFF"/>
+                    </a:solidFill>
+                  </a:tcPr>
+                </a:tc>
+                <a:tc>
+                  <a:txBody>
+                    <a:bodyPr/>
+                    <a:lstStyle/>
+                    <a:p>
+                      <a:r>
+                        <a:rPr sz="1800" b="0">
+                          <a:solidFill>
+                            <a:srgbClr val="173F50"/>
+                          </a:solidFill>
+                          <a:latin typeface="Arial"/>
+                          <a:ea typeface="Arial"/>
+                          <a:cs typeface="Arial"/>
+                        </a:rPr>
+                        <a:t>Manager discretion vs protection</a:t>
                       </a:r>
                     </a:p>
                   </a:txBody>
@@ -7499,7 +8030,7 @@
                   </a:tcPr>
                 </a:tc>
               </a:tr>
-              <a:tr h="704850">
+              <a:tr h="647700">
                 <a:tc>
                   <a:txBody>
                     <a:bodyPr/>
@@ -7508,7 +8039,7 @@
                       <a:r>
                         <a:rPr sz="1800" b="0">
                           <a:solidFill>
-                            <a:srgbClr val="193640"/>
+                            <a:srgbClr val="173F50"/>
                           </a:solidFill>
                           <a:latin typeface="Arial"/>
                           <a:ea typeface="Arial"/>
@@ -7532,13 +8063,37 @@
                       <a:r>
                         <a:rPr sz="1800" b="0">
                           <a:solidFill>
-                            <a:srgbClr val="193640"/>
+                            <a:srgbClr val="173F50"/>
                           </a:solidFill>
                           <a:latin typeface="Arial"/>
                           <a:ea typeface="Arial"/>
                           <a:cs typeface="Arial"/>
                         </a:rPr>
-                        <a:t>Select/configure strategies and enable automation</a:t>
+                        <a:t>Allocation changes</a:t>
+                      </a:r>
+                    </a:p>
+                  </a:txBody>
+                  <a:tcPr marL="91440" marR="91440" marT="45720" marB="45720">
+                    <a:solidFill>
+                      <a:srgbClr val="F1F5F6"/>
+                    </a:solidFill>
+                  </a:tcPr>
+                </a:tc>
+                <a:tc>
+                  <a:txBody>
+                    <a:bodyPr/>
+                    <a:lstStyle/>
+                    <a:p>
+                      <a:r>
+                        <a:rPr sz="1800" b="0">
+                          <a:solidFill>
+                            <a:srgbClr val="173F50"/>
+                          </a:solidFill>
+                          <a:latin typeface="Arial"/>
+                          <a:ea typeface="Arial"/>
+                          <a:cs typeface="Arial"/>
+                        </a:rPr>
+                        <a:t>Return seeking vs exposure caps</a:t>
                       </a:r>
                     </a:p>
                   </a:txBody>
@@ -7549,7 +8104,7 @@
                   </a:tcPr>
                 </a:tc>
               </a:tr>
-              <a:tr h="704850">
+              <a:tr h="647700">
                 <a:tc>
                   <a:txBody>
                     <a:bodyPr/>
@@ -7558,7 +8113,7 @@
                       <a:r>
                         <a:rPr sz="1800" b="0">
                           <a:solidFill>
-                            <a:srgbClr val="193640"/>
+                            <a:srgbClr val="173F50"/>
                           </a:solidFill>
                           <a:latin typeface="Arial"/>
                           <a:ea typeface="Arial"/>
@@ -7582,13 +8137,37 @@
                       <a:r>
                         <a:rPr sz="1800" b="0">
                           <a:solidFill>
-                            <a:srgbClr val="193640"/>
+                            <a:srgbClr val="173F50"/>
                           </a:solidFill>
                           <a:latin typeface="Arial"/>
                           <a:ea typeface="Arial"/>
                           <a:cs typeface="Arial"/>
                         </a:rPr>
-                        <a:t>Update markets, adjust limits and pause</a:t>
+                        <a:t>Policy and emergency controls</a:t>
+                      </a:r>
+                    </a:p>
+                  </a:txBody>
+                  <a:tcPr marL="91440" marR="91440" marT="45720" marB="45720">
+                    <a:solidFill>
+                      <a:srgbClr val="FFFFFF"/>
+                    </a:solidFill>
+                  </a:tcPr>
+                </a:tc>
+                <a:tc>
+                  <a:txBody>
+                    <a:bodyPr/>
+                    <a:lstStyle/>
+                    <a:p>
+                      <a:r>
+                        <a:rPr sz="1800" b="0">
+                          <a:solidFill>
+                            <a:srgbClr val="173F50"/>
+                          </a:solidFill>
+                          <a:latin typeface="Arial"/>
+                          <a:ea typeface="Arial"/>
+                          <a:cs typeface="Arial"/>
+                        </a:rPr>
+                        <a:t>Protection vs trading flexibility</a:t>
                       </a:r>
                     </a:p>
                   </a:txBody>
@@ -7599,7 +8178,7 @@
                   </a:tcPr>
                 </a:tc>
               </a:tr>
-              <a:tr h="704850">
+              <a:tr h="647700">
                 <a:tc>
                   <a:txBody>
                     <a:bodyPr/>
@@ -7608,7 +8187,7 @@
                       <a:r>
                         <a:rPr sz="1800" b="0">
                           <a:solidFill>
-                            <a:srgbClr val="193640"/>
+                            <a:srgbClr val="173F50"/>
                           </a:solidFill>
                           <a:latin typeface="Arial"/>
                           <a:ea typeface="Arial"/>
@@ -7632,13 +8211,37 @@
                       <a:r>
                         <a:rPr sz="1800" b="0">
                           <a:solidFill>
-                            <a:srgbClr val="193640"/>
+                            <a:srgbClr val="173F50"/>
                           </a:solidFill>
                           <a:latin typeface="Arial"/>
                           <a:ea typeface="Arial"/>
                           <a:cs typeface="Arial"/>
                         </a:rPr>
-                        <a:t>Execute eligible trades / assign roles</a:t>
+                        <a:t>Execution / permissions</a:t>
+                      </a:r>
+                    </a:p>
+                  </a:txBody>
+                  <a:tcPr marL="91440" marR="91440" marT="45720" marB="45720">
+                    <a:solidFill>
+                      <a:srgbClr val="F1F5F6"/>
+                    </a:solidFill>
+                  </a:tcPr>
+                </a:tc>
+                <a:tc>
+                  <a:txBody>
+                    <a:bodyPr/>
+                    <a:lstStyle/>
+                    <a:p>
+                      <a:r>
+                        <a:rPr sz="1800" b="0">
+                          <a:solidFill>
+                            <a:srgbClr val="173F50"/>
+                          </a:solidFill>
+                          <a:latin typeface="Arial"/>
+                          <a:ea typeface="Arial"/>
+                          <a:cs typeface="Arial"/>
+                        </a:rPr>
+                        <a:t>Availability and central authority</a:t>
                       </a:r>
                     </a:p>
                   </a:txBody>
@@ -7655,10 +8258,10 @@
       </p:graphicFrame>
       <p:sp>
         <p:nvSpPr>
-          <p:cNvPr id="3" name="">
+          <p:cNvPr id="5" name="">
             <a:extLst xmlns:a="http://schemas.openxmlformats.org/drawingml/2006/main">
               <a:ext uri="{FF2B5EF4-FFF2-40B4-BE49-F238E27FC236}">
-                <a16:creationId xmlns:a16="http://schemas.microsoft.com/office/drawing/2014/main" id="{57535E0A-9B66-4D18-B93D-5E75B6F70665}"/>
+                <a16:creationId xmlns:a16="http://schemas.microsoft.com/office/drawing/2014/main" id="{45775BDB-2D5D-472D-BA9A-A2D51558ABC9}"/>
               </a:ext>
             </a:extLst>
           </p:cNvPr>
@@ -7669,8 +8272,8 @@
         </p:nvSpPr>
         <p:spPr>
           <a:xfrm xmlns:a="http://schemas.openxmlformats.org/drawingml/2006/main">
-            <a:off x="609600" y="5572125"/>
-            <a:ext cx="10953750" cy="571500"/>
+            <a:off x="552450" y="5810250"/>
+            <a:ext cx="11087100" cy="428625"/>
           </a:xfrm>
           <a:prstGeom xmlns:a="http://schemas.openxmlformats.org/drawingml/2006/main" prst="rect">
             <a:avLst/>
@@ -7684,7 +8287,7 @@
           <a:bodyPr xmlns:a="http://schemas.openxmlformats.org/drawingml/2006/main"/>
           <a:lstStyle xmlns:a="http://schemas.openxmlformats.org/drawingml/2006/main">
             <a:defPPr>
-              <a:defRPr sz="2100" b="0">
+              <a:defRPr sz="1875" b="0">
                 <a:solidFill>
                   <a:srgbClr val="173F50"/>
                 </a:solidFill>
@@ -7696,7 +8299,7 @@
           </a:lstStyle>
           <a:p xmlns:a="http://schemas.openxmlformats.org/drawingml/2006/main">
             <a:pPr>
-              <a:defRPr sz="2100" b="0">
+              <a:defRPr sz="1875" b="0">
                 <a:solidFill>
                   <a:srgbClr val="173F50"/>
                 </a:solidFill>
@@ -7706,7 +8309,7 @@
               </a:defRPr>
             </a:pPr>
             <a:r>
-              <a:rPr sz="2100" b="0">
+              <a:rPr sz="1875" b="0">
                 <a:solidFill>
                   <a:srgbClr val="173F50"/>
                 </a:solidFill>
@@ -7714,7 +8317,7 @@
                 <a:ea typeface="Arial"/>
                 <a:cs typeface="Arial"/>
               </a:rPr>
-              <a:t>Three separate Sepolia wallets demonstrate the core roles.</a:t>
+              <a:t>Design scenario; organizational time savings have not been measured.</a:t>
             </a:r>
           </a:p>
         </p:txBody>
@@ -7722,7 +8325,7 @@
     </p:spTree>
     <p:extLst>
       <p:ext uri="{BB962C8B-B14F-4D97-AF65-F5344CB8AC3E}">
-        <p14:creationId xmlns:p14="http://schemas.microsoft.com/office/powerpoint/2010/main" val="319411937"/>
+        <p14:creationId xmlns:p14="http://schemas.microsoft.com/office/powerpoint/2010/main" val="267102355"/>
       </p:ext>
     </p:extLst>
   </p:cSld>
@@ -7753,7 +8356,7 @@
           <p:cNvPr id="4" name="">
             <a:extLst xmlns:a="http://schemas.openxmlformats.org/drawingml/2006/main">
               <a:ext uri="{FF2B5EF4-FFF2-40B4-BE49-F238E27FC236}">
-                <a16:creationId xmlns:a16="http://schemas.microsoft.com/office/drawing/2014/main" id="{B9306FC9-F44D-4636-95AC-03479F4FEA51}"/>
+                <a16:creationId xmlns:a16="http://schemas.microsoft.com/office/drawing/2014/main" id="{1323AF9E-C8E1-4598-B326-19D2B610CF5C}"/>
               </a:ext>
             </a:extLst>
           </p:cNvPr>
@@ -7764,8 +8367,8 @@
         </p:nvSpPr>
         <p:spPr>
           <a:xfrm xmlns:a="http://schemas.openxmlformats.org/drawingml/2006/main">
-            <a:off x="609600" y="457200"/>
-            <a:ext cx="10972800" cy="933450"/>
+            <a:off x="552450" y="333375"/>
+            <a:ext cx="11087100" cy="838200"/>
           </a:xfrm>
           <a:prstGeom xmlns:a="http://schemas.openxmlformats.org/drawingml/2006/main" prst="rect">
             <a:avLst/>
@@ -7779,9 +8382,9 @@
           <a:bodyPr xmlns:a="http://schemas.openxmlformats.org/drawingml/2006/main"/>
           <a:lstStyle xmlns:a="http://schemas.openxmlformats.org/drawingml/2006/main">
             <a:defPPr>
-              <a:defRPr sz="3300" b="1">
-                <a:solidFill>
-                  <a:srgbClr val="123442"/>
+              <a:defRPr sz="3150" b="1">
+                <a:solidFill>
+                  <a:srgbClr val="173F50"/>
                 </a:solidFill>
                 <a:latin typeface="Arial"/>
                 <a:ea typeface="Arial"/>
@@ -7791,9 +8394,9 @@
           </a:lstStyle>
           <a:p xmlns:a="http://schemas.openxmlformats.org/drawingml/2006/main">
             <a:pPr>
-              <a:defRPr sz="3300" b="1">
-                <a:solidFill>
-                  <a:srgbClr val="123442"/>
+              <a:defRPr sz="3150" b="1">
+                <a:solidFill>
+                  <a:srgbClr val="173F50"/>
                 </a:solidFill>
                 <a:latin typeface="Arial"/>
                 <a:ea typeface="Arial"/>
@@ -7801,363 +8404,25 @@
               </a:defRPr>
             </a:pPr>
             <a:r>
-              <a:rPr sz="3300" b="1">
-                <a:solidFill>
-                  <a:srgbClr val="123442"/>
+              <a:rPr sz="3150" b="1">
+                <a:solidFill>
+                  <a:srgbClr val="173F50"/>
                 </a:solidFill>
                 <a:latin typeface="Arial"/>
                 <a:ea typeface="Arial"/>
                 <a:cs typeface="Arial"/>
               </a:rPr>
-              <a:t>Three interacting core contracts</a:t>
+              <a:t>System architecture</a:t>
             </a:r>
           </a:p>
         </p:txBody>
       </p:sp>
-      <p:graphicFrame>
-        <p:nvGraphicFramePr>
+      <p:sp>
+        <p:nvSpPr>
           <p:cNvPr id="2" name="">
             <a:extLst xmlns:a="http://schemas.openxmlformats.org/drawingml/2006/main">
               <a:ext uri="{FF2B5EF4-FFF2-40B4-BE49-F238E27FC236}">
-                <a16:creationId xmlns:a16="http://schemas.microsoft.com/office/drawing/2014/main" id="{98945E39-FAEE-481C-AF21-88B19A0AE9F7}"/>
-              </a:ext>
-            </a:extLst>
-          </p:cNvPr>
-          <p:cNvGraphicFramePr/>
-          <p:nvPr/>
-        </p:nvGraphicFramePr>
-        <p:xfrm>
-          <a:off xmlns:a="http://schemas.openxmlformats.org/drawingml/2006/main" x="609600" y="1619250"/>
-          <a:ext xmlns:a="http://schemas.openxmlformats.org/drawingml/2006/main" cx="10972800" cy="3333750"/>
-        </p:xfrm>
-        <a:graphic xmlns:a="http://schemas.openxmlformats.org/drawingml/2006/main">
-          <a:graphicData uri="http://schemas.openxmlformats.org/drawingml/2006/table">
-            <a:tbl>
-              <a:tblPr/>
-              <a:tblGrid>
-                <a:gridCol w="3048000"/>
-                <a:gridCol w="4191000"/>
-                <a:gridCol w="3733800"/>
-              </a:tblGrid>
-              <a:tr h="833438">
-                <a:tc>
-                  <a:txBody>
-                    <a:bodyPr/>
-                    <a:lstStyle/>
-                    <a:p>
-                      <a:r>
-                        <a:rPr sz="1800" b="1">
-                          <a:solidFill>
-                            <a:srgbClr val="FFFFFF"/>
-                          </a:solidFill>
-                          <a:latin typeface="Arial"/>
-                          <a:ea typeface="Arial"/>
-                          <a:cs typeface="Arial"/>
-                        </a:rPr>
-                        <a:t>Contract</a:t>
-                      </a:r>
-                    </a:p>
-                  </a:txBody>
-                  <a:tcPr marL="91440" marR="91440" marT="45720" marB="45720">
-                    <a:solidFill>
-                      <a:srgbClr val="173F50"/>
-                    </a:solidFill>
-                  </a:tcPr>
-                </a:tc>
-                <a:tc>
-                  <a:txBody>
-                    <a:bodyPr/>
-                    <a:lstStyle/>
-                    <a:p>
-                      <a:r>
-                        <a:rPr sz="1800" b="1">
-                          <a:solidFill>
-                            <a:srgbClr val="FFFFFF"/>
-                          </a:solidFill>
-                          <a:latin typeface="Arial"/>
-                          <a:ea typeface="Arial"/>
-                          <a:cs typeface="Arial"/>
-                        </a:rPr>
-                        <a:t>Responsibility</a:t>
-                      </a:r>
-                    </a:p>
-                  </a:txBody>
-                  <a:tcPr marL="91440" marR="91440" marT="45720" marB="45720">
-                    <a:solidFill>
-                      <a:srgbClr val="173F50"/>
-                    </a:solidFill>
-                  </a:tcPr>
-                </a:tc>
-                <a:tc>
-                  <a:txBody>
-                    <a:bodyPr/>
-                    <a:lstStyle/>
-                    <a:p>
-                      <a:r>
-                        <a:rPr sz="1800" b="1">
-                          <a:solidFill>
-                            <a:srgbClr val="FFFFFF"/>
-                          </a:solidFill>
-                          <a:latin typeface="Arial"/>
-                          <a:ea typeface="Arial"/>
-                          <a:cs typeface="Arial"/>
-                        </a:rPr>
-                        <a:t>Calls</a:t>
-                      </a:r>
-                    </a:p>
-                  </a:txBody>
-                  <a:tcPr marL="91440" marR="91440" marT="45720" marB="45720">
-                    <a:solidFill>
-                      <a:srgbClr val="173F50"/>
-                    </a:solidFill>
-                  </a:tcPr>
-                </a:tc>
-              </a:tr>
-              <a:tr h="833438">
-                <a:tc>
-                  <a:txBody>
-                    <a:bodyPr/>
-                    <a:lstStyle/>
-                    <a:p>
-                      <a:r>
-                        <a:rPr sz="1800" b="0">
-                          <a:solidFill>
-                            <a:srgbClr val="193640"/>
-                          </a:solidFill>
-                          <a:latin typeface="Arial"/>
-                          <a:ea typeface="Arial"/>
-                          <a:cs typeface="Arial"/>
-                        </a:rPr>
-                        <a:t>PortfolioVault</a:t>
-                      </a:r>
-                    </a:p>
-                  </a:txBody>
-                  <a:tcPr marL="91440" marR="91440" marT="45720" marB="45720">
-                    <a:solidFill>
-                      <a:srgbClr val="FFFFFF"/>
-                    </a:solidFill>
-                  </a:tcPr>
-                </a:tc>
-                <a:tc>
-                  <a:txBody>
-                    <a:bodyPr/>
-                    <a:lstStyle/>
-                    <a:p>
-                      <a:r>
-                        <a:rPr sz="1800" b="0">
-                          <a:solidFill>
-                            <a:srgbClr val="193640"/>
-                          </a:solidFill>
-                          <a:latin typeface="Arial"/>
-                          <a:ea typeface="Arial"/>
-                          <a:cs typeface="Arial"/>
-                        </a:rPr>
-                        <a:t>Custody and share accounting</a:t>
-                      </a:r>
-                    </a:p>
-                  </a:txBody>
-                  <a:tcPr marL="91440" marR="91440" marT="45720" marB="45720">
-                    <a:solidFill>
-                      <a:srgbClr val="FFFFFF"/>
-                    </a:solidFill>
-                  </a:tcPr>
-                </a:tc>
-                <a:tc>
-                  <a:txBody>
-                    <a:bodyPr/>
-                    <a:lstStyle/>
-                    <a:p>
-                      <a:r>
-                        <a:rPr sz="1800" b="0">
-                          <a:solidFill>
-                            <a:srgbClr val="193640"/>
-                          </a:solidFill>
-                          <a:latin typeface="Arial"/>
-                          <a:ea typeface="Arial"/>
-                          <a:cs typeface="Arial"/>
-                        </a:rPr>
-                        <a:t>StrategyEngine</a:t>
-                      </a:r>
-                    </a:p>
-                    <a:p>
-                      <a:r>
-                        <a:rPr sz="1800" b="0">
-                          <a:solidFill>
-                            <a:srgbClr val="193640"/>
-                          </a:solidFill>
-                          <a:latin typeface="Arial"/>
-                          <a:ea typeface="Arial"/>
-                          <a:cs typeface="Arial"/>
-                        </a:rPr>
-                        <a:t>RiskManager / MockExchange</a:t>
-                      </a:r>
-                    </a:p>
-                  </a:txBody>
-                  <a:tcPr marL="91440" marR="91440" marT="45720" marB="45720">
-                    <a:solidFill>
-                      <a:srgbClr val="FFFFFF"/>
-                    </a:solidFill>
-                  </a:tcPr>
-                </a:tc>
-              </a:tr>
-              <a:tr h="833438">
-                <a:tc>
-                  <a:txBody>
-                    <a:bodyPr/>
-                    <a:lstStyle/>
-                    <a:p>
-                      <a:r>
-                        <a:rPr sz="1800" b="0">
-                          <a:solidFill>
-                            <a:srgbClr val="193640"/>
-                          </a:solidFill>
-                          <a:latin typeface="Arial"/>
-                          <a:ea typeface="Arial"/>
-                          <a:cs typeface="Arial"/>
-                        </a:rPr>
-                        <a:t>StrategyEngine</a:t>
-                      </a:r>
-                    </a:p>
-                  </a:txBody>
-                  <a:tcPr marL="91440" marR="91440" marT="45720" marB="45720">
-                    <a:solidFill>
-                      <a:srgbClr val="F1F5F6"/>
-                    </a:solidFill>
-                  </a:tcPr>
-                </a:tc>
-                <a:tc>
-                  <a:txBody>
-                    <a:bodyPr/>
-                    <a:lstStyle/>
-                    <a:p>
-                      <a:r>
-                        <a:rPr sz="1800" b="0">
-                          <a:solidFill>
-                            <a:srgbClr val="193640"/>
-                          </a:solidFill>
-                          <a:latin typeface="Arial"/>
-                          <a:ea typeface="Arial"/>
-                          <a:cs typeface="Arial"/>
-                        </a:rPr>
-                        <a:t>Allocation rule and parameters</a:t>
-                      </a:r>
-                    </a:p>
-                  </a:txBody>
-                  <a:tcPr marL="91440" marR="91440" marT="45720" marB="45720">
-                    <a:solidFill>
-                      <a:srgbClr val="F1F5F6"/>
-                    </a:solidFill>
-                  </a:tcPr>
-                </a:tc>
-                <a:tc>
-                  <a:txBody>
-                    <a:bodyPr/>
-                    <a:lstStyle/>
-                    <a:p>
-                      <a:r>
-                        <a:rPr sz="1800" b="0">
-                          <a:solidFill>
-                            <a:srgbClr val="193640"/>
-                          </a:solidFill>
-                          <a:latin typeface="Arial"/>
-                          <a:ea typeface="Arial"/>
-                          <a:cs typeface="Arial"/>
-                        </a:rPr>
-                        <a:t>RiskManager.validate</a:t>
-                      </a:r>
-                    </a:p>
-                  </a:txBody>
-                  <a:tcPr marL="91440" marR="91440" marT="45720" marB="45720">
-                    <a:solidFill>
-                      <a:srgbClr val="F1F5F6"/>
-                    </a:solidFill>
-                  </a:tcPr>
-                </a:tc>
-              </a:tr>
-              <a:tr h="833438">
-                <a:tc>
-                  <a:txBody>
-                    <a:bodyPr/>
-                    <a:lstStyle/>
-                    <a:p>
-                      <a:r>
-                        <a:rPr sz="1800" b="0">
-                          <a:solidFill>
-                            <a:srgbClr val="193640"/>
-                          </a:solidFill>
-                          <a:latin typeface="Arial"/>
-                          <a:ea typeface="Arial"/>
-                          <a:cs typeface="Arial"/>
-                        </a:rPr>
-                        <a:t>RiskManager</a:t>
-                      </a:r>
-                    </a:p>
-                  </a:txBody>
-                  <a:tcPr marL="91440" marR="91440" marT="45720" marB="45720">
-                    <a:solidFill>
-                      <a:srgbClr val="FFFFFF"/>
-                    </a:solidFill>
-                  </a:tcPr>
-                </a:tc>
-                <a:tc>
-                  <a:txBody>
-                    <a:bodyPr/>
-                    <a:lstStyle/>
-                    <a:p>
-                      <a:r>
-                        <a:rPr sz="1800" b="0">
-                          <a:solidFill>
-                            <a:srgbClr val="193640"/>
-                          </a:solidFill>
-                          <a:latin typeface="Arial"/>
-                          <a:ea typeface="Arial"/>
-                          <a:cs typeface="Arial"/>
-                        </a:rPr>
-                        <a:t>Roles, prices and policy</a:t>
-                      </a:r>
-                    </a:p>
-                  </a:txBody>
-                  <a:tcPr marL="91440" marR="91440" marT="45720" marB="45720">
-                    <a:solidFill>
-                      <a:srgbClr val="FFFFFF"/>
-                    </a:solidFill>
-                  </a:tcPr>
-                </a:tc>
-                <a:tc>
-                  <a:txBody>
-                    <a:bodyPr/>
-                    <a:lstStyle/>
-                    <a:p>
-                      <a:r>
-                        <a:rPr sz="1800" b="0">
-                          <a:solidFill>
-                            <a:srgbClr val="193640"/>
-                          </a:solidFill>
-                          <a:latin typeface="Arial"/>
-                          <a:ea typeface="Arial"/>
-                          <a:cs typeface="Arial"/>
-                        </a:rPr>
-                        <a:t>Known token configuration</a:t>
-                      </a:r>
-                    </a:p>
-                  </a:txBody>
-                  <a:tcPr marL="91440" marR="91440" marT="45720" marB="45720">
-                    <a:solidFill>
-                      <a:srgbClr val="FFFFFF"/>
-                    </a:solidFill>
-                  </a:tcPr>
-                </a:tc>
-              </a:tr>
-            </a:tbl>
-          </a:graphicData>
-        </a:graphic>
-      </p:graphicFrame>
-      <p:sp>
-        <p:nvSpPr>
-          <p:cNvPr id="3" name="">
-            <a:extLst xmlns:a="http://schemas.openxmlformats.org/drawingml/2006/main">
-              <a:ext uri="{FF2B5EF4-FFF2-40B4-BE49-F238E27FC236}">
-                <a16:creationId xmlns:a16="http://schemas.microsoft.com/office/drawing/2014/main" id="{E18943B0-117D-433A-ACC0-BE0B1F38D915}"/>
+                <a16:creationId xmlns:a16="http://schemas.microsoft.com/office/drawing/2014/main" id="{906499AF-5B75-4CDF-9CF4-CAE4A29F3C5E}"/>
               </a:ext>
             </a:extLst>
           </p:cNvPr>
@@ -8168,8 +8433,8 @@
         </p:nvSpPr>
         <p:spPr>
           <a:xfrm xmlns:a="http://schemas.openxmlformats.org/drawingml/2006/main">
-            <a:off x="609600" y="5429250"/>
-            <a:ext cx="10972800" cy="762000"/>
+            <a:off x="552450" y="6477000"/>
+            <a:ext cx="11087100" cy="266700"/>
           </a:xfrm>
           <a:prstGeom xmlns:a="http://schemas.openxmlformats.org/drawingml/2006/main" prst="rect">
             <a:avLst/>
@@ -8183,7 +8448,7 @@
           <a:bodyPr xmlns:a="http://schemas.openxmlformats.org/drawingml/2006/main"/>
           <a:lstStyle xmlns:a="http://schemas.openxmlformats.org/drawingml/2006/main">
             <a:defPPr>
-              <a:defRPr sz="2100" b="0">
+              <a:defRPr sz="1275" b="0">
                 <a:solidFill>
                   <a:srgbClr val="173F50"/>
                 </a:solidFill>
@@ -8195,7 +8460,7 @@
           </a:lstStyle>
           <a:p xmlns:a="http://schemas.openxmlformats.org/drawingml/2006/main">
             <a:pPr>
-              <a:defRPr sz="2100" b="0">
+              <a:defRPr sz="1275" b="0">
                 <a:solidFill>
                   <a:srgbClr val="173F50"/>
                 </a:solidFill>
@@ -8205,7 +8470,7 @@
               </a:defRPr>
             </a:pPr>
             <a:r>
-              <a:rPr sz="2100" b="0">
+              <a:rPr sz="1275" b="0">
                 <a:solidFill>
                   <a:srgbClr val="173F50"/>
                 </a:solidFill>
@@ -8213,15 +8478,43 @@
                 <a:ea typeface="Arial"/>
                 <a:cs typeface="Arial"/>
               </a:rPr>
-              <a:t>The public API prepares unsigned transactions. MetaMask signs them.</a:t>
+              <a:t>AlphaVault  /  Du zhuotong  /  3 of 12</a:t>
             </a:r>
           </a:p>
         </p:txBody>
       </p:sp>
+      <p:pic>
+        <p:nvPicPr>
+          <p:cNvPr id="3" name="">
+            <a:extLst xmlns:a="http://schemas.openxmlformats.org/drawingml/2006/main">
+              <a:ext uri="{FF2B5EF4-FFF2-40B4-BE49-F238E27FC236}">
+                <a16:creationId xmlns:a16="http://schemas.microsoft.com/office/drawing/2014/main" id="{D48F032B-528F-4FA1-80ED-D55E42DA0866}"/>
+              </a:ext>
+            </a:extLst>
+          </p:cNvPr>
+          <p:cNvPicPr>
+            <a:picLocks xmlns:a="http://schemas.openxmlformats.org/drawingml/2006/main" noChangeAspect="1"/>
+          </p:cNvPicPr>
+          <p:nvPr/>
+        </p:nvPicPr>
+        <p:blipFill>
+          <a:blip xmlns:r="http://schemas.openxmlformats.org/officeDocument/2006/relationships" xmlns:a="http://schemas.openxmlformats.org/drawingml/2006/main" r:embed="R87e27e491f674b9d"/>
+          <a:stretch xmlns:a="http://schemas.openxmlformats.org/drawingml/2006/main"/>
+        </p:blipFill>
+        <p:spPr>
+          <a:xfrm xmlns:a="http://schemas.openxmlformats.org/drawingml/2006/main">
+            <a:off x="1954306" y="1190625"/>
+            <a:ext cx="8283388" cy="5029200"/>
+          </a:xfrm>
+          <a:prstGeom xmlns:a="http://schemas.openxmlformats.org/drawingml/2006/main" prst="rect">
+            <a:avLst/>
+          </a:prstGeom>
+        </p:spPr>
+      </p:pic>
     </p:spTree>
     <p:extLst>
       <p:ext uri="{BB962C8B-B14F-4D97-AF65-F5344CB8AC3E}">
-        <p14:creationId xmlns:p14="http://schemas.microsoft.com/office/powerpoint/2010/main" val="440581810"/>
+        <p14:creationId xmlns:p14="http://schemas.microsoft.com/office/powerpoint/2010/main" val="1145282952"/>
       </p:ext>
     </p:extLst>
   </p:cSld>
@@ -8252,7 +8545,7 @@
           <p:cNvPr id="4" name="">
             <a:extLst xmlns:a="http://schemas.openxmlformats.org/drawingml/2006/main">
               <a:ext uri="{FF2B5EF4-FFF2-40B4-BE49-F238E27FC236}">
-                <a16:creationId xmlns:a16="http://schemas.microsoft.com/office/drawing/2014/main" id="{F084107F-D092-4A15-A403-BE3127D55ADA}"/>
+                <a16:creationId xmlns:a16="http://schemas.microsoft.com/office/drawing/2014/main" id="{71116669-594C-4EC0-B60C-CD025521273B}"/>
               </a:ext>
             </a:extLst>
           </p:cNvPr>
@@ -8263,8 +8556,8 @@
         </p:nvSpPr>
         <p:spPr>
           <a:xfrm xmlns:a="http://schemas.openxmlformats.org/drawingml/2006/main">
-            <a:off x="609600" y="457200"/>
-            <a:ext cx="10972800" cy="933450"/>
+            <a:off x="552450" y="333375"/>
+            <a:ext cx="11087100" cy="838200"/>
           </a:xfrm>
           <a:prstGeom xmlns:a="http://schemas.openxmlformats.org/drawingml/2006/main" prst="rect">
             <a:avLst/>
@@ -8278,9 +8571,9 @@
           <a:bodyPr xmlns:a="http://schemas.openxmlformats.org/drawingml/2006/main"/>
           <a:lstStyle xmlns:a="http://schemas.openxmlformats.org/drawingml/2006/main">
             <a:defPPr>
-              <a:defRPr sz="3300" b="1">
-                <a:solidFill>
-                  <a:srgbClr val="123442"/>
+              <a:defRPr sz="3150" b="1">
+                <a:solidFill>
+                  <a:srgbClr val="173F50"/>
                 </a:solidFill>
                 <a:latin typeface="Arial"/>
                 <a:ea typeface="Arial"/>
@@ -8290,9 +8583,9 @@
           </a:lstStyle>
           <a:p xmlns:a="http://schemas.openxmlformats.org/drawingml/2006/main">
             <a:pPr>
-              <a:defRPr sz="3300" b="1">
-                <a:solidFill>
-                  <a:srgbClr val="123442"/>
+              <a:defRPr sz="3150" b="1">
+                <a:solidFill>
+                  <a:srgbClr val="173F50"/>
                 </a:solidFill>
                 <a:latin typeface="Arial"/>
                 <a:ea typeface="Arial"/>
@@ -8300,253 +8593,25 @@
               </a:defRPr>
             </a:pPr>
             <a:r>
-              <a:rPr sz="3300" b="1">
-                <a:solidFill>
-                  <a:srgbClr val="123442"/>
+              <a:rPr sz="3150" b="1">
+                <a:solidFill>
+                  <a:srgbClr val="173F50"/>
                 </a:solidFill>
                 <a:latin typeface="Arial"/>
                 <a:ea typeface="Arial"/>
                 <a:cs typeface="Arial"/>
               </a:rPr>
-              <a:t>Allocation strategies</a:t>
+              <a:t>Contract interaction</a:t>
             </a:r>
           </a:p>
         </p:txBody>
       </p:sp>
-      <p:graphicFrame>
-        <p:nvGraphicFramePr>
+      <p:sp>
+        <p:nvSpPr>
           <p:cNvPr id="2" name="">
             <a:extLst xmlns:a="http://schemas.openxmlformats.org/drawingml/2006/main">
               <a:ext uri="{FF2B5EF4-FFF2-40B4-BE49-F238E27FC236}">
-                <a16:creationId xmlns:a16="http://schemas.microsoft.com/office/drawing/2014/main" id="{BBA3FF65-1F04-4F5C-B765-EE9762ACACAE}"/>
-              </a:ext>
-            </a:extLst>
-          </p:cNvPr>
-          <p:cNvGraphicFramePr/>
-          <p:nvPr/>
-        </p:nvGraphicFramePr>
-        <p:xfrm>
-          <a:off xmlns:a="http://schemas.openxmlformats.org/drawingml/2006/main" x="609600" y="1714500"/>
-          <a:ext xmlns:a="http://schemas.openxmlformats.org/drawingml/2006/main" cx="10972800" cy="2952750"/>
-        </p:xfrm>
-        <a:graphic xmlns:a="http://schemas.openxmlformats.org/drawingml/2006/main">
-          <a:graphicData uri="http://schemas.openxmlformats.org/drawingml/2006/table">
-            <a:tbl>
-              <a:tblPr/>
-              <a:tblGrid>
-                <a:gridCol w="3238500"/>
-                <a:gridCol w="7734300"/>
-              </a:tblGrid>
-              <a:tr h="738188">
-                <a:tc>
-                  <a:txBody>
-                    <a:bodyPr/>
-                    <a:lstStyle/>
-                    <a:p>
-                      <a:r>
-                        <a:rPr sz="1800" b="1">
-                          <a:solidFill>
-                            <a:srgbClr val="FFFFFF"/>
-                          </a:solidFill>
-                          <a:latin typeface="Arial"/>
-                          <a:ea typeface="Arial"/>
-                          <a:cs typeface="Arial"/>
-                        </a:rPr>
-                        <a:t>Rule</a:t>
-                      </a:r>
-                    </a:p>
-                  </a:txBody>
-                  <a:tcPr marL="91440" marR="91440" marT="45720" marB="45720">
-                    <a:solidFill>
-                      <a:srgbClr val="173F50"/>
-                    </a:solidFill>
-                  </a:tcPr>
-                </a:tc>
-                <a:tc>
-                  <a:txBody>
-                    <a:bodyPr/>
-                    <a:lstStyle/>
-                    <a:p>
-                      <a:r>
-                        <a:rPr sz="1800" b="1">
-                          <a:solidFill>
-                            <a:srgbClr val="FFFFFF"/>
-                          </a:solidFill>
-                          <a:latin typeface="Arial"/>
-                          <a:ea typeface="Arial"/>
-                          <a:cs typeface="Arial"/>
-                        </a:rPr>
-                        <a:t>Allocation behavior</a:t>
-                      </a:r>
-                    </a:p>
-                  </a:txBody>
-                  <a:tcPr marL="91440" marR="91440" marT="45720" marB="45720">
-                    <a:solidFill>
-                      <a:srgbClr val="173F50"/>
-                    </a:solidFill>
-                  </a:tcPr>
-                </a:tc>
-              </a:tr>
-              <a:tr h="738188">
-                <a:tc>
-                  <a:txBody>
-                    <a:bodyPr/>
-                    <a:lstStyle/>
-                    <a:p>
-                      <a:r>
-                        <a:rPr sz="1800" b="0">
-                          <a:solidFill>
-                            <a:srgbClr val="193640"/>
-                          </a:solidFill>
-                          <a:latin typeface="Arial"/>
-                          <a:ea typeface="Arial"/>
-                          <a:cs typeface="Arial"/>
-                        </a:rPr>
-                        <a:t>Equal Weight</a:t>
-                      </a:r>
-                    </a:p>
-                  </a:txBody>
-                  <a:tcPr marL="91440" marR="91440" marT="45720" marB="45720">
-                    <a:solidFill>
-                      <a:srgbClr val="FFFFFF"/>
-                    </a:solidFill>
-                  </a:tcPr>
-                </a:tc>
-                <a:tc>
-                  <a:txBody>
-                    <a:bodyPr/>
-                    <a:lstStyle/>
-                    <a:p>
-                      <a:r>
-                        <a:rPr sz="1800" b="0">
-                          <a:solidFill>
-                            <a:srgbClr val="193640"/>
-                          </a:solidFill>
-                          <a:latin typeface="Arial"/>
-                          <a:ea typeface="Arial"/>
-                          <a:cs typeface="Arial"/>
-                        </a:rPr>
-                        <a:t>Keep cash buffer, split remaining exposure equally</a:t>
-                      </a:r>
-                    </a:p>
-                  </a:txBody>
-                  <a:tcPr marL="91440" marR="91440" marT="45720" marB="45720">
-                    <a:solidFill>
-                      <a:srgbClr val="FFFFFF"/>
-                    </a:solidFill>
-                  </a:tcPr>
-                </a:tc>
-              </a:tr>
-              <a:tr h="738188">
-                <a:tc>
-                  <a:txBody>
-                    <a:bodyPr/>
-                    <a:lstStyle/>
-                    <a:p>
-                      <a:r>
-                        <a:rPr sz="1800" b="0">
-                          <a:solidFill>
-                            <a:srgbClr val="193640"/>
-                          </a:solidFill>
-                          <a:latin typeface="Arial"/>
-                          <a:ea typeface="Arial"/>
-                          <a:cs typeface="Arial"/>
-                        </a:rPr>
-                        <a:t>Momentum</a:t>
-                      </a:r>
-                    </a:p>
-                  </a:txBody>
-                  <a:tcPr marL="91440" marR="91440" marT="45720" marB="45720">
-                    <a:solidFill>
-                      <a:srgbClr val="F1F5F6"/>
-                    </a:solidFill>
-                  </a:tcPr>
-                </a:tc>
-                <a:tc>
-                  <a:txBody>
-                    <a:bodyPr/>
-                    <a:lstStyle/>
-                    <a:p>
-                      <a:r>
-                        <a:rPr sz="1800" b="0">
-                          <a:solidFill>
-                            <a:srgbClr val="193640"/>
-                          </a:solidFill>
-                          <a:latin typeface="Arial"/>
-                          <a:ea typeface="Arial"/>
-                          <a:cs typeface="Arial"/>
-                        </a:rPr>
-                        <a:t>75/25 risky tilt, or all cash if both signals are nonpositive</a:t>
-                      </a:r>
-                    </a:p>
-                  </a:txBody>
-                  <a:tcPr marL="91440" marR="91440" marT="45720" marB="45720">
-                    <a:solidFill>
-                      <a:srgbClr val="F1F5F6"/>
-                    </a:solidFill>
-                  </a:tcPr>
-                </a:tc>
-              </a:tr>
-              <a:tr h="738188">
-                <a:tc>
-                  <a:txBody>
-                    <a:bodyPr/>
-                    <a:lstStyle/>
-                    <a:p>
-                      <a:r>
-                        <a:rPr sz="1800" b="0">
-                          <a:solidFill>
-                            <a:srgbClr val="193640"/>
-                          </a:solidFill>
-                          <a:latin typeface="Arial"/>
-                          <a:ea typeface="Arial"/>
-                          <a:cs typeface="Arial"/>
-                        </a:rPr>
-                        <a:t>Volatility Target</a:t>
-                      </a:r>
-                    </a:p>
-                  </a:txBody>
-                  <a:tcPr marL="91440" marR="91440" marT="45720" marB="45720">
-                    <a:solidFill>
-                      <a:srgbClr val="FFFFFF"/>
-                    </a:solidFill>
-                  </a:tcPr>
-                </a:tc>
-                <a:tc>
-                  <a:txBody>
-                    <a:bodyPr/>
-                    <a:lstStyle/>
-                    <a:p>
-                      <a:r>
-                        <a:rPr sz="1800" b="0">
-                          <a:solidFill>
-                            <a:srgbClr val="193640"/>
-                          </a:solidFill>
-                          <a:latin typeface="Arial"/>
-                          <a:ea typeface="Arial"/>
-                          <a:cs typeface="Arial"/>
-                        </a:rPr>
-                        <a:t>Reduce total risky exposure when the volatility proxy is high</a:t>
-                      </a:r>
-                    </a:p>
-                  </a:txBody>
-                  <a:tcPr marL="91440" marR="91440" marT="45720" marB="45720">
-                    <a:solidFill>
-                      <a:srgbClr val="FFFFFF"/>
-                    </a:solidFill>
-                  </a:tcPr>
-                </a:tc>
-              </a:tr>
-            </a:tbl>
-          </a:graphicData>
-        </a:graphic>
-      </p:graphicFrame>
-      <p:sp>
-        <p:nvSpPr>
-          <p:cNvPr id="3" name="">
-            <a:extLst xmlns:a="http://schemas.openxmlformats.org/drawingml/2006/main">
-              <a:ext uri="{FF2B5EF4-FFF2-40B4-BE49-F238E27FC236}">
-                <a16:creationId xmlns:a16="http://schemas.microsoft.com/office/drawing/2014/main" id="{16DF749F-96DF-43D4-9968-692A4199F2C5}"/>
+                <a16:creationId xmlns:a16="http://schemas.microsoft.com/office/drawing/2014/main" id="{AFF06FC1-932F-482C-9882-6B1819D330F0}"/>
               </a:ext>
             </a:extLst>
           </p:cNvPr>
@@ -8557,8 +8622,8 @@
         </p:nvSpPr>
         <p:spPr>
           <a:xfrm xmlns:a="http://schemas.openxmlformats.org/drawingml/2006/main">
-            <a:off x="609600" y="5381625"/>
-            <a:ext cx="10972800" cy="809625"/>
+            <a:off x="552450" y="6477000"/>
+            <a:ext cx="11087100" cy="266700"/>
           </a:xfrm>
           <a:prstGeom xmlns:a="http://schemas.openxmlformats.org/drawingml/2006/main" prst="rect">
             <a:avLst/>
@@ -8572,7 +8637,7 @@
           <a:bodyPr xmlns:a="http://schemas.openxmlformats.org/drawingml/2006/main"/>
           <a:lstStyle xmlns:a="http://schemas.openxmlformats.org/drawingml/2006/main">
             <a:defPPr>
-              <a:defRPr sz="2250" b="0">
+              <a:defRPr sz="1275" b="0">
                 <a:solidFill>
                   <a:srgbClr val="173F50"/>
                 </a:solidFill>
@@ -8584,7 +8649,7 @@
           </a:lstStyle>
           <a:p xmlns:a="http://schemas.openxmlformats.org/drawingml/2006/main">
             <a:pPr>
-              <a:defRPr sz="2250" b="0">
+              <a:defRPr sz="1275" b="0">
                 <a:solidFill>
                   <a:srgbClr val="173F50"/>
                 </a:solidFill>
@@ -8594,7 +8659,7 @@
               </a:defRPr>
             </a:pPr>
             <a:r>
-              <a:rPr sz="2250" b="0">
+              <a:rPr sz="1275" b="0">
                 <a:solidFill>
                   <a:srgbClr val="173F50"/>
                 </a:solidFill>
@@ -8602,15 +8667,43 @@
                 <a:ea typeface="Arial"/>
                 <a:cs typeface="Arial"/>
               </a:rPr>
-              <a:t>Example Momentum target: 20% mUSD, 60% mETH, 20% mBTC</a:t>
+              <a:t>AlphaVault  /  Du zhuotong  /  4 of 12</a:t>
             </a:r>
           </a:p>
         </p:txBody>
       </p:sp>
+      <p:pic>
+        <p:nvPicPr>
+          <p:cNvPr id="3" name="">
+            <a:extLst xmlns:a="http://schemas.openxmlformats.org/drawingml/2006/main">
+              <a:ext uri="{FF2B5EF4-FFF2-40B4-BE49-F238E27FC236}">
+                <a16:creationId xmlns:a16="http://schemas.microsoft.com/office/drawing/2014/main" id="{9AFC25AE-3F76-4B10-8473-8CA9B2CFB1F6}"/>
+              </a:ext>
+            </a:extLst>
+          </p:cNvPr>
+          <p:cNvPicPr>
+            <a:picLocks xmlns:a="http://schemas.openxmlformats.org/drawingml/2006/main" noChangeAspect="1"/>
+          </p:cNvPicPr>
+          <p:nvPr/>
+        </p:nvPicPr>
+        <p:blipFill>
+          <a:blip xmlns:r="http://schemas.openxmlformats.org/officeDocument/2006/relationships" xmlns:a="http://schemas.openxmlformats.org/drawingml/2006/main" r:embed="Rce3041c29e96447d"/>
+          <a:stretch xmlns:a="http://schemas.openxmlformats.org/drawingml/2006/main"/>
+        </p:blipFill>
+        <p:spPr>
+          <a:xfrm xmlns:a="http://schemas.openxmlformats.org/drawingml/2006/main">
+            <a:off x="2383255" y="1190625"/>
+            <a:ext cx="7425489" cy="5038725"/>
+          </a:xfrm>
+          <a:prstGeom xmlns:a="http://schemas.openxmlformats.org/drawingml/2006/main" prst="rect">
+            <a:avLst/>
+          </a:prstGeom>
+        </p:spPr>
+      </p:pic>
     </p:spTree>
     <p:extLst>
       <p:ext uri="{BB962C8B-B14F-4D97-AF65-F5344CB8AC3E}">
-        <p14:creationId xmlns:p14="http://schemas.microsoft.com/office/powerpoint/2010/main" val="1953545721"/>
+        <p14:creationId xmlns:p14="http://schemas.microsoft.com/office/powerpoint/2010/main" val="273336503"/>
       </p:ext>
     </p:extLst>
   </p:cSld>
@@ -8638,10 +8731,10 @@
       </p:grpSpPr>
       <p:sp>
         <p:nvSpPr>
-          <p:cNvPr id="7" name="">
+          <p:cNvPr id="4" name="">
             <a:extLst xmlns:a="http://schemas.openxmlformats.org/drawingml/2006/main">
               <a:ext uri="{FF2B5EF4-FFF2-40B4-BE49-F238E27FC236}">
-                <a16:creationId xmlns:a16="http://schemas.microsoft.com/office/drawing/2014/main" id="{2292F441-C022-4359-AF41-4772C790050B}"/>
+                <a16:creationId xmlns:a16="http://schemas.microsoft.com/office/drawing/2014/main" id="{0ED6394C-7667-41B9-992C-4D5FFF7E897D}"/>
               </a:ext>
             </a:extLst>
           </p:cNvPr>
@@ -8652,8 +8745,8 @@
         </p:nvSpPr>
         <p:spPr>
           <a:xfrm xmlns:a="http://schemas.openxmlformats.org/drawingml/2006/main">
-            <a:off x="609600" y="457200"/>
-            <a:ext cx="10972800" cy="933450"/>
+            <a:off x="552450" y="333375"/>
+            <a:ext cx="11087100" cy="838200"/>
           </a:xfrm>
           <a:prstGeom xmlns:a="http://schemas.openxmlformats.org/drawingml/2006/main" prst="rect">
             <a:avLst/>
@@ -8667,9 +8760,9 @@
           <a:bodyPr xmlns:a="http://schemas.openxmlformats.org/drawingml/2006/main"/>
           <a:lstStyle xmlns:a="http://schemas.openxmlformats.org/drawingml/2006/main">
             <a:defPPr>
-              <a:defRPr sz="3300" b="1">
-                <a:solidFill>
-                  <a:srgbClr val="123442"/>
+              <a:defRPr sz="3150" b="1">
+                <a:solidFill>
+                  <a:srgbClr val="173F50"/>
                 </a:solidFill>
                 <a:latin typeface="Arial"/>
                 <a:ea typeface="Arial"/>
@@ -8679,9 +8772,9 @@
           </a:lstStyle>
           <a:p xmlns:a="http://schemas.openxmlformats.org/drawingml/2006/main">
             <a:pPr>
-              <a:defRPr sz="3300" b="1">
-                <a:solidFill>
-                  <a:srgbClr val="123442"/>
+              <a:defRPr sz="3150" b="1">
+                <a:solidFill>
+                  <a:srgbClr val="173F50"/>
                 </a:solidFill>
                 <a:latin typeface="Arial"/>
                 <a:ea typeface="Arial"/>
@@ -8689,15 +8782,15 @@
               </a:defRPr>
             </a:pPr>
             <a:r>
-              <a:rPr sz="3300" b="1">
-                <a:solidFill>
-                  <a:srgbClr val="123442"/>
+              <a:rPr sz="3150" b="1">
+                <a:solidFill>
+                  <a:srgbClr val="173F50"/>
                 </a:solidFill>
                 <a:latin typeface="Arial"/>
                 <a:ea typeface="Arial"/>
                 <a:cs typeface="Arial"/>
               </a:rPr>
-              <a:t>Risk limits and investor exit</a:t>
+              <a:t>Persistent data model</a:t>
             </a:r>
           </a:p>
         </p:txBody>
@@ -8707,7 +8800,7 @@
           <p:cNvPr id="2" name="">
             <a:extLst xmlns:a="http://schemas.openxmlformats.org/drawingml/2006/main">
               <a:ext uri="{FF2B5EF4-FFF2-40B4-BE49-F238E27FC236}">
-                <a16:creationId xmlns:a16="http://schemas.microsoft.com/office/drawing/2014/main" id="{2EA1C4F6-07CD-41EE-9F28-877B07EA41AD}"/>
+                <a16:creationId xmlns:a16="http://schemas.microsoft.com/office/drawing/2014/main" id="{06DA32B4-BAC0-4FB3-8E90-16CFBFCFF56F}"/>
               </a:ext>
             </a:extLst>
           </p:cNvPr>
@@ -8718,8 +8811,8 @@
         </p:nvSpPr>
         <p:spPr>
           <a:xfrm xmlns:a="http://schemas.openxmlformats.org/drawingml/2006/main">
-            <a:off x="609600" y="1733550"/>
-            <a:ext cx="4953000" cy="523875"/>
+            <a:off x="552450" y="6477000"/>
+            <a:ext cx="11087100" cy="266700"/>
           </a:xfrm>
           <a:prstGeom xmlns:a="http://schemas.openxmlformats.org/drawingml/2006/main" prst="rect">
             <a:avLst/>
@@ -8733,9 +8826,9 @@
           <a:bodyPr xmlns:a="http://schemas.openxmlformats.org/drawingml/2006/main"/>
           <a:lstStyle xmlns:a="http://schemas.openxmlformats.org/drawingml/2006/main">
             <a:defPPr>
-              <a:defRPr sz="2400" b="1">
-                <a:solidFill>
-                  <a:srgbClr val="123442"/>
+              <a:defRPr sz="1275" b="0">
+                <a:solidFill>
+                  <a:srgbClr val="173F50"/>
                 </a:solidFill>
                 <a:latin typeface="Arial"/>
                 <a:ea typeface="Arial"/>
@@ -8745,9 +8838,9 @@
           </a:lstStyle>
           <a:p xmlns:a="http://schemas.openxmlformats.org/drawingml/2006/main">
             <a:pPr>
-              <a:defRPr sz="2400" b="1">
-                <a:solidFill>
-                  <a:srgbClr val="123442"/>
+              <a:defRPr sz="1275" b="0">
+                <a:solidFill>
+                  <a:srgbClr val="173F50"/>
                 </a:solidFill>
                 <a:latin typeface="Arial"/>
                 <a:ea typeface="Arial"/>
@@ -8755,402 +8848,51 @@
               </a:defRPr>
             </a:pPr>
             <a:r>
-              <a:rPr sz="2400" b="1">
-                <a:solidFill>
-                  <a:srgbClr val="123442"/>
+              <a:rPr sz="1275" b="0">
+                <a:solidFill>
+                  <a:srgbClr val="173F50"/>
                 </a:solidFill>
                 <a:latin typeface="Arial"/>
                 <a:ea typeface="Arial"/>
                 <a:cs typeface="Arial"/>
               </a:rPr>
-              <a:t>Before trading</a:t>
+              <a:t>AlphaVault  /  Du zhuotong  /  5 of 12</a:t>
             </a:r>
           </a:p>
         </p:txBody>
       </p:sp>
-      <p:sp>
-        <p:nvSpPr>
+      <p:pic>
+        <p:nvPicPr>
           <p:cNvPr id="3" name="">
             <a:extLst xmlns:a="http://schemas.openxmlformats.org/drawingml/2006/main">
               <a:ext uri="{FF2B5EF4-FFF2-40B4-BE49-F238E27FC236}">
-                <a16:creationId xmlns:a16="http://schemas.microsoft.com/office/drawing/2014/main" id="{B1A87FE8-1982-46E9-9CEF-86B4D78F4E71}"/>
+                <a16:creationId xmlns:a16="http://schemas.microsoft.com/office/drawing/2014/main" id="{69482C5C-A948-4414-90EC-6DE1B88FC7F1}"/>
               </a:ext>
             </a:extLst>
           </p:cNvPr>
-          <p:cNvSpPr>
-            <a:spLocks xmlns:a="http://schemas.openxmlformats.org/drawingml/2006/main" noGrp="1"/>
-          </p:cNvSpPr>
+          <p:cNvPicPr>
+            <a:picLocks xmlns:a="http://schemas.openxmlformats.org/drawingml/2006/main" noChangeAspect="1"/>
+          </p:cNvPicPr>
           <p:nvPr/>
-        </p:nvSpPr>
+        </p:nvPicPr>
+        <p:blipFill>
+          <a:blip xmlns:r="http://schemas.openxmlformats.org/officeDocument/2006/relationships" xmlns:a="http://schemas.openxmlformats.org/drawingml/2006/main" r:embed="Rc3f6d6b967c74c84"/>
+          <a:stretch xmlns:a="http://schemas.openxmlformats.org/drawingml/2006/main"/>
+        </p:blipFill>
         <p:spPr>
           <a:xfrm xmlns:a="http://schemas.openxmlformats.org/drawingml/2006/main">
-            <a:off x="609600" y="2524125"/>
-            <a:ext cx="5143500" cy="2381250"/>
+            <a:off x="2667000" y="1191986"/>
+            <a:ext cx="6858000" cy="5045529"/>
           </a:xfrm>
           <a:prstGeom xmlns:a="http://schemas.openxmlformats.org/drawingml/2006/main" prst="rect">
             <a:avLst/>
           </a:prstGeom>
-          <a:noFill xmlns:a="http://schemas.openxmlformats.org/drawingml/2006/main"/>
-          <a:ln xmlns:a="http://schemas.openxmlformats.org/drawingml/2006/main" w="0">
-            <a:noFill/>
-          </a:ln>
         </p:spPr>
-        <p:txBody>
-          <a:bodyPr xmlns:a="http://schemas.openxmlformats.org/drawingml/2006/main"/>
-          <a:lstStyle xmlns:a="http://schemas.openxmlformats.org/drawingml/2006/main">
-            <a:defPPr>
-              <a:defRPr sz="2250" b="0">
-                <a:solidFill>
-                  <a:srgbClr val="173F50"/>
-                </a:solidFill>
-                <a:latin typeface="Arial"/>
-                <a:ea typeface="Arial"/>
-                <a:cs typeface="Arial"/>
-              </a:defRPr>
-            </a:defPPr>
-          </a:lstStyle>
-          <a:p xmlns:a="http://schemas.openxmlformats.org/drawingml/2006/main">
-            <a:pPr>
-              <a:defRPr sz="2250" b="0">
-                <a:solidFill>
-                  <a:srgbClr val="173F50"/>
-                </a:solidFill>
-                <a:latin typeface="Arial"/>
-                <a:ea typeface="Arial"/>
-                <a:cs typeface="Arial"/>
-              </a:defRPr>
-            </a:pPr>
-            <a:r>
-              <a:rPr sz="2250" b="0">
-                <a:solidFill>
-                  <a:srgbClr val="173F50"/>
-                </a:solidFill>
-                <a:latin typeface="Arial"/>
-                <a:ea typeface="Arial"/>
-                <a:cs typeface="Arial"/>
-              </a:rPr>
-              <a:t>Role and automation</a:t>
-            </a:r>
-          </a:p>
-          <a:p xmlns:a="http://schemas.openxmlformats.org/drawingml/2006/main">
-            <a:pPr>
-              <a:defRPr sz="2250" b="0">
-                <a:solidFill>
-                  <a:srgbClr val="173F50"/>
-                </a:solidFill>
-                <a:latin typeface="Arial"/>
-                <a:ea typeface="Arial"/>
-                <a:cs typeface="Arial"/>
-              </a:defRPr>
-            </a:pPr>
-            <a:r>
-              <a:rPr sz="2250" b="0">
-                <a:solidFill>
-                  <a:srgbClr val="173F50"/>
-                </a:solidFill>
-                <a:latin typeface="Arial"/>
-                <a:ea typeface="Arial"/>
-                <a:cs typeface="Arial"/>
-              </a:rPr>
-              <a:t>Fresh prices and enabled assets</a:t>
-            </a:r>
-          </a:p>
-          <a:p xmlns:a="http://schemas.openxmlformats.org/drawingml/2006/main">
-            <a:pPr>
-              <a:defRPr sz="2250" b="0">
-                <a:solidFill>
-                  <a:srgbClr val="173F50"/>
-                </a:solidFill>
-                <a:latin typeface="Arial"/>
-                <a:ea typeface="Arial"/>
-                <a:cs typeface="Arial"/>
-              </a:defRPr>
-            </a:pPr>
-            <a:r>
-              <a:rPr sz="2250" b="0">
-                <a:solidFill>
-                  <a:srgbClr val="173F50"/>
-                </a:solidFill>
-                <a:latin typeface="Arial"/>
-                <a:ea typeface="Arial"/>
-                <a:cs typeface="Arial"/>
-              </a:rPr>
-              <a:t>Position cap and cash floor</a:t>
-            </a:r>
-          </a:p>
-          <a:p xmlns:a="http://schemas.openxmlformats.org/drawingml/2006/main">
-            <a:pPr>
-              <a:defRPr sz="2250" b="0">
-                <a:solidFill>
-                  <a:srgbClr val="173F50"/>
-                </a:solidFill>
-                <a:latin typeface="Arial"/>
-                <a:ea typeface="Arial"/>
-                <a:cs typeface="Arial"/>
-              </a:defRPr>
-            </a:pPr>
-            <a:r>
-              <a:rPr sz="2250" b="0">
-                <a:solidFill>
-                  <a:srgbClr val="173F50"/>
-                </a:solidFill>
-                <a:latin typeface="Arial"/>
-                <a:ea typeface="Arial"/>
-                <a:cs typeface="Arial"/>
-              </a:rPr>
-              <a:t>Volatility, deadline and cooldown</a:t>
-            </a:r>
-          </a:p>
-        </p:txBody>
-      </p:sp>
-      <p:sp>
-        <p:nvSpPr>
-          <p:cNvPr id="4" name="">
-            <a:extLst xmlns:a="http://schemas.openxmlformats.org/drawingml/2006/main">
-              <a:ext uri="{FF2B5EF4-FFF2-40B4-BE49-F238E27FC236}">
-                <a16:creationId xmlns:a16="http://schemas.microsoft.com/office/drawing/2014/main" id="{000CAD36-2313-474A-B62E-DE5F0E729D3D}"/>
-              </a:ext>
-            </a:extLst>
-          </p:cNvPr>
-          <p:cNvSpPr>
-            <a:spLocks xmlns:a="http://schemas.openxmlformats.org/drawingml/2006/main" noGrp="1"/>
-          </p:cNvSpPr>
-          <p:nvPr/>
-        </p:nvSpPr>
-        <p:spPr>
-          <a:xfrm xmlns:a="http://schemas.openxmlformats.org/drawingml/2006/main">
-            <a:off x="6667500" y="1733550"/>
-            <a:ext cx="4857750" cy="523875"/>
-          </a:xfrm>
-          <a:prstGeom xmlns:a="http://schemas.openxmlformats.org/drawingml/2006/main" prst="rect">
-            <a:avLst/>
-          </a:prstGeom>
-          <a:noFill xmlns:a="http://schemas.openxmlformats.org/drawingml/2006/main"/>
-          <a:ln xmlns:a="http://schemas.openxmlformats.org/drawingml/2006/main" w="0">
-            <a:noFill/>
-          </a:ln>
-        </p:spPr>
-        <p:txBody>
-          <a:bodyPr xmlns:a="http://schemas.openxmlformats.org/drawingml/2006/main"/>
-          <a:lstStyle xmlns:a="http://schemas.openxmlformats.org/drawingml/2006/main">
-            <a:defPPr>
-              <a:defRPr sz="2400" b="1">
-                <a:solidFill>
-                  <a:srgbClr val="123442"/>
-                </a:solidFill>
-                <a:latin typeface="Arial"/>
-                <a:ea typeface="Arial"/>
-                <a:cs typeface="Arial"/>
-              </a:defRPr>
-            </a:defPPr>
-          </a:lstStyle>
-          <a:p xmlns:a="http://schemas.openxmlformats.org/drawingml/2006/main">
-            <a:pPr>
-              <a:defRPr sz="2400" b="1">
-                <a:solidFill>
-                  <a:srgbClr val="123442"/>
-                </a:solidFill>
-                <a:latin typeface="Arial"/>
-                <a:ea typeface="Arial"/>
-                <a:cs typeface="Arial"/>
-              </a:defRPr>
-            </a:pPr>
-            <a:r>
-              <a:rPr sz="2400" b="1">
-                <a:solidFill>
-                  <a:srgbClr val="123442"/>
-                </a:solidFill>
-                <a:latin typeface="Arial"/>
-                <a:ea typeface="Arial"/>
-                <a:cs typeface="Arial"/>
-              </a:rPr>
-              <a:t>During execution</a:t>
-            </a:r>
-          </a:p>
-        </p:txBody>
-      </p:sp>
-      <p:sp>
-        <p:nvSpPr>
-          <p:cNvPr id="5" name="">
-            <a:extLst xmlns:a="http://schemas.openxmlformats.org/drawingml/2006/main">
-              <a:ext uri="{FF2B5EF4-FFF2-40B4-BE49-F238E27FC236}">
-                <a16:creationId xmlns:a16="http://schemas.microsoft.com/office/drawing/2014/main" id="{172DD296-3453-4445-9A7B-CB9E5D75FE35}"/>
-              </a:ext>
-            </a:extLst>
-          </p:cNvPr>
-          <p:cNvSpPr>
-            <a:spLocks xmlns:a="http://schemas.openxmlformats.org/drawingml/2006/main" noGrp="1"/>
-          </p:cNvSpPr>
-          <p:nvPr/>
-        </p:nvSpPr>
-        <p:spPr>
-          <a:xfrm xmlns:a="http://schemas.openxmlformats.org/drawingml/2006/main">
-            <a:off x="6667500" y="2524125"/>
-            <a:ext cx="4857750" cy="1905000"/>
-          </a:xfrm>
-          <a:prstGeom xmlns:a="http://schemas.openxmlformats.org/drawingml/2006/main" prst="rect">
-            <a:avLst/>
-          </a:prstGeom>
-          <a:noFill xmlns:a="http://schemas.openxmlformats.org/drawingml/2006/main"/>
-          <a:ln xmlns:a="http://schemas.openxmlformats.org/drawingml/2006/main" w="0">
-            <a:noFill/>
-          </a:ln>
-        </p:spPr>
-        <p:txBody>
-          <a:bodyPr xmlns:a="http://schemas.openxmlformats.org/drawingml/2006/main"/>
-          <a:lstStyle xmlns:a="http://schemas.openxmlformats.org/drawingml/2006/main">
-            <a:defPPr>
-              <a:defRPr sz="2250" b="0">
-                <a:solidFill>
-                  <a:srgbClr val="173F50"/>
-                </a:solidFill>
-                <a:latin typeface="Arial"/>
-                <a:ea typeface="Arial"/>
-                <a:cs typeface="Arial"/>
-              </a:defRPr>
-            </a:defPPr>
-          </a:lstStyle>
-          <a:p xmlns:a="http://schemas.openxmlformats.org/drawingml/2006/main">
-            <a:pPr>
-              <a:defRPr sz="2250" b="0">
-                <a:solidFill>
-                  <a:srgbClr val="173F50"/>
-                </a:solidFill>
-                <a:latin typeface="Arial"/>
-                <a:ea typeface="Arial"/>
-                <a:cs typeface="Arial"/>
-              </a:defRPr>
-            </a:pPr>
-            <a:r>
-              <a:rPr sz="2250" b="0">
-                <a:solidFill>
-                  <a:srgbClr val="173F50"/>
-                </a:solidFill>
-                <a:latin typeface="Arial"/>
-                <a:ea typeface="Arial"/>
-                <a:cs typeface="Arial"/>
-              </a:rPr>
-              <a:t>Minimum swap outputs</a:t>
-            </a:r>
-          </a:p>
-          <a:p xmlns:a="http://schemas.openxmlformats.org/drawingml/2006/main">
-            <a:pPr>
-              <a:defRPr sz="2250" b="0">
-                <a:solidFill>
-                  <a:srgbClr val="173F50"/>
-                </a:solidFill>
-                <a:latin typeface="Arial"/>
-                <a:ea typeface="Arial"/>
-                <a:cs typeface="Arial"/>
-              </a:defRPr>
-            </a:pPr>
-            <a:r>
-              <a:rPr sz="2250" b="0">
-                <a:solidFill>
-                  <a:srgbClr val="173F50"/>
-                </a:solidFill>
-                <a:latin typeface="Arial"/>
-                <a:ea typeface="Arial"/>
-                <a:cs typeface="Arial"/>
-              </a:rPr>
-              <a:t>Aggregate NAV-loss check</a:t>
-            </a:r>
-          </a:p>
-          <a:p xmlns:a="http://schemas.openxmlformats.org/drawingml/2006/main">
-            <a:pPr>
-              <a:defRPr sz="2250" b="0">
-                <a:solidFill>
-                  <a:srgbClr val="173F50"/>
-                </a:solidFill>
-                <a:latin typeface="Arial"/>
-                <a:ea typeface="Arial"/>
-                <a:cs typeface="Arial"/>
-              </a:defRPr>
-            </a:pPr>
-            <a:r>
-              <a:rPr sz="2250" b="0">
-                <a:solidFill>
-                  <a:srgbClr val="173F50"/>
-                </a:solidFill>
-                <a:latin typeface="Arial"/>
-                <a:ea typeface="Arial"/>
-                <a:cs typeface="Arial"/>
-              </a:rPr>
-              <a:t>Atomic transaction rollback</a:t>
-            </a:r>
-          </a:p>
-        </p:txBody>
-      </p:sp>
-      <p:sp>
-        <p:nvSpPr>
-          <p:cNvPr id="6" name="">
-            <a:extLst xmlns:a="http://schemas.openxmlformats.org/drawingml/2006/main">
-              <a:ext uri="{FF2B5EF4-FFF2-40B4-BE49-F238E27FC236}">
-                <a16:creationId xmlns:a16="http://schemas.microsoft.com/office/drawing/2014/main" id="{E7E8A183-F368-4A31-9191-6CF2FDE3884B}"/>
-              </a:ext>
-            </a:extLst>
-          </p:cNvPr>
-          <p:cNvSpPr>
-            <a:spLocks xmlns:a="http://schemas.openxmlformats.org/drawingml/2006/main" noGrp="1"/>
-          </p:cNvSpPr>
-          <p:nvPr/>
-        </p:nvSpPr>
-        <p:spPr>
-          <a:xfrm xmlns:a="http://schemas.openxmlformats.org/drawingml/2006/main">
-            <a:off x="609600" y="5524500"/>
-            <a:ext cx="10953750" cy="762000"/>
-          </a:xfrm>
-          <a:prstGeom xmlns:a="http://schemas.openxmlformats.org/drawingml/2006/main" prst="rect">
-            <a:avLst/>
-          </a:prstGeom>
-          <a:noFill xmlns:a="http://schemas.openxmlformats.org/drawingml/2006/main"/>
-          <a:ln xmlns:a="http://schemas.openxmlformats.org/drawingml/2006/main" w="0">
-            <a:noFill/>
-          </a:ln>
-        </p:spPr>
-        <p:txBody>
-          <a:bodyPr xmlns:a="http://schemas.openxmlformats.org/drawingml/2006/main"/>
-          <a:lstStyle xmlns:a="http://schemas.openxmlformats.org/drawingml/2006/main">
-            <a:defPPr>
-              <a:defRPr sz="2100" b="0">
-                <a:solidFill>
-                  <a:srgbClr val="173F50"/>
-                </a:solidFill>
-                <a:latin typeface="Arial"/>
-                <a:ea typeface="Arial"/>
-                <a:cs typeface="Arial"/>
-              </a:defRPr>
-            </a:defPPr>
-          </a:lstStyle>
-          <a:p xmlns:a="http://schemas.openxmlformats.org/drawingml/2006/main">
-            <a:pPr>
-              <a:defRPr sz="2100" b="0">
-                <a:solidFill>
-                  <a:srgbClr val="173F50"/>
-                </a:solidFill>
-                <a:latin typeface="Arial"/>
-                <a:ea typeface="Arial"/>
-                <a:cs typeface="Arial"/>
-              </a:defRPr>
-            </a:pPr>
-            <a:r>
-              <a:rPr sz="2100" b="0">
-                <a:solidFill>
-                  <a:srgbClr val="173F50"/>
-                </a:solidFill>
-                <a:latin typeface="Arial"/>
-                <a:ea typeface="Arial"/>
-                <a:cs typeface="Arial"/>
-              </a:rPr>
-              <a:t>Pause blocks deposits and trades. Investors can still redeem the basket.</a:t>
-            </a:r>
-          </a:p>
-        </p:txBody>
-      </p:sp>
+      </p:pic>
     </p:spTree>
     <p:extLst>
       <p:ext uri="{BB962C8B-B14F-4D97-AF65-F5344CB8AC3E}">
-        <p14:creationId xmlns:p14="http://schemas.microsoft.com/office/powerpoint/2010/main" val="1692014357"/>
+        <p14:creationId xmlns:p14="http://schemas.microsoft.com/office/powerpoint/2010/main" val="1695419233"/>
       </p:ext>
     </p:extLst>
   </p:cSld>
@@ -9178,10 +8920,10 @@
       </p:grpSpPr>
       <p:sp>
         <p:nvSpPr>
-          <p:cNvPr id="6" name="">
+          <p:cNvPr id="4" name="">
             <a:extLst xmlns:a="http://schemas.openxmlformats.org/drawingml/2006/main">
               <a:ext uri="{FF2B5EF4-FFF2-40B4-BE49-F238E27FC236}">
-                <a16:creationId xmlns:a16="http://schemas.microsoft.com/office/drawing/2014/main" id="{EC7AC48A-D342-45D5-A28C-8161FA260D5B}"/>
+                <a16:creationId xmlns:a16="http://schemas.microsoft.com/office/drawing/2014/main" id="{FFCE66BF-04A3-421C-96CD-711490BE8574}"/>
               </a:ext>
             </a:extLst>
           </p:cNvPr>
@@ -9192,8 +8934,8 @@
         </p:nvSpPr>
         <p:spPr>
           <a:xfrm xmlns:a="http://schemas.openxmlformats.org/drawingml/2006/main">
-            <a:off x="609600" y="457200"/>
-            <a:ext cx="10972800" cy="933450"/>
+            <a:off x="552450" y="333375"/>
+            <a:ext cx="11087100" cy="838200"/>
           </a:xfrm>
           <a:prstGeom xmlns:a="http://schemas.openxmlformats.org/drawingml/2006/main" prst="rect">
             <a:avLst/>
@@ -9207,9 +8949,9 @@
           <a:bodyPr xmlns:a="http://schemas.openxmlformats.org/drawingml/2006/main"/>
           <a:lstStyle xmlns:a="http://schemas.openxmlformats.org/drawingml/2006/main">
             <a:defPPr>
-              <a:defRPr sz="3300" b="1">
-                <a:solidFill>
-                  <a:srgbClr val="123442"/>
+              <a:defRPr sz="3150" b="1">
+                <a:solidFill>
+                  <a:srgbClr val="173F50"/>
                 </a:solidFill>
                 <a:latin typeface="Arial"/>
                 <a:ea typeface="Arial"/>
@@ -9219,9 +8961,9 @@
           </a:lstStyle>
           <a:p xmlns:a="http://schemas.openxmlformats.org/drawingml/2006/main">
             <a:pPr>
-              <a:defRPr sz="3300" b="1">
-                <a:solidFill>
-                  <a:srgbClr val="123442"/>
+              <a:defRPr sz="3150" b="1">
+                <a:solidFill>
+                  <a:srgbClr val="173F50"/>
                 </a:solidFill>
                 <a:latin typeface="Arial"/>
                 <a:ea typeface="Arial"/>
@@ -9229,47 +8971,25 @@
               </a:defRPr>
             </a:pPr>
             <a:r>
-              <a:rPr sz="3300" b="1">
-                <a:solidFill>
-                  <a:srgbClr val="123442"/>
+              <a:rPr sz="3150" b="1">
+                <a:solidFill>
+                  <a:srgbClr val="173F50"/>
                 </a:solidFill>
                 <a:latin typeface="Arial"/>
                 <a:ea typeface="Arial"/>
                 <a:cs typeface="Arial"/>
               </a:rPr>
-              <a:t>Synthetic strategy evaluation</a:t>
+              <a:t>Process flow</a:t>
             </a:r>
           </a:p>
         </p:txBody>
       </p:sp>
-      <p:graphicFrame>
-        <p:nvGraphicFramePr>
-          <p:cNvPr id="2" name="Chart">
+      <p:sp>
+        <p:nvSpPr>
+          <p:cNvPr id="2" name="">
             <a:extLst xmlns:a="http://schemas.openxmlformats.org/drawingml/2006/main">
               <a:ext uri="{FF2B5EF4-FFF2-40B4-BE49-F238E27FC236}">
-                <a16:creationId xmlns:a16="http://schemas.microsoft.com/office/drawing/2014/main" id="{17C05F86-F79E-49C0-809E-D5D861A265CB}"/>
-              </a:ext>
-            </a:extLst>
-          </p:cNvPr>
-          <p:cNvGraphicFramePr/>
-          <p:nvPr/>
-        </p:nvGraphicFramePr>
-        <p:xfrm>
-          <a:off xmlns:a="http://schemas.openxmlformats.org/drawingml/2006/main" x="609600" y="1571625"/>
-          <a:ext xmlns:a="http://schemas.openxmlformats.org/drawingml/2006/main" cx="7620000" cy="3714750"/>
-        </p:xfrm>
-        <a:graphic xmlns:a="http://schemas.openxmlformats.org/drawingml/2006/main">
-          <a:graphicData uri="http://schemas.openxmlformats.org/drawingml/2006/chart">
-            <c:chart xmlns:r="http://schemas.openxmlformats.org/officeDocument/2006/relationships" xmlns:c="http://schemas.openxmlformats.org/drawingml/2006/chart" r:id="Re504628e81824d5b"/>
-          </a:graphicData>
-        </a:graphic>
-      </p:graphicFrame>
-      <p:sp>
-        <p:nvSpPr>
-          <p:cNvPr id="3" name="">
-            <a:extLst xmlns:a="http://schemas.openxmlformats.org/drawingml/2006/main">
-              <a:ext uri="{FF2B5EF4-FFF2-40B4-BE49-F238E27FC236}">
-                <a16:creationId xmlns:a16="http://schemas.microsoft.com/office/drawing/2014/main" id="{1A05E781-A8B0-4EF3-90AC-262805634BFA}"/>
+                <a16:creationId xmlns:a16="http://schemas.microsoft.com/office/drawing/2014/main" id="{3606A252-C425-4131-B4BF-6F0D44FBD371}"/>
               </a:ext>
             </a:extLst>
           </p:cNvPr>
@@ -9280,8 +9000,8 @@
         </p:nvSpPr>
         <p:spPr>
           <a:xfrm xmlns:a="http://schemas.openxmlformats.org/drawingml/2006/main">
-            <a:off x="8715375" y="1809750"/>
-            <a:ext cx="2857500" cy="523875"/>
+            <a:off x="552450" y="6477000"/>
+            <a:ext cx="11087100" cy="266700"/>
           </a:xfrm>
           <a:prstGeom xmlns:a="http://schemas.openxmlformats.org/drawingml/2006/main" prst="rect">
             <a:avLst/>
@@ -9295,9 +9015,9 @@
           <a:bodyPr xmlns:a="http://schemas.openxmlformats.org/drawingml/2006/main"/>
           <a:lstStyle xmlns:a="http://schemas.openxmlformats.org/drawingml/2006/main">
             <a:defPPr>
-              <a:defRPr sz="2100" b="1">
-                <a:solidFill>
-                  <a:srgbClr val="123442"/>
+              <a:defRPr sz="1275" b="0">
+                <a:solidFill>
+                  <a:srgbClr val="173F50"/>
                 </a:solidFill>
                 <a:latin typeface="Arial"/>
                 <a:ea typeface="Arial"/>
@@ -9307,9 +9027,9 @@
           </a:lstStyle>
           <a:p xmlns:a="http://schemas.openxmlformats.org/drawingml/2006/main">
             <a:pPr>
-              <a:defRPr sz="2100" b="1">
-                <a:solidFill>
-                  <a:srgbClr val="123442"/>
+              <a:defRPr sz="1275" b="0">
+                <a:solidFill>
+                  <a:srgbClr val="173F50"/>
                 </a:solidFill>
                 <a:latin typeface="Arial"/>
                 <a:ea typeface="Arial"/>
@@ -9317,201 +9037,51 @@
               </a:defRPr>
             </a:pPr>
             <a:r>
-              <a:rPr sz="2100" b="1">
-                <a:solidFill>
-                  <a:srgbClr val="123442"/>
+              <a:rPr sz="1275" b="0">
+                <a:solidFill>
+                  <a:srgbClr val="173F50"/>
                 </a:solidFill>
                 <a:latin typeface="Arial"/>
                 <a:ea typeface="Arial"/>
                 <a:cs typeface="Arial"/>
               </a:rPr>
-              <a:t>Total return</a:t>
+              <a:t>AlphaVault  /  Du zhuotong  /  6 of 12</a:t>
             </a:r>
           </a:p>
         </p:txBody>
       </p:sp>
-      <p:sp>
-        <p:nvSpPr>
-          <p:cNvPr id="4" name="">
+      <p:pic>
+        <p:nvPicPr>
+          <p:cNvPr id="3" name="">
             <a:extLst xmlns:a="http://schemas.openxmlformats.org/drawingml/2006/main">
               <a:ext uri="{FF2B5EF4-FFF2-40B4-BE49-F238E27FC236}">
-                <a16:creationId xmlns:a16="http://schemas.microsoft.com/office/drawing/2014/main" id="{52639FE2-7D62-42A4-ABAC-EF5B3CB016FF}"/>
+                <a16:creationId xmlns:a16="http://schemas.microsoft.com/office/drawing/2014/main" id="{5EF80752-0A46-4A4A-A0BB-4C5D31C224FE}"/>
               </a:ext>
             </a:extLst>
           </p:cNvPr>
-          <p:cNvSpPr>
-            <a:spLocks xmlns:a="http://schemas.openxmlformats.org/drawingml/2006/main" noGrp="1"/>
-          </p:cNvSpPr>
+          <p:cNvPicPr>
+            <a:picLocks xmlns:a="http://schemas.openxmlformats.org/drawingml/2006/main" noChangeAspect="1"/>
+          </p:cNvPicPr>
           <p:nvPr/>
-        </p:nvSpPr>
+        </p:nvPicPr>
+        <p:blipFill>
+          <a:blip xmlns:r="http://schemas.openxmlformats.org/officeDocument/2006/relationships" xmlns:a="http://schemas.openxmlformats.org/drawingml/2006/main" r:embed="R1dc5373e1cff4486"/>
+          <a:stretch xmlns:a="http://schemas.openxmlformats.org/drawingml/2006/main"/>
+        </p:blipFill>
         <p:spPr>
           <a:xfrm xmlns:a="http://schemas.openxmlformats.org/drawingml/2006/main">
-            <a:off x="8715375" y="2619375"/>
-            <a:ext cx="2857500" cy="2143125"/>
+            <a:off x="2310581" y="1190625"/>
+            <a:ext cx="7570839" cy="5029200"/>
           </a:xfrm>
           <a:prstGeom xmlns:a="http://schemas.openxmlformats.org/drawingml/2006/main" prst="rect">
             <a:avLst/>
           </a:prstGeom>
-          <a:noFill xmlns:a="http://schemas.openxmlformats.org/drawingml/2006/main"/>
-          <a:ln xmlns:a="http://schemas.openxmlformats.org/drawingml/2006/main" w="0">
-            <a:noFill/>
-          </a:ln>
         </p:spPr>
-        <p:txBody>
-          <a:bodyPr xmlns:a="http://schemas.openxmlformats.org/drawingml/2006/main"/>
-          <a:lstStyle xmlns:a="http://schemas.openxmlformats.org/drawingml/2006/main">
-            <a:defPPr>
-              <a:defRPr sz="1950" b="0">
-                <a:solidFill>
-                  <a:srgbClr val="173F50"/>
-                </a:solidFill>
-                <a:latin typeface="Arial"/>
-                <a:ea typeface="Arial"/>
-                <a:cs typeface="Arial"/>
-              </a:defRPr>
-            </a:defPPr>
-          </a:lstStyle>
-          <a:p xmlns:a="http://schemas.openxmlformats.org/drawingml/2006/main">
-            <a:pPr>
-              <a:defRPr sz="1950" b="0">
-                <a:solidFill>
-                  <a:srgbClr val="173F50"/>
-                </a:solidFill>
-                <a:latin typeface="Arial"/>
-                <a:ea typeface="Arial"/>
-                <a:cs typeface="Arial"/>
-              </a:defRPr>
-            </a:pPr>
-            <a:r>
-              <a:rPr sz="1950" b="0">
-                <a:solidFill>
-                  <a:srgbClr val="173F50"/>
-                </a:solidFill>
-                <a:latin typeface="Arial"/>
-                <a:ea typeface="Arial"/>
-                <a:cs typeface="Arial"/>
-              </a:rPr>
-              <a:t>Equal Weight  −2.32%</a:t>
-            </a:r>
-          </a:p>
-          <a:p xmlns:a="http://schemas.openxmlformats.org/drawingml/2006/main">
-            <a:pPr>
-              <a:defRPr sz="1950" b="0">
-                <a:solidFill>
-                  <a:srgbClr val="173F50"/>
-                </a:solidFill>
-                <a:latin typeface="Arial"/>
-                <a:ea typeface="Arial"/>
-                <a:cs typeface="Arial"/>
-              </a:defRPr>
-            </a:pPr>
-            <a:r>
-              <a:rPr sz="1950" b="0">
-                <a:solidFill>
-                  <a:srgbClr val="173F50"/>
-                </a:solidFill>
-                <a:latin typeface="Arial"/>
-                <a:ea typeface="Arial"/>
-                <a:cs typeface="Arial"/>
-              </a:rPr>
-              <a:t>Momentum  −22.59%</a:t>
-            </a:r>
-          </a:p>
-          <a:p xmlns:a="http://schemas.openxmlformats.org/drawingml/2006/main">
-            <a:pPr>
-              <a:defRPr sz="1950" b="0">
-                <a:solidFill>
-                  <a:srgbClr val="173F50"/>
-                </a:solidFill>
-                <a:latin typeface="Arial"/>
-                <a:ea typeface="Arial"/>
-                <a:cs typeface="Arial"/>
-              </a:defRPr>
-            </a:pPr>
-            <a:r>
-              <a:rPr sz="1950" b="0">
-                <a:solidFill>
-                  <a:srgbClr val="173F50"/>
-                </a:solidFill>
-                <a:latin typeface="Arial"/>
-                <a:ea typeface="Arial"/>
-                <a:cs typeface="Arial"/>
-              </a:rPr>
-              <a:t>Volatility Target  −1.58%</a:t>
-            </a:r>
-          </a:p>
-        </p:txBody>
-      </p:sp>
-      <p:sp>
-        <p:nvSpPr>
-          <p:cNvPr id="5" name="">
-            <a:extLst xmlns:a="http://schemas.openxmlformats.org/drawingml/2006/main">
-              <a:ext uri="{FF2B5EF4-FFF2-40B4-BE49-F238E27FC236}">
-                <a16:creationId xmlns:a16="http://schemas.microsoft.com/office/drawing/2014/main" id="{707E8136-7A44-42AA-833E-72216180999A}"/>
-              </a:ext>
-            </a:extLst>
-          </p:cNvPr>
-          <p:cNvSpPr>
-            <a:spLocks xmlns:a="http://schemas.openxmlformats.org/drawingml/2006/main" noGrp="1"/>
-          </p:cNvSpPr>
-          <p:nvPr/>
-        </p:nvSpPr>
-        <p:spPr>
-          <a:xfrm xmlns:a="http://schemas.openxmlformats.org/drawingml/2006/main">
-            <a:off x="609600" y="5619750"/>
-            <a:ext cx="10953750" cy="619125"/>
-          </a:xfrm>
-          <a:prstGeom xmlns:a="http://schemas.openxmlformats.org/drawingml/2006/main" prst="rect">
-            <a:avLst/>
-          </a:prstGeom>
-          <a:noFill xmlns:a="http://schemas.openxmlformats.org/drawingml/2006/main"/>
-          <a:ln xmlns:a="http://schemas.openxmlformats.org/drawingml/2006/main" w="0">
-            <a:noFill/>
-          </a:ln>
-        </p:spPr>
-        <p:txBody>
-          <a:bodyPr xmlns:a="http://schemas.openxmlformats.org/drawingml/2006/main"/>
-          <a:lstStyle xmlns:a="http://schemas.openxmlformats.org/drawingml/2006/main">
-            <a:defPPr>
-              <a:defRPr sz="1950" b="0">
-                <a:solidFill>
-                  <a:srgbClr val="173F50"/>
-                </a:solidFill>
-                <a:latin typeface="Arial"/>
-                <a:ea typeface="Arial"/>
-                <a:cs typeface="Arial"/>
-              </a:defRPr>
-            </a:defPPr>
-          </a:lstStyle>
-          <a:p xmlns:a="http://schemas.openxmlformats.org/drawingml/2006/main">
-            <a:pPr>
-              <a:defRPr sz="1950" b="0">
-                <a:solidFill>
-                  <a:srgbClr val="173F50"/>
-                </a:solidFill>
-                <a:latin typeface="Arial"/>
-                <a:ea typeface="Arial"/>
-                <a:cs typeface="Arial"/>
-              </a:defRPr>
-            </a:pPr>
-            <a:r>
-              <a:rPr sz="1950" b="0">
-                <a:solidFill>
-                  <a:srgbClr val="173F50"/>
-                </a:solidFill>
-                <a:latin typeface="Arial"/>
-                <a:ea typeface="Arial"/>
-                <a:cs typeface="Arial"/>
-              </a:rPr>
-              <a:t>Synthetic data only. Fees included, gas and market impact excluded.</a:t>
-            </a:r>
-          </a:p>
-        </p:txBody>
-      </p:sp>
+      </p:pic>
     </p:spTree>
     <p:extLst>
       <p:ext uri="{BB962C8B-B14F-4D97-AF65-F5344CB8AC3E}">
-        <p14:creationId xmlns:p14="http://schemas.microsoft.com/office/powerpoint/2010/main" val="1639815905"/>
+        <p14:creationId xmlns:p14="http://schemas.microsoft.com/office/powerpoint/2010/main" val="820277130"/>
       </p:ext>
     </p:extLst>
   </p:cSld>
@@ -9539,10 +9109,10 @@
       </p:grpSpPr>
       <p:sp>
         <p:nvSpPr>
-          <p:cNvPr id="6" name="">
+          <p:cNvPr id="4" name="">
             <a:extLst xmlns:a="http://schemas.openxmlformats.org/drawingml/2006/main">
               <a:ext uri="{FF2B5EF4-FFF2-40B4-BE49-F238E27FC236}">
-                <a16:creationId xmlns:a16="http://schemas.microsoft.com/office/drawing/2014/main" id="{6A7F7D2D-9CE8-4F93-9A1D-7AD0A26EC994}"/>
+                <a16:creationId xmlns:a16="http://schemas.microsoft.com/office/drawing/2014/main" id="{F70C1916-B49E-44BF-9A1A-A920AF6DCC47}"/>
               </a:ext>
             </a:extLst>
           </p:cNvPr>
@@ -9553,8 +9123,8 @@
         </p:nvSpPr>
         <p:spPr>
           <a:xfrm xmlns:a="http://schemas.openxmlformats.org/drawingml/2006/main">
-            <a:off x="609600" y="457200"/>
-            <a:ext cx="10972800" cy="933450"/>
+            <a:off x="552450" y="333375"/>
+            <a:ext cx="11087100" cy="838200"/>
           </a:xfrm>
           <a:prstGeom xmlns:a="http://schemas.openxmlformats.org/drawingml/2006/main" prst="rect">
             <a:avLst/>
@@ -9568,9 +9138,9 @@
           <a:bodyPr xmlns:a="http://schemas.openxmlformats.org/drawingml/2006/main"/>
           <a:lstStyle xmlns:a="http://schemas.openxmlformats.org/drawingml/2006/main">
             <a:defPPr>
-              <a:defRPr sz="3300" b="1">
-                <a:solidFill>
-                  <a:srgbClr val="123442"/>
+              <a:defRPr sz="3150" b="1">
+                <a:solidFill>
+                  <a:srgbClr val="173F50"/>
                 </a:solidFill>
                 <a:latin typeface="Arial"/>
                 <a:ea typeface="Arial"/>
@@ -9580,9 +9150,9 @@
           </a:lstStyle>
           <a:p xmlns:a="http://schemas.openxmlformats.org/drawingml/2006/main">
             <a:pPr>
-              <a:defRPr sz="3300" b="1">
-                <a:solidFill>
-                  <a:srgbClr val="123442"/>
+              <a:defRPr sz="3150" b="1">
+                <a:solidFill>
+                  <a:srgbClr val="173F50"/>
                 </a:solidFill>
                 <a:latin typeface="Arial"/>
                 <a:ea typeface="Arial"/>
@@ -9590,15 +9160,15 @@
               </a:defRPr>
             </a:pPr>
             <a:r>
-              <a:rPr sz="3300" b="1">
-                <a:solidFill>
-                  <a:srgbClr val="123442"/>
+              <a:rPr sz="3150" b="1">
+                <a:solidFill>
+                  <a:srgbClr val="173F50"/>
                 </a:solidFill>
                 <a:latin typeface="Arial"/>
                 <a:ea typeface="Arial"/>
                 <a:cs typeface="Arial"/>
               </a:rPr>
-              <a:t>Application demonstration</a:t>
+              <a:t>Dashboard guide</a:t>
             </a:r>
           </a:p>
         </p:txBody>
@@ -9608,7 +9178,7 @@
           <p:cNvPr id="2" name="">
             <a:extLst xmlns:a="http://schemas.openxmlformats.org/drawingml/2006/main">
               <a:ext uri="{FF2B5EF4-FFF2-40B4-BE49-F238E27FC236}">
-                <a16:creationId xmlns:a16="http://schemas.microsoft.com/office/drawing/2014/main" id="{35144AD8-50AA-4153-ABDA-25732CAF519E}"/>
+                <a16:creationId xmlns:a16="http://schemas.microsoft.com/office/drawing/2014/main" id="{4E3B06C7-EC5E-41A5-B0CD-4DB25B3AB4D1}"/>
               </a:ext>
             </a:extLst>
           </p:cNvPr>
@@ -9619,8 +9189,8 @@
         </p:nvSpPr>
         <p:spPr>
           <a:xfrm xmlns:a="http://schemas.openxmlformats.org/drawingml/2006/main">
-            <a:off x="609600" y="1809750"/>
-            <a:ext cx="10477500" cy="523875"/>
+            <a:off x="552450" y="6477000"/>
+            <a:ext cx="11087100" cy="266700"/>
           </a:xfrm>
           <a:prstGeom xmlns:a="http://schemas.openxmlformats.org/drawingml/2006/main" prst="rect">
             <a:avLst/>
@@ -9634,9 +9204,9 @@
           <a:bodyPr xmlns:a="http://schemas.openxmlformats.org/drawingml/2006/main"/>
           <a:lstStyle xmlns:a="http://schemas.openxmlformats.org/drawingml/2006/main">
             <a:defPPr>
-              <a:defRPr sz="2400" b="1">
-                <a:solidFill>
-                  <a:srgbClr val="123442"/>
+              <a:defRPr sz="1275" b="0">
+                <a:solidFill>
+                  <a:srgbClr val="173F50"/>
                 </a:solidFill>
                 <a:latin typeface="Arial"/>
                 <a:ea typeface="Arial"/>
@@ -9646,9 +9216,9 @@
           </a:lstStyle>
           <a:p xmlns:a="http://schemas.openxmlformats.org/drawingml/2006/main">
             <a:pPr>
-              <a:defRPr sz="2400" b="1">
-                <a:solidFill>
-                  <a:srgbClr val="123442"/>
+              <a:defRPr sz="1275" b="0">
+                <a:solidFill>
+                  <a:srgbClr val="173F50"/>
                 </a:solidFill>
                 <a:latin typeface="Arial"/>
                 <a:ea typeface="Arial"/>
@@ -9656,267 +9226,51 @@
               </a:defRPr>
             </a:pPr>
             <a:r>
-              <a:rPr sz="2400" b="1">
-                <a:solidFill>
-                  <a:srgbClr val="123442"/>
+              <a:rPr sz="1275" b="0">
+                <a:solidFill>
+                  <a:srgbClr val="173F50"/>
                 </a:solidFill>
                 <a:latin typeface="Arial"/>
                 <a:ea typeface="Arial"/>
                 <a:cs typeface="Arial"/>
               </a:rPr>
-              <a:t>Public dashboard</a:t>
+              <a:t>AlphaVault  /  Du zhuotong  /  7 of 12</a:t>
             </a:r>
           </a:p>
         </p:txBody>
       </p:sp>
-      <p:sp>
-        <p:nvSpPr>
+      <p:pic>
+        <p:nvPicPr>
           <p:cNvPr id="3" name="">
             <a:extLst xmlns:a="http://schemas.openxmlformats.org/drawingml/2006/main">
               <a:ext uri="{FF2B5EF4-FFF2-40B4-BE49-F238E27FC236}">
-                <a16:creationId xmlns:a16="http://schemas.microsoft.com/office/drawing/2014/main" id="{E2FCF62B-C1CF-4A60-8256-93DA3655352F}"/>
+                <a16:creationId xmlns:a16="http://schemas.microsoft.com/office/drawing/2014/main" id="{B9C8FD83-0F81-4BE0-BFD1-E624038028A5}"/>
               </a:ext>
             </a:extLst>
           </p:cNvPr>
-          <p:cNvSpPr>
-            <a:spLocks xmlns:a="http://schemas.openxmlformats.org/drawingml/2006/main" noGrp="1"/>
-          </p:cNvSpPr>
+          <p:cNvPicPr>
+            <a:picLocks xmlns:a="http://schemas.openxmlformats.org/drawingml/2006/main" noChangeAspect="1"/>
+          </p:cNvPicPr>
           <p:nvPr/>
-        </p:nvSpPr>
+        </p:nvPicPr>
+        <p:blipFill>
+          <a:blip xmlns:r="http://schemas.openxmlformats.org/officeDocument/2006/relationships" xmlns:a="http://schemas.openxmlformats.org/drawingml/2006/main" r:embed="R327d6743fc7e4d64"/>
+          <a:stretch xmlns:a="http://schemas.openxmlformats.org/drawingml/2006/main"/>
+        </p:blipFill>
         <p:spPr>
           <a:xfrm xmlns:a="http://schemas.openxmlformats.org/drawingml/2006/main">
-            <a:off x="609600" y="2524125"/>
-            <a:ext cx="10953750" cy="1000125"/>
+            <a:off x="2262188" y="1190625"/>
+            <a:ext cx="7667625" cy="5038725"/>
           </a:xfrm>
           <a:prstGeom xmlns:a="http://schemas.openxmlformats.org/drawingml/2006/main" prst="rect">
             <a:avLst/>
           </a:prstGeom>
-          <a:noFill xmlns:a="http://schemas.openxmlformats.org/drawingml/2006/main"/>
-          <a:ln xmlns:a="http://schemas.openxmlformats.org/drawingml/2006/main" w="0">
-            <a:noFill/>
-          </a:ln>
         </p:spPr>
-        <p:txBody>
-          <a:bodyPr xmlns:a="http://schemas.openxmlformats.org/drawingml/2006/main"/>
-          <a:lstStyle xmlns:a="http://schemas.openxmlformats.org/drawingml/2006/main">
-            <a:defPPr>
-              <a:defRPr sz="2250" b="0">
-                <a:solidFill>
-                  <a:srgbClr val="173F50"/>
-                </a:solidFill>
-                <a:latin typeface="Arial"/>
-                <a:ea typeface="Arial"/>
-                <a:cs typeface="Arial"/>
-              </a:defRPr>
-            </a:defPPr>
-          </a:lstStyle>
-          <a:p xmlns:a="http://schemas.openxmlformats.org/drawingml/2006/main">
-            <a:pPr>
-              <a:defRPr sz="2250" b="0">
-                <a:solidFill>
-                  <a:srgbClr val="173F50"/>
-                </a:solidFill>
-                <a:latin typeface="Arial"/>
-                <a:ea typeface="Arial"/>
-                <a:cs typeface="Arial"/>
-              </a:defRPr>
-            </a:pPr>
-            <a:r>
-              <a:rPr sz="2250" b="0">
-                <a:solidFill>
-                  <a:srgbClr val="173F50"/>
-                </a:solidFill>
-                <a:latin typeface="Arial"/>
-                <a:ea typeface="Arial"/>
-                <a:cs typeface="Arial"/>
-              </a:rPr>
-              <a:t>https://alphavault-sepolia.onrender.com</a:t>
-            </a:r>
-          </a:p>
-          <a:p xmlns:a="http://schemas.openxmlformats.org/drawingml/2006/main">
-            <a:pPr>
-              <a:defRPr sz="2250" b="0">
-                <a:solidFill>
-                  <a:srgbClr val="173F50"/>
-                </a:solidFill>
-                <a:latin typeface="Arial"/>
-                <a:ea typeface="Arial"/>
-                <a:cs typeface="Arial"/>
-              </a:defRPr>
-            </a:pPr>
-            <a:r>
-              <a:rPr sz="2250" b="0">
-                <a:solidFill>
-                  <a:srgbClr val="173F50"/>
-                </a:solidFill>
-                <a:latin typeface="Arial"/>
-                <a:ea typeface="Arial"/>
-                <a:cs typeface="Arial"/>
-              </a:rPr>
-              <a:t>Portfolio, strategy, freshness and transaction ledger</a:t>
-            </a:r>
-          </a:p>
-        </p:txBody>
-      </p:sp>
-      <p:sp>
-        <p:nvSpPr>
-          <p:cNvPr id="4" name="">
-            <a:extLst xmlns:a="http://schemas.openxmlformats.org/drawingml/2006/main">
-              <a:ext uri="{FF2B5EF4-FFF2-40B4-BE49-F238E27FC236}">
-                <a16:creationId xmlns:a16="http://schemas.microsoft.com/office/drawing/2014/main" id="{8899B8CD-4E10-4FFB-820B-E3990AB10C16}"/>
-              </a:ext>
-            </a:extLst>
-          </p:cNvPr>
-          <p:cNvSpPr>
-            <a:spLocks xmlns:a="http://schemas.openxmlformats.org/drawingml/2006/main" noGrp="1"/>
-          </p:cNvSpPr>
-          <p:nvPr/>
-        </p:nvSpPr>
-        <p:spPr>
-          <a:xfrm xmlns:a="http://schemas.openxmlformats.org/drawingml/2006/main">
-            <a:off x="609600" y="4000500"/>
-            <a:ext cx="10477500" cy="523875"/>
-          </a:xfrm>
-          <a:prstGeom xmlns:a="http://schemas.openxmlformats.org/drawingml/2006/main" prst="rect">
-            <a:avLst/>
-          </a:prstGeom>
-          <a:noFill xmlns:a="http://schemas.openxmlformats.org/drawingml/2006/main"/>
-          <a:ln xmlns:a="http://schemas.openxmlformats.org/drawingml/2006/main" w="0">
-            <a:noFill/>
-          </a:ln>
-        </p:spPr>
-        <p:txBody>
-          <a:bodyPr xmlns:a="http://schemas.openxmlformats.org/drawingml/2006/main"/>
-          <a:lstStyle xmlns:a="http://schemas.openxmlformats.org/drawingml/2006/main">
-            <a:defPPr>
-              <a:defRPr sz="2400" b="1">
-                <a:solidFill>
-                  <a:srgbClr val="123442"/>
-                </a:solidFill>
-                <a:latin typeface="Arial"/>
-                <a:ea typeface="Arial"/>
-                <a:cs typeface="Arial"/>
-              </a:defRPr>
-            </a:defPPr>
-          </a:lstStyle>
-          <a:p xmlns:a="http://schemas.openxmlformats.org/drawingml/2006/main">
-            <a:pPr>
-              <a:defRPr sz="2400" b="1">
-                <a:solidFill>
-                  <a:srgbClr val="123442"/>
-                </a:solidFill>
-                <a:latin typeface="Arial"/>
-                <a:ea typeface="Arial"/>
-                <a:cs typeface="Arial"/>
-              </a:defRPr>
-            </a:pPr>
-            <a:r>
-              <a:rPr sz="2400" b="1">
-                <a:solidFill>
-                  <a:srgbClr val="123442"/>
-                </a:solidFill>
-                <a:latin typeface="Arial"/>
-                <a:ea typeface="Arial"/>
-                <a:cs typeface="Arial"/>
-              </a:rPr>
-              <a:t>Local interaction sequence</a:t>
-            </a:r>
-          </a:p>
-        </p:txBody>
-      </p:sp>
-      <p:sp>
-        <p:nvSpPr>
-          <p:cNvPr id="5" name="">
-            <a:extLst xmlns:a="http://schemas.openxmlformats.org/drawingml/2006/main">
-              <a:ext uri="{FF2B5EF4-FFF2-40B4-BE49-F238E27FC236}">
-                <a16:creationId xmlns:a16="http://schemas.microsoft.com/office/drawing/2014/main" id="{D1836AC1-7EED-43C1-BF5A-CC6882A96B18}"/>
-              </a:ext>
-            </a:extLst>
-          </p:cNvPr>
-          <p:cNvSpPr>
-            <a:spLocks xmlns:a="http://schemas.openxmlformats.org/drawingml/2006/main" noGrp="1"/>
-          </p:cNvSpPr>
-          <p:nvPr/>
-        </p:nvSpPr>
-        <p:spPr>
-          <a:xfrm xmlns:a="http://schemas.openxmlformats.org/drawingml/2006/main">
-            <a:off x="609600" y="4667250"/>
-            <a:ext cx="10953750" cy="1047750"/>
-          </a:xfrm>
-          <a:prstGeom xmlns:a="http://schemas.openxmlformats.org/drawingml/2006/main" prst="rect">
-            <a:avLst/>
-          </a:prstGeom>
-          <a:noFill xmlns:a="http://schemas.openxmlformats.org/drawingml/2006/main"/>
-          <a:ln xmlns:a="http://schemas.openxmlformats.org/drawingml/2006/main" w="0">
-            <a:noFill/>
-          </a:ln>
-        </p:spPr>
-        <p:txBody>
-          <a:bodyPr xmlns:a="http://schemas.openxmlformats.org/drawingml/2006/main"/>
-          <a:lstStyle xmlns:a="http://schemas.openxmlformats.org/drawingml/2006/main">
-            <a:defPPr>
-              <a:defRPr sz="2250" b="0">
-                <a:solidFill>
-                  <a:srgbClr val="173F50"/>
-                </a:solidFill>
-                <a:latin typeface="Arial"/>
-                <a:ea typeface="Arial"/>
-                <a:cs typeface="Arial"/>
-              </a:defRPr>
-            </a:defPPr>
-          </a:lstStyle>
-          <a:p xmlns:a="http://schemas.openxmlformats.org/drawingml/2006/main">
-            <a:pPr>
-              <a:defRPr sz="2250" b="0">
-                <a:solidFill>
-                  <a:srgbClr val="173F50"/>
-                </a:solidFill>
-                <a:latin typeface="Arial"/>
-                <a:ea typeface="Arial"/>
-                <a:cs typeface="Arial"/>
-              </a:defRPr>
-            </a:pPr>
-            <a:r>
-              <a:rPr sz="2250" b="0">
-                <a:solidFill>
-                  <a:srgbClr val="173F50"/>
-                </a:solidFill>
-                <a:latin typeface="Arial"/>
-                <a:ea typeface="Arial"/>
-                <a:cs typeface="Arial"/>
-              </a:rPr>
-              <a:t>Role switch, strategy selection, rebalance, pause and in-kind exit</a:t>
-            </a:r>
-          </a:p>
-          <a:p xmlns:a="http://schemas.openxmlformats.org/drawingml/2006/main">
-            <a:pPr>
-              <a:defRPr sz="2250" b="0">
-                <a:solidFill>
-                  <a:srgbClr val="173F50"/>
-                </a:solidFill>
-                <a:latin typeface="Arial"/>
-                <a:ea typeface="Arial"/>
-                <a:cs typeface="Arial"/>
-              </a:defRPr>
-            </a:pPr>
-            <a:r>
-              <a:rPr sz="2250" b="0">
-                <a:solidFill>
-                  <a:srgbClr val="173F50"/>
-                </a:solidFill>
-                <a:latin typeface="Arial"/>
-                <a:ea typeface="Arial"/>
-                <a:cs typeface="Arial"/>
-              </a:rPr>
-              <a:t>The recording labels local simulation separately from Sepolia.</a:t>
-            </a:r>
-          </a:p>
-        </p:txBody>
-      </p:sp>
+      </p:pic>
     </p:spTree>
     <p:extLst>
       <p:ext uri="{BB962C8B-B14F-4D97-AF65-F5344CB8AC3E}">
-        <p14:creationId xmlns:p14="http://schemas.microsoft.com/office/powerpoint/2010/main" val="62820365"/>
+        <p14:creationId xmlns:p14="http://schemas.microsoft.com/office/powerpoint/2010/main" val="1937676620"/>
       </p:ext>
     </p:extLst>
   </p:cSld>
@@ -9944,10 +9298,10 @@
       </p:grpSpPr>
       <p:sp>
         <p:nvSpPr>
-          <p:cNvPr id="4" name="">
+          <p:cNvPr id="5" name="">
             <a:extLst xmlns:a="http://schemas.openxmlformats.org/drawingml/2006/main">
               <a:ext uri="{FF2B5EF4-FFF2-40B4-BE49-F238E27FC236}">
-                <a16:creationId xmlns:a16="http://schemas.microsoft.com/office/drawing/2014/main" id="{A2C4AA25-657D-4E96-A1FB-909E3897C17C}"/>
+                <a16:creationId xmlns:a16="http://schemas.microsoft.com/office/drawing/2014/main" id="{9B3EC46A-1B4A-4DD9-9391-FEA30D39DB7F}"/>
               </a:ext>
             </a:extLst>
           </p:cNvPr>
@@ -9958,8 +9312,8 @@
         </p:nvSpPr>
         <p:spPr>
           <a:xfrm xmlns:a="http://schemas.openxmlformats.org/drawingml/2006/main">
-            <a:off x="609600" y="457200"/>
-            <a:ext cx="10972800" cy="933450"/>
+            <a:off x="552450" y="333375"/>
+            <a:ext cx="11087100" cy="838200"/>
           </a:xfrm>
           <a:prstGeom xmlns:a="http://schemas.openxmlformats.org/drawingml/2006/main" prst="rect">
             <a:avLst/>
@@ -9973,9 +9327,9 @@
           <a:bodyPr xmlns:a="http://schemas.openxmlformats.org/drawingml/2006/main"/>
           <a:lstStyle xmlns:a="http://schemas.openxmlformats.org/drawingml/2006/main">
             <a:defPPr>
-              <a:defRPr sz="3300" b="1">
-                <a:solidFill>
-                  <a:srgbClr val="123442"/>
+              <a:defRPr sz="3150" b="1">
+                <a:solidFill>
+                  <a:srgbClr val="173F50"/>
                 </a:solidFill>
                 <a:latin typeface="Arial"/>
                 <a:ea typeface="Arial"/>
@@ -9985,9 +9339,9 @@
           </a:lstStyle>
           <a:p xmlns:a="http://schemas.openxmlformats.org/drawingml/2006/main">
             <a:pPr>
-              <a:defRPr sz="3300" b="1">
-                <a:solidFill>
-                  <a:srgbClr val="123442"/>
+              <a:defRPr sz="3150" b="1">
+                <a:solidFill>
+                  <a:srgbClr val="173F50"/>
                 </a:solidFill>
                 <a:latin typeface="Arial"/>
                 <a:ea typeface="Arial"/>
@@ -9995,25 +9349,91 @@
               </a:defRPr>
             </a:pPr>
             <a:r>
-              <a:rPr sz="3300" b="1">
-                <a:solidFill>
-                  <a:srgbClr val="123442"/>
+              <a:rPr sz="3150" b="1">
+                <a:solidFill>
+                  <a:srgbClr val="173F50"/>
                 </a:solidFill>
                 <a:latin typeface="Arial"/>
                 <a:ea typeface="Arial"/>
                 <a:cs typeface="Arial"/>
               </a:rPr>
-              <a:t>Sepolia business evidence</a:t>
+              <a:t>Recorded application workflow</a:t>
+            </a:r>
+          </a:p>
+        </p:txBody>
+      </p:sp>
+      <p:sp>
+        <p:nvSpPr>
+          <p:cNvPr id="2" name="">
+            <a:extLst xmlns:a="http://schemas.openxmlformats.org/drawingml/2006/main">
+              <a:ext uri="{FF2B5EF4-FFF2-40B4-BE49-F238E27FC236}">
+                <a16:creationId xmlns:a16="http://schemas.microsoft.com/office/drawing/2014/main" id="{7A89DDAB-9900-40E5-9E21-2B40CF6FC3D7}"/>
+              </a:ext>
+            </a:extLst>
+          </p:cNvPr>
+          <p:cNvSpPr>
+            <a:spLocks xmlns:a="http://schemas.openxmlformats.org/drawingml/2006/main" noGrp="1"/>
+          </p:cNvSpPr>
+          <p:nvPr/>
+        </p:nvSpPr>
+        <p:spPr>
+          <a:xfrm xmlns:a="http://schemas.openxmlformats.org/drawingml/2006/main">
+            <a:off x="552450" y="6477000"/>
+            <a:ext cx="11087100" cy="266700"/>
+          </a:xfrm>
+          <a:prstGeom xmlns:a="http://schemas.openxmlformats.org/drawingml/2006/main" prst="rect">
+            <a:avLst/>
+          </a:prstGeom>
+          <a:noFill xmlns:a="http://schemas.openxmlformats.org/drawingml/2006/main"/>
+          <a:ln xmlns:a="http://schemas.openxmlformats.org/drawingml/2006/main" w="0">
+            <a:noFill/>
+          </a:ln>
+        </p:spPr>
+        <p:txBody>
+          <a:bodyPr xmlns:a="http://schemas.openxmlformats.org/drawingml/2006/main"/>
+          <a:lstStyle xmlns:a="http://schemas.openxmlformats.org/drawingml/2006/main">
+            <a:defPPr>
+              <a:defRPr sz="1275" b="0">
+                <a:solidFill>
+                  <a:srgbClr val="173F50"/>
+                </a:solidFill>
+                <a:latin typeface="Arial"/>
+                <a:ea typeface="Arial"/>
+                <a:cs typeface="Arial"/>
+              </a:defRPr>
+            </a:defPPr>
+          </a:lstStyle>
+          <a:p xmlns:a="http://schemas.openxmlformats.org/drawingml/2006/main">
+            <a:pPr>
+              <a:defRPr sz="1275" b="0">
+                <a:solidFill>
+                  <a:srgbClr val="173F50"/>
+                </a:solidFill>
+                <a:latin typeface="Arial"/>
+                <a:ea typeface="Arial"/>
+                <a:cs typeface="Arial"/>
+              </a:defRPr>
+            </a:pPr>
+            <a:r>
+              <a:rPr sz="1275" b="0">
+                <a:solidFill>
+                  <a:srgbClr val="173F50"/>
+                </a:solidFill>
+                <a:latin typeface="Arial"/>
+                <a:ea typeface="Arial"/>
+                <a:cs typeface="Arial"/>
+              </a:rPr>
+              <a:t>AlphaVault  /  Du zhuotong  /  8 of 12</a:t>
             </a:r>
           </a:p>
         </p:txBody>
       </p:sp>
       <p:graphicFrame>
         <p:nvGraphicFramePr>
-          <p:cNvPr id="2" name="">
+          <p:cNvPr id="3" name="">
             <a:extLst xmlns:a="http://schemas.openxmlformats.org/drawingml/2006/main">
               <a:ext uri="{FF2B5EF4-FFF2-40B4-BE49-F238E27FC236}">
-                <a16:creationId xmlns:a16="http://schemas.microsoft.com/office/drawing/2014/main" id="{D9D70178-3369-4651-82CF-A0E3D8AF5230}"/>
+                <a16:creationId xmlns:a16="http://schemas.microsoft.com/office/drawing/2014/main" id="{5CAE1380-9E14-4692-B0BB-E5EB4B318119}"/>
               </a:ext>
             </a:extLst>
           </p:cNvPr>
@@ -10021,19 +9441,18 @@
           <p:nvPr/>
         </p:nvGraphicFramePr>
         <p:xfrm>
-          <a:off xmlns:a="http://schemas.openxmlformats.org/drawingml/2006/main" x="609600" y="1714500"/>
-          <a:ext xmlns:a="http://schemas.openxmlformats.org/drawingml/2006/main" cx="10972800" cy="2762250"/>
+          <a:off xmlns:a="http://schemas.openxmlformats.org/drawingml/2006/main" x="552450" y="1714500"/>
+          <a:ext xmlns:a="http://schemas.openxmlformats.org/drawingml/2006/main" cx="11087100" cy="3333750"/>
         </p:xfrm>
         <a:graphic xmlns:a="http://schemas.openxmlformats.org/drawingml/2006/main">
           <a:graphicData uri="http://schemas.openxmlformats.org/drawingml/2006/table">
             <a:tbl>
               <a:tblPr/>
               <a:tblGrid>
-                <a:gridCol w="5715000"/>
-                <a:gridCol w="2628900"/>
-                <a:gridCol w="2628900"/>
+                <a:gridCol w="5543550"/>
+                <a:gridCol w="5543550"/>
               </a:tblGrid>
-              <a:tr h="690563">
+              <a:tr h="666750">
                 <a:tc>
                   <a:txBody>
                     <a:bodyPr/>
@@ -10048,7 +9467,7 @@
                           <a:ea typeface="Arial"/>
                           <a:cs typeface="Arial"/>
                         </a:rPr>
-                        <a:t>Observed step</a:t>
+                        <a:t>Local demonstration</a:t>
                       </a:r>
                     </a:p>
                   </a:txBody>
@@ -10072,31 +9491,7 @@
                           <a:ea typeface="Arial"/>
                           <a:cs typeface="Arial"/>
                         </a:rPr>
-                        <a:t>NAV in mUSD</a:t>
-                      </a:r>
-                    </a:p>
-                  </a:txBody>
-                  <a:tcPr marL="91440" marR="91440" marT="45720" marB="45720">
-                    <a:solidFill>
-                      <a:srgbClr val="173F50"/>
-                    </a:solidFill>
-                  </a:tcPr>
-                </a:tc>
-                <a:tc>
-                  <a:txBody>
-                    <a:bodyPr/>
-                    <a:lstStyle/>
-                    <a:p>
-                      <a:r>
-                        <a:rPr sz="1800" b="1">
-                          <a:solidFill>
-                            <a:srgbClr val="FFFFFF"/>
-                          </a:solidFill>
-                          <a:latin typeface="Arial"/>
-                          <a:ea typeface="Arial"/>
-                          <a:cs typeface="Arial"/>
-                        </a:rPr>
-                        <a:t>Investor shares</a:t>
+                        <a:t>Public historical evidence</a:t>
                       </a:r>
                     </a:p>
                   </a:txBody>
@@ -10107,7 +9502,7 @@
                   </a:tcPr>
                 </a:tc>
               </a:tr>
-              <a:tr h="690563">
+              <a:tr h="666750">
                 <a:tc>
                   <a:txBody>
                     <a:bodyPr/>
@@ -10116,13 +9511,13 @@
                       <a:r>
                         <a:rPr sz="1800" b="0">
                           <a:solidFill>
-                            <a:srgbClr val="193640"/>
+                            <a:srgbClr val="173F50"/>
                           </a:solidFill>
                           <a:latin typeface="Arial"/>
                           <a:ea typeface="Arial"/>
                           <a:cs typeface="Arial"/>
                         </a:rPr>
-                        <a:t>Deposit</a:t>
+                        <a:t>Approve and deposit 1,000 mUSD</a:t>
                       </a:r>
                     </a:p>
                   </a:txBody>
@@ -10140,13 +9535,89 @@
                       <a:r>
                         <a:rPr sz="1800" b="0">
                           <a:solidFill>
-                            <a:srgbClr val="193640"/>
+                            <a:srgbClr val="173F50"/>
                           </a:solidFill>
                           <a:latin typeface="Arial"/>
                           <a:ea typeface="Arial"/>
                           <a:cs typeface="Arial"/>
                         </a:rPr>
-                        <a:t>1,000.00</a:t>
+                        <a:t>Sepolia dashboard and stale-price disclosure</a:t>
+                      </a:r>
+                    </a:p>
+                  </a:txBody>
+                  <a:tcPr marL="91440" marR="91440" marT="45720" marB="45720">
+                    <a:solidFill>
+                      <a:srgbClr val="FFFFFF"/>
+                    </a:solidFill>
+                  </a:tcPr>
+                </a:tc>
+              </a:tr>
+              <a:tr h="666750">
+                <a:tc>
+                  <a:txBody>
+                    <a:bodyPr/>
+                    <a:lstStyle/>
+                    <a:p>
+                      <a:r>
+                        <a:rPr sz="1800" b="0">
+                          <a:solidFill>
+                            <a:srgbClr val="173F50"/>
+                          </a:solidFill>
+                          <a:latin typeface="Arial"/>
+                          <a:ea typeface="Arial"/>
+                          <a:cs typeface="Arial"/>
+                        </a:rPr>
+                        <a:t>Select Momentum and rebalance</a:t>
+                      </a:r>
+                    </a:p>
+                  </a:txBody>
+                  <a:tcPr marL="91440" marR="91440" marT="45720" marB="45720">
+                    <a:solidFill>
+                      <a:srgbClr val="F1F5F6"/>
+                    </a:solidFill>
+                  </a:tcPr>
+                </a:tc>
+                <a:tc>
+                  <a:txBody>
+                    <a:bodyPr/>
+                    <a:lstStyle/>
+                    <a:p>
+                      <a:r>
+                        <a:rPr sz="1800" b="0">
+                          <a:solidFill>
+                            <a:srgbClr val="173F50"/>
+                          </a:solidFill>
+                          <a:latin typeface="Arial"/>
+                          <a:ea typeface="Arial"/>
+                          <a:cs typeface="Arial"/>
+                        </a:rPr>
+                        <a:t>NAV 748.80 mUSD; share index 99.84</a:t>
+                      </a:r>
+                    </a:p>
+                  </a:txBody>
+                  <a:tcPr marL="91440" marR="91440" marT="45720" marB="45720">
+                    <a:solidFill>
+                      <a:srgbClr val="F1F5F6"/>
+                    </a:solidFill>
+                  </a:tcPr>
+                </a:tc>
+              </a:tr>
+              <a:tr h="666750">
+                <a:tc>
+                  <a:txBody>
+                    <a:bodyPr/>
+                    <a:lstStyle/>
+                    <a:p>
+                      <a:r>
+                        <a:rPr sz="1800" b="0">
+                          <a:solidFill>
+                            <a:srgbClr val="173F50"/>
+                          </a:solidFill>
+                          <a:latin typeface="Arial"/>
+                          <a:ea typeface="Arial"/>
+                          <a:cs typeface="Arial"/>
+                        </a:rPr>
+                        <a:t>Pause and redeem 25% in kind</a:t>
                       </a:r>
                     </a:p>
                   </a:txBody>
@@ -10164,13 +9635,13 @@
                       <a:r>
                         <a:rPr sz="1800" b="0">
                           <a:solidFill>
-                            <a:srgbClr val="193640"/>
+                            <a:srgbClr val="173F50"/>
                           </a:solidFill>
                           <a:latin typeface="Arial"/>
                           <a:ea typeface="Arial"/>
                           <a:cs typeface="Arial"/>
                         </a:rPr>
-                        <a:t>1,000</a:t>
+                        <a:t>10 method types, including ERC20 approve</a:t>
                       </a:r>
                     </a:p>
                   </a:txBody>
@@ -10181,7 +9652,7 @@
                   </a:tcPr>
                 </a:tc>
               </a:tr>
-              <a:tr h="690563">
+              <a:tr h="666750">
                 <a:tc>
                   <a:txBody>
                     <a:bodyPr/>
@@ -10190,13 +9661,13 @@
                       <a:r>
                         <a:rPr sz="1800" b="0">
                           <a:solidFill>
-                            <a:srgbClr val="193640"/>
+                            <a:srgbClr val="173F50"/>
                           </a:solidFill>
                           <a:latin typeface="Arial"/>
                           <a:ea typeface="Arial"/>
                           <a:cs typeface="Arial"/>
                         </a:rPr>
-                        <a:t>Momentum rebalance</a:t>
+                        <a:t>Inspect ledger and synthetic research</a:t>
                       </a:r>
                     </a:p>
                   </a:txBody>
@@ -10214,37 +9685,13 @@
                       <a:r>
                         <a:rPr sz="1800" b="0">
                           <a:solidFill>
-                            <a:srgbClr val="193640"/>
+                            <a:srgbClr val="173F50"/>
                           </a:solidFill>
                           <a:latin typeface="Arial"/>
                           <a:ea typeface="Arial"/>
                           <a:cs typeface="Arial"/>
                         </a:rPr>
-                        <a:t>998.40</a:t>
-                      </a:r>
-                    </a:p>
-                  </a:txBody>
-                  <a:tcPr marL="91440" marR="91440" marT="45720" marB="45720">
-                    <a:solidFill>
-                      <a:srgbClr val="F1F5F6"/>
-                    </a:solidFill>
-                  </a:tcPr>
-                </a:tc>
-                <a:tc>
-                  <a:txBody>
-                    <a:bodyPr/>
-                    <a:lstStyle/>
-                    <a:p>
-                      <a:r>
-                        <a:rPr sz="1800" b="0">
-                          <a:solidFill>
-                            <a:srgbClr val="193640"/>
-                          </a:solidFill>
-                          <a:latin typeface="Arial"/>
-                          <a:ea typeface="Arial"/>
-                          <a:cs typeface="Arial"/>
-                        </a:rPr>
-                        <a:t>1,000</a:t>
+                        <a:t>No new public signatures in the recording</a:t>
                       </a:r>
                     </a:p>
                   </a:txBody>
@@ -10255,90 +9702,16 @@
                   </a:tcPr>
                 </a:tc>
               </a:tr>
-              <a:tr h="690563">
-                <a:tc>
-                  <a:txBody>
-                    <a:bodyPr/>
-                    <a:lstStyle/>
-                    <a:p>
-                      <a:r>
-                        <a:rPr sz="1800" b="0">
-                          <a:solidFill>
-                            <a:srgbClr val="193640"/>
-                          </a:solidFill>
-                          <a:latin typeface="Arial"/>
-                          <a:ea typeface="Arial"/>
-                          <a:cs typeface="Arial"/>
-                        </a:rPr>
-                        <a:t>Redeem 250 while paused</a:t>
-                      </a:r>
-                    </a:p>
-                  </a:txBody>
-                  <a:tcPr marL="91440" marR="91440" marT="45720" marB="45720">
-                    <a:solidFill>
-                      <a:srgbClr val="FFFFFF"/>
-                    </a:solidFill>
-                  </a:tcPr>
-                </a:tc>
-                <a:tc>
-                  <a:txBody>
-                    <a:bodyPr/>
-                    <a:lstStyle/>
-                    <a:p>
-                      <a:r>
-                        <a:rPr sz="1800" b="0">
-                          <a:solidFill>
-                            <a:srgbClr val="193640"/>
-                          </a:solidFill>
-                          <a:latin typeface="Arial"/>
-                          <a:ea typeface="Arial"/>
-                          <a:cs typeface="Arial"/>
-                        </a:rPr>
-                        <a:t>748.80</a:t>
-                      </a:r>
-                    </a:p>
-                  </a:txBody>
-                  <a:tcPr marL="91440" marR="91440" marT="45720" marB="45720">
-                    <a:solidFill>
-                      <a:srgbClr val="FFFFFF"/>
-                    </a:solidFill>
-                  </a:tcPr>
-                </a:tc>
-                <a:tc>
-                  <a:txBody>
-                    <a:bodyPr/>
-                    <a:lstStyle/>
-                    <a:p>
-                      <a:r>
-                        <a:rPr sz="1800" b="0">
-                          <a:solidFill>
-                            <a:srgbClr val="193640"/>
-                          </a:solidFill>
-                          <a:latin typeface="Arial"/>
-                          <a:ea typeface="Arial"/>
-                          <a:cs typeface="Arial"/>
-                        </a:rPr>
-                        <a:t>750</a:t>
-                      </a:r>
-                    </a:p>
-                  </a:txBody>
-                  <a:tcPr marL="91440" marR="91440" marT="45720" marB="45720">
-                    <a:solidFill>
-                      <a:srgbClr val="FFFFFF"/>
-                    </a:solidFill>
-                  </a:tcPr>
-                </a:tc>
-              </a:tr>
             </a:tbl>
           </a:graphicData>
         </a:graphic>
       </p:graphicFrame>
       <p:sp>
         <p:nvSpPr>
-          <p:cNvPr id="3" name="">
+          <p:cNvPr id="4" name="">
             <a:extLst xmlns:a="http://schemas.openxmlformats.org/drawingml/2006/main">
               <a:ext uri="{FF2B5EF4-FFF2-40B4-BE49-F238E27FC236}">
-                <a16:creationId xmlns:a16="http://schemas.microsoft.com/office/drawing/2014/main" id="{CD3FDD71-197B-469F-8BF8-36A5D63A915C}"/>
+                <a16:creationId xmlns:a16="http://schemas.microsoft.com/office/drawing/2014/main" id="{6614335B-D3A1-4FBF-8579-30CEED9DC136}"/>
               </a:ext>
             </a:extLst>
           </p:cNvPr>
@@ -10349,8 +9722,8 @@
         </p:nvSpPr>
         <p:spPr>
           <a:xfrm xmlns:a="http://schemas.openxmlformats.org/drawingml/2006/main">
-            <a:off x="609600" y="5191125"/>
-            <a:ext cx="10972800" cy="1047750"/>
+            <a:off x="552450" y="5572125"/>
+            <a:ext cx="11087100" cy="619125"/>
           </a:xfrm>
           <a:prstGeom xmlns:a="http://schemas.openxmlformats.org/drawingml/2006/main" prst="rect">
             <a:avLst/>
@@ -10364,7 +9737,7 @@
           <a:bodyPr xmlns:a="http://schemas.openxmlformats.org/drawingml/2006/main"/>
           <a:lstStyle xmlns:a="http://schemas.openxmlformats.org/drawingml/2006/main">
             <a:defPPr>
-              <a:defRPr sz="2100" b="0">
+              <a:defRPr sz="2025" b="0">
                 <a:solidFill>
                   <a:srgbClr val="173F50"/>
                 </a:solidFill>
@@ -10376,7 +9749,7 @@
           </a:lstStyle>
           <a:p xmlns:a="http://schemas.openxmlformats.org/drawingml/2006/main">
             <a:pPr>
-              <a:defRPr sz="2100" b="0">
+              <a:defRPr sz="2025" b="0">
                 <a:solidFill>
                   <a:srgbClr val="173F50"/>
                 </a:solidFill>
@@ -10386,7 +9759,7 @@
               </a:defRPr>
             </a:pPr>
             <a:r>
-              <a:rPr sz="2100" b="0">
+              <a:rPr sz="2025" b="0">
                 <a:solidFill>
                   <a:srgbClr val="173F50"/>
                 </a:solidFill>
@@ -10394,30 +9767,7 @@
                 <a:ea typeface="Arial"/>
                 <a:cs typeface="Arial"/>
               </a:rPr>
-              <a:t>12 successful receipts / 10 method types including ERC20 approval</a:t>
-            </a:r>
-          </a:p>
-          <a:p xmlns:a="http://schemas.openxmlformats.org/drawingml/2006/main">
-            <a:pPr>
-              <a:defRPr sz="2100" b="0">
-                <a:solidFill>
-                  <a:srgbClr val="173F50"/>
-                </a:solidFill>
-                <a:latin typeface="Arial"/>
-                <a:ea typeface="Arial"/>
-                <a:cs typeface="Arial"/>
-              </a:defRPr>
-            </a:pPr>
-            <a:r>
-              <a:rPr sz="2100" b="0">
-                <a:solidFill>
-                  <a:srgbClr val="173F50"/>
-                </a:solidFill>
-                <a:latin typeface="Arial"/>
-                <a:ea typeface="Arial"/>
-                <a:cs typeface="Arial"/>
-              </a:rPr>
-              <a:t>One additional core method is needed if approval is excluded.</a:t>
+              <a:t>Recorded application workflow: 3 min 23 sec within the ten-minute presentation.</a:t>
             </a:r>
           </a:p>
         </p:txBody>
@@ -10425,7 +9775,7 @@
     </p:spTree>
     <p:extLst>
       <p:ext uri="{BB962C8B-B14F-4D97-AF65-F5344CB8AC3E}">
-        <p14:creationId xmlns:p14="http://schemas.microsoft.com/office/powerpoint/2010/main" val="1080685892"/>
+        <p14:creationId xmlns:p14="http://schemas.microsoft.com/office/powerpoint/2010/main" val="2069192816"/>
       </p:ext>
     </p:extLst>
   </p:cSld>
@@ -10453,10 +9803,10 @@
       </p:grpSpPr>
       <p:sp>
         <p:nvSpPr>
-          <p:cNvPr id="4" name="">
+          <p:cNvPr id="8" name="">
             <a:extLst xmlns:a="http://schemas.openxmlformats.org/drawingml/2006/main">
               <a:ext uri="{FF2B5EF4-FFF2-40B4-BE49-F238E27FC236}">
-                <a16:creationId xmlns:a16="http://schemas.microsoft.com/office/drawing/2014/main" id="{342070F9-32D0-4D87-975F-9DFB6BB5674B}"/>
+                <a16:creationId xmlns:a16="http://schemas.microsoft.com/office/drawing/2014/main" id="{4FFE2501-59B0-4A82-BCAD-441A99C75594}"/>
               </a:ext>
             </a:extLst>
           </p:cNvPr>
@@ -10467,8 +9817,8 @@
         </p:nvSpPr>
         <p:spPr>
           <a:xfrm xmlns:a="http://schemas.openxmlformats.org/drawingml/2006/main">
-            <a:off x="609600" y="457200"/>
-            <a:ext cx="10972800" cy="933450"/>
+            <a:off x="552450" y="333375"/>
+            <a:ext cx="11087100" cy="838200"/>
           </a:xfrm>
           <a:prstGeom xmlns:a="http://schemas.openxmlformats.org/drawingml/2006/main" prst="rect">
             <a:avLst/>
@@ -10482,9 +9832,9 @@
           <a:bodyPr xmlns:a="http://schemas.openxmlformats.org/drawingml/2006/main"/>
           <a:lstStyle xmlns:a="http://schemas.openxmlformats.org/drawingml/2006/main">
             <a:defPPr>
-              <a:defRPr sz="3300" b="1">
-                <a:solidFill>
-                  <a:srgbClr val="123442"/>
+              <a:defRPr sz="3150" b="1">
+                <a:solidFill>
+                  <a:srgbClr val="173F50"/>
                 </a:solidFill>
                 <a:latin typeface="Arial"/>
                 <a:ea typeface="Arial"/>
@@ -10494,9 +9844,9 @@
           </a:lstStyle>
           <a:p xmlns:a="http://schemas.openxmlformats.org/drawingml/2006/main">
             <a:pPr>
-              <a:defRPr sz="3300" b="1">
-                <a:solidFill>
-                  <a:srgbClr val="123442"/>
+              <a:defRPr sz="3150" b="1">
+                <a:solidFill>
+                  <a:srgbClr val="173F50"/>
                 </a:solidFill>
                 <a:latin typeface="Arial"/>
                 <a:ea typeface="Arial"/>
@@ -10504,303 +9854,25 @@
               </a:defRPr>
             </a:pPr>
             <a:r>
-              <a:rPr sz="3300" b="1">
-                <a:solidFill>
-                  <a:srgbClr val="123442"/>
+              <a:rPr sz="3150" b="1">
+                <a:solidFill>
+                  <a:srgbClr val="173F50"/>
                 </a:solidFill>
                 <a:latin typeface="Arial"/>
                 <a:ea typeface="Arial"/>
                 <a:cs typeface="Arial"/>
               </a:rPr>
-              <a:t>Testing and persistent hosting</a:t>
+              <a:t>Measured impact</a:t>
             </a:r>
           </a:p>
         </p:txBody>
       </p:sp>
-      <p:graphicFrame>
-        <p:nvGraphicFramePr>
+      <p:sp>
+        <p:nvSpPr>
           <p:cNvPr id="2" name="">
             <a:extLst xmlns:a="http://schemas.openxmlformats.org/drawingml/2006/main">
               <a:ext uri="{FF2B5EF4-FFF2-40B4-BE49-F238E27FC236}">
-                <a16:creationId xmlns:a16="http://schemas.microsoft.com/office/drawing/2014/main" id="{A97C67AF-DE39-4929-B89D-DE457AF83A0C}"/>
-              </a:ext>
-            </a:extLst>
-          </p:cNvPr>
-          <p:cNvGraphicFramePr/>
-          <p:nvPr/>
-        </p:nvGraphicFramePr>
-        <p:xfrm>
-          <a:off xmlns:a="http://schemas.openxmlformats.org/drawingml/2006/main" x="609600" y="1619250"/>
-          <a:ext xmlns:a="http://schemas.openxmlformats.org/drawingml/2006/main" cx="10972800" cy="3476625"/>
-        </p:xfrm>
-        <a:graphic xmlns:a="http://schemas.openxmlformats.org/drawingml/2006/main">
-          <a:graphicData uri="http://schemas.openxmlformats.org/drawingml/2006/table">
-            <a:tbl>
-              <a:tblPr/>
-              <a:tblGrid>
-                <a:gridCol w="3333750"/>
-                <a:gridCol w="7639050"/>
-              </a:tblGrid>
-              <a:tr h="695325">
-                <a:tc>
-                  <a:txBody>
-                    <a:bodyPr/>
-                    <a:lstStyle/>
-                    <a:p>
-                      <a:r>
-                        <a:rPr sz="1800" b="1">
-                          <a:solidFill>
-                            <a:srgbClr val="FFFFFF"/>
-                          </a:solidFill>
-                          <a:latin typeface="Arial"/>
-                          <a:ea typeface="Arial"/>
-                          <a:cs typeface="Arial"/>
-                        </a:rPr>
-                        <a:t>Layer</a:t>
-                      </a:r>
-                    </a:p>
-                  </a:txBody>
-                  <a:tcPr marL="91440" marR="91440" marT="45720" marB="45720">
-                    <a:solidFill>
-                      <a:srgbClr val="173F50"/>
-                    </a:solidFill>
-                  </a:tcPr>
-                </a:tc>
-                <a:tc>
-                  <a:txBody>
-                    <a:bodyPr/>
-                    <a:lstStyle/>
-                    <a:p>
-                      <a:r>
-                        <a:rPr sz="1800" b="1">
-                          <a:solidFill>
-                            <a:srgbClr val="FFFFFF"/>
-                          </a:solidFill>
-                          <a:latin typeface="Arial"/>
-                          <a:ea typeface="Arial"/>
-                          <a:cs typeface="Arial"/>
-                        </a:rPr>
-                        <a:t>Recorded evidence</a:t>
-                      </a:r>
-                    </a:p>
-                  </a:txBody>
-                  <a:tcPr marL="91440" marR="91440" marT="45720" marB="45720">
-                    <a:solidFill>
-                      <a:srgbClr val="173F50"/>
-                    </a:solidFill>
-                  </a:tcPr>
-                </a:tc>
-              </a:tr>
-              <a:tr h="695325">
-                <a:tc>
-                  <a:txBody>
-                    <a:bodyPr/>
-                    <a:lstStyle/>
-                    <a:p>
-                      <a:r>
-                        <a:rPr sz="1800" b="0">
-                          <a:solidFill>
-                            <a:srgbClr val="193640"/>
-                          </a:solidFill>
-                          <a:latin typeface="Arial"/>
-                          <a:ea typeface="Arial"/>
-                          <a:cs typeface="Arial"/>
-                        </a:rPr>
-                        <a:t>Automated tests</a:t>
-                      </a:r>
-                    </a:p>
-                  </a:txBody>
-                  <a:tcPr marL="91440" marR="91440" marT="45720" marB="45720">
-                    <a:solidFill>
-                      <a:srgbClr val="FFFFFF"/>
-                    </a:solidFill>
-                  </a:tcPr>
-                </a:tc>
-                <a:tc>
-                  <a:txBody>
-                    <a:bodyPr/>
-                    <a:lstStyle/>
-                    <a:p>
-                      <a:r>
-                        <a:rPr sz="1800" b="0">
-                          <a:solidFill>
-                            <a:srgbClr val="193640"/>
-                          </a:solidFill>
-                          <a:latin typeface="Arial"/>
-                          <a:ea typeface="Arial"/>
-                          <a:cs typeface="Arial"/>
-                        </a:rPr>
-                        <a:t>64 passed before CA change; 7 PostgreSQL checks passed after</a:t>
-                      </a:r>
-                    </a:p>
-                  </a:txBody>
-                  <a:tcPr marL="91440" marR="91440" marT="45720" marB="45720">
-                    <a:solidFill>
-                      <a:srgbClr val="FFFFFF"/>
-                    </a:solidFill>
-                  </a:tcPr>
-                </a:tc>
-              </a:tr>
-              <a:tr h="695325">
-                <a:tc>
-                  <a:txBody>
-                    <a:bodyPr/>
-                    <a:lstStyle/>
-                    <a:p>
-                      <a:r>
-                        <a:rPr sz="1800" b="0">
-                          <a:solidFill>
-                            <a:srgbClr val="193640"/>
-                          </a:solidFill>
-                          <a:latin typeface="Arial"/>
-                          <a:ea typeface="Arial"/>
-                          <a:cs typeface="Arial"/>
-                        </a:rPr>
-                        <a:t>Public hosting</a:t>
-                      </a:r>
-                    </a:p>
-                  </a:txBody>
-                  <a:tcPr marL="91440" marR="91440" marT="45720" marB="45720">
-                    <a:solidFill>
-                      <a:srgbClr val="F1F5F6"/>
-                    </a:solidFill>
-                  </a:tcPr>
-                </a:tc>
-                <a:tc>
-                  <a:txBody>
-                    <a:bodyPr/>
-                    <a:lstStyle/>
-                    <a:p>
-                      <a:r>
-                        <a:rPr sz="1800" b="0">
-                          <a:solidFill>
-                            <a:srgbClr val="193640"/>
-                          </a:solidFill>
-                          <a:latin typeface="Arial"/>
-                          <a:ea typeface="Arial"/>
-                          <a:cs typeface="Arial"/>
-                        </a:rPr>
-                        <a:t>Render HTTPS with Supabase PostgreSQL and verified TLS</a:t>
-                      </a:r>
-                    </a:p>
-                  </a:txBody>
-                  <a:tcPr marL="91440" marR="91440" marT="45720" marB="45720">
-                    <a:solidFill>
-                      <a:srgbClr val="F1F5F6"/>
-                    </a:solidFill>
-                  </a:tcPr>
-                </a:tc>
-              </a:tr>
-              <a:tr h="695325">
-                <a:tc>
-                  <a:txBody>
-                    <a:bodyPr/>
-                    <a:lstStyle/>
-                    <a:p>
-                      <a:r>
-                        <a:rPr sz="1800" b="0">
-                          <a:solidFill>
-                            <a:srgbClr val="193640"/>
-                          </a:solidFill>
-                          <a:latin typeface="Arial"/>
-                          <a:ea typeface="Arial"/>
-                          <a:cs typeface="Arial"/>
-                        </a:rPr>
-                        <a:t>Restart persistence</a:t>
-                      </a:r>
-                    </a:p>
-                  </a:txBody>
-                  <a:tcPr marL="91440" marR="91440" marT="45720" marB="45720">
-                    <a:solidFill>
-                      <a:srgbClr val="FFFFFF"/>
-                    </a:solidFill>
-                  </a:tcPr>
-                </a:tc>
-                <a:tc>
-                  <a:txBody>
-                    <a:bodyPr/>
-                    <a:lstStyle/>
-                    <a:p>
-                      <a:r>
-                        <a:rPr sz="1800" b="0">
-                          <a:solidFill>
-                            <a:srgbClr val="193640"/>
-                          </a:solidFill>
-                          <a:latin typeface="Arial"/>
-                          <a:ea typeface="Arial"/>
-                          <a:cs typeface="Arial"/>
-                        </a:rPr>
-                        <a:t>Non-chain jobs sentinel retained across a service restart</a:t>
-                      </a:r>
-                    </a:p>
-                  </a:txBody>
-                  <a:tcPr marL="91440" marR="91440" marT="45720" marB="45720">
-                    <a:solidFill>
-                      <a:srgbClr val="FFFFFF"/>
-                    </a:solidFill>
-                  </a:tcPr>
-                </a:tc>
-              </a:tr>
-              <a:tr h="695325">
-                <a:tc>
-                  <a:txBody>
-                    <a:bodyPr/>
-                    <a:lstStyle/>
-                    <a:p>
-                      <a:r>
-                        <a:rPr sz="1800" b="0">
-                          <a:solidFill>
-                            <a:srgbClr val="193640"/>
-                          </a:solidFill>
-                          <a:latin typeface="Arial"/>
-                          <a:ea typeface="Arial"/>
-                          <a:cs typeface="Arial"/>
-                        </a:rPr>
-                        <a:t>Wallet boundary</a:t>
-                      </a:r>
-                    </a:p>
-                  </a:txBody>
-                  <a:tcPr marL="91440" marR="91440" marT="45720" marB="45720">
-                    <a:solidFill>
-                      <a:srgbClr val="F1F5F6"/>
-                    </a:solidFill>
-                  </a:tcPr>
-                </a:tc>
-                <a:tc>
-                  <a:txBody>
-                    <a:bodyPr/>
-                    <a:lstStyle/>
-                    <a:p>
-                      <a:r>
-                        <a:rPr sz="1800" b="0">
-                          <a:solidFill>
-                            <a:srgbClr val="193640"/>
-                          </a:solidFill>
-                          <a:latin typeface="Arial"/>
-                          <a:ea typeface="Arial"/>
-                          <a:cs typeface="Arial"/>
-                        </a:rPr>
-                        <a:t>Hosted backend rejects local signing requests</a:t>
-                      </a:r>
-                    </a:p>
-                  </a:txBody>
-                  <a:tcPr marL="91440" marR="91440" marT="45720" marB="45720">
-                    <a:solidFill>
-                      <a:srgbClr val="F1F5F6"/>
-                    </a:solidFill>
-                  </a:tcPr>
-                </a:tc>
-              </a:tr>
-            </a:tbl>
-          </a:graphicData>
-        </a:graphic>
-      </p:graphicFrame>
-      <p:sp>
-        <p:nvSpPr>
-          <p:cNvPr id="3" name="">
-            <a:extLst xmlns:a="http://schemas.openxmlformats.org/drawingml/2006/main">
-              <a:ext uri="{FF2B5EF4-FFF2-40B4-BE49-F238E27FC236}">
-                <a16:creationId xmlns:a16="http://schemas.microsoft.com/office/drawing/2014/main" id="{FDDECB37-A6FA-480A-9A82-D3338C80D0BB}"/>
+                <a16:creationId xmlns:a16="http://schemas.microsoft.com/office/drawing/2014/main" id="{417494E7-D7C2-444C-A143-4A0DCF2E2BD7}"/>
               </a:ext>
             </a:extLst>
           </p:cNvPr>
@@ -10811,8 +9883,162 @@
         </p:nvSpPr>
         <p:spPr>
           <a:xfrm xmlns:a="http://schemas.openxmlformats.org/drawingml/2006/main">
-            <a:off x="609600" y="5572125"/>
-            <a:ext cx="10953750" cy="619125"/>
+            <a:off x="552450" y="6477000"/>
+            <a:ext cx="11087100" cy="266700"/>
+          </a:xfrm>
+          <a:prstGeom xmlns:a="http://schemas.openxmlformats.org/drawingml/2006/main" prst="rect">
+            <a:avLst/>
+          </a:prstGeom>
+          <a:noFill xmlns:a="http://schemas.openxmlformats.org/drawingml/2006/main"/>
+          <a:ln xmlns:a="http://schemas.openxmlformats.org/drawingml/2006/main" w="0">
+            <a:noFill/>
+          </a:ln>
+        </p:spPr>
+        <p:txBody>
+          <a:bodyPr xmlns:a="http://schemas.openxmlformats.org/drawingml/2006/main"/>
+          <a:lstStyle xmlns:a="http://schemas.openxmlformats.org/drawingml/2006/main">
+            <a:defPPr>
+              <a:defRPr sz="1275" b="0">
+                <a:solidFill>
+                  <a:srgbClr val="173F50"/>
+                </a:solidFill>
+                <a:latin typeface="Arial"/>
+                <a:ea typeface="Arial"/>
+                <a:cs typeface="Arial"/>
+              </a:defRPr>
+            </a:defPPr>
+          </a:lstStyle>
+          <a:p xmlns:a="http://schemas.openxmlformats.org/drawingml/2006/main">
+            <a:pPr>
+              <a:defRPr sz="1275" b="0">
+                <a:solidFill>
+                  <a:srgbClr val="173F50"/>
+                </a:solidFill>
+                <a:latin typeface="Arial"/>
+                <a:ea typeface="Arial"/>
+                <a:cs typeface="Arial"/>
+              </a:defRPr>
+            </a:pPr>
+            <a:r>
+              <a:rPr sz="1275" b="0">
+                <a:solidFill>
+                  <a:srgbClr val="173F50"/>
+                </a:solidFill>
+                <a:latin typeface="Arial"/>
+                <a:ea typeface="Arial"/>
+                <a:cs typeface="Arial"/>
+              </a:rPr>
+              <a:t>AlphaVault  /  Du zhuotong  /  9 of 12</a:t>
+            </a:r>
+          </a:p>
+        </p:txBody>
+      </p:sp>
+      <p:graphicFrame>
+        <p:nvGraphicFramePr>
+          <p:cNvPr id="3" name="Chart">
+            <a:extLst xmlns:a="http://schemas.openxmlformats.org/drawingml/2006/main">
+              <a:ext uri="{FF2B5EF4-FFF2-40B4-BE49-F238E27FC236}">
+                <a16:creationId xmlns:a16="http://schemas.microsoft.com/office/drawing/2014/main" id="{CE64D9C6-E6EB-46A8-BFC5-A71AEC105DF5}"/>
+              </a:ext>
+            </a:extLst>
+          </p:cNvPr>
+          <p:cNvGraphicFramePr/>
+          <p:nvPr/>
+        </p:nvGraphicFramePr>
+        <p:xfrm>
+          <a:off xmlns:a="http://schemas.openxmlformats.org/drawingml/2006/main" x="552450" y="1428750"/>
+          <a:ext xmlns:a="http://schemas.openxmlformats.org/drawingml/2006/main" cx="7429500" cy="3810000"/>
+        </p:xfrm>
+        <a:graphic xmlns:a="http://schemas.openxmlformats.org/drawingml/2006/main">
+          <a:graphicData uri="http://schemas.openxmlformats.org/drawingml/2006/chart">
+            <c:chart xmlns:r="http://schemas.openxmlformats.org/officeDocument/2006/relationships" xmlns:c="http://schemas.openxmlformats.org/drawingml/2006/chart" r:id="Rd4d73446b8e742bb"/>
+          </a:graphicData>
+        </a:graphic>
+      </p:graphicFrame>
+      <p:sp>
+        <p:nvSpPr>
+          <p:cNvPr id="4" name="">
+            <a:extLst xmlns:a="http://schemas.openxmlformats.org/drawingml/2006/main">
+              <a:ext uri="{FF2B5EF4-FFF2-40B4-BE49-F238E27FC236}">
+                <a16:creationId xmlns:a16="http://schemas.microsoft.com/office/drawing/2014/main" id="{FD45E6AF-1C9A-44B2-92B1-970DE6E15424}"/>
+              </a:ext>
+            </a:extLst>
+          </p:cNvPr>
+          <p:cNvSpPr>
+            <a:spLocks xmlns:a="http://schemas.openxmlformats.org/drawingml/2006/main" noGrp="1"/>
+          </p:cNvSpPr>
+          <p:nvPr/>
+        </p:nvSpPr>
+        <p:spPr>
+          <a:xfrm xmlns:a="http://schemas.openxmlformats.org/drawingml/2006/main">
+            <a:off x="8334375" y="1571625"/>
+            <a:ext cx="3286125" cy="571500"/>
+          </a:xfrm>
+          <a:prstGeom xmlns:a="http://schemas.openxmlformats.org/drawingml/2006/main" prst="rect">
+            <a:avLst/>
+          </a:prstGeom>
+          <a:noFill xmlns:a="http://schemas.openxmlformats.org/drawingml/2006/main"/>
+          <a:ln xmlns:a="http://schemas.openxmlformats.org/drawingml/2006/main" w="0">
+            <a:noFill/>
+          </a:ln>
+        </p:spPr>
+        <p:txBody>
+          <a:bodyPr xmlns:a="http://schemas.openxmlformats.org/drawingml/2006/main"/>
+          <a:lstStyle xmlns:a="http://schemas.openxmlformats.org/drawingml/2006/main">
+            <a:defPPr>
+              <a:defRPr sz="2100" b="1">
+                <a:solidFill>
+                  <a:srgbClr val="173F50"/>
+                </a:solidFill>
+                <a:latin typeface="Arial"/>
+                <a:ea typeface="Arial"/>
+                <a:cs typeface="Arial"/>
+              </a:defRPr>
+            </a:defPPr>
+          </a:lstStyle>
+          <a:p xmlns:a="http://schemas.openxmlformats.org/drawingml/2006/main">
+            <a:pPr>
+              <a:defRPr sz="2100" b="1">
+                <a:solidFill>
+                  <a:srgbClr val="173F50"/>
+                </a:solidFill>
+                <a:latin typeface="Arial"/>
+                <a:ea typeface="Arial"/>
+                <a:cs typeface="Arial"/>
+              </a:defRPr>
+            </a:pPr>
+            <a:r>
+              <a:rPr sz="2100" b="1">
+                <a:solidFill>
+                  <a:srgbClr val="173F50"/>
+                </a:solidFill>
+                <a:latin typeface="Arial"/>
+                <a:ea typeface="Arial"/>
+                <a:cs typeface="Arial"/>
+              </a:rPr>
+              <a:t>Maximum drawdown</a:t>
+            </a:r>
+          </a:p>
+        </p:txBody>
+      </p:sp>
+      <p:sp>
+        <p:nvSpPr>
+          <p:cNvPr id="5" name="">
+            <a:extLst xmlns:a="http://schemas.openxmlformats.org/drawingml/2006/main">
+              <a:ext uri="{FF2B5EF4-FFF2-40B4-BE49-F238E27FC236}">
+                <a16:creationId xmlns:a16="http://schemas.microsoft.com/office/drawing/2014/main" id="{5E744B6B-DC8D-4900-BC2F-D6989694E1E2}"/>
+              </a:ext>
+            </a:extLst>
+          </p:cNvPr>
+          <p:cNvSpPr>
+            <a:spLocks xmlns:a="http://schemas.openxmlformats.org/drawingml/2006/main" noGrp="1"/>
+          </p:cNvSpPr>
+          <p:nvPr/>
+        </p:nvSpPr>
+        <p:spPr>
+          <a:xfrm xmlns:a="http://schemas.openxmlformats.org/drawingml/2006/main">
+            <a:off x="8334375" y="2333625"/>
+            <a:ext cx="3286125" cy="1714500"/>
           </a:xfrm>
           <a:prstGeom xmlns:a="http://schemas.openxmlformats.org/drawingml/2006/main" prst="rect">
             <a:avLst/>
@@ -10856,7 +10082,208 @@
                 <a:ea typeface="Arial"/>
                 <a:cs typeface="Arial"/>
               </a:rPr>
-              <a:t>Free hosting can sleep. Historical acceptance does not guarantee uptime.</a:t>
+              <a:t>Equal Weight  9.04%</a:t>
+            </a:r>
+          </a:p>
+          <a:p xmlns:a="http://schemas.openxmlformats.org/drawingml/2006/main">
+            <a:pPr>
+              <a:defRPr sz="2025" b="0">
+                <a:solidFill>
+                  <a:srgbClr val="173F50"/>
+                </a:solidFill>
+                <a:latin typeface="Arial"/>
+                <a:ea typeface="Arial"/>
+                <a:cs typeface="Arial"/>
+              </a:defRPr>
+            </a:pPr>
+            <a:r>
+              <a:rPr sz="2025" b="0">
+                <a:solidFill>
+                  <a:srgbClr val="173F50"/>
+                </a:solidFill>
+                <a:latin typeface="Arial"/>
+                <a:ea typeface="Arial"/>
+                <a:cs typeface="Arial"/>
+              </a:rPr>
+              <a:t>Volatility Target  5.82%</a:t>
+            </a:r>
+          </a:p>
+          <a:p xmlns:a="http://schemas.openxmlformats.org/drawingml/2006/main">
+            <a:pPr>
+              <a:defRPr sz="2025" b="0">
+                <a:solidFill>
+                  <a:srgbClr val="173F50"/>
+                </a:solidFill>
+                <a:latin typeface="Arial"/>
+                <a:ea typeface="Arial"/>
+                <a:cs typeface="Arial"/>
+              </a:defRPr>
+            </a:pPr>
+            <a:r>
+              <a:rPr sz="2025" b="0">
+                <a:solidFill>
+                  <a:srgbClr val="173F50"/>
+                </a:solidFill>
+                <a:latin typeface="Arial"/>
+                <a:ea typeface="Arial"/>
+                <a:cs typeface="Arial"/>
+              </a:rPr>
+              <a:t>Difference  3.22 pp</a:t>
+            </a:r>
+          </a:p>
+        </p:txBody>
+      </p:sp>
+      <p:sp>
+        <p:nvSpPr>
+          <p:cNvPr id="6" name="">
+            <a:extLst xmlns:a="http://schemas.openxmlformats.org/drawingml/2006/main">
+              <a:ext uri="{FF2B5EF4-FFF2-40B4-BE49-F238E27FC236}">
+                <a16:creationId xmlns:a16="http://schemas.microsoft.com/office/drawing/2014/main" id="{243CAAF0-6652-434F-995E-C2D6295B98A0}"/>
+              </a:ext>
+            </a:extLst>
+          </p:cNvPr>
+          <p:cNvSpPr>
+            <a:spLocks xmlns:a="http://schemas.openxmlformats.org/drawingml/2006/main" noGrp="1"/>
+          </p:cNvSpPr>
+          <p:nvPr/>
+        </p:nvSpPr>
+        <p:spPr>
+          <a:xfrm xmlns:a="http://schemas.openxmlformats.org/drawingml/2006/main">
+            <a:off x="8334375" y="4429125"/>
+            <a:ext cx="3286125" cy="1047750"/>
+          </a:xfrm>
+          <a:prstGeom xmlns:a="http://schemas.openxmlformats.org/drawingml/2006/main" prst="rect">
+            <a:avLst/>
+          </a:prstGeom>
+          <a:noFill xmlns:a="http://schemas.openxmlformats.org/drawingml/2006/main"/>
+          <a:ln xmlns:a="http://schemas.openxmlformats.org/drawingml/2006/main" w="0">
+            <a:noFill/>
+          </a:ln>
+        </p:spPr>
+        <p:txBody>
+          <a:bodyPr xmlns:a="http://schemas.openxmlformats.org/drawingml/2006/main"/>
+          <a:lstStyle xmlns:a="http://schemas.openxmlformats.org/drawingml/2006/main">
+            <a:defPPr>
+              <a:defRPr sz="1875" b="0">
+                <a:solidFill>
+                  <a:srgbClr val="173F50"/>
+                </a:solidFill>
+                <a:latin typeface="Arial"/>
+                <a:ea typeface="Arial"/>
+                <a:cs typeface="Arial"/>
+              </a:defRPr>
+            </a:defPPr>
+          </a:lstStyle>
+          <a:p xmlns:a="http://schemas.openxmlformats.org/drawingml/2006/main">
+            <a:pPr>
+              <a:defRPr sz="1875" b="0">
+                <a:solidFill>
+                  <a:srgbClr val="173F50"/>
+                </a:solidFill>
+                <a:latin typeface="Arial"/>
+                <a:ea typeface="Arial"/>
+                <a:cs typeface="Arial"/>
+              </a:defRPr>
+            </a:pPr>
+            <a:r>
+              <a:rPr sz="1875" b="0">
+                <a:solidFill>
+                  <a:srgbClr val="173F50"/>
+                </a:solidFill>
+                <a:latin typeface="Arial"/>
+                <a:ea typeface="Arial"/>
+                <a:cs typeface="Arial"/>
+              </a:rPr>
+              <a:t>Both returns are negative.</a:t>
+            </a:r>
+          </a:p>
+          <a:p xmlns:a="http://schemas.openxmlformats.org/drawingml/2006/main">
+            <a:pPr>
+              <a:defRPr sz="1875" b="0">
+                <a:solidFill>
+                  <a:srgbClr val="173F50"/>
+                </a:solidFill>
+                <a:latin typeface="Arial"/>
+                <a:ea typeface="Arial"/>
+                <a:cs typeface="Arial"/>
+              </a:defRPr>
+            </a:pPr>
+            <a:r>
+              <a:rPr sz="1875" b="0">
+                <a:solidFill>
+                  <a:srgbClr val="173F50"/>
+                </a:solidFill>
+                <a:latin typeface="Arial"/>
+                <a:ea typeface="Arial"/>
+                <a:cs typeface="Arial"/>
+              </a:rPr>
+              <a:t>Synthetic fixture only.</a:t>
+            </a:r>
+          </a:p>
+        </p:txBody>
+      </p:sp>
+      <p:sp>
+        <p:nvSpPr>
+          <p:cNvPr id="7" name="">
+            <a:extLst xmlns:a="http://schemas.openxmlformats.org/drawingml/2006/main">
+              <a:ext uri="{FF2B5EF4-FFF2-40B4-BE49-F238E27FC236}">
+                <a16:creationId xmlns:a16="http://schemas.microsoft.com/office/drawing/2014/main" id="{063AB8B8-B338-4130-A638-7235AC69C17B}"/>
+              </a:ext>
+            </a:extLst>
+          </p:cNvPr>
+          <p:cNvSpPr>
+            <a:spLocks xmlns:a="http://schemas.openxmlformats.org/drawingml/2006/main" noGrp="1"/>
+          </p:cNvSpPr>
+          <p:nvPr/>
+        </p:nvSpPr>
+        <p:spPr>
+          <a:xfrm xmlns:a="http://schemas.openxmlformats.org/drawingml/2006/main">
+            <a:off x="552450" y="5715000"/>
+            <a:ext cx="11087100" cy="619125"/>
+          </a:xfrm>
+          <a:prstGeom xmlns:a="http://schemas.openxmlformats.org/drawingml/2006/main" prst="rect">
+            <a:avLst/>
+          </a:prstGeom>
+          <a:noFill xmlns:a="http://schemas.openxmlformats.org/drawingml/2006/main"/>
+          <a:ln xmlns:a="http://schemas.openxmlformats.org/drawingml/2006/main" w="0">
+            <a:noFill/>
+          </a:ln>
+        </p:spPr>
+        <p:txBody>
+          <a:bodyPr xmlns:a="http://schemas.openxmlformats.org/drawingml/2006/main"/>
+          <a:lstStyle xmlns:a="http://schemas.openxmlformats.org/drawingml/2006/main">
+            <a:defPPr>
+              <a:defRPr sz="1875" b="0">
+                <a:solidFill>
+                  <a:srgbClr val="173F50"/>
+                </a:solidFill>
+                <a:latin typeface="Arial"/>
+                <a:ea typeface="Arial"/>
+                <a:cs typeface="Arial"/>
+              </a:defRPr>
+            </a:defPPr>
+          </a:lstStyle>
+          <a:p xmlns:a="http://schemas.openxmlformats.org/drawingml/2006/main">
+            <a:pPr>
+              <a:defRPr sz="1875" b="0">
+                <a:solidFill>
+                  <a:srgbClr val="173F50"/>
+                </a:solidFill>
+                <a:latin typeface="Arial"/>
+                <a:ea typeface="Arial"/>
+                <a:cs typeface="Arial"/>
+              </a:defRPr>
+            </a:pPr>
+            <a:r>
+              <a:rPr sz="1875" b="0">
+                <a:solidFill>
+                  <a:srgbClr val="173F50"/>
+                </a:solidFill>
+                <a:latin typeface="Arial"/>
+                <a:ea typeface="Arial"/>
+                <a:cs typeface="Arial"/>
+              </a:rPr>
+              <a:t>Functional evidence: six selected unauthorized calls rejected; paused exit succeeds.</a:t>
             </a:r>
           </a:p>
         </p:txBody>
@@ -10864,7 +10291,7 @@
     </p:spTree>
     <p:extLst>
       <p:ext uri="{BB962C8B-B14F-4D97-AF65-F5344CB8AC3E}">
-        <p14:creationId xmlns:p14="http://schemas.microsoft.com/office/powerpoint/2010/main" val="1760200533"/>
+        <p14:creationId xmlns:p14="http://schemas.microsoft.com/office/powerpoint/2010/main" val="2059476196"/>
       </p:ext>
     </p:extLst>
   </p:cSld>

--- a/submission/AlphaVault-Presentation.pptx
+++ b/submission/AlphaVault-Presentation.pptx
@@ -2,24 +2,24 @@
 <file path=ppt/presentation.xml><?xml version="1.0" encoding="utf-8"?>
 <p:presentation xmlns:p="http://schemas.openxmlformats.org/presentationml/2006/main">
   <p:sldMasterIdLst>
-    <p:sldMasterId xmlns:r="http://schemas.openxmlformats.org/officeDocument/2006/relationships" id="2147483648" r:id="Rb310d442b94b4b92"/>
+    <p:sldMasterId xmlns:r="http://schemas.openxmlformats.org/officeDocument/2006/relationships" id="2147483648" r:id="R4d3d154819f94cd3"/>
   </p:sldMasterIdLst>
   <p:notesMasterIdLst>
-    <p:notesMasterId xmlns:r="http://schemas.openxmlformats.org/officeDocument/2006/relationships" r:id="R46d5ab7ce2fd46f9"/>
+    <p:notesMasterId xmlns:r="http://schemas.openxmlformats.org/officeDocument/2006/relationships" r:id="R7633797fe63045f9"/>
   </p:notesMasterIdLst>
   <p:sldIdLst>
-    <p:sldId xmlns:r="http://schemas.openxmlformats.org/officeDocument/2006/relationships" id="256" r:id="R0e4f70de742740a2"/>
-    <p:sldId xmlns:r="http://schemas.openxmlformats.org/officeDocument/2006/relationships" id="257" r:id="R34dc6d6458d946c5"/>
-    <p:sldId xmlns:r="http://schemas.openxmlformats.org/officeDocument/2006/relationships" id="258" r:id="Ra53262d7109e4b75"/>
-    <p:sldId xmlns:r="http://schemas.openxmlformats.org/officeDocument/2006/relationships" id="259" r:id="R6e2da4232ca143e1"/>
-    <p:sldId xmlns:r="http://schemas.openxmlformats.org/officeDocument/2006/relationships" id="260" r:id="R41fb08e627124e9e"/>
-    <p:sldId xmlns:r="http://schemas.openxmlformats.org/officeDocument/2006/relationships" id="261" r:id="R886491b66d684c11"/>
-    <p:sldId xmlns:r="http://schemas.openxmlformats.org/officeDocument/2006/relationships" id="262" r:id="Rb3359ff5e07a4e31"/>
-    <p:sldId xmlns:r="http://schemas.openxmlformats.org/officeDocument/2006/relationships" id="263" r:id="Rb32e7893935f4fc9"/>
-    <p:sldId xmlns:r="http://schemas.openxmlformats.org/officeDocument/2006/relationships" id="264" r:id="R3761ce16d6e64dc7"/>
-    <p:sldId xmlns:r="http://schemas.openxmlformats.org/officeDocument/2006/relationships" id="265" r:id="R04e975cb953745b5"/>
-    <p:sldId xmlns:r="http://schemas.openxmlformats.org/officeDocument/2006/relationships" id="266" r:id="R041ea3e7b7e04fec"/>
-    <p:sldId xmlns:r="http://schemas.openxmlformats.org/officeDocument/2006/relationships" id="267" r:id="R4fe4ca9e1fef4d95"/>
+    <p:sldId xmlns:r="http://schemas.openxmlformats.org/officeDocument/2006/relationships" id="256" r:id="R34ee6d8936e541eb"/>
+    <p:sldId xmlns:r="http://schemas.openxmlformats.org/officeDocument/2006/relationships" id="257" r:id="Rf622a2ce1dda4853"/>
+    <p:sldId xmlns:r="http://schemas.openxmlformats.org/officeDocument/2006/relationships" id="258" r:id="R2d6377340a7844d7"/>
+    <p:sldId xmlns:r="http://schemas.openxmlformats.org/officeDocument/2006/relationships" id="259" r:id="R955e607e30d24ea4"/>
+    <p:sldId xmlns:r="http://schemas.openxmlformats.org/officeDocument/2006/relationships" id="260" r:id="R4ab07de2eb734eec"/>
+    <p:sldId xmlns:r="http://schemas.openxmlformats.org/officeDocument/2006/relationships" id="261" r:id="R596f287c33f847b7"/>
+    <p:sldId xmlns:r="http://schemas.openxmlformats.org/officeDocument/2006/relationships" id="262" r:id="R30a88f7fdad04ff6"/>
+    <p:sldId xmlns:r="http://schemas.openxmlformats.org/officeDocument/2006/relationships" id="263" r:id="R61c85e0deea544d1"/>
+    <p:sldId xmlns:r="http://schemas.openxmlformats.org/officeDocument/2006/relationships" id="264" r:id="R0486eae28b0445b8"/>
+    <p:sldId xmlns:r="http://schemas.openxmlformats.org/officeDocument/2006/relationships" id="265" r:id="R33391cd129674e27"/>
+    <p:sldId xmlns:r="http://schemas.openxmlformats.org/officeDocument/2006/relationships" id="266" r:id="R8cb8460dd3ef466d"/>
+    <p:sldId xmlns:r="http://schemas.openxmlformats.org/officeDocument/2006/relationships" id="267" r:id="Rb387f8e8ec62482d"/>
   </p:sldIdLst>
   <p:sldSz cx="12192000" cy="6858000"/>
   <p:notesSz cx="6858000" cy="9144000"/>
@@ -533,7 +533,7 @@
           </a:p>
           <a:p xmlns:a="http://schemas.openxmlformats.org/drawingml/2006/main">
             <a:r>
-              <a:t>Source: evidence/submission-tests.tap, submission-hosted-check.json, hosted-jobs-*.json.</a:t>
+              <a:t>Source: evidence/current-tests.tap, submission-hosted-check.json, hosted-jobs-*.json.</a:t>
             </a:r>
           </a:p>
         </p:txBody>
@@ -1330,7 +1330,7 @@
           <p:cNvPr id="3" name="Title">
             <a:extLst xmlns:a="http://schemas.openxmlformats.org/drawingml/2006/main">
               <a:ext uri="{FF2B5EF4-FFF2-40B4-BE49-F238E27FC236}">
-                <a16:creationId xmlns:a16="http://schemas.microsoft.com/office/drawing/2014/main" id="{481690E9-AA6A-4679-BE4F-98C76EA79C45}"/>
+                <a16:creationId xmlns:a16="http://schemas.microsoft.com/office/drawing/2014/main" id="{DC6729F1-B238-4EAB-B5C0-D9513F57776E}"/>
               </a:ext>
             </a:extLst>
           </p:cNvPr>
@@ -1487,7 +1487,7 @@
           <p:cNvPr id="2" name="Subtitle">
             <a:extLst xmlns:a="http://schemas.openxmlformats.org/drawingml/2006/main">
               <a:ext uri="{FF2B5EF4-FFF2-40B4-BE49-F238E27FC236}">
-                <a16:creationId xmlns:a16="http://schemas.microsoft.com/office/drawing/2014/main" id="{34196B3A-4D41-435B-906F-CC5F807E681E}"/>
+                <a16:creationId xmlns:a16="http://schemas.microsoft.com/office/drawing/2014/main" id="{ECAD22F5-9169-4FA5-9BF8-B2F7C3F09076}"/>
               </a:ext>
             </a:extLst>
           </p:cNvPr>
@@ -1661,7 +1661,7 @@
           <p:cNvPr id="2" name="Section title">
             <a:extLst xmlns:a="http://schemas.openxmlformats.org/drawingml/2006/main">
               <a:ext uri="{FF2B5EF4-FFF2-40B4-BE49-F238E27FC236}">
-                <a16:creationId xmlns:a16="http://schemas.microsoft.com/office/drawing/2014/main" id="{45E4476E-492E-4952-A41B-E8A8F5C71D1C}"/>
+                <a16:creationId xmlns:a16="http://schemas.microsoft.com/office/drawing/2014/main" id="{72F6C952-BE07-4644-A26A-FA2DFCEAE99C}"/>
               </a:ext>
             </a:extLst>
           </p:cNvPr>
@@ -1835,7 +1835,7 @@
           <p:cNvPr id="3" name="Title">
             <a:extLst xmlns:a="http://schemas.openxmlformats.org/drawingml/2006/main">
               <a:ext uri="{FF2B5EF4-FFF2-40B4-BE49-F238E27FC236}">
-                <a16:creationId xmlns:a16="http://schemas.microsoft.com/office/drawing/2014/main" id="{9AA0D517-AA5C-4309-B800-0FD668C79478}"/>
+                <a16:creationId xmlns:a16="http://schemas.microsoft.com/office/drawing/2014/main" id="{57E36E3B-C7A4-4B64-A1CC-FB04CB540177}"/>
               </a:ext>
             </a:extLst>
           </p:cNvPr>
@@ -1992,7 +1992,7 @@
           <p:cNvPr id="2" name="Body">
             <a:extLst xmlns:a="http://schemas.openxmlformats.org/drawingml/2006/main">
               <a:ext uri="{FF2B5EF4-FFF2-40B4-BE49-F238E27FC236}">
-                <a16:creationId xmlns:a16="http://schemas.microsoft.com/office/drawing/2014/main" id="{3E918968-9305-4780-A662-220F980E3067}"/>
+                <a16:creationId xmlns:a16="http://schemas.microsoft.com/office/drawing/2014/main" id="{22999E9B-22A1-42F0-8C16-CC72A516CA2F}"/>
               </a:ext>
             </a:extLst>
           </p:cNvPr>
@@ -2166,7 +2166,7 @@
           <p:cNvPr id="4" name="Title">
             <a:extLst xmlns:a="http://schemas.openxmlformats.org/drawingml/2006/main">
               <a:ext uri="{FF2B5EF4-FFF2-40B4-BE49-F238E27FC236}">
-                <a16:creationId xmlns:a16="http://schemas.microsoft.com/office/drawing/2014/main" id="{BFB42CBF-A35E-413A-803F-43F278710B5F}"/>
+                <a16:creationId xmlns:a16="http://schemas.microsoft.com/office/drawing/2014/main" id="{D07EA27B-A04B-4755-9996-1A53151CD943}"/>
               </a:ext>
             </a:extLst>
           </p:cNvPr>
@@ -2323,7 +2323,7 @@
           <p:cNvPr id="2" name="Left column">
             <a:extLst xmlns:a="http://schemas.openxmlformats.org/drawingml/2006/main">
               <a:ext uri="{FF2B5EF4-FFF2-40B4-BE49-F238E27FC236}">
-                <a16:creationId xmlns:a16="http://schemas.microsoft.com/office/drawing/2014/main" id="{C5A2805E-C94F-404B-B903-074C2FFE74C1}"/>
+                <a16:creationId xmlns:a16="http://schemas.microsoft.com/office/drawing/2014/main" id="{3D5027CC-D9BB-492A-8569-A8BE5175FD84}"/>
               </a:ext>
             </a:extLst>
           </p:cNvPr>
@@ -2480,7 +2480,7 @@
           <p:cNvPr id="3" name="Right column">
             <a:extLst xmlns:a="http://schemas.openxmlformats.org/drawingml/2006/main">
               <a:ext uri="{FF2B5EF4-FFF2-40B4-BE49-F238E27FC236}">
-                <a16:creationId xmlns:a16="http://schemas.microsoft.com/office/drawing/2014/main" id="{51D2295E-2AC7-40E6-87CE-D09D8F735F60}"/>
+                <a16:creationId xmlns:a16="http://schemas.microsoft.com/office/drawing/2014/main" id="{7D5650A0-E0A2-4C16-A6E3-8F2E57D28444}"/>
               </a:ext>
             </a:extLst>
           </p:cNvPr>
@@ -2654,7 +2654,7 @@
           <p:cNvPr id="3" name="Title">
             <a:extLst xmlns:a="http://schemas.openxmlformats.org/drawingml/2006/main">
               <a:ext uri="{FF2B5EF4-FFF2-40B4-BE49-F238E27FC236}">
-                <a16:creationId xmlns:a16="http://schemas.microsoft.com/office/drawing/2014/main" id="{31E41049-5EA2-4725-AEA5-9ACEE47E9378}"/>
+                <a16:creationId xmlns:a16="http://schemas.microsoft.com/office/drawing/2014/main" id="{DD938C23-2A31-4131-9EF1-802C583F594B}"/>
               </a:ext>
             </a:extLst>
           </p:cNvPr>
@@ -2811,7 +2811,7 @@
           <p:cNvPr id="2" name="Left column">
             <a:extLst xmlns:a="http://schemas.openxmlformats.org/drawingml/2006/main">
               <a:ext uri="{FF2B5EF4-FFF2-40B4-BE49-F238E27FC236}">
-                <a16:creationId xmlns:a16="http://schemas.microsoft.com/office/drawing/2014/main" id="{09D32AEA-E6A6-4A77-90A3-7E4AF04E7B6D}"/>
+                <a16:creationId xmlns:a16="http://schemas.microsoft.com/office/drawing/2014/main" id="{866E9B17-126B-4793-B297-CE4B05D9D73F}"/>
               </a:ext>
             </a:extLst>
           </p:cNvPr>
@@ -3006,12 +3006,12 @@
   </p:cSld>
   <p:clrMap bg1="lt1" tx1="dk1" bg2="lt2" tx2="dk2" accent1="accent1" accent2="accent2" accent3="accent3" accent4="accent4" accent5="accent5" accent6="accent6" hlink="hlink" folHlink="folHlink"/>
   <p:sldLayoutIdLst>
-    <p:sldLayoutId xmlns:r="http://schemas.openxmlformats.org/officeDocument/2006/relationships" id="2147483649" r:id="Rad52270d19ac49b5"/>
-    <p:sldLayoutId xmlns:r="http://schemas.openxmlformats.org/officeDocument/2006/relationships" id="2147483650" r:id="R7934a89b3ed24b71"/>
-    <p:sldLayoutId xmlns:r="http://schemas.openxmlformats.org/officeDocument/2006/relationships" id="2147483651" r:id="Rafea1ca58fbd45b2"/>
-    <p:sldLayoutId xmlns:r="http://schemas.openxmlformats.org/officeDocument/2006/relationships" id="2147483652" r:id="R93cc497d6bf84a1d"/>
-    <p:sldLayoutId xmlns:r="http://schemas.openxmlformats.org/officeDocument/2006/relationships" id="2147483653" r:id="Rd2320585865542b9"/>
-    <p:sldLayoutId xmlns:r="http://schemas.openxmlformats.org/officeDocument/2006/relationships" id="2147483654" r:id="Rd0d25dd5b1ec494b"/>
+    <p:sldLayoutId xmlns:r="http://schemas.openxmlformats.org/officeDocument/2006/relationships" id="2147483649" r:id="R10b2d90a032c4c5d"/>
+    <p:sldLayoutId xmlns:r="http://schemas.openxmlformats.org/officeDocument/2006/relationships" id="2147483650" r:id="R9694ddf139ac498a"/>
+    <p:sldLayoutId xmlns:r="http://schemas.openxmlformats.org/officeDocument/2006/relationships" id="2147483651" r:id="Ra16a9d3efc51409e"/>
+    <p:sldLayoutId xmlns:r="http://schemas.openxmlformats.org/officeDocument/2006/relationships" id="2147483652" r:id="Re703a2dd755c4f4b"/>
+    <p:sldLayoutId xmlns:r="http://schemas.openxmlformats.org/officeDocument/2006/relationships" id="2147483653" r:id="Rd600115218164805"/>
+    <p:sldLayoutId xmlns:r="http://schemas.openxmlformats.org/officeDocument/2006/relationships" id="2147483654" r:id="R3bea4adc9cb64e77"/>
   </p:sldLayoutIdLst>
   <p:txStyles>
     <p:titleStyle>
@@ -5771,7 +5771,7 @@
           <p:cNvPr id="6" name="">
             <a:extLst xmlns:a="http://schemas.openxmlformats.org/drawingml/2006/main">
               <a:ext uri="{FF2B5EF4-FFF2-40B4-BE49-F238E27FC236}">
-                <a16:creationId xmlns:a16="http://schemas.microsoft.com/office/drawing/2014/main" id="{0F89C895-799E-42B9-8FBA-D458452B34B2}"/>
+                <a16:creationId xmlns:a16="http://schemas.microsoft.com/office/drawing/2014/main" id="{E4A1AE86-F336-4033-BABA-96A204513821}"/>
               </a:ext>
             </a:extLst>
           </p:cNvPr>
@@ -5837,7 +5837,7 @@
           <p:cNvPr id="2" name="">
             <a:extLst xmlns:a="http://schemas.openxmlformats.org/drawingml/2006/main">
               <a:ext uri="{FF2B5EF4-FFF2-40B4-BE49-F238E27FC236}">
-                <a16:creationId xmlns:a16="http://schemas.microsoft.com/office/drawing/2014/main" id="{C9C24825-3A93-4695-B5B3-A0525397E07D}"/>
+                <a16:creationId xmlns:a16="http://schemas.microsoft.com/office/drawing/2014/main" id="{A7EFEF95-9532-4040-8CA3-24A7D4DC237A}"/>
               </a:ext>
             </a:extLst>
           </p:cNvPr>
@@ -5903,7 +5903,7 @@
           <p:cNvPr id="3" name="">
             <a:extLst xmlns:a="http://schemas.openxmlformats.org/drawingml/2006/main">
               <a:ext uri="{FF2B5EF4-FFF2-40B4-BE49-F238E27FC236}">
-                <a16:creationId xmlns:a16="http://schemas.microsoft.com/office/drawing/2014/main" id="{D1765612-B461-4C8D-AD4A-6D7545318FE4}"/>
+                <a16:creationId xmlns:a16="http://schemas.microsoft.com/office/drawing/2014/main" id="{9E422F67-F541-44AA-A018-F7A407B19A92}"/>
               </a:ext>
             </a:extLst>
           </p:cNvPr>
@@ -5992,7 +5992,7 @@
           <p:cNvPr id="4" name="">
             <a:extLst xmlns:a="http://schemas.openxmlformats.org/drawingml/2006/main">
               <a:ext uri="{FF2B5EF4-FFF2-40B4-BE49-F238E27FC236}">
-                <a16:creationId xmlns:a16="http://schemas.microsoft.com/office/drawing/2014/main" id="{2AFB83D0-5AD4-4904-9283-7C7024274AF2}"/>
+                <a16:creationId xmlns:a16="http://schemas.microsoft.com/office/drawing/2014/main" id="{C810D2CA-4C8F-40BA-B699-4FA28E197FC7}"/>
               </a:ext>
             </a:extLst>
           </p:cNvPr>
@@ -6058,7 +6058,7 @@
           <p:cNvPr id="5" name="">
             <a:extLst xmlns:a="http://schemas.openxmlformats.org/drawingml/2006/main">
               <a:ext uri="{FF2B5EF4-FFF2-40B4-BE49-F238E27FC236}">
-                <a16:creationId xmlns:a16="http://schemas.microsoft.com/office/drawing/2014/main" id="{BB8AADA0-606A-4765-9AB4-E5679D657902}"/>
+                <a16:creationId xmlns:a16="http://schemas.microsoft.com/office/drawing/2014/main" id="{554C910A-45C1-4BA9-AD16-141F69B90599}"/>
               </a:ext>
             </a:extLst>
           </p:cNvPr>
@@ -6145,7 +6145,7 @@
     </p:spTree>
     <p:extLst>
       <p:ext uri="{BB962C8B-B14F-4D97-AF65-F5344CB8AC3E}">
-        <p14:creationId xmlns:p14="http://schemas.microsoft.com/office/powerpoint/2010/main" val="267604934"/>
+        <p14:creationId xmlns:p14="http://schemas.microsoft.com/office/powerpoint/2010/main" val="547702832"/>
       </p:ext>
     </p:extLst>
   </p:cSld>
@@ -6176,7 +6176,7 @@
           <p:cNvPr id="4" name="">
             <a:extLst xmlns:a="http://schemas.openxmlformats.org/drawingml/2006/main">
               <a:ext uri="{FF2B5EF4-FFF2-40B4-BE49-F238E27FC236}">
-                <a16:creationId xmlns:a16="http://schemas.microsoft.com/office/drawing/2014/main" id="{3296DC30-76B5-4E3B-A5BC-EAB2B245AB9B}"/>
+                <a16:creationId xmlns:a16="http://schemas.microsoft.com/office/drawing/2014/main" id="{ED0725BF-4C13-41B2-93D3-24CCDB3ABB70}"/>
               </a:ext>
             </a:extLst>
           </p:cNvPr>
@@ -6242,7 +6242,7 @@
           <p:cNvPr id="2" name="">
             <a:extLst xmlns:a="http://schemas.openxmlformats.org/drawingml/2006/main">
               <a:ext uri="{FF2B5EF4-FFF2-40B4-BE49-F238E27FC236}">
-                <a16:creationId xmlns:a16="http://schemas.microsoft.com/office/drawing/2014/main" id="{1D129130-16D7-4840-B038-AA1E93B43CBD}"/>
+                <a16:creationId xmlns:a16="http://schemas.microsoft.com/office/drawing/2014/main" id="{FAC7D85C-5931-489A-A150-6E68995EAA41}"/>
               </a:ext>
             </a:extLst>
           </p:cNvPr>
@@ -6308,7 +6308,7 @@
           <p:cNvPr id="3" name="">
             <a:extLst xmlns:a="http://schemas.openxmlformats.org/drawingml/2006/main">
               <a:ext uri="{FF2B5EF4-FFF2-40B4-BE49-F238E27FC236}">
-                <a16:creationId xmlns:a16="http://schemas.microsoft.com/office/drawing/2014/main" id="{874B7543-EA19-4640-BE72-476EF4FF0D34}"/>
+                <a16:creationId xmlns:a16="http://schemas.microsoft.com/office/drawing/2014/main" id="{4A0A2394-8603-4B65-A90D-600D9944AE57}"/>
               </a:ext>
             </a:extLst>
           </p:cNvPr>
@@ -6634,7 +6634,7 @@
     </p:spTree>
     <p:extLst>
       <p:ext uri="{BB962C8B-B14F-4D97-AF65-F5344CB8AC3E}">
-        <p14:creationId xmlns:p14="http://schemas.microsoft.com/office/powerpoint/2010/main" val="758618456"/>
+        <p14:creationId xmlns:p14="http://schemas.microsoft.com/office/powerpoint/2010/main" val="1087988805"/>
       </p:ext>
     </p:extLst>
   </p:cSld>
@@ -6665,7 +6665,7 @@
           <p:cNvPr id="5" name="">
             <a:extLst xmlns:a="http://schemas.openxmlformats.org/drawingml/2006/main">
               <a:ext uri="{FF2B5EF4-FFF2-40B4-BE49-F238E27FC236}">
-                <a16:creationId xmlns:a16="http://schemas.microsoft.com/office/drawing/2014/main" id="{2E840AAA-0B7A-4412-B640-C68006E0EA3E}"/>
+                <a16:creationId xmlns:a16="http://schemas.microsoft.com/office/drawing/2014/main" id="{40D9ED46-EC85-4E29-92FB-FDDF1F064BDB}"/>
               </a:ext>
             </a:extLst>
           </p:cNvPr>
@@ -6731,7 +6731,7 @@
           <p:cNvPr id="2" name="">
             <a:extLst xmlns:a="http://schemas.openxmlformats.org/drawingml/2006/main">
               <a:ext uri="{FF2B5EF4-FFF2-40B4-BE49-F238E27FC236}">
-                <a16:creationId xmlns:a16="http://schemas.microsoft.com/office/drawing/2014/main" id="{D1272EDF-4320-4D11-B895-FDF48833E5DB}"/>
+                <a16:creationId xmlns:a16="http://schemas.microsoft.com/office/drawing/2014/main" id="{69A4576C-E3CD-4E0D-9D05-2A269F99C638}"/>
               </a:ext>
             </a:extLst>
           </p:cNvPr>
@@ -6797,7 +6797,7 @@
           <p:cNvPr id="3" name="">
             <a:extLst xmlns:a="http://schemas.openxmlformats.org/drawingml/2006/main">
               <a:ext uri="{FF2B5EF4-FFF2-40B4-BE49-F238E27FC236}">
-                <a16:creationId xmlns:a16="http://schemas.microsoft.com/office/drawing/2014/main" id="{082CC478-788C-4DCD-80D0-F9E54227402F}"/>
+                <a16:creationId xmlns:a16="http://schemas.microsoft.com/office/drawing/2014/main" id="{66B75B10-EE55-4679-AC07-254E11B1EE26}"/>
               </a:ext>
             </a:extLst>
           </p:cNvPr>
@@ -7075,7 +7075,7 @@
           <p:cNvPr id="4" name="">
             <a:extLst xmlns:a="http://schemas.openxmlformats.org/drawingml/2006/main">
               <a:ext uri="{FF2B5EF4-FFF2-40B4-BE49-F238E27FC236}">
-                <a16:creationId xmlns:a16="http://schemas.microsoft.com/office/drawing/2014/main" id="{6961A65D-9EC2-43B6-8692-64885945D8A9}"/>
+                <a16:creationId xmlns:a16="http://schemas.microsoft.com/office/drawing/2014/main" id="{669EFEDE-B69A-4BEC-B28C-270868244DD4}"/>
               </a:ext>
             </a:extLst>
           </p:cNvPr>
@@ -7139,7 +7139,7 @@
     </p:spTree>
     <p:extLst>
       <p:ext uri="{BB962C8B-B14F-4D97-AF65-F5344CB8AC3E}">
-        <p14:creationId xmlns:p14="http://schemas.microsoft.com/office/powerpoint/2010/main" val="282749582"/>
+        <p14:creationId xmlns:p14="http://schemas.microsoft.com/office/powerpoint/2010/main" val="1774197682"/>
       </p:ext>
     </p:extLst>
   </p:cSld>
@@ -7170,7 +7170,7 @@
           <p:cNvPr id="7" name="">
             <a:extLst xmlns:a="http://schemas.openxmlformats.org/drawingml/2006/main">
               <a:ext uri="{FF2B5EF4-FFF2-40B4-BE49-F238E27FC236}">
-                <a16:creationId xmlns:a16="http://schemas.microsoft.com/office/drawing/2014/main" id="{6604213F-DB21-491B-9805-1142AD90F0E3}"/>
+                <a16:creationId xmlns:a16="http://schemas.microsoft.com/office/drawing/2014/main" id="{4D3A732F-3C95-48BF-8EE4-F2D58FB4A5C8}"/>
               </a:ext>
             </a:extLst>
           </p:cNvPr>
@@ -7236,7 +7236,7 @@
           <p:cNvPr id="2" name="">
             <a:extLst xmlns:a="http://schemas.openxmlformats.org/drawingml/2006/main">
               <a:ext uri="{FF2B5EF4-FFF2-40B4-BE49-F238E27FC236}">
-                <a16:creationId xmlns:a16="http://schemas.microsoft.com/office/drawing/2014/main" id="{68EBA814-4123-45D3-831A-3AE2E58804E5}"/>
+                <a16:creationId xmlns:a16="http://schemas.microsoft.com/office/drawing/2014/main" id="{AC40F984-6419-4F2E-A3A7-F65A4738642B}"/>
               </a:ext>
             </a:extLst>
           </p:cNvPr>
@@ -7302,7 +7302,7 @@
           <p:cNvPr id="3" name="">
             <a:extLst xmlns:a="http://schemas.openxmlformats.org/drawingml/2006/main">
               <a:ext uri="{FF2B5EF4-FFF2-40B4-BE49-F238E27FC236}">
-                <a16:creationId xmlns:a16="http://schemas.microsoft.com/office/drawing/2014/main" id="{04643F29-873D-4908-9963-93163F425462}"/>
+                <a16:creationId xmlns:a16="http://schemas.microsoft.com/office/drawing/2014/main" id="{1A1942DC-CF05-4460-9029-C87C99F77FD3}"/>
               </a:ext>
             </a:extLst>
           </p:cNvPr>
@@ -7368,7 +7368,7 @@
           <p:cNvPr id="4" name="">
             <a:extLst xmlns:a="http://schemas.openxmlformats.org/drawingml/2006/main">
               <a:ext uri="{FF2B5EF4-FFF2-40B4-BE49-F238E27FC236}">
-                <a16:creationId xmlns:a16="http://schemas.microsoft.com/office/drawing/2014/main" id="{A9188912-DCDA-44EA-BDA6-83203F01B2A3}"/>
+                <a16:creationId xmlns:a16="http://schemas.microsoft.com/office/drawing/2014/main" id="{7C40D4A2-45E2-4E44-A87F-5D653BDC2B16}"/>
               </a:ext>
             </a:extLst>
           </p:cNvPr>
@@ -7480,7 +7480,7 @@
           <p:cNvPr id="5" name="">
             <a:extLst xmlns:a="http://schemas.openxmlformats.org/drawingml/2006/main">
               <a:ext uri="{FF2B5EF4-FFF2-40B4-BE49-F238E27FC236}">
-                <a16:creationId xmlns:a16="http://schemas.microsoft.com/office/drawing/2014/main" id="{1E599176-35DB-47FA-A73C-A0411DA2E5DB}"/>
+                <a16:creationId xmlns:a16="http://schemas.microsoft.com/office/drawing/2014/main" id="{7511D013-9AD9-4118-98D0-874565138A4E}"/>
               </a:ext>
             </a:extLst>
           </p:cNvPr>
@@ -7569,7 +7569,7 @@
           <p:cNvPr id="6" name="">
             <a:extLst xmlns:a="http://schemas.openxmlformats.org/drawingml/2006/main">
               <a:ext uri="{FF2B5EF4-FFF2-40B4-BE49-F238E27FC236}">
-                <a16:creationId xmlns:a16="http://schemas.microsoft.com/office/drawing/2014/main" id="{97F21E24-A090-4E0B-81DC-AFC5022AECCE}"/>
+                <a16:creationId xmlns:a16="http://schemas.microsoft.com/office/drawing/2014/main" id="{AF60B599-CD24-4E25-A127-938DC9CC3038}"/>
               </a:ext>
             </a:extLst>
           </p:cNvPr>
@@ -7625,7 +7625,7 @@
                 <a:ea typeface="Arial"/>
                 <a:cs typeface="Arial"/>
               </a:rPr>
-              <a:t>Private repository: arrange assessor access or provide the source ZIP.</a:t>
+              <a:t>Public repository: source code and contribution history are accessible.</a:t>
             </a:r>
           </a:p>
         </p:txBody>
@@ -7633,7 +7633,7 @@
     </p:spTree>
     <p:extLst>
       <p:ext uri="{BB962C8B-B14F-4D97-AF65-F5344CB8AC3E}">
-        <p14:creationId xmlns:p14="http://schemas.microsoft.com/office/powerpoint/2010/main" val="1367804120"/>
+        <p14:creationId xmlns:p14="http://schemas.microsoft.com/office/powerpoint/2010/main" val="724485892"/>
       </p:ext>
     </p:extLst>
   </p:cSld>
@@ -7664,7 +7664,7 @@
           <p:cNvPr id="6" name="">
             <a:extLst xmlns:a="http://schemas.openxmlformats.org/drawingml/2006/main">
               <a:ext uri="{FF2B5EF4-FFF2-40B4-BE49-F238E27FC236}">
-                <a16:creationId xmlns:a16="http://schemas.microsoft.com/office/drawing/2014/main" id="{86455833-10CF-45BD-B163-02E2DB7E3EEC}"/>
+                <a16:creationId xmlns:a16="http://schemas.microsoft.com/office/drawing/2014/main" id="{1137ECF9-6CDC-4DEA-AD54-BCDC99109B4C}"/>
               </a:ext>
             </a:extLst>
           </p:cNvPr>
@@ -7730,7 +7730,7 @@
           <p:cNvPr id="2" name="">
             <a:extLst xmlns:a="http://schemas.openxmlformats.org/drawingml/2006/main">
               <a:ext uri="{FF2B5EF4-FFF2-40B4-BE49-F238E27FC236}">
-                <a16:creationId xmlns:a16="http://schemas.microsoft.com/office/drawing/2014/main" id="{C5E3A59B-1462-457B-80C6-319FBADEFB56}"/>
+                <a16:creationId xmlns:a16="http://schemas.microsoft.com/office/drawing/2014/main" id="{B6462613-2B2D-4649-AF7D-0CC81ADBE0A3}"/>
               </a:ext>
             </a:extLst>
           </p:cNvPr>
@@ -7796,7 +7796,7 @@
           <p:cNvPr id="3" name="">
             <a:extLst xmlns:a="http://schemas.openxmlformats.org/drawingml/2006/main">
               <a:ext uri="{FF2B5EF4-FFF2-40B4-BE49-F238E27FC236}">
-                <a16:creationId xmlns:a16="http://schemas.microsoft.com/office/drawing/2014/main" id="{DDBC2A47-38E1-4933-9E72-576098710FBA}"/>
+                <a16:creationId xmlns:a16="http://schemas.microsoft.com/office/drawing/2014/main" id="{821BCFF0-C9DF-4536-8A85-1E671361948C}"/>
               </a:ext>
             </a:extLst>
           </p:cNvPr>
@@ -7862,7 +7862,7 @@
           <p:cNvPr id="4" name="">
             <a:extLst xmlns:a="http://schemas.openxmlformats.org/drawingml/2006/main">
               <a:ext uri="{FF2B5EF4-FFF2-40B4-BE49-F238E27FC236}">
-                <a16:creationId xmlns:a16="http://schemas.microsoft.com/office/drawing/2014/main" id="{5EDBDDB5-BBB1-436B-9CBC-6BEAAB5132D0}"/>
+                <a16:creationId xmlns:a16="http://schemas.microsoft.com/office/drawing/2014/main" id="{D0AAD7D5-F348-407A-AE14-9F8407AAFFC8}"/>
               </a:ext>
             </a:extLst>
           </p:cNvPr>
@@ -8261,7 +8261,7 @@
           <p:cNvPr id="5" name="">
             <a:extLst xmlns:a="http://schemas.openxmlformats.org/drawingml/2006/main">
               <a:ext uri="{FF2B5EF4-FFF2-40B4-BE49-F238E27FC236}">
-                <a16:creationId xmlns:a16="http://schemas.microsoft.com/office/drawing/2014/main" id="{45775BDB-2D5D-472D-BA9A-A2D51558ABC9}"/>
+                <a16:creationId xmlns:a16="http://schemas.microsoft.com/office/drawing/2014/main" id="{04B8D09B-B52F-4BF6-81D4-C391988193AC}"/>
               </a:ext>
             </a:extLst>
           </p:cNvPr>
@@ -8325,7 +8325,7 @@
     </p:spTree>
     <p:extLst>
       <p:ext uri="{BB962C8B-B14F-4D97-AF65-F5344CB8AC3E}">
-        <p14:creationId xmlns:p14="http://schemas.microsoft.com/office/powerpoint/2010/main" val="267102355"/>
+        <p14:creationId xmlns:p14="http://schemas.microsoft.com/office/powerpoint/2010/main" val="112949998"/>
       </p:ext>
     </p:extLst>
   </p:cSld>
@@ -8356,7 +8356,7 @@
           <p:cNvPr id="4" name="">
             <a:extLst xmlns:a="http://schemas.openxmlformats.org/drawingml/2006/main">
               <a:ext uri="{FF2B5EF4-FFF2-40B4-BE49-F238E27FC236}">
-                <a16:creationId xmlns:a16="http://schemas.microsoft.com/office/drawing/2014/main" id="{1323AF9E-C8E1-4598-B326-19D2B610CF5C}"/>
+                <a16:creationId xmlns:a16="http://schemas.microsoft.com/office/drawing/2014/main" id="{3B23F519-ACC1-43D2-8F0B-946DD38232FA}"/>
               </a:ext>
             </a:extLst>
           </p:cNvPr>
@@ -8422,7 +8422,7 @@
           <p:cNvPr id="2" name="">
             <a:extLst xmlns:a="http://schemas.openxmlformats.org/drawingml/2006/main">
               <a:ext uri="{FF2B5EF4-FFF2-40B4-BE49-F238E27FC236}">
-                <a16:creationId xmlns:a16="http://schemas.microsoft.com/office/drawing/2014/main" id="{906499AF-5B75-4CDF-9CF4-CAE4A29F3C5E}"/>
+                <a16:creationId xmlns:a16="http://schemas.microsoft.com/office/drawing/2014/main" id="{106E10CC-728C-411B-BC5F-572B55CC37B5}"/>
               </a:ext>
             </a:extLst>
           </p:cNvPr>
@@ -8488,7 +8488,7 @@
           <p:cNvPr id="3" name="">
             <a:extLst xmlns:a="http://schemas.openxmlformats.org/drawingml/2006/main">
               <a:ext uri="{FF2B5EF4-FFF2-40B4-BE49-F238E27FC236}">
-                <a16:creationId xmlns:a16="http://schemas.microsoft.com/office/drawing/2014/main" id="{D48F032B-528F-4FA1-80ED-D55E42DA0866}"/>
+                <a16:creationId xmlns:a16="http://schemas.microsoft.com/office/drawing/2014/main" id="{99338077-604D-42B7-9E0D-6F987AEA43CA}"/>
               </a:ext>
             </a:extLst>
           </p:cNvPr>
@@ -8498,7 +8498,7 @@
           <p:nvPr/>
         </p:nvPicPr>
         <p:blipFill>
-          <a:blip xmlns:r="http://schemas.openxmlformats.org/officeDocument/2006/relationships" xmlns:a="http://schemas.openxmlformats.org/drawingml/2006/main" r:embed="R87e27e491f674b9d"/>
+          <a:blip xmlns:r="http://schemas.openxmlformats.org/officeDocument/2006/relationships" xmlns:a="http://schemas.openxmlformats.org/drawingml/2006/main" r:embed="R4f829fcbc2d24b06"/>
           <a:stretch xmlns:a="http://schemas.openxmlformats.org/drawingml/2006/main"/>
         </p:blipFill>
         <p:spPr>
@@ -8514,7 +8514,7 @@
     </p:spTree>
     <p:extLst>
       <p:ext uri="{BB962C8B-B14F-4D97-AF65-F5344CB8AC3E}">
-        <p14:creationId xmlns:p14="http://schemas.microsoft.com/office/powerpoint/2010/main" val="1145282952"/>
+        <p14:creationId xmlns:p14="http://schemas.microsoft.com/office/powerpoint/2010/main" val="2060427448"/>
       </p:ext>
     </p:extLst>
   </p:cSld>
@@ -8545,7 +8545,7 @@
           <p:cNvPr id="4" name="">
             <a:extLst xmlns:a="http://schemas.openxmlformats.org/drawingml/2006/main">
               <a:ext uri="{FF2B5EF4-FFF2-40B4-BE49-F238E27FC236}">
-                <a16:creationId xmlns:a16="http://schemas.microsoft.com/office/drawing/2014/main" id="{71116669-594C-4EC0-B60C-CD025521273B}"/>
+                <a16:creationId xmlns:a16="http://schemas.microsoft.com/office/drawing/2014/main" id="{6C977ADC-BE43-4B7E-B91F-4931457DF50B}"/>
               </a:ext>
             </a:extLst>
           </p:cNvPr>
@@ -8611,7 +8611,7 @@
           <p:cNvPr id="2" name="">
             <a:extLst xmlns:a="http://schemas.openxmlformats.org/drawingml/2006/main">
               <a:ext uri="{FF2B5EF4-FFF2-40B4-BE49-F238E27FC236}">
-                <a16:creationId xmlns:a16="http://schemas.microsoft.com/office/drawing/2014/main" id="{AFF06FC1-932F-482C-9882-6B1819D330F0}"/>
+                <a16:creationId xmlns:a16="http://schemas.microsoft.com/office/drawing/2014/main" id="{E8442D06-4BA9-4289-B898-C3E991E8094D}"/>
               </a:ext>
             </a:extLst>
           </p:cNvPr>
@@ -8677,7 +8677,7 @@
           <p:cNvPr id="3" name="">
             <a:extLst xmlns:a="http://schemas.openxmlformats.org/drawingml/2006/main">
               <a:ext uri="{FF2B5EF4-FFF2-40B4-BE49-F238E27FC236}">
-                <a16:creationId xmlns:a16="http://schemas.microsoft.com/office/drawing/2014/main" id="{9AFC25AE-3F76-4B10-8473-8CA9B2CFB1F6}"/>
+                <a16:creationId xmlns:a16="http://schemas.microsoft.com/office/drawing/2014/main" id="{E682898A-1F12-4E71-B5AA-FA63500C9DE9}"/>
               </a:ext>
             </a:extLst>
           </p:cNvPr>
@@ -8687,7 +8687,7 @@
           <p:nvPr/>
         </p:nvPicPr>
         <p:blipFill>
-          <a:blip xmlns:r="http://schemas.openxmlformats.org/officeDocument/2006/relationships" xmlns:a="http://schemas.openxmlformats.org/drawingml/2006/main" r:embed="Rce3041c29e96447d"/>
+          <a:blip xmlns:r="http://schemas.openxmlformats.org/officeDocument/2006/relationships" xmlns:a="http://schemas.openxmlformats.org/drawingml/2006/main" r:embed="R1284d3162df143bb"/>
           <a:stretch xmlns:a="http://schemas.openxmlformats.org/drawingml/2006/main"/>
         </p:blipFill>
         <p:spPr>
@@ -8703,7 +8703,7 @@
     </p:spTree>
     <p:extLst>
       <p:ext uri="{BB962C8B-B14F-4D97-AF65-F5344CB8AC3E}">
-        <p14:creationId xmlns:p14="http://schemas.microsoft.com/office/powerpoint/2010/main" val="273336503"/>
+        <p14:creationId xmlns:p14="http://schemas.microsoft.com/office/powerpoint/2010/main" val="1063482501"/>
       </p:ext>
     </p:extLst>
   </p:cSld>
@@ -8734,7 +8734,7 @@
           <p:cNvPr id="4" name="">
             <a:extLst xmlns:a="http://schemas.openxmlformats.org/drawingml/2006/main">
               <a:ext uri="{FF2B5EF4-FFF2-40B4-BE49-F238E27FC236}">
-                <a16:creationId xmlns:a16="http://schemas.microsoft.com/office/drawing/2014/main" id="{0ED6394C-7667-41B9-992C-4D5FFF7E897D}"/>
+                <a16:creationId xmlns:a16="http://schemas.microsoft.com/office/drawing/2014/main" id="{E2F626E5-D8CF-4B70-A3F1-9117133D5562}"/>
               </a:ext>
             </a:extLst>
           </p:cNvPr>
@@ -8800,7 +8800,7 @@
           <p:cNvPr id="2" name="">
             <a:extLst xmlns:a="http://schemas.openxmlformats.org/drawingml/2006/main">
               <a:ext uri="{FF2B5EF4-FFF2-40B4-BE49-F238E27FC236}">
-                <a16:creationId xmlns:a16="http://schemas.microsoft.com/office/drawing/2014/main" id="{06DA32B4-BAC0-4FB3-8E90-16CFBFCFF56F}"/>
+                <a16:creationId xmlns:a16="http://schemas.microsoft.com/office/drawing/2014/main" id="{6C490842-3543-4CC2-A974-CB37AF1E37DF}"/>
               </a:ext>
             </a:extLst>
           </p:cNvPr>
@@ -8866,7 +8866,7 @@
           <p:cNvPr id="3" name="">
             <a:extLst xmlns:a="http://schemas.openxmlformats.org/drawingml/2006/main">
               <a:ext uri="{FF2B5EF4-FFF2-40B4-BE49-F238E27FC236}">
-                <a16:creationId xmlns:a16="http://schemas.microsoft.com/office/drawing/2014/main" id="{69482C5C-A948-4414-90EC-6DE1B88FC7F1}"/>
+                <a16:creationId xmlns:a16="http://schemas.microsoft.com/office/drawing/2014/main" id="{96B370E7-821B-488C-865C-816ACBB1C651}"/>
               </a:ext>
             </a:extLst>
           </p:cNvPr>
@@ -8876,7 +8876,7 @@
           <p:nvPr/>
         </p:nvPicPr>
         <p:blipFill>
-          <a:blip xmlns:r="http://schemas.openxmlformats.org/officeDocument/2006/relationships" xmlns:a="http://schemas.openxmlformats.org/drawingml/2006/main" r:embed="Rc3f6d6b967c74c84"/>
+          <a:blip xmlns:r="http://schemas.openxmlformats.org/officeDocument/2006/relationships" xmlns:a="http://schemas.openxmlformats.org/drawingml/2006/main" r:embed="Rd39015293c2f46b7"/>
           <a:stretch xmlns:a="http://schemas.openxmlformats.org/drawingml/2006/main"/>
         </p:blipFill>
         <p:spPr>
@@ -8892,7 +8892,7 @@
     </p:spTree>
     <p:extLst>
       <p:ext uri="{BB962C8B-B14F-4D97-AF65-F5344CB8AC3E}">
-        <p14:creationId xmlns:p14="http://schemas.microsoft.com/office/powerpoint/2010/main" val="1695419233"/>
+        <p14:creationId xmlns:p14="http://schemas.microsoft.com/office/powerpoint/2010/main" val="1965633632"/>
       </p:ext>
     </p:extLst>
   </p:cSld>
@@ -8923,7 +8923,7 @@
           <p:cNvPr id="4" name="">
             <a:extLst xmlns:a="http://schemas.openxmlformats.org/drawingml/2006/main">
               <a:ext uri="{FF2B5EF4-FFF2-40B4-BE49-F238E27FC236}">
-                <a16:creationId xmlns:a16="http://schemas.microsoft.com/office/drawing/2014/main" id="{FFCE66BF-04A3-421C-96CD-711490BE8574}"/>
+                <a16:creationId xmlns:a16="http://schemas.microsoft.com/office/drawing/2014/main" id="{F97ECC5C-A8E6-4BB6-B761-789E9CE34FA4}"/>
               </a:ext>
             </a:extLst>
           </p:cNvPr>
@@ -8989,7 +8989,7 @@
           <p:cNvPr id="2" name="">
             <a:extLst xmlns:a="http://schemas.openxmlformats.org/drawingml/2006/main">
               <a:ext uri="{FF2B5EF4-FFF2-40B4-BE49-F238E27FC236}">
-                <a16:creationId xmlns:a16="http://schemas.microsoft.com/office/drawing/2014/main" id="{3606A252-C425-4131-B4BF-6F0D44FBD371}"/>
+                <a16:creationId xmlns:a16="http://schemas.microsoft.com/office/drawing/2014/main" id="{7F8C87B4-9891-4C95-86F7-5C910748FDA6}"/>
               </a:ext>
             </a:extLst>
           </p:cNvPr>
@@ -9055,7 +9055,7 @@
           <p:cNvPr id="3" name="">
             <a:extLst xmlns:a="http://schemas.openxmlformats.org/drawingml/2006/main">
               <a:ext uri="{FF2B5EF4-FFF2-40B4-BE49-F238E27FC236}">
-                <a16:creationId xmlns:a16="http://schemas.microsoft.com/office/drawing/2014/main" id="{5EF80752-0A46-4A4A-A0BB-4C5D31C224FE}"/>
+                <a16:creationId xmlns:a16="http://schemas.microsoft.com/office/drawing/2014/main" id="{B8DDE488-402F-4C28-9223-05564650C59E}"/>
               </a:ext>
             </a:extLst>
           </p:cNvPr>
@@ -9065,7 +9065,7 @@
           <p:nvPr/>
         </p:nvPicPr>
         <p:blipFill>
-          <a:blip xmlns:r="http://schemas.openxmlformats.org/officeDocument/2006/relationships" xmlns:a="http://schemas.openxmlformats.org/drawingml/2006/main" r:embed="R1dc5373e1cff4486"/>
+          <a:blip xmlns:r="http://schemas.openxmlformats.org/officeDocument/2006/relationships" xmlns:a="http://schemas.openxmlformats.org/drawingml/2006/main" r:embed="Re92afcfa1b0c4ee8"/>
           <a:stretch xmlns:a="http://schemas.openxmlformats.org/drawingml/2006/main"/>
         </p:blipFill>
         <p:spPr>
@@ -9081,7 +9081,7 @@
     </p:spTree>
     <p:extLst>
       <p:ext uri="{BB962C8B-B14F-4D97-AF65-F5344CB8AC3E}">
-        <p14:creationId xmlns:p14="http://schemas.microsoft.com/office/powerpoint/2010/main" val="820277130"/>
+        <p14:creationId xmlns:p14="http://schemas.microsoft.com/office/powerpoint/2010/main" val="1901831797"/>
       </p:ext>
     </p:extLst>
   </p:cSld>
@@ -9112,7 +9112,7 @@
           <p:cNvPr id="4" name="">
             <a:extLst xmlns:a="http://schemas.openxmlformats.org/drawingml/2006/main">
               <a:ext uri="{FF2B5EF4-FFF2-40B4-BE49-F238E27FC236}">
-                <a16:creationId xmlns:a16="http://schemas.microsoft.com/office/drawing/2014/main" id="{F70C1916-B49E-44BF-9A1A-A920AF6DCC47}"/>
+                <a16:creationId xmlns:a16="http://schemas.microsoft.com/office/drawing/2014/main" id="{8D517A40-78E6-455D-B1E6-2A53C30354E5}"/>
               </a:ext>
             </a:extLst>
           </p:cNvPr>
@@ -9178,7 +9178,7 @@
           <p:cNvPr id="2" name="">
             <a:extLst xmlns:a="http://schemas.openxmlformats.org/drawingml/2006/main">
               <a:ext uri="{FF2B5EF4-FFF2-40B4-BE49-F238E27FC236}">
-                <a16:creationId xmlns:a16="http://schemas.microsoft.com/office/drawing/2014/main" id="{4E3B06C7-EC5E-41A5-B0CD-4DB25B3AB4D1}"/>
+                <a16:creationId xmlns:a16="http://schemas.microsoft.com/office/drawing/2014/main" id="{FE489CDC-3085-472F-A489-5C373A7327F9}"/>
               </a:ext>
             </a:extLst>
           </p:cNvPr>
@@ -9244,7 +9244,7 @@
           <p:cNvPr id="3" name="">
             <a:extLst xmlns:a="http://schemas.openxmlformats.org/drawingml/2006/main">
               <a:ext uri="{FF2B5EF4-FFF2-40B4-BE49-F238E27FC236}">
-                <a16:creationId xmlns:a16="http://schemas.microsoft.com/office/drawing/2014/main" id="{B9C8FD83-0F81-4BE0-BFD1-E624038028A5}"/>
+                <a16:creationId xmlns:a16="http://schemas.microsoft.com/office/drawing/2014/main" id="{E9A658A7-E507-4F7E-8F98-EF54E271E663}"/>
               </a:ext>
             </a:extLst>
           </p:cNvPr>
@@ -9254,7 +9254,7 @@
           <p:nvPr/>
         </p:nvPicPr>
         <p:blipFill>
-          <a:blip xmlns:r="http://schemas.openxmlformats.org/officeDocument/2006/relationships" xmlns:a="http://schemas.openxmlformats.org/drawingml/2006/main" r:embed="R327d6743fc7e4d64"/>
+          <a:blip xmlns:r="http://schemas.openxmlformats.org/officeDocument/2006/relationships" xmlns:a="http://schemas.openxmlformats.org/drawingml/2006/main" r:embed="R5c8c652bae904467"/>
           <a:stretch xmlns:a="http://schemas.openxmlformats.org/drawingml/2006/main"/>
         </p:blipFill>
         <p:spPr>
@@ -9270,7 +9270,7 @@
     </p:spTree>
     <p:extLst>
       <p:ext uri="{BB962C8B-B14F-4D97-AF65-F5344CB8AC3E}">
-        <p14:creationId xmlns:p14="http://schemas.microsoft.com/office/powerpoint/2010/main" val="1937676620"/>
+        <p14:creationId xmlns:p14="http://schemas.microsoft.com/office/powerpoint/2010/main" val="733498719"/>
       </p:ext>
     </p:extLst>
   </p:cSld>
@@ -9301,7 +9301,7 @@
           <p:cNvPr id="5" name="">
             <a:extLst xmlns:a="http://schemas.openxmlformats.org/drawingml/2006/main">
               <a:ext uri="{FF2B5EF4-FFF2-40B4-BE49-F238E27FC236}">
-                <a16:creationId xmlns:a16="http://schemas.microsoft.com/office/drawing/2014/main" id="{9B3EC46A-1B4A-4DD9-9391-FEA30D39DB7F}"/>
+                <a16:creationId xmlns:a16="http://schemas.microsoft.com/office/drawing/2014/main" id="{28A65407-9A9A-4499-AD3C-FDBDAE6382F3}"/>
               </a:ext>
             </a:extLst>
           </p:cNvPr>
@@ -9367,7 +9367,7 @@
           <p:cNvPr id="2" name="">
             <a:extLst xmlns:a="http://schemas.openxmlformats.org/drawingml/2006/main">
               <a:ext uri="{FF2B5EF4-FFF2-40B4-BE49-F238E27FC236}">
-                <a16:creationId xmlns:a16="http://schemas.microsoft.com/office/drawing/2014/main" id="{7A89DDAB-9900-40E5-9E21-2B40CF6FC3D7}"/>
+                <a16:creationId xmlns:a16="http://schemas.microsoft.com/office/drawing/2014/main" id="{98868D13-58F5-4677-86FC-355900E63A70}"/>
               </a:ext>
             </a:extLst>
           </p:cNvPr>
@@ -9433,7 +9433,7 @@
           <p:cNvPr id="3" name="">
             <a:extLst xmlns:a="http://schemas.openxmlformats.org/drawingml/2006/main">
               <a:ext uri="{FF2B5EF4-FFF2-40B4-BE49-F238E27FC236}">
-                <a16:creationId xmlns:a16="http://schemas.microsoft.com/office/drawing/2014/main" id="{5CAE1380-9E14-4692-B0BB-E5EB4B318119}"/>
+                <a16:creationId xmlns:a16="http://schemas.microsoft.com/office/drawing/2014/main" id="{BFB1332F-6439-4C31-8D05-8FD0097790A7}"/>
               </a:ext>
             </a:extLst>
           </p:cNvPr>
@@ -9711,7 +9711,7 @@
           <p:cNvPr id="4" name="">
             <a:extLst xmlns:a="http://schemas.openxmlformats.org/drawingml/2006/main">
               <a:ext uri="{FF2B5EF4-FFF2-40B4-BE49-F238E27FC236}">
-                <a16:creationId xmlns:a16="http://schemas.microsoft.com/office/drawing/2014/main" id="{6614335B-D3A1-4FBF-8579-30CEED9DC136}"/>
+                <a16:creationId xmlns:a16="http://schemas.microsoft.com/office/drawing/2014/main" id="{579F12F4-10D9-4B52-BB7C-566207FE7F7F}"/>
               </a:ext>
             </a:extLst>
           </p:cNvPr>
@@ -9775,7 +9775,7 @@
     </p:spTree>
     <p:extLst>
       <p:ext uri="{BB962C8B-B14F-4D97-AF65-F5344CB8AC3E}">
-        <p14:creationId xmlns:p14="http://schemas.microsoft.com/office/powerpoint/2010/main" val="2069192816"/>
+        <p14:creationId xmlns:p14="http://schemas.microsoft.com/office/powerpoint/2010/main" val="323585427"/>
       </p:ext>
     </p:extLst>
   </p:cSld>
@@ -9806,7 +9806,7 @@
           <p:cNvPr id="8" name="">
             <a:extLst xmlns:a="http://schemas.openxmlformats.org/drawingml/2006/main">
               <a:ext uri="{FF2B5EF4-FFF2-40B4-BE49-F238E27FC236}">
-                <a16:creationId xmlns:a16="http://schemas.microsoft.com/office/drawing/2014/main" id="{4FFE2501-59B0-4A82-BCAD-441A99C75594}"/>
+                <a16:creationId xmlns:a16="http://schemas.microsoft.com/office/drawing/2014/main" id="{EF902AB2-1ED0-411E-AFC0-C521B2338209}"/>
               </a:ext>
             </a:extLst>
           </p:cNvPr>
@@ -9872,7 +9872,7 @@
           <p:cNvPr id="2" name="">
             <a:extLst xmlns:a="http://schemas.openxmlformats.org/drawingml/2006/main">
               <a:ext uri="{FF2B5EF4-FFF2-40B4-BE49-F238E27FC236}">
-                <a16:creationId xmlns:a16="http://schemas.microsoft.com/office/drawing/2014/main" id="{417494E7-D7C2-444C-A143-4A0DCF2E2BD7}"/>
+                <a16:creationId xmlns:a16="http://schemas.microsoft.com/office/drawing/2014/main" id="{A88F5FF6-8E77-4997-B638-851326EAAD6F}"/>
               </a:ext>
             </a:extLst>
           </p:cNvPr>
@@ -9938,7 +9938,7 @@
           <p:cNvPr id="3" name="Chart">
             <a:extLst xmlns:a="http://schemas.openxmlformats.org/drawingml/2006/main">
               <a:ext uri="{FF2B5EF4-FFF2-40B4-BE49-F238E27FC236}">
-                <a16:creationId xmlns:a16="http://schemas.microsoft.com/office/drawing/2014/main" id="{CE64D9C6-E6EB-46A8-BFC5-A71AEC105DF5}"/>
+                <a16:creationId xmlns:a16="http://schemas.microsoft.com/office/drawing/2014/main" id="{B3304E44-B74F-4B0D-B577-9512D9F0B905}"/>
               </a:ext>
             </a:extLst>
           </p:cNvPr>
@@ -9951,7 +9951,7 @@
         </p:xfrm>
         <a:graphic xmlns:a="http://schemas.openxmlformats.org/drawingml/2006/main">
           <a:graphicData uri="http://schemas.openxmlformats.org/drawingml/2006/chart">
-            <c:chart xmlns:r="http://schemas.openxmlformats.org/officeDocument/2006/relationships" xmlns:c="http://schemas.openxmlformats.org/drawingml/2006/chart" r:id="Rd4d73446b8e742bb"/>
+            <c:chart xmlns:r="http://schemas.openxmlformats.org/officeDocument/2006/relationships" xmlns:c="http://schemas.openxmlformats.org/drawingml/2006/chart" r:id="R1b6134dcca054da0"/>
           </a:graphicData>
         </a:graphic>
       </p:graphicFrame>
@@ -9960,7 +9960,7 @@
           <p:cNvPr id="4" name="">
             <a:extLst xmlns:a="http://schemas.openxmlformats.org/drawingml/2006/main">
               <a:ext uri="{FF2B5EF4-FFF2-40B4-BE49-F238E27FC236}">
-                <a16:creationId xmlns:a16="http://schemas.microsoft.com/office/drawing/2014/main" id="{FD45E6AF-1C9A-44B2-92B1-970DE6E15424}"/>
+                <a16:creationId xmlns:a16="http://schemas.microsoft.com/office/drawing/2014/main" id="{49EC08B6-3E5B-4C37-A7DD-134549F9CC45}"/>
               </a:ext>
             </a:extLst>
           </p:cNvPr>
@@ -10026,7 +10026,7 @@
           <p:cNvPr id="5" name="">
             <a:extLst xmlns:a="http://schemas.openxmlformats.org/drawingml/2006/main">
               <a:ext uri="{FF2B5EF4-FFF2-40B4-BE49-F238E27FC236}">
-                <a16:creationId xmlns:a16="http://schemas.microsoft.com/office/drawing/2014/main" id="{5E744B6B-DC8D-4900-BC2F-D6989694E1E2}"/>
+                <a16:creationId xmlns:a16="http://schemas.microsoft.com/office/drawing/2014/main" id="{DA8EDBC4-D19C-405A-8847-FFB3217405E1}"/>
               </a:ext>
             </a:extLst>
           </p:cNvPr>
@@ -10138,7 +10138,7 @@
           <p:cNvPr id="6" name="">
             <a:extLst xmlns:a="http://schemas.openxmlformats.org/drawingml/2006/main">
               <a:ext uri="{FF2B5EF4-FFF2-40B4-BE49-F238E27FC236}">
-                <a16:creationId xmlns:a16="http://schemas.microsoft.com/office/drawing/2014/main" id="{243CAAF0-6652-434F-995E-C2D6295B98A0}"/>
+                <a16:creationId xmlns:a16="http://schemas.microsoft.com/office/drawing/2014/main" id="{9776E638-2928-4583-AD52-AA0BEF400674}"/>
               </a:ext>
             </a:extLst>
           </p:cNvPr>
@@ -10227,7 +10227,7 @@
           <p:cNvPr id="7" name="">
             <a:extLst xmlns:a="http://schemas.openxmlformats.org/drawingml/2006/main">
               <a:ext uri="{FF2B5EF4-FFF2-40B4-BE49-F238E27FC236}">
-                <a16:creationId xmlns:a16="http://schemas.microsoft.com/office/drawing/2014/main" id="{063AB8B8-B338-4130-A638-7235AC69C17B}"/>
+                <a16:creationId xmlns:a16="http://schemas.microsoft.com/office/drawing/2014/main" id="{9EB99D40-62AB-489B-A382-8601167081D4}"/>
               </a:ext>
             </a:extLst>
           </p:cNvPr>
@@ -10291,7 +10291,7 @@
     </p:spTree>
     <p:extLst>
       <p:ext uri="{BB962C8B-B14F-4D97-AF65-F5344CB8AC3E}">
-        <p14:creationId xmlns:p14="http://schemas.microsoft.com/office/powerpoint/2010/main" val="2059476196"/>
+        <p14:creationId xmlns:p14="http://schemas.microsoft.com/office/powerpoint/2010/main" val="1891562127"/>
       </p:ext>
     </p:extLst>
   </p:cSld>

--- a/submission/AlphaVault-Presentation.pptx
+++ b/submission/AlphaVault-Presentation.pptx
@@ -2,24 +2,24 @@
 <file path=ppt/presentation.xml><?xml version="1.0" encoding="utf-8"?>
 <p:presentation xmlns:p="http://schemas.openxmlformats.org/presentationml/2006/main">
   <p:sldMasterIdLst>
-    <p:sldMasterId xmlns:r="http://schemas.openxmlformats.org/officeDocument/2006/relationships" id="2147483648" r:id="R4d3d154819f94cd3"/>
+    <p:sldMasterId xmlns:r="http://schemas.openxmlformats.org/officeDocument/2006/relationships" id="2147483648" r:id="R609d156055d64dfa"/>
   </p:sldMasterIdLst>
   <p:notesMasterIdLst>
-    <p:notesMasterId xmlns:r="http://schemas.openxmlformats.org/officeDocument/2006/relationships" r:id="R7633797fe63045f9"/>
+    <p:notesMasterId xmlns:r="http://schemas.openxmlformats.org/officeDocument/2006/relationships" r:id="Rbbc84ff9878e439f"/>
   </p:notesMasterIdLst>
   <p:sldIdLst>
-    <p:sldId xmlns:r="http://schemas.openxmlformats.org/officeDocument/2006/relationships" id="256" r:id="R34ee6d8936e541eb"/>
-    <p:sldId xmlns:r="http://schemas.openxmlformats.org/officeDocument/2006/relationships" id="257" r:id="Rf622a2ce1dda4853"/>
-    <p:sldId xmlns:r="http://schemas.openxmlformats.org/officeDocument/2006/relationships" id="258" r:id="R2d6377340a7844d7"/>
-    <p:sldId xmlns:r="http://schemas.openxmlformats.org/officeDocument/2006/relationships" id="259" r:id="R955e607e30d24ea4"/>
-    <p:sldId xmlns:r="http://schemas.openxmlformats.org/officeDocument/2006/relationships" id="260" r:id="R4ab07de2eb734eec"/>
-    <p:sldId xmlns:r="http://schemas.openxmlformats.org/officeDocument/2006/relationships" id="261" r:id="R596f287c33f847b7"/>
-    <p:sldId xmlns:r="http://schemas.openxmlformats.org/officeDocument/2006/relationships" id="262" r:id="R30a88f7fdad04ff6"/>
-    <p:sldId xmlns:r="http://schemas.openxmlformats.org/officeDocument/2006/relationships" id="263" r:id="R61c85e0deea544d1"/>
-    <p:sldId xmlns:r="http://schemas.openxmlformats.org/officeDocument/2006/relationships" id="264" r:id="R0486eae28b0445b8"/>
-    <p:sldId xmlns:r="http://schemas.openxmlformats.org/officeDocument/2006/relationships" id="265" r:id="R33391cd129674e27"/>
-    <p:sldId xmlns:r="http://schemas.openxmlformats.org/officeDocument/2006/relationships" id="266" r:id="R8cb8460dd3ef466d"/>
-    <p:sldId xmlns:r="http://schemas.openxmlformats.org/officeDocument/2006/relationships" id="267" r:id="Rb387f8e8ec62482d"/>
+    <p:sldId xmlns:r="http://schemas.openxmlformats.org/officeDocument/2006/relationships" id="256" r:id="Rc05baf8aadb8411f"/>
+    <p:sldId xmlns:r="http://schemas.openxmlformats.org/officeDocument/2006/relationships" id="257" r:id="R2f73189136e14807"/>
+    <p:sldId xmlns:r="http://schemas.openxmlformats.org/officeDocument/2006/relationships" id="258" r:id="R7947501dc2a14026"/>
+    <p:sldId xmlns:r="http://schemas.openxmlformats.org/officeDocument/2006/relationships" id="259" r:id="Rb618d6ebffc94973"/>
+    <p:sldId xmlns:r="http://schemas.openxmlformats.org/officeDocument/2006/relationships" id="260" r:id="R8e5bd2ae9fe04050"/>
+    <p:sldId xmlns:r="http://schemas.openxmlformats.org/officeDocument/2006/relationships" id="261" r:id="Rea04d83747764b83"/>
+    <p:sldId xmlns:r="http://schemas.openxmlformats.org/officeDocument/2006/relationships" id="262" r:id="R2f8d8c5304354e64"/>
+    <p:sldId xmlns:r="http://schemas.openxmlformats.org/officeDocument/2006/relationships" id="263" r:id="Rf5363a246863449b"/>
+    <p:sldId xmlns:r="http://schemas.openxmlformats.org/officeDocument/2006/relationships" id="264" r:id="R551a99692fa049bd"/>
+    <p:sldId xmlns:r="http://schemas.openxmlformats.org/officeDocument/2006/relationships" id="265" r:id="R006f49c2e5c44ee5"/>
+    <p:sldId xmlns:r="http://schemas.openxmlformats.org/officeDocument/2006/relationships" id="266" r:id="R23efde10454e4636"/>
+    <p:sldId xmlns:r="http://schemas.openxmlformats.org/officeDocument/2006/relationships" id="267" r:id="R74c4d260c744490f"/>
   </p:sldIdLst>
   <p:sldSz cx="12192000" cy="6858000"/>
   <p:notesSz cx="6858000" cy="9144000"/>
@@ -1330,7 +1330,7 @@
           <p:cNvPr id="3" name="Title">
             <a:extLst xmlns:a="http://schemas.openxmlformats.org/drawingml/2006/main">
               <a:ext uri="{FF2B5EF4-FFF2-40B4-BE49-F238E27FC236}">
-                <a16:creationId xmlns:a16="http://schemas.microsoft.com/office/drawing/2014/main" id="{DC6729F1-B238-4EAB-B5C0-D9513F57776E}"/>
+                <a16:creationId xmlns:a16="http://schemas.microsoft.com/office/drawing/2014/main" id="{B5E7D587-1C68-4D6A-981C-4964C81F2C2F}"/>
               </a:ext>
             </a:extLst>
           </p:cNvPr>
@@ -1487,7 +1487,7 @@
           <p:cNvPr id="2" name="Subtitle">
             <a:extLst xmlns:a="http://schemas.openxmlformats.org/drawingml/2006/main">
               <a:ext uri="{FF2B5EF4-FFF2-40B4-BE49-F238E27FC236}">
-                <a16:creationId xmlns:a16="http://schemas.microsoft.com/office/drawing/2014/main" id="{ECAD22F5-9169-4FA5-9BF8-B2F7C3F09076}"/>
+                <a16:creationId xmlns:a16="http://schemas.microsoft.com/office/drawing/2014/main" id="{251CF352-4A0C-4F24-B4E2-A6AE5EB12549}"/>
               </a:ext>
             </a:extLst>
           </p:cNvPr>
@@ -1661,7 +1661,7 @@
           <p:cNvPr id="2" name="Section title">
             <a:extLst xmlns:a="http://schemas.openxmlformats.org/drawingml/2006/main">
               <a:ext uri="{FF2B5EF4-FFF2-40B4-BE49-F238E27FC236}">
-                <a16:creationId xmlns:a16="http://schemas.microsoft.com/office/drawing/2014/main" id="{72F6C952-BE07-4644-A26A-FA2DFCEAE99C}"/>
+                <a16:creationId xmlns:a16="http://schemas.microsoft.com/office/drawing/2014/main" id="{88816E27-5A4D-4F3B-BC3E-4C1F924BDC48}"/>
               </a:ext>
             </a:extLst>
           </p:cNvPr>
@@ -1835,7 +1835,7 @@
           <p:cNvPr id="3" name="Title">
             <a:extLst xmlns:a="http://schemas.openxmlformats.org/drawingml/2006/main">
               <a:ext uri="{FF2B5EF4-FFF2-40B4-BE49-F238E27FC236}">
-                <a16:creationId xmlns:a16="http://schemas.microsoft.com/office/drawing/2014/main" id="{57E36E3B-C7A4-4B64-A1CC-FB04CB540177}"/>
+                <a16:creationId xmlns:a16="http://schemas.microsoft.com/office/drawing/2014/main" id="{3BE13B4F-217F-4592-9FD2-A9A1B23A053D}"/>
               </a:ext>
             </a:extLst>
           </p:cNvPr>
@@ -1992,7 +1992,7 @@
           <p:cNvPr id="2" name="Body">
             <a:extLst xmlns:a="http://schemas.openxmlformats.org/drawingml/2006/main">
               <a:ext uri="{FF2B5EF4-FFF2-40B4-BE49-F238E27FC236}">
-                <a16:creationId xmlns:a16="http://schemas.microsoft.com/office/drawing/2014/main" id="{22999E9B-22A1-42F0-8C16-CC72A516CA2F}"/>
+                <a16:creationId xmlns:a16="http://schemas.microsoft.com/office/drawing/2014/main" id="{ABEB5F58-C70A-482F-A979-C1082DB6AB95}"/>
               </a:ext>
             </a:extLst>
           </p:cNvPr>
@@ -2166,7 +2166,7 @@
           <p:cNvPr id="4" name="Title">
             <a:extLst xmlns:a="http://schemas.openxmlformats.org/drawingml/2006/main">
               <a:ext uri="{FF2B5EF4-FFF2-40B4-BE49-F238E27FC236}">
-                <a16:creationId xmlns:a16="http://schemas.microsoft.com/office/drawing/2014/main" id="{D07EA27B-A04B-4755-9996-1A53151CD943}"/>
+                <a16:creationId xmlns:a16="http://schemas.microsoft.com/office/drawing/2014/main" id="{A5AA1548-9770-4FA1-8538-B4C419EAEF58}"/>
               </a:ext>
             </a:extLst>
           </p:cNvPr>
@@ -2323,7 +2323,7 @@
           <p:cNvPr id="2" name="Left column">
             <a:extLst xmlns:a="http://schemas.openxmlformats.org/drawingml/2006/main">
               <a:ext uri="{FF2B5EF4-FFF2-40B4-BE49-F238E27FC236}">
-                <a16:creationId xmlns:a16="http://schemas.microsoft.com/office/drawing/2014/main" id="{3D5027CC-D9BB-492A-8569-A8BE5175FD84}"/>
+                <a16:creationId xmlns:a16="http://schemas.microsoft.com/office/drawing/2014/main" id="{B6820C06-C09B-43C4-BA64-1BFC11043113}"/>
               </a:ext>
             </a:extLst>
           </p:cNvPr>
@@ -2480,7 +2480,7 @@
           <p:cNvPr id="3" name="Right column">
             <a:extLst xmlns:a="http://schemas.openxmlformats.org/drawingml/2006/main">
               <a:ext uri="{FF2B5EF4-FFF2-40B4-BE49-F238E27FC236}">
-                <a16:creationId xmlns:a16="http://schemas.microsoft.com/office/drawing/2014/main" id="{7D5650A0-E0A2-4C16-A6E3-8F2E57D28444}"/>
+                <a16:creationId xmlns:a16="http://schemas.microsoft.com/office/drawing/2014/main" id="{75965FCD-895B-4B86-87C3-E479FB858832}"/>
               </a:ext>
             </a:extLst>
           </p:cNvPr>
@@ -2654,7 +2654,7 @@
           <p:cNvPr id="3" name="Title">
             <a:extLst xmlns:a="http://schemas.openxmlformats.org/drawingml/2006/main">
               <a:ext uri="{FF2B5EF4-FFF2-40B4-BE49-F238E27FC236}">
-                <a16:creationId xmlns:a16="http://schemas.microsoft.com/office/drawing/2014/main" id="{DD938C23-2A31-4131-9EF1-802C583F594B}"/>
+                <a16:creationId xmlns:a16="http://schemas.microsoft.com/office/drawing/2014/main" id="{4B6EC008-8520-423A-BD53-6FBF79D02AAA}"/>
               </a:ext>
             </a:extLst>
           </p:cNvPr>
@@ -2811,7 +2811,7 @@
           <p:cNvPr id="2" name="Left column">
             <a:extLst xmlns:a="http://schemas.openxmlformats.org/drawingml/2006/main">
               <a:ext uri="{FF2B5EF4-FFF2-40B4-BE49-F238E27FC236}">
-                <a16:creationId xmlns:a16="http://schemas.microsoft.com/office/drawing/2014/main" id="{866E9B17-126B-4793-B297-CE4B05D9D73F}"/>
+                <a16:creationId xmlns:a16="http://schemas.microsoft.com/office/drawing/2014/main" id="{018AAA3E-DC5A-4D1C-BE01-FA6777DE1438}"/>
               </a:ext>
             </a:extLst>
           </p:cNvPr>
@@ -3006,12 +3006,12 @@
   </p:cSld>
   <p:clrMap bg1="lt1" tx1="dk1" bg2="lt2" tx2="dk2" accent1="accent1" accent2="accent2" accent3="accent3" accent4="accent4" accent5="accent5" accent6="accent6" hlink="hlink" folHlink="folHlink"/>
   <p:sldLayoutIdLst>
-    <p:sldLayoutId xmlns:r="http://schemas.openxmlformats.org/officeDocument/2006/relationships" id="2147483649" r:id="R10b2d90a032c4c5d"/>
-    <p:sldLayoutId xmlns:r="http://schemas.openxmlformats.org/officeDocument/2006/relationships" id="2147483650" r:id="R9694ddf139ac498a"/>
-    <p:sldLayoutId xmlns:r="http://schemas.openxmlformats.org/officeDocument/2006/relationships" id="2147483651" r:id="Ra16a9d3efc51409e"/>
-    <p:sldLayoutId xmlns:r="http://schemas.openxmlformats.org/officeDocument/2006/relationships" id="2147483652" r:id="Re703a2dd755c4f4b"/>
-    <p:sldLayoutId xmlns:r="http://schemas.openxmlformats.org/officeDocument/2006/relationships" id="2147483653" r:id="Rd600115218164805"/>
-    <p:sldLayoutId xmlns:r="http://schemas.openxmlformats.org/officeDocument/2006/relationships" id="2147483654" r:id="R3bea4adc9cb64e77"/>
+    <p:sldLayoutId xmlns:r="http://schemas.openxmlformats.org/officeDocument/2006/relationships" id="2147483649" r:id="R574a24bf91354821"/>
+    <p:sldLayoutId xmlns:r="http://schemas.openxmlformats.org/officeDocument/2006/relationships" id="2147483650" r:id="R9e29d66b16834e1a"/>
+    <p:sldLayoutId xmlns:r="http://schemas.openxmlformats.org/officeDocument/2006/relationships" id="2147483651" r:id="Rb7f5fa4cb24f439a"/>
+    <p:sldLayoutId xmlns:r="http://schemas.openxmlformats.org/officeDocument/2006/relationships" id="2147483652" r:id="R48f32a2f06674395"/>
+    <p:sldLayoutId xmlns:r="http://schemas.openxmlformats.org/officeDocument/2006/relationships" id="2147483653" r:id="Rd83ed97b59fd4521"/>
+    <p:sldLayoutId xmlns:r="http://schemas.openxmlformats.org/officeDocument/2006/relationships" id="2147483654" r:id="R9a921f819d034631"/>
   </p:sldLayoutIdLst>
   <p:txStyles>
     <p:titleStyle>
@@ -5771,7 +5771,7 @@
           <p:cNvPr id="6" name="">
             <a:extLst xmlns:a="http://schemas.openxmlformats.org/drawingml/2006/main">
               <a:ext uri="{FF2B5EF4-FFF2-40B4-BE49-F238E27FC236}">
-                <a16:creationId xmlns:a16="http://schemas.microsoft.com/office/drawing/2014/main" id="{E4A1AE86-F336-4033-BABA-96A204513821}"/>
+                <a16:creationId xmlns:a16="http://schemas.microsoft.com/office/drawing/2014/main" id="{FA07DF03-45C4-4D56-8004-4107CD4B7288}"/>
               </a:ext>
             </a:extLst>
           </p:cNvPr>
@@ -5837,7 +5837,7 @@
           <p:cNvPr id="2" name="">
             <a:extLst xmlns:a="http://schemas.openxmlformats.org/drawingml/2006/main">
               <a:ext uri="{FF2B5EF4-FFF2-40B4-BE49-F238E27FC236}">
-                <a16:creationId xmlns:a16="http://schemas.microsoft.com/office/drawing/2014/main" id="{A7EFEF95-9532-4040-8CA3-24A7D4DC237A}"/>
+                <a16:creationId xmlns:a16="http://schemas.microsoft.com/office/drawing/2014/main" id="{58337263-B639-4CBA-A558-44CBB3B398B4}"/>
               </a:ext>
             </a:extLst>
           </p:cNvPr>
@@ -5903,7 +5903,7 @@
           <p:cNvPr id="3" name="">
             <a:extLst xmlns:a="http://schemas.openxmlformats.org/drawingml/2006/main">
               <a:ext uri="{FF2B5EF4-FFF2-40B4-BE49-F238E27FC236}">
-                <a16:creationId xmlns:a16="http://schemas.microsoft.com/office/drawing/2014/main" id="{9E422F67-F541-44AA-A018-F7A407B19A92}"/>
+                <a16:creationId xmlns:a16="http://schemas.microsoft.com/office/drawing/2014/main" id="{01E2B7B0-F77C-45F3-B1B4-E470F452EDFC}"/>
               </a:ext>
             </a:extLst>
           </p:cNvPr>
@@ -5992,7 +5992,7 @@
           <p:cNvPr id="4" name="">
             <a:extLst xmlns:a="http://schemas.openxmlformats.org/drawingml/2006/main">
               <a:ext uri="{FF2B5EF4-FFF2-40B4-BE49-F238E27FC236}">
-                <a16:creationId xmlns:a16="http://schemas.microsoft.com/office/drawing/2014/main" id="{C810D2CA-4C8F-40BA-B699-4FA28E197FC7}"/>
+                <a16:creationId xmlns:a16="http://schemas.microsoft.com/office/drawing/2014/main" id="{2AEBD797-55AB-4B2F-BF97-5D4E1EDDA80B}"/>
               </a:ext>
             </a:extLst>
           </p:cNvPr>
@@ -6058,7 +6058,7 @@
           <p:cNvPr id="5" name="">
             <a:extLst xmlns:a="http://schemas.openxmlformats.org/drawingml/2006/main">
               <a:ext uri="{FF2B5EF4-FFF2-40B4-BE49-F238E27FC236}">
-                <a16:creationId xmlns:a16="http://schemas.microsoft.com/office/drawing/2014/main" id="{554C910A-45C1-4BA9-AD16-141F69B90599}"/>
+                <a16:creationId xmlns:a16="http://schemas.microsoft.com/office/drawing/2014/main" id="{9CA01499-12F1-484C-B9CD-4A8E9E211D44}"/>
               </a:ext>
             </a:extLst>
           </p:cNvPr>
@@ -6117,35 +6117,12 @@
               <a:t>Du zhuotong  |  SC6113</a:t>
             </a:r>
           </a:p>
-          <a:p xmlns:a="http://schemas.openxmlformats.org/drawingml/2006/main">
-            <a:pPr>
-              <a:defRPr sz="2100" b="0">
-                <a:solidFill>
-                  <a:srgbClr val="173F50"/>
-                </a:solidFill>
-                <a:latin typeface="Arial"/>
-                <a:ea typeface="Arial"/>
-                <a:cs typeface="Arial"/>
-              </a:defRPr>
-            </a:pPr>
-            <a:r>
-              <a:rPr sz="2100" b="0">
-                <a:solidFill>
-                  <a:srgbClr val="173F50"/>
-                </a:solidFill>
-                <a:latin typeface="Arial"/>
-                <a:ea typeface="Arial"/>
-                <a:cs typeface="Arial"/>
-              </a:rPr>
-              <a:t>Ten-minute project demonstration</a:t>
-            </a:r>
-          </a:p>
         </p:txBody>
       </p:sp>
     </p:spTree>
     <p:extLst>
       <p:ext uri="{BB962C8B-B14F-4D97-AF65-F5344CB8AC3E}">
-        <p14:creationId xmlns:p14="http://schemas.microsoft.com/office/powerpoint/2010/main" val="547702832"/>
+        <p14:creationId xmlns:p14="http://schemas.microsoft.com/office/powerpoint/2010/main" val="716744108"/>
       </p:ext>
     </p:extLst>
   </p:cSld>
@@ -6176,7 +6153,7 @@
           <p:cNvPr id="4" name="">
             <a:extLst xmlns:a="http://schemas.openxmlformats.org/drawingml/2006/main">
               <a:ext uri="{FF2B5EF4-FFF2-40B4-BE49-F238E27FC236}">
-                <a16:creationId xmlns:a16="http://schemas.microsoft.com/office/drawing/2014/main" id="{ED0725BF-4C13-41B2-93D3-24CCDB3ABB70}"/>
+                <a16:creationId xmlns:a16="http://schemas.microsoft.com/office/drawing/2014/main" id="{376662A6-48E4-4251-9329-E576257AB1F5}"/>
               </a:ext>
             </a:extLst>
           </p:cNvPr>
@@ -6242,7 +6219,7 @@
           <p:cNvPr id="2" name="">
             <a:extLst xmlns:a="http://schemas.openxmlformats.org/drawingml/2006/main">
               <a:ext uri="{FF2B5EF4-FFF2-40B4-BE49-F238E27FC236}">
-                <a16:creationId xmlns:a16="http://schemas.microsoft.com/office/drawing/2014/main" id="{FAC7D85C-5931-489A-A150-6E68995EAA41}"/>
+                <a16:creationId xmlns:a16="http://schemas.microsoft.com/office/drawing/2014/main" id="{365367DA-8A36-4598-A965-7ACCA2F7C12B}"/>
               </a:ext>
             </a:extLst>
           </p:cNvPr>
@@ -6308,7 +6285,7 @@
           <p:cNvPr id="3" name="">
             <a:extLst xmlns:a="http://schemas.openxmlformats.org/drawingml/2006/main">
               <a:ext uri="{FF2B5EF4-FFF2-40B4-BE49-F238E27FC236}">
-                <a16:creationId xmlns:a16="http://schemas.microsoft.com/office/drawing/2014/main" id="{4A0A2394-8603-4B65-A90D-600D9944AE57}"/>
+                <a16:creationId xmlns:a16="http://schemas.microsoft.com/office/drawing/2014/main" id="{5D4F5C1E-1CA8-4D4B-9E70-B65E2E11E7E6}"/>
               </a:ext>
             </a:extLst>
           </p:cNvPr>
@@ -6634,7 +6611,7 @@
     </p:spTree>
     <p:extLst>
       <p:ext uri="{BB962C8B-B14F-4D97-AF65-F5344CB8AC3E}">
-        <p14:creationId xmlns:p14="http://schemas.microsoft.com/office/powerpoint/2010/main" val="1087988805"/>
+        <p14:creationId xmlns:p14="http://schemas.microsoft.com/office/powerpoint/2010/main" val="2118534275"/>
       </p:ext>
     </p:extLst>
   </p:cSld>
@@ -6665,7 +6642,7 @@
           <p:cNvPr id="5" name="">
             <a:extLst xmlns:a="http://schemas.openxmlformats.org/drawingml/2006/main">
               <a:ext uri="{FF2B5EF4-FFF2-40B4-BE49-F238E27FC236}">
-                <a16:creationId xmlns:a16="http://schemas.microsoft.com/office/drawing/2014/main" id="{40D9ED46-EC85-4E29-92FB-FDDF1F064BDB}"/>
+                <a16:creationId xmlns:a16="http://schemas.microsoft.com/office/drawing/2014/main" id="{13AB003C-960C-416F-9EB4-3DD1E8B42CBB}"/>
               </a:ext>
             </a:extLst>
           </p:cNvPr>
@@ -6731,7 +6708,7 @@
           <p:cNvPr id="2" name="">
             <a:extLst xmlns:a="http://schemas.openxmlformats.org/drawingml/2006/main">
               <a:ext uri="{FF2B5EF4-FFF2-40B4-BE49-F238E27FC236}">
-                <a16:creationId xmlns:a16="http://schemas.microsoft.com/office/drawing/2014/main" id="{69A4576C-E3CD-4E0D-9D05-2A269F99C638}"/>
+                <a16:creationId xmlns:a16="http://schemas.microsoft.com/office/drawing/2014/main" id="{AB747BF9-A620-4E7A-96CB-A6D9EEDF92C8}"/>
               </a:ext>
             </a:extLst>
           </p:cNvPr>
@@ -6797,7 +6774,7 @@
           <p:cNvPr id="3" name="">
             <a:extLst xmlns:a="http://schemas.openxmlformats.org/drawingml/2006/main">
               <a:ext uri="{FF2B5EF4-FFF2-40B4-BE49-F238E27FC236}">
-                <a16:creationId xmlns:a16="http://schemas.microsoft.com/office/drawing/2014/main" id="{66B75B10-EE55-4679-AC07-254E11B1EE26}"/>
+                <a16:creationId xmlns:a16="http://schemas.microsoft.com/office/drawing/2014/main" id="{1430A4ED-BD32-410C-B5A8-D843ACAE2A44}"/>
               </a:ext>
             </a:extLst>
           </p:cNvPr>
@@ -7075,7 +7052,7 @@
           <p:cNvPr id="4" name="">
             <a:extLst xmlns:a="http://schemas.openxmlformats.org/drawingml/2006/main">
               <a:ext uri="{FF2B5EF4-FFF2-40B4-BE49-F238E27FC236}">
-                <a16:creationId xmlns:a16="http://schemas.microsoft.com/office/drawing/2014/main" id="{669EFEDE-B69A-4BEC-B28C-270868244DD4}"/>
+                <a16:creationId xmlns:a16="http://schemas.microsoft.com/office/drawing/2014/main" id="{FAD78490-9152-4A4D-8A11-5E26A4AEB88D}"/>
               </a:ext>
             </a:extLst>
           </p:cNvPr>
@@ -7139,7 +7116,7 @@
     </p:spTree>
     <p:extLst>
       <p:ext uri="{BB962C8B-B14F-4D97-AF65-F5344CB8AC3E}">
-        <p14:creationId xmlns:p14="http://schemas.microsoft.com/office/powerpoint/2010/main" val="1774197682"/>
+        <p14:creationId xmlns:p14="http://schemas.microsoft.com/office/powerpoint/2010/main" val="2118817506"/>
       </p:ext>
     </p:extLst>
   </p:cSld>
@@ -7170,7 +7147,7 @@
           <p:cNvPr id="7" name="">
             <a:extLst xmlns:a="http://schemas.openxmlformats.org/drawingml/2006/main">
               <a:ext uri="{FF2B5EF4-FFF2-40B4-BE49-F238E27FC236}">
-                <a16:creationId xmlns:a16="http://schemas.microsoft.com/office/drawing/2014/main" id="{4D3A732F-3C95-48BF-8EE4-F2D58FB4A5C8}"/>
+                <a16:creationId xmlns:a16="http://schemas.microsoft.com/office/drawing/2014/main" id="{1FF62769-75A3-447B-BFA9-D97F5FB18D6E}"/>
               </a:ext>
             </a:extLst>
           </p:cNvPr>
@@ -7236,7 +7213,7 @@
           <p:cNvPr id="2" name="">
             <a:extLst xmlns:a="http://schemas.openxmlformats.org/drawingml/2006/main">
               <a:ext uri="{FF2B5EF4-FFF2-40B4-BE49-F238E27FC236}">
-                <a16:creationId xmlns:a16="http://schemas.microsoft.com/office/drawing/2014/main" id="{AC40F984-6419-4F2E-A3A7-F65A4738642B}"/>
+                <a16:creationId xmlns:a16="http://schemas.microsoft.com/office/drawing/2014/main" id="{159BF2E5-5C8C-484F-AFE7-E8BA3DABA9BA}"/>
               </a:ext>
             </a:extLst>
           </p:cNvPr>
@@ -7302,7 +7279,7 @@
           <p:cNvPr id="3" name="">
             <a:extLst xmlns:a="http://schemas.openxmlformats.org/drawingml/2006/main">
               <a:ext uri="{FF2B5EF4-FFF2-40B4-BE49-F238E27FC236}">
-                <a16:creationId xmlns:a16="http://schemas.microsoft.com/office/drawing/2014/main" id="{1A1942DC-CF05-4460-9029-C87C99F77FD3}"/>
+                <a16:creationId xmlns:a16="http://schemas.microsoft.com/office/drawing/2014/main" id="{6CFFBAA9-90EE-4393-9EFA-F446A6312245}"/>
               </a:ext>
             </a:extLst>
           </p:cNvPr>
@@ -7368,7 +7345,7 @@
           <p:cNvPr id="4" name="">
             <a:extLst xmlns:a="http://schemas.openxmlformats.org/drawingml/2006/main">
               <a:ext uri="{FF2B5EF4-FFF2-40B4-BE49-F238E27FC236}">
-                <a16:creationId xmlns:a16="http://schemas.microsoft.com/office/drawing/2014/main" id="{7C40D4A2-45E2-4E44-A87F-5D653BDC2B16}"/>
+                <a16:creationId xmlns:a16="http://schemas.microsoft.com/office/drawing/2014/main" id="{929C84EE-E440-4BD3-AAC3-85270F61AA92}"/>
               </a:ext>
             </a:extLst>
           </p:cNvPr>
@@ -7480,7 +7457,7 @@
           <p:cNvPr id="5" name="">
             <a:extLst xmlns:a="http://schemas.openxmlformats.org/drawingml/2006/main">
               <a:ext uri="{FF2B5EF4-FFF2-40B4-BE49-F238E27FC236}">
-                <a16:creationId xmlns:a16="http://schemas.microsoft.com/office/drawing/2014/main" id="{7511D013-9AD9-4118-98D0-874565138A4E}"/>
+                <a16:creationId xmlns:a16="http://schemas.microsoft.com/office/drawing/2014/main" id="{86D3133E-D3AC-4B70-B35D-B8B2CBFFBEB2}"/>
               </a:ext>
             </a:extLst>
           </p:cNvPr>
@@ -7569,7 +7546,7 @@
           <p:cNvPr id="6" name="">
             <a:extLst xmlns:a="http://schemas.openxmlformats.org/drawingml/2006/main">
               <a:ext uri="{FF2B5EF4-FFF2-40B4-BE49-F238E27FC236}">
-                <a16:creationId xmlns:a16="http://schemas.microsoft.com/office/drawing/2014/main" id="{AF60B599-CD24-4E25-A127-938DC9CC3038}"/>
+                <a16:creationId xmlns:a16="http://schemas.microsoft.com/office/drawing/2014/main" id="{3306AEB2-1F10-4225-832B-69B0A8382F7A}"/>
               </a:ext>
             </a:extLst>
           </p:cNvPr>
@@ -7633,7 +7610,7 @@
     </p:spTree>
     <p:extLst>
       <p:ext uri="{BB962C8B-B14F-4D97-AF65-F5344CB8AC3E}">
-        <p14:creationId xmlns:p14="http://schemas.microsoft.com/office/powerpoint/2010/main" val="724485892"/>
+        <p14:creationId xmlns:p14="http://schemas.microsoft.com/office/powerpoint/2010/main" val="2109374202"/>
       </p:ext>
     </p:extLst>
   </p:cSld>
@@ -7664,7 +7641,7 @@
           <p:cNvPr id="6" name="">
             <a:extLst xmlns:a="http://schemas.openxmlformats.org/drawingml/2006/main">
               <a:ext uri="{FF2B5EF4-FFF2-40B4-BE49-F238E27FC236}">
-                <a16:creationId xmlns:a16="http://schemas.microsoft.com/office/drawing/2014/main" id="{1137ECF9-6CDC-4DEA-AD54-BCDC99109B4C}"/>
+                <a16:creationId xmlns:a16="http://schemas.microsoft.com/office/drawing/2014/main" id="{B607A217-EF57-4F81-A82E-0C7A8E40BB0F}"/>
               </a:ext>
             </a:extLst>
           </p:cNvPr>
@@ -7730,7 +7707,7 @@
           <p:cNvPr id="2" name="">
             <a:extLst xmlns:a="http://schemas.openxmlformats.org/drawingml/2006/main">
               <a:ext uri="{FF2B5EF4-FFF2-40B4-BE49-F238E27FC236}">
-                <a16:creationId xmlns:a16="http://schemas.microsoft.com/office/drawing/2014/main" id="{B6462613-2B2D-4649-AF7D-0CC81ADBE0A3}"/>
+                <a16:creationId xmlns:a16="http://schemas.microsoft.com/office/drawing/2014/main" id="{7A5B61CC-EC38-4969-BF3E-B9ED74DBD1D6}"/>
               </a:ext>
             </a:extLst>
           </p:cNvPr>
@@ -7796,7 +7773,7 @@
           <p:cNvPr id="3" name="">
             <a:extLst xmlns:a="http://schemas.openxmlformats.org/drawingml/2006/main">
               <a:ext uri="{FF2B5EF4-FFF2-40B4-BE49-F238E27FC236}">
-                <a16:creationId xmlns:a16="http://schemas.microsoft.com/office/drawing/2014/main" id="{821BCFF0-C9DF-4536-8A85-1E671361948C}"/>
+                <a16:creationId xmlns:a16="http://schemas.microsoft.com/office/drawing/2014/main" id="{2D54F241-BB2A-4A12-BC9E-D58F480EFE9F}"/>
               </a:ext>
             </a:extLst>
           </p:cNvPr>
@@ -7862,7 +7839,7 @@
           <p:cNvPr id="4" name="">
             <a:extLst xmlns:a="http://schemas.openxmlformats.org/drawingml/2006/main">
               <a:ext uri="{FF2B5EF4-FFF2-40B4-BE49-F238E27FC236}">
-                <a16:creationId xmlns:a16="http://schemas.microsoft.com/office/drawing/2014/main" id="{D0AAD7D5-F348-407A-AE14-9F8407AAFFC8}"/>
+                <a16:creationId xmlns:a16="http://schemas.microsoft.com/office/drawing/2014/main" id="{F89E3A2B-5D58-420D-8A44-9C81017C9354}"/>
               </a:ext>
             </a:extLst>
           </p:cNvPr>
@@ -8261,7 +8238,7 @@
           <p:cNvPr id="5" name="">
             <a:extLst xmlns:a="http://schemas.openxmlformats.org/drawingml/2006/main">
               <a:ext uri="{FF2B5EF4-FFF2-40B4-BE49-F238E27FC236}">
-                <a16:creationId xmlns:a16="http://schemas.microsoft.com/office/drawing/2014/main" id="{04B8D09B-B52F-4BF6-81D4-C391988193AC}"/>
+                <a16:creationId xmlns:a16="http://schemas.microsoft.com/office/drawing/2014/main" id="{A61A8D73-7E10-4915-BF97-74623B960D6F}"/>
               </a:ext>
             </a:extLst>
           </p:cNvPr>
@@ -8325,7 +8302,7 @@
     </p:spTree>
     <p:extLst>
       <p:ext uri="{BB962C8B-B14F-4D97-AF65-F5344CB8AC3E}">
-        <p14:creationId xmlns:p14="http://schemas.microsoft.com/office/powerpoint/2010/main" val="112949998"/>
+        <p14:creationId xmlns:p14="http://schemas.microsoft.com/office/powerpoint/2010/main" val="2133195321"/>
       </p:ext>
     </p:extLst>
   </p:cSld>
@@ -8356,7 +8333,7 @@
           <p:cNvPr id="4" name="">
             <a:extLst xmlns:a="http://schemas.openxmlformats.org/drawingml/2006/main">
               <a:ext uri="{FF2B5EF4-FFF2-40B4-BE49-F238E27FC236}">
-                <a16:creationId xmlns:a16="http://schemas.microsoft.com/office/drawing/2014/main" id="{3B23F519-ACC1-43D2-8F0B-946DD38232FA}"/>
+                <a16:creationId xmlns:a16="http://schemas.microsoft.com/office/drawing/2014/main" id="{CA846238-02FA-44A9-934A-5CEA4833196F}"/>
               </a:ext>
             </a:extLst>
           </p:cNvPr>
@@ -8422,7 +8399,7 @@
           <p:cNvPr id="2" name="">
             <a:extLst xmlns:a="http://schemas.openxmlformats.org/drawingml/2006/main">
               <a:ext uri="{FF2B5EF4-FFF2-40B4-BE49-F238E27FC236}">
-                <a16:creationId xmlns:a16="http://schemas.microsoft.com/office/drawing/2014/main" id="{106E10CC-728C-411B-BC5F-572B55CC37B5}"/>
+                <a16:creationId xmlns:a16="http://schemas.microsoft.com/office/drawing/2014/main" id="{4E5966B3-44FF-44B9-B88E-F69424C1F0CA}"/>
               </a:ext>
             </a:extLst>
           </p:cNvPr>
@@ -8488,7 +8465,7 @@
           <p:cNvPr id="3" name="">
             <a:extLst xmlns:a="http://schemas.openxmlformats.org/drawingml/2006/main">
               <a:ext uri="{FF2B5EF4-FFF2-40B4-BE49-F238E27FC236}">
-                <a16:creationId xmlns:a16="http://schemas.microsoft.com/office/drawing/2014/main" id="{99338077-604D-42B7-9E0D-6F987AEA43CA}"/>
+                <a16:creationId xmlns:a16="http://schemas.microsoft.com/office/drawing/2014/main" id="{A73CFBFC-89AC-4E02-B594-DF5721A17A02}"/>
               </a:ext>
             </a:extLst>
           </p:cNvPr>
@@ -8498,7 +8475,7 @@
           <p:nvPr/>
         </p:nvPicPr>
         <p:blipFill>
-          <a:blip xmlns:r="http://schemas.openxmlformats.org/officeDocument/2006/relationships" xmlns:a="http://schemas.openxmlformats.org/drawingml/2006/main" r:embed="R4f829fcbc2d24b06"/>
+          <a:blip xmlns:r="http://schemas.openxmlformats.org/officeDocument/2006/relationships" xmlns:a="http://schemas.openxmlformats.org/drawingml/2006/main" r:embed="Rf4be8d3056bb43c8"/>
           <a:stretch xmlns:a="http://schemas.openxmlformats.org/drawingml/2006/main"/>
         </p:blipFill>
         <p:spPr>
@@ -8514,7 +8491,7 @@
     </p:spTree>
     <p:extLst>
       <p:ext uri="{BB962C8B-B14F-4D97-AF65-F5344CB8AC3E}">
-        <p14:creationId xmlns:p14="http://schemas.microsoft.com/office/powerpoint/2010/main" val="2060427448"/>
+        <p14:creationId xmlns:p14="http://schemas.microsoft.com/office/powerpoint/2010/main" val="1549362706"/>
       </p:ext>
     </p:extLst>
   </p:cSld>
@@ -8545,7 +8522,7 @@
           <p:cNvPr id="4" name="">
             <a:extLst xmlns:a="http://schemas.openxmlformats.org/drawingml/2006/main">
               <a:ext uri="{FF2B5EF4-FFF2-40B4-BE49-F238E27FC236}">
-                <a16:creationId xmlns:a16="http://schemas.microsoft.com/office/drawing/2014/main" id="{6C977ADC-BE43-4B7E-B91F-4931457DF50B}"/>
+                <a16:creationId xmlns:a16="http://schemas.microsoft.com/office/drawing/2014/main" id="{695579E5-5F21-468D-8B11-010C6EE0222F}"/>
               </a:ext>
             </a:extLst>
           </p:cNvPr>
@@ -8611,7 +8588,7 @@
           <p:cNvPr id="2" name="">
             <a:extLst xmlns:a="http://schemas.openxmlformats.org/drawingml/2006/main">
               <a:ext uri="{FF2B5EF4-FFF2-40B4-BE49-F238E27FC236}">
-                <a16:creationId xmlns:a16="http://schemas.microsoft.com/office/drawing/2014/main" id="{E8442D06-4BA9-4289-B898-C3E991E8094D}"/>
+                <a16:creationId xmlns:a16="http://schemas.microsoft.com/office/drawing/2014/main" id="{9DBD8525-DF91-4417-8D26-7DC150061606}"/>
               </a:ext>
             </a:extLst>
           </p:cNvPr>
@@ -8677,7 +8654,7 @@
           <p:cNvPr id="3" name="">
             <a:extLst xmlns:a="http://schemas.openxmlformats.org/drawingml/2006/main">
               <a:ext uri="{FF2B5EF4-FFF2-40B4-BE49-F238E27FC236}">
-                <a16:creationId xmlns:a16="http://schemas.microsoft.com/office/drawing/2014/main" id="{E682898A-1F12-4E71-B5AA-FA63500C9DE9}"/>
+                <a16:creationId xmlns:a16="http://schemas.microsoft.com/office/drawing/2014/main" id="{596BB8E3-1E82-4D93-8DF8-EFC26ADD66B6}"/>
               </a:ext>
             </a:extLst>
           </p:cNvPr>
@@ -8687,7 +8664,7 @@
           <p:nvPr/>
         </p:nvPicPr>
         <p:blipFill>
-          <a:blip xmlns:r="http://schemas.openxmlformats.org/officeDocument/2006/relationships" xmlns:a="http://schemas.openxmlformats.org/drawingml/2006/main" r:embed="R1284d3162df143bb"/>
+          <a:blip xmlns:r="http://schemas.openxmlformats.org/officeDocument/2006/relationships" xmlns:a="http://schemas.openxmlformats.org/drawingml/2006/main" r:embed="Rea0675274145406f"/>
           <a:stretch xmlns:a="http://schemas.openxmlformats.org/drawingml/2006/main"/>
         </p:blipFill>
         <p:spPr>
@@ -8703,7 +8680,7 @@
     </p:spTree>
     <p:extLst>
       <p:ext uri="{BB962C8B-B14F-4D97-AF65-F5344CB8AC3E}">
-        <p14:creationId xmlns:p14="http://schemas.microsoft.com/office/powerpoint/2010/main" val="1063482501"/>
+        <p14:creationId xmlns:p14="http://schemas.microsoft.com/office/powerpoint/2010/main" val="579562243"/>
       </p:ext>
     </p:extLst>
   </p:cSld>
@@ -8734,7 +8711,7 @@
           <p:cNvPr id="4" name="">
             <a:extLst xmlns:a="http://schemas.openxmlformats.org/drawingml/2006/main">
               <a:ext uri="{FF2B5EF4-FFF2-40B4-BE49-F238E27FC236}">
-                <a16:creationId xmlns:a16="http://schemas.microsoft.com/office/drawing/2014/main" id="{E2F626E5-D8CF-4B70-A3F1-9117133D5562}"/>
+                <a16:creationId xmlns:a16="http://schemas.microsoft.com/office/drawing/2014/main" id="{FEC4B659-2D22-40FE-B7BD-976D1A2A4251}"/>
               </a:ext>
             </a:extLst>
           </p:cNvPr>
@@ -8800,7 +8777,7 @@
           <p:cNvPr id="2" name="">
             <a:extLst xmlns:a="http://schemas.openxmlformats.org/drawingml/2006/main">
               <a:ext uri="{FF2B5EF4-FFF2-40B4-BE49-F238E27FC236}">
-                <a16:creationId xmlns:a16="http://schemas.microsoft.com/office/drawing/2014/main" id="{6C490842-3543-4CC2-A974-CB37AF1E37DF}"/>
+                <a16:creationId xmlns:a16="http://schemas.microsoft.com/office/drawing/2014/main" id="{1A65C9F7-5DE8-4093-A834-7B7C87267D42}"/>
               </a:ext>
             </a:extLst>
           </p:cNvPr>
@@ -8866,7 +8843,7 @@
           <p:cNvPr id="3" name="">
             <a:extLst xmlns:a="http://schemas.openxmlformats.org/drawingml/2006/main">
               <a:ext uri="{FF2B5EF4-FFF2-40B4-BE49-F238E27FC236}">
-                <a16:creationId xmlns:a16="http://schemas.microsoft.com/office/drawing/2014/main" id="{96B370E7-821B-488C-865C-816ACBB1C651}"/>
+                <a16:creationId xmlns:a16="http://schemas.microsoft.com/office/drawing/2014/main" id="{F5E9F3D8-74F1-4908-9C19-8A5B50707EF2}"/>
               </a:ext>
             </a:extLst>
           </p:cNvPr>
@@ -8876,7 +8853,7 @@
           <p:nvPr/>
         </p:nvPicPr>
         <p:blipFill>
-          <a:blip xmlns:r="http://schemas.openxmlformats.org/officeDocument/2006/relationships" xmlns:a="http://schemas.openxmlformats.org/drawingml/2006/main" r:embed="Rd39015293c2f46b7"/>
+          <a:blip xmlns:r="http://schemas.openxmlformats.org/officeDocument/2006/relationships" xmlns:a="http://schemas.openxmlformats.org/drawingml/2006/main" r:embed="Rb738d4e2f8314c9e"/>
           <a:stretch xmlns:a="http://schemas.openxmlformats.org/drawingml/2006/main"/>
         </p:blipFill>
         <p:spPr>
@@ -8892,7 +8869,7 @@
     </p:spTree>
     <p:extLst>
       <p:ext uri="{BB962C8B-B14F-4D97-AF65-F5344CB8AC3E}">
-        <p14:creationId xmlns:p14="http://schemas.microsoft.com/office/powerpoint/2010/main" val="1965633632"/>
+        <p14:creationId xmlns:p14="http://schemas.microsoft.com/office/powerpoint/2010/main" val="642832048"/>
       </p:ext>
     </p:extLst>
   </p:cSld>
@@ -8923,7 +8900,7 @@
           <p:cNvPr id="4" name="">
             <a:extLst xmlns:a="http://schemas.openxmlformats.org/drawingml/2006/main">
               <a:ext uri="{FF2B5EF4-FFF2-40B4-BE49-F238E27FC236}">
-                <a16:creationId xmlns:a16="http://schemas.microsoft.com/office/drawing/2014/main" id="{F97ECC5C-A8E6-4BB6-B761-789E9CE34FA4}"/>
+                <a16:creationId xmlns:a16="http://schemas.microsoft.com/office/drawing/2014/main" id="{E448EAD9-201C-4C83-A00A-A464B53E6D67}"/>
               </a:ext>
             </a:extLst>
           </p:cNvPr>
@@ -8989,7 +8966,7 @@
           <p:cNvPr id="2" name="">
             <a:extLst xmlns:a="http://schemas.openxmlformats.org/drawingml/2006/main">
               <a:ext uri="{FF2B5EF4-FFF2-40B4-BE49-F238E27FC236}">
-                <a16:creationId xmlns:a16="http://schemas.microsoft.com/office/drawing/2014/main" id="{7F8C87B4-9891-4C95-86F7-5C910748FDA6}"/>
+                <a16:creationId xmlns:a16="http://schemas.microsoft.com/office/drawing/2014/main" id="{81357DD9-05F4-484D-9EEB-A931FE15B3BB}"/>
               </a:ext>
             </a:extLst>
           </p:cNvPr>
@@ -9055,7 +9032,7 @@
           <p:cNvPr id="3" name="">
             <a:extLst xmlns:a="http://schemas.openxmlformats.org/drawingml/2006/main">
               <a:ext uri="{FF2B5EF4-FFF2-40B4-BE49-F238E27FC236}">
-                <a16:creationId xmlns:a16="http://schemas.microsoft.com/office/drawing/2014/main" id="{B8DDE488-402F-4C28-9223-05564650C59E}"/>
+                <a16:creationId xmlns:a16="http://schemas.microsoft.com/office/drawing/2014/main" id="{4F0B614A-3811-4FEB-A2DA-AAB71FFE6515}"/>
               </a:ext>
             </a:extLst>
           </p:cNvPr>
@@ -9065,7 +9042,7 @@
           <p:nvPr/>
         </p:nvPicPr>
         <p:blipFill>
-          <a:blip xmlns:r="http://schemas.openxmlformats.org/officeDocument/2006/relationships" xmlns:a="http://schemas.openxmlformats.org/drawingml/2006/main" r:embed="Re92afcfa1b0c4ee8"/>
+          <a:blip xmlns:r="http://schemas.openxmlformats.org/officeDocument/2006/relationships" xmlns:a="http://schemas.openxmlformats.org/drawingml/2006/main" r:embed="R5caaa120b1da4f32"/>
           <a:stretch xmlns:a="http://schemas.openxmlformats.org/drawingml/2006/main"/>
         </p:blipFill>
         <p:spPr>
@@ -9081,7 +9058,7 @@
     </p:spTree>
     <p:extLst>
       <p:ext uri="{BB962C8B-B14F-4D97-AF65-F5344CB8AC3E}">
-        <p14:creationId xmlns:p14="http://schemas.microsoft.com/office/powerpoint/2010/main" val="1901831797"/>
+        <p14:creationId xmlns:p14="http://schemas.microsoft.com/office/powerpoint/2010/main" val="1902113514"/>
       </p:ext>
     </p:extLst>
   </p:cSld>
@@ -9112,7 +9089,7 @@
           <p:cNvPr id="4" name="">
             <a:extLst xmlns:a="http://schemas.openxmlformats.org/drawingml/2006/main">
               <a:ext uri="{FF2B5EF4-FFF2-40B4-BE49-F238E27FC236}">
-                <a16:creationId xmlns:a16="http://schemas.microsoft.com/office/drawing/2014/main" id="{8D517A40-78E6-455D-B1E6-2A53C30354E5}"/>
+                <a16:creationId xmlns:a16="http://schemas.microsoft.com/office/drawing/2014/main" id="{37390D7D-9B4F-4668-86E1-895F91C5B30F}"/>
               </a:ext>
             </a:extLst>
           </p:cNvPr>
@@ -9178,7 +9155,7 @@
           <p:cNvPr id="2" name="">
             <a:extLst xmlns:a="http://schemas.openxmlformats.org/drawingml/2006/main">
               <a:ext uri="{FF2B5EF4-FFF2-40B4-BE49-F238E27FC236}">
-                <a16:creationId xmlns:a16="http://schemas.microsoft.com/office/drawing/2014/main" id="{FE489CDC-3085-472F-A489-5C373A7327F9}"/>
+                <a16:creationId xmlns:a16="http://schemas.microsoft.com/office/drawing/2014/main" id="{9E1215D9-D31C-4F2D-90A0-0CA45F887C49}"/>
               </a:ext>
             </a:extLst>
           </p:cNvPr>
@@ -9244,7 +9221,7 @@
           <p:cNvPr id="3" name="">
             <a:extLst xmlns:a="http://schemas.openxmlformats.org/drawingml/2006/main">
               <a:ext uri="{FF2B5EF4-FFF2-40B4-BE49-F238E27FC236}">
-                <a16:creationId xmlns:a16="http://schemas.microsoft.com/office/drawing/2014/main" id="{E9A658A7-E507-4F7E-8F98-EF54E271E663}"/>
+                <a16:creationId xmlns:a16="http://schemas.microsoft.com/office/drawing/2014/main" id="{00765441-7EFD-4E43-B128-572D0C83365C}"/>
               </a:ext>
             </a:extLst>
           </p:cNvPr>
@@ -9254,7 +9231,7 @@
           <p:nvPr/>
         </p:nvPicPr>
         <p:blipFill>
-          <a:blip xmlns:r="http://schemas.openxmlformats.org/officeDocument/2006/relationships" xmlns:a="http://schemas.openxmlformats.org/drawingml/2006/main" r:embed="R5c8c652bae904467"/>
+          <a:blip xmlns:r="http://schemas.openxmlformats.org/officeDocument/2006/relationships" xmlns:a="http://schemas.openxmlformats.org/drawingml/2006/main" r:embed="R175dfccffde949ec"/>
           <a:stretch xmlns:a="http://schemas.openxmlformats.org/drawingml/2006/main"/>
         </p:blipFill>
         <p:spPr>
@@ -9270,7 +9247,7 @@
     </p:spTree>
     <p:extLst>
       <p:ext uri="{BB962C8B-B14F-4D97-AF65-F5344CB8AC3E}">
-        <p14:creationId xmlns:p14="http://schemas.microsoft.com/office/powerpoint/2010/main" val="733498719"/>
+        <p14:creationId xmlns:p14="http://schemas.microsoft.com/office/powerpoint/2010/main" val="1547733013"/>
       </p:ext>
     </p:extLst>
   </p:cSld>
@@ -9301,7 +9278,7 @@
           <p:cNvPr id="5" name="">
             <a:extLst xmlns:a="http://schemas.openxmlformats.org/drawingml/2006/main">
               <a:ext uri="{FF2B5EF4-FFF2-40B4-BE49-F238E27FC236}">
-                <a16:creationId xmlns:a16="http://schemas.microsoft.com/office/drawing/2014/main" id="{28A65407-9A9A-4499-AD3C-FDBDAE6382F3}"/>
+                <a16:creationId xmlns:a16="http://schemas.microsoft.com/office/drawing/2014/main" id="{1F7E19A0-3425-463E-99C7-DE2F49183143}"/>
               </a:ext>
             </a:extLst>
           </p:cNvPr>
@@ -9367,7 +9344,7 @@
           <p:cNvPr id="2" name="">
             <a:extLst xmlns:a="http://schemas.openxmlformats.org/drawingml/2006/main">
               <a:ext uri="{FF2B5EF4-FFF2-40B4-BE49-F238E27FC236}">
-                <a16:creationId xmlns:a16="http://schemas.microsoft.com/office/drawing/2014/main" id="{98868D13-58F5-4677-86FC-355900E63A70}"/>
+                <a16:creationId xmlns:a16="http://schemas.microsoft.com/office/drawing/2014/main" id="{8009FFAC-B425-46E0-826C-58119D28B62F}"/>
               </a:ext>
             </a:extLst>
           </p:cNvPr>
@@ -9433,7 +9410,7 @@
           <p:cNvPr id="3" name="">
             <a:extLst xmlns:a="http://schemas.openxmlformats.org/drawingml/2006/main">
               <a:ext uri="{FF2B5EF4-FFF2-40B4-BE49-F238E27FC236}">
-                <a16:creationId xmlns:a16="http://schemas.microsoft.com/office/drawing/2014/main" id="{BFB1332F-6439-4C31-8D05-8FD0097790A7}"/>
+                <a16:creationId xmlns:a16="http://schemas.microsoft.com/office/drawing/2014/main" id="{2D6EBD2D-350E-45BB-AA0E-96B3ABB9AC63}"/>
               </a:ext>
             </a:extLst>
           </p:cNvPr>
@@ -9711,7 +9688,7 @@
           <p:cNvPr id="4" name="">
             <a:extLst xmlns:a="http://schemas.openxmlformats.org/drawingml/2006/main">
               <a:ext uri="{FF2B5EF4-FFF2-40B4-BE49-F238E27FC236}">
-                <a16:creationId xmlns:a16="http://schemas.microsoft.com/office/drawing/2014/main" id="{579F12F4-10D9-4B52-BB7C-566207FE7F7F}"/>
+                <a16:creationId xmlns:a16="http://schemas.microsoft.com/office/drawing/2014/main" id="{BCF79EAE-F9C7-4E11-B368-447C99428F2E}"/>
               </a:ext>
             </a:extLst>
           </p:cNvPr>
@@ -9775,7 +9752,7 @@
     </p:spTree>
     <p:extLst>
       <p:ext uri="{BB962C8B-B14F-4D97-AF65-F5344CB8AC3E}">
-        <p14:creationId xmlns:p14="http://schemas.microsoft.com/office/powerpoint/2010/main" val="323585427"/>
+        <p14:creationId xmlns:p14="http://schemas.microsoft.com/office/powerpoint/2010/main" val="1303080640"/>
       </p:ext>
     </p:extLst>
   </p:cSld>
@@ -9806,7 +9783,7 @@
           <p:cNvPr id="8" name="">
             <a:extLst xmlns:a="http://schemas.openxmlformats.org/drawingml/2006/main">
               <a:ext uri="{FF2B5EF4-FFF2-40B4-BE49-F238E27FC236}">
-                <a16:creationId xmlns:a16="http://schemas.microsoft.com/office/drawing/2014/main" id="{EF902AB2-1ED0-411E-AFC0-C521B2338209}"/>
+                <a16:creationId xmlns:a16="http://schemas.microsoft.com/office/drawing/2014/main" id="{0AB3978F-718F-48DE-9822-A7EFB59B882C}"/>
               </a:ext>
             </a:extLst>
           </p:cNvPr>
@@ -9872,7 +9849,7 @@
           <p:cNvPr id="2" name="">
             <a:extLst xmlns:a="http://schemas.openxmlformats.org/drawingml/2006/main">
               <a:ext uri="{FF2B5EF4-FFF2-40B4-BE49-F238E27FC236}">
-                <a16:creationId xmlns:a16="http://schemas.microsoft.com/office/drawing/2014/main" id="{A88F5FF6-8E77-4997-B638-851326EAAD6F}"/>
+                <a16:creationId xmlns:a16="http://schemas.microsoft.com/office/drawing/2014/main" id="{D6A6915B-10B2-4F2F-B3EC-F342DB6F87F3}"/>
               </a:ext>
             </a:extLst>
           </p:cNvPr>
@@ -9938,7 +9915,7 @@
           <p:cNvPr id="3" name="Chart">
             <a:extLst xmlns:a="http://schemas.openxmlformats.org/drawingml/2006/main">
               <a:ext uri="{FF2B5EF4-FFF2-40B4-BE49-F238E27FC236}">
-                <a16:creationId xmlns:a16="http://schemas.microsoft.com/office/drawing/2014/main" id="{B3304E44-B74F-4B0D-B577-9512D9F0B905}"/>
+                <a16:creationId xmlns:a16="http://schemas.microsoft.com/office/drawing/2014/main" id="{0E4F35ED-482B-438F-8643-98CE7E94DC7F}"/>
               </a:ext>
             </a:extLst>
           </p:cNvPr>
@@ -9951,7 +9928,7 @@
         </p:xfrm>
         <a:graphic xmlns:a="http://schemas.openxmlformats.org/drawingml/2006/main">
           <a:graphicData uri="http://schemas.openxmlformats.org/drawingml/2006/chart">
-            <c:chart xmlns:r="http://schemas.openxmlformats.org/officeDocument/2006/relationships" xmlns:c="http://schemas.openxmlformats.org/drawingml/2006/chart" r:id="R1b6134dcca054da0"/>
+            <c:chart xmlns:r="http://schemas.openxmlformats.org/officeDocument/2006/relationships" xmlns:c="http://schemas.openxmlformats.org/drawingml/2006/chart" r:id="R6cc0ac5a66294808"/>
           </a:graphicData>
         </a:graphic>
       </p:graphicFrame>
@@ -9960,7 +9937,7 @@
           <p:cNvPr id="4" name="">
             <a:extLst xmlns:a="http://schemas.openxmlformats.org/drawingml/2006/main">
               <a:ext uri="{FF2B5EF4-FFF2-40B4-BE49-F238E27FC236}">
-                <a16:creationId xmlns:a16="http://schemas.microsoft.com/office/drawing/2014/main" id="{49EC08B6-3E5B-4C37-A7DD-134549F9CC45}"/>
+                <a16:creationId xmlns:a16="http://schemas.microsoft.com/office/drawing/2014/main" id="{CEEF3F1C-5DF8-4C5B-A4E3-7ABC16DE1129}"/>
               </a:ext>
             </a:extLst>
           </p:cNvPr>
@@ -10026,7 +10003,7 @@
           <p:cNvPr id="5" name="">
             <a:extLst xmlns:a="http://schemas.openxmlformats.org/drawingml/2006/main">
               <a:ext uri="{FF2B5EF4-FFF2-40B4-BE49-F238E27FC236}">
-                <a16:creationId xmlns:a16="http://schemas.microsoft.com/office/drawing/2014/main" id="{DA8EDBC4-D19C-405A-8847-FFB3217405E1}"/>
+                <a16:creationId xmlns:a16="http://schemas.microsoft.com/office/drawing/2014/main" id="{2A48E8B5-D784-4523-8F0C-9EB3303C7782}"/>
               </a:ext>
             </a:extLst>
           </p:cNvPr>
@@ -10138,7 +10115,7 @@
           <p:cNvPr id="6" name="">
             <a:extLst xmlns:a="http://schemas.openxmlformats.org/drawingml/2006/main">
               <a:ext uri="{FF2B5EF4-FFF2-40B4-BE49-F238E27FC236}">
-                <a16:creationId xmlns:a16="http://schemas.microsoft.com/office/drawing/2014/main" id="{9776E638-2928-4583-AD52-AA0BEF400674}"/>
+                <a16:creationId xmlns:a16="http://schemas.microsoft.com/office/drawing/2014/main" id="{8AC8DF61-AFF6-45E3-80EA-8E7D97B45855}"/>
               </a:ext>
             </a:extLst>
           </p:cNvPr>
@@ -10227,7 +10204,7 @@
           <p:cNvPr id="7" name="">
             <a:extLst xmlns:a="http://schemas.openxmlformats.org/drawingml/2006/main">
               <a:ext uri="{FF2B5EF4-FFF2-40B4-BE49-F238E27FC236}">
-                <a16:creationId xmlns:a16="http://schemas.microsoft.com/office/drawing/2014/main" id="{9EB99D40-62AB-489B-A382-8601167081D4}"/>
+                <a16:creationId xmlns:a16="http://schemas.microsoft.com/office/drawing/2014/main" id="{AA5A2DF1-B71D-479A-A07F-DB683B5D0E74}"/>
               </a:ext>
             </a:extLst>
           </p:cNvPr>
@@ -10291,7 +10268,7 @@
     </p:spTree>
     <p:extLst>
       <p:ext uri="{BB962C8B-B14F-4D97-AF65-F5344CB8AC3E}">
-        <p14:creationId xmlns:p14="http://schemas.microsoft.com/office/powerpoint/2010/main" val="1891562127"/>
+        <p14:creationId xmlns:p14="http://schemas.microsoft.com/office/powerpoint/2010/main" val="1906100928"/>
       </p:ext>
     </p:extLst>
   </p:cSld>

--- a/submission/AlphaVault-Presentation.pptx
+++ b/submission/AlphaVault-Presentation.pptx
@@ -2,24 +2,24 @@
 <file path=ppt/presentation.xml><?xml version="1.0" encoding="utf-8"?>
 <p:presentation xmlns:p="http://schemas.openxmlformats.org/presentationml/2006/main">
   <p:sldMasterIdLst>
-    <p:sldMasterId xmlns:r="http://schemas.openxmlformats.org/officeDocument/2006/relationships" id="2147483648" r:id="R609d156055d64dfa"/>
+    <p:sldMasterId xmlns:r="http://schemas.openxmlformats.org/officeDocument/2006/relationships" id="2147483648" r:id="Rb06d292233c54260"/>
   </p:sldMasterIdLst>
   <p:notesMasterIdLst>
-    <p:notesMasterId xmlns:r="http://schemas.openxmlformats.org/officeDocument/2006/relationships" r:id="Rbbc84ff9878e439f"/>
+    <p:notesMasterId xmlns:r="http://schemas.openxmlformats.org/officeDocument/2006/relationships" r:id="Ra4237e2ebead4998"/>
   </p:notesMasterIdLst>
   <p:sldIdLst>
-    <p:sldId xmlns:r="http://schemas.openxmlformats.org/officeDocument/2006/relationships" id="256" r:id="Rc05baf8aadb8411f"/>
-    <p:sldId xmlns:r="http://schemas.openxmlformats.org/officeDocument/2006/relationships" id="257" r:id="R2f73189136e14807"/>
-    <p:sldId xmlns:r="http://schemas.openxmlformats.org/officeDocument/2006/relationships" id="258" r:id="R7947501dc2a14026"/>
-    <p:sldId xmlns:r="http://schemas.openxmlformats.org/officeDocument/2006/relationships" id="259" r:id="Rb618d6ebffc94973"/>
-    <p:sldId xmlns:r="http://schemas.openxmlformats.org/officeDocument/2006/relationships" id="260" r:id="R8e5bd2ae9fe04050"/>
-    <p:sldId xmlns:r="http://schemas.openxmlformats.org/officeDocument/2006/relationships" id="261" r:id="Rea04d83747764b83"/>
-    <p:sldId xmlns:r="http://schemas.openxmlformats.org/officeDocument/2006/relationships" id="262" r:id="R2f8d8c5304354e64"/>
-    <p:sldId xmlns:r="http://schemas.openxmlformats.org/officeDocument/2006/relationships" id="263" r:id="Rf5363a246863449b"/>
-    <p:sldId xmlns:r="http://schemas.openxmlformats.org/officeDocument/2006/relationships" id="264" r:id="R551a99692fa049bd"/>
-    <p:sldId xmlns:r="http://schemas.openxmlformats.org/officeDocument/2006/relationships" id="265" r:id="R006f49c2e5c44ee5"/>
-    <p:sldId xmlns:r="http://schemas.openxmlformats.org/officeDocument/2006/relationships" id="266" r:id="R23efde10454e4636"/>
-    <p:sldId xmlns:r="http://schemas.openxmlformats.org/officeDocument/2006/relationships" id="267" r:id="R74c4d260c744490f"/>
+    <p:sldId xmlns:r="http://schemas.openxmlformats.org/officeDocument/2006/relationships" id="256" r:id="R9f4665fa40904cc8"/>
+    <p:sldId xmlns:r="http://schemas.openxmlformats.org/officeDocument/2006/relationships" id="257" r:id="R107c7480f0e14575"/>
+    <p:sldId xmlns:r="http://schemas.openxmlformats.org/officeDocument/2006/relationships" id="258" r:id="Ra11349612cae46c0"/>
+    <p:sldId xmlns:r="http://schemas.openxmlformats.org/officeDocument/2006/relationships" id="259" r:id="R0d00ef4edebc4d1f"/>
+    <p:sldId xmlns:r="http://schemas.openxmlformats.org/officeDocument/2006/relationships" id="260" r:id="R5996762fffbb44dc"/>
+    <p:sldId xmlns:r="http://schemas.openxmlformats.org/officeDocument/2006/relationships" id="261" r:id="Rcfa5bd752dc64b82"/>
+    <p:sldId xmlns:r="http://schemas.openxmlformats.org/officeDocument/2006/relationships" id="262" r:id="Ra978bf66fc094c26"/>
+    <p:sldId xmlns:r="http://schemas.openxmlformats.org/officeDocument/2006/relationships" id="263" r:id="R64967178054d4c84"/>
+    <p:sldId xmlns:r="http://schemas.openxmlformats.org/officeDocument/2006/relationships" id="264" r:id="Rd5832a61807f4c63"/>
+    <p:sldId xmlns:r="http://schemas.openxmlformats.org/officeDocument/2006/relationships" id="265" r:id="Rbd9d6a8b5e7b43f3"/>
+    <p:sldId xmlns:r="http://schemas.openxmlformats.org/officeDocument/2006/relationships" id="266" r:id="R0725a49b6d224c7b"/>
+    <p:sldId xmlns:r="http://schemas.openxmlformats.org/officeDocument/2006/relationships" id="267" r:id="Ra26da29fde7c4e21"/>
   </p:sldIdLst>
   <p:sldSz cx="12192000" cy="6858000"/>
   <p:notesSz cx="6858000" cy="9144000"/>
@@ -169,9 +169,9 @@
 </file>
 
 <file path=ppt/notesMasters/theme/theme3.xml><?xml version="1.0" encoding="utf-8"?>
-<a:theme xmlns:a="http://schemas.openxmlformats.org/drawingml/2006/main" name="ChatGPT">
+<a:theme xmlns:a="http://schemas.openxmlformats.org/drawingml/2006/main" name="AlphaVault">
   <a:themeElements>
-    <a:clrScheme name="ChatGPT">
+    <a:clrScheme name="AlphaVault">
       <a:dk1>
         <a:srgbClr val="000000"/>
       </a:dk1>
@@ -221,7 +221,7 @@
         <a:cs typeface=""/>
       </a:minorFont>
     </a:fontScheme>
-    <a:fmtScheme name="ChatGPT">
+    <a:fmtScheme name="AlphaVault">
       <a:fillStyleLst>
         <a:solidFill>
           <a:schemeClr val="phClr"/>
@@ -453,7 +453,7 @@
           <a:lstStyle xmlns:a="http://schemas.openxmlformats.org/drawingml/2006/main"/>
           <a:p xmlns:a="http://schemas.openxmlformats.org/drawingml/2006/main">
             <a:r>
-              <a:t>0–20 seconds. Welcome to AlphaVault, a quantitative portfolio management and risk controlled rebalancing application by Du zhuotong. This ten minute demonstration explains the problem, system design, actual application workflow, and measured results. The project uses mock assets on a local chain and the Sepolia test network.</a:t>
+              <a:t>0–20 seconds. Welcome to AlphaVault, a quantitative portfolio management and risk controlled rebalancing application by Du Zhuotong. This ten minute demonstration explains the problem, system design, actual application workflow, and measured results. The project uses mock assets on a local chain and the Sepolia test network.</a:t>
             </a:r>
           </a:p>
           <a:p xmlns:a="http://schemas.openxmlformats.org/drawingml/2006/main">
@@ -528,7 +528,7 @@
           <a:lstStyle xmlns:a="http://schemas.openxmlformats.org/drawingml/2006/main"/>
           <a:p xmlns:a="http://schemas.openxmlformats.org/drawingml/2006/main">
             <a:r>
-              <a:t>478–528 seconds. The latest full automated run passes sixty four tests with zero failures. Tests cover contract permissions, accounting, rollback, price freshness, pause behavior, API preparation and persistence. A new public acceptance check also passes: the service is in wallet mode, uses PostgreSQL, points to the expected Sepolia vault, and exposes ten verified transaction types. The earlier restart experiment provides a stronger storage check than event replay alone. A non chain jobs record remained identical after the Render service restarted. Because that record is not reconstructed from blockchain events, its retention demonstrates persistence across that observed restart. This is a specific acceptance result, not an uptime guarantee. The free service can still sleep.</a:t>
+              <a:t>478–528 seconds. The Python Flask suite passes thirty six tests and the contract and legacy regression suite passes sixty four tests. Tests cover contract permissions, accounting, rollback, price freshness, pause behavior, API preparation and persistence. A new public acceptance check also passes: the service is in wallet mode, uses PostgreSQL, points to the expected Sepolia vault, and exposes ten verified transaction types. The earlier restart experiment provides a stronger storage check than event replay alone. A non chain jobs record remained identical after the Render service restarted. Because that record is not reconstructed from blockchain events, its retention demonstrates persistence across that observed restart. This is a specific acceptance result, not an uptime guarantee. The free service can still sleep.</a:t>
             </a:r>
           </a:p>
           <a:p xmlns:a="http://schemas.openxmlformats.org/drawingml/2006/main">
@@ -833,7 +833,7 @@
           </a:p>
           <a:p xmlns:a="http://schemas.openxmlformats.org/drawingml/2006/main">
             <a:r>
-              <a:t>Source: Technical report p. 3; contracts/ and server/.</a:t>
+              <a:t>Source: Technical report p. 3; contracts/ and backend/.</a:t>
             </a:r>
           </a:p>
         </p:txBody>
@@ -983,7 +983,7 @@
           </a:p>
           <a:p xmlns:a="http://schemas.openxmlformats.org/drawingml/2006/main">
             <a:r>
-              <a:t>Source: Technical report p. 7; server/store.mjs, postgres-store.mjs.</a:t>
+              <a:t>Source: Technical report p. 7; backend/store.mjs, postgres-store.mjs.</a:t>
             </a:r>
           </a:p>
         </p:txBody>
@@ -1058,7 +1058,7 @@
           </a:p>
           <a:p xmlns:a="http://schemas.openxmlformats.org/drawingml/2006/main">
             <a:r>
-              <a:t>Source: Technical report p. 8; public/app.js and server/actions.mjs.</a:t>
+              <a:t>Source: Technical report p. 8; public/app.js and backend/actions.mjs.</a:t>
             </a:r>
           </a:p>
         </p:txBody>
@@ -1330,7 +1330,7 @@
           <p:cNvPr id="3" name="Title">
             <a:extLst xmlns:a="http://schemas.openxmlformats.org/drawingml/2006/main">
               <a:ext uri="{FF2B5EF4-FFF2-40B4-BE49-F238E27FC236}">
-                <a16:creationId xmlns:a16="http://schemas.microsoft.com/office/drawing/2014/main" id="{B5E7D587-1C68-4D6A-981C-4964C81F2C2F}"/>
+                <a16:creationId xmlns:a16="http://schemas.microsoft.com/office/drawing/2014/main" id="{2A81F570-29F2-4AD7-A191-AE0F577F6FBB}"/>
               </a:ext>
             </a:extLst>
           </p:cNvPr>
@@ -1381,6 +1381,7 @@
                 <a:spcPts val="0"/>
               </a:spcAft>
               <a:buNone/>
+              <a:defRPr/>
             </a:lvl1pPr>
             <a:lvl2pPr marL="0" indent="0">
               <a:lnSpc>
@@ -1393,6 +1394,7 @@
                 <a:spcPts val="0"/>
               </a:spcAft>
               <a:buNone/>
+              <a:defRPr/>
             </a:lvl2pPr>
             <a:lvl3pPr marL="0" indent="0">
               <a:lnSpc>
@@ -1405,6 +1407,7 @@
                 <a:spcPts val="0"/>
               </a:spcAft>
               <a:buNone/>
+              <a:defRPr/>
             </a:lvl3pPr>
             <a:lvl4pPr marL="0" indent="0">
               <a:lnSpc>
@@ -1417,6 +1420,7 @@
                 <a:spcPts val="0"/>
               </a:spcAft>
               <a:buNone/>
+              <a:defRPr/>
             </a:lvl4pPr>
             <a:lvl5pPr marL="0" indent="0">
               <a:lnSpc>
@@ -1429,6 +1433,7 @@
                 <a:spcPts val="0"/>
               </a:spcAft>
               <a:buNone/>
+              <a:defRPr/>
             </a:lvl5pPr>
             <a:lvl6pPr marL="0" indent="0">
               <a:lnSpc>
@@ -1441,6 +1446,7 @@
                 <a:spcPts val="0"/>
               </a:spcAft>
               <a:buNone/>
+              <a:defRPr/>
             </a:lvl6pPr>
             <a:lvl7pPr marL="0" indent="0">
               <a:lnSpc>
@@ -1453,6 +1459,7 @@
                 <a:spcPts val="0"/>
               </a:spcAft>
               <a:buNone/>
+              <a:defRPr/>
             </a:lvl7pPr>
             <a:lvl8pPr marL="0" indent="0">
               <a:lnSpc>
@@ -1465,6 +1472,7 @@
                 <a:spcPts val="0"/>
               </a:spcAft>
               <a:buNone/>
+              <a:defRPr/>
             </a:lvl8pPr>
             <a:lvl9pPr marL="0" indent="0">
               <a:lnSpc>
@@ -1477,6 +1485,7 @@
                 <a:spcPts val="0"/>
               </a:spcAft>
               <a:buNone/>
+              <a:defRPr/>
             </a:lvl9pPr>
           </a:lstStyle>
           <a:p xmlns:a="http://schemas.openxmlformats.org/drawingml/2006/main"/>
@@ -1487,7 +1496,7 @@
           <p:cNvPr id="2" name="Subtitle">
             <a:extLst xmlns:a="http://schemas.openxmlformats.org/drawingml/2006/main">
               <a:ext uri="{FF2B5EF4-FFF2-40B4-BE49-F238E27FC236}">
-                <a16:creationId xmlns:a16="http://schemas.microsoft.com/office/drawing/2014/main" id="{251CF352-4A0C-4F24-B4E2-A6AE5EB12549}"/>
+                <a16:creationId xmlns:a16="http://schemas.microsoft.com/office/drawing/2014/main" id="{27F04BF9-F635-4754-8FF1-BE67E25C9D7E}"/>
               </a:ext>
             </a:extLst>
           </p:cNvPr>
@@ -1538,6 +1547,7 @@
                 <a:spcPts val="0"/>
               </a:spcAft>
               <a:buNone/>
+              <a:defRPr/>
             </a:lvl1pPr>
             <a:lvl2pPr marL="0" indent="0">
               <a:lnSpc>
@@ -1550,6 +1560,7 @@
                 <a:spcPts val="0"/>
               </a:spcAft>
               <a:buNone/>
+              <a:defRPr/>
             </a:lvl2pPr>
             <a:lvl3pPr marL="0" indent="0">
               <a:lnSpc>
@@ -1562,6 +1573,7 @@
                 <a:spcPts val="0"/>
               </a:spcAft>
               <a:buNone/>
+              <a:defRPr/>
             </a:lvl3pPr>
             <a:lvl4pPr marL="0" indent="0">
               <a:lnSpc>
@@ -1574,6 +1586,7 @@
                 <a:spcPts val="0"/>
               </a:spcAft>
               <a:buNone/>
+              <a:defRPr/>
             </a:lvl4pPr>
             <a:lvl5pPr marL="0" indent="0">
               <a:lnSpc>
@@ -1586,6 +1599,7 @@
                 <a:spcPts val="0"/>
               </a:spcAft>
               <a:buNone/>
+              <a:defRPr/>
             </a:lvl5pPr>
             <a:lvl6pPr marL="0" indent="0">
               <a:lnSpc>
@@ -1598,6 +1612,7 @@
                 <a:spcPts val="0"/>
               </a:spcAft>
               <a:buNone/>
+              <a:defRPr/>
             </a:lvl6pPr>
             <a:lvl7pPr marL="0" indent="0">
               <a:lnSpc>
@@ -1610,6 +1625,7 @@
                 <a:spcPts val="0"/>
               </a:spcAft>
               <a:buNone/>
+              <a:defRPr/>
             </a:lvl7pPr>
             <a:lvl8pPr marL="0" indent="0">
               <a:lnSpc>
@@ -1622,6 +1638,7 @@
                 <a:spcPts val="0"/>
               </a:spcAft>
               <a:buNone/>
+              <a:defRPr/>
             </a:lvl8pPr>
             <a:lvl9pPr marL="0" indent="0">
               <a:lnSpc>
@@ -1634,6 +1651,7 @@
                 <a:spcPts val="0"/>
               </a:spcAft>
               <a:buNone/>
+              <a:defRPr/>
             </a:lvl9pPr>
           </a:lstStyle>
           <a:p xmlns:a="http://schemas.openxmlformats.org/drawingml/2006/main"/>
@@ -1661,7 +1679,7 @@
           <p:cNvPr id="2" name="Section title">
             <a:extLst xmlns:a="http://schemas.openxmlformats.org/drawingml/2006/main">
               <a:ext uri="{FF2B5EF4-FFF2-40B4-BE49-F238E27FC236}">
-                <a16:creationId xmlns:a16="http://schemas.microsoft.com/office/drawing/2014/main" id="{88816E27-5A4D-4F3B-BC3E-4C1F924BDC48}"/>
+                <a16:creationId xmlns:a16="http://schemas.microsoft.com/office/drawing/2014/main" id="{4E7BC990-30E0-433C-BA37-FCE1C5A2BC5A}"/>
               </a:ext>
             </a:extLst>
           </p:cNvPr>
@@ -1712,6 +1730,7 @@
                 <a:spcPts val="0"/>
               </a:spcAft>
               <a:buNone/>
+              <a:defRPr/>
             </a:lvl1pPr>
             <a:lvl2pPr marL="0" indent="0">
               <a:lnSpc>
@@ -1724,6 +1743,7 @@
                 <a:spcPts val="0"/>
               </a:spcAft>
               <a:buNone/>
+              <a:defRPr/>
             </a:lvl2pPr>
             <a:lvl3pPr marL="0" indent="0">
               <a:lnSpc>
@@ -1736,6 +1756,7 @@
                 <a:spcPts val="0"/>
               </a:spcAft>
               <a:buNone/>
+              <a:defRPr/>
             </a:lvl3pPr>
             <a:lvl4pPr marL="0" indent="0">
               <a:lnSpc>
@@ -1748,6 +1769,7 @@
                 <a:spcPts val="0"/>
               </a:spcAft>
               <a:buNone/>
+              <a:defRPr/>
             </a:lvl4pPr>
             <a:lvl5pPr marL="0" indent="0">
               <a:lnSpc>
@@ -1760,6 +1782,7 @@
                 <a:spcPts val="0"/>
               </a:spcAft>
               <a:buNone/>
+              <a:defRPr/>
             </a:lvl5pPr>
             <a:lvl6pPr marL="0" indent="0">
               <a:lnSpc>
@@ -1772,6 +1795,7 @@
                 <a:spcPts val="0"/>
               </a:spcAft>
               <a:buNone/>
+              <a:defRPr/>
             </a:lvl6pPr>
             <a:lvl7pPr marL="0" indent="0">
               <a:lnSpc>
@@ -1784,6 +1808,7 @@
                 <a:spcPts val="0"/>
               </a:spcAft>
               <a:buNone/>
+              <a:defRPr/>
             </a:lvl7pPr>
             <a:lvl8pPr marL="0" indent="0">
               <a:lnSpc>
@@ -1796,6 +1821,7 @@
                 <a:spcPts val="0"/>
               </a:spcAft>
               <a:buNone/>
+              <a:defRPr/>
             </a:lvl8pPr>
             <a:lvl9pPr marL="0" indent="0">
               <a:lnSpc>
@@ -1808,6 +1834,7 @@
                 <a:spcPts val="0"/>
               </a:spcAft>
               <a:buNone/>
+              <a:defRPr/>
             </a:lvl9pPr>
           </a:lstStyle>
           <a:p xmlns:a="http://schemas.openxmlformats.org/drawingml/2006/main"/>
@@ -1835,7 +1862,7 @@
           <p:cNvPr id="3" name="Title">
             <a:extLst xmlns:a="http://schemas.openxmlformats.org/drawingml/2006/main">
               <a:ext uri="{FF2B5EF4-FFF2-40B4-BE49-F238E27FC236}">
-                <a16:creationId xmlns:a16="http://schemas.microsoft.com/office/drawing/2014/main" id="{3BE13B4F-217F-4592-9FD2-A9A1B23A053D}"/>
+                <a16:creationId xmlns:a16="http://schemas.microsoft.com/office/drawing/2014/main" id="{9BB3CE10-6678-48A2-BA84-9161FD956F05}"/>
               </a:ext>
             </a:extLst>
           </p:cNvPr>
@@ -1886,6 +1913,7 @@
                 <a:spcPts val="0"/>
               </a:spcAft>
               <a:buNone/>
+              <a:defRPr/>
             </a:lvl1pPr>
             <a:lvl2pPr marL="0" indent="0">
               <a:lnSpc>
@@ -1898,6 +1926,7 @@
                 <a:spcPts val="0"/>
               </a:spcAft>
               <a:buNone/>
+              <a:defRPr/>
             </a:lvl2pPr>
             <a:lvl3pPr marL="0" indent="0">
               <a:lnSpc>
@@ -1910,6 +1939,7 @@
                 <a:spcPts val="0"/>
               </a:spcAft>
               <a:buNone/>
+              <a:defRPr/>
             </a:lvl3pPr>
             <a:lvl4pPr marL="0" indent="0">
               <a:lnSpc>
@@ -1922,6 +1952,7 @@
                 <a:spcPts val="0"/>
               </a:spcAft>
               <a:buNone/>
+              <a:defRPr/>
             </a:lvl4pPr>
             <a:lvl5pPr marL="0" indent="0">
               <a:lnSpc>
@@ -1934,6 +1965,7 @@
                 <a:spcPts val="0"/>
               </a:spcAft>
               <a:buNone/>
+              <a:defRPr/>
             </a:lvl5pPr>
             <a:lvl6pPr marL="0" indent="0">
               <a:lnSpc>
@@ -1946,6 +1978,7 @@
                 <a:spcPts val="0"/>
               </a:spcAft>
               <a:buNone/>
+              <a:defRPr/>
             </a:lvl6pPr>
             <a:lvl7pPr marL="0" indent="0">
               <a:lnSpc>
@@ -1958,6 +1991,7 @@
                 <a:spcPts val="0"/>
               </a:spcAft>
               <a:buNone/>
+              <a:defRPr/>
             </a:lvl7pPr>
             <a:lvl8pPr marL="0" indent="0">
               <a:lnSpc>
@@ -1970,6 +2004,7 @@
                 <a:spcPts val="0"/>
               </a:spcAft>
               <a:buNone/>
+              <a:defRPr/>
             </a:lvl8pPr>
             <a:lvl9pPr marL="0" indent="0">
               <a:lnSpc>
@@ -1982,6 +2017,7 @@
                 <a:spcPts val="0"/>
               </a:spcAft>
               <a:buNone/>
+              <a:defRPr/>
             </a:lvl9pPr>
           </a:lstStyle>
           <a:p xmlns:a="http://schemas.openxmlformats.org/drawingml/2006/main"/>
@@ -1992,7 +2028,7 @@
           <p:cNvPr id="2" name="Body">
             <a:extLst xmlns:a="http://schemas.openxmlformats.org/drawingml/2006/main">
               <a:ext uri="{FF2B5EF4-FFF2-40B4-BE49-F238E27FC236}">
-                <a16:creationId xmlns:a16="http://schemas.microsoft.com/office/drawing/2014/main" id="{ABEB5F58-C70A-482F-A979-C1082DB6AB95}"/>
+                <a16:creationId xmlns:a16="http://schemas.microsoft.com/office/drawing/2014/main" id="{AC5B51E5-FED3-4DEF-B3FF-E8F6462D5405}"/>
               </a:ext>
             </a:extLst>
           </p:cNvPr>
@@ -2043,6 +2079,7 @@
                 <a:spcPts val="1200"/>
               </a:spcAft>
               <a:buChar char="•"/>
+              <a:defRPr/>
             </a:lvl1pPr>
             <a:lvl2pPr marL="533400" indent="-228600">
               <a:lnSpc>
@@ -2055,6 +2092,7 @@
                 <a:spcPts val="1200"/>
               </a:spcAft>
               <a:buChar char="•"/>
+              <a:defRPr/>
             </a:lvl2pPr>
             <a:lvl3pPr marL="838200" indent="-228600">
               <a:lnSpc>
@@ -2067,6 +2105,7 @@
                 <a:spcPts val="1200"/>
               </a:spcAft>
               <a:buChar char="•"/>
+              <a:defRPr/>
             </a:lvl3pPr>
             <a:lvl4pPr marL="1143000" indent="-228600">
               <a:lnSpc>
@@ -2079,6 +2118,7 @@
                 <a:spcPts val="1200"/>
               </a:spcAft>
               <a:buChar char="•"/>
+              <a:defRPr/>
             </a:lvl4pPr>
             <a:lvl5pPr marL="1447800" indent="-228600">
               <a:lnSpc>
@@ -2091,6 +2131,7 @@
                 <a:spcPts val="1200"/>
               </a:spcAft>
               <a:buChar char="•"/>
+              <a:defRPr/>
             </a:lvl5pPr>
             <a:lvl6pPr marL="1752600" indent="-228600">
               <a:lnSpc>
@@ -2103,6 +2144,7 @@
                 <a:spcPts val="1200"/>
               </a:spcAft>
               <a:buChar char="•"/>
+              <a:defRPr/>
             </a:lvl6pPr>
             <a:lvl7pPr marL="2057400" indent="-228600">
               <a:lnSpc>
@@ -2115,6 +2157,7 @@
                 <a:spcPts val="1200"/>
               </a:spcAft>
               <a:buChar char="•"/>
+              <a:defRPr/>
             </a:lvl7pPr>
             <a:lvl8pPr marL="2362200" indent="-228600">
               <a:lnSpc>
@@ -2127,6 +2170,7 @@
                 <a:spcPts val="1200"/>
               </a:spcAft>
               <a:buChar char="•"/>
+              <a:defRPr/>
             </a:lvl8pPr>
             <a:lvl9pPr marL="2667000" indent="-228600">
               <a:lnSpc>
@@ -2139,6 +2183,7 @@
                 <a:spcPts val="1200"/>
               </a:spcAft>
               <a:buChar char="•"/>
+              <a:defRPr/>
             </a:lvl9pPr>
           </a:lstStyle>
           <a:p xmlns:a="http://schemas.openxmlformats.org/drawingml/2006/main"/>
@@ -2166,7 +2211,7 @@
           <p:cNvPr id="4" name="Title">
             <a:extLst xmlns:a="http://schemas.openxmlformats.org/drawingml/2006/main">
               <a:ext uri="{FF2B5EF4-FFF2-40B4-BE49-F238E27FC236}">
-                <a16:creationId xmlns:a16="http://schemas.microsoft.com/office/drawing/2014/main" id="{A5AA1548-9770-4FA1-8538-B4C419EAEF58}"/>
+                <a16:creationId xmlns:a16="http://schemas.microsoft.com/office/drawing/2014/main" id="{9225786A-9E1B-4C84-9BAC-6BDB8E9155E4}"/>
               </a:ext>
             </a:extLst>
           </p:cNvPr>
@@ -2217,6 +2262,7 @@
                 <a:spcPts val="0"/>
               </a:spcAft>
               <a:buNone/>
+              <a:defRPr/>
             </a:lvl1pPr>
             <a:lvl2pPr marL="0" indent="0">
               <a:lnSpc>
@@ -2229,6 +2275,7 @@
                 <a:spcPts val="0"/>
               </a:spcAft>
               <a:buNone/>
+              <a:defRPr/>
             </a:lvl2pPr>
             <a:lvl3pPr marL="0" indent="0">
               <a:lnSpc>
@@ -2241,6 +2288,7 @@
                 <a:spcPts val="0"/>
               </a:spcAft>
               <a:buNone/>
+              <a:defRPr/>
             </a:lvl3pPr>
             <a:lvl4pPr marL="0" indent="0">
               <a:lnSpc>
@@ -2253,6 +2301,7 @@
                 <a:spcPts val="0"/>
               </a:spcAft>
               <a:buNone/>
+              <a:defRPr/>
             </a:lvl4pPr>
             <a:lvl5pPr marL="0" indent="0">
               <a:lnSpc>
@@ -2265,6 +2314,7 @@
                 <a:spcPts val="0"/>
               </a:spcAft>
               <a:buNone/>
+              <a:defRPr/>
             </a:lvl5pPr>
             <a:lvl6pPr marL="0" indent="0">
               <a:lnSpc>
@@ -2277,6 +2327,7 @@
                 <a:spcPts val="0"/>
               </a:spcAft>
               <a:buNone/>
+              <a:defRPr/>
             </a:lvl6pPr>
             <a:lvl7pPr marL="0" indent="0">
               <a:lnSpc>
@@ -2289,6 +2340,7 @@
                 <a:spcPts val="0"/>
               </a:spcAft>
               <a:buNone/>
+              <a:defRPr/>
             </a:lvl7pPr>
             <a:lvl8pPr marL="0" indent="0">
               <a:lnSpc>
@@ -2301,6 +2353,7 @@
                 <a:spcPts val="0"/>
               </a:spcAft>
               <a:buNone/>
+              <a:defRPr/>
             </a:lvl8pPr>
             <a:lvl9pPr marL="0" indent="0">
               <a:lnSpc>
@@ -2313,6 +2366,7 @@
                 <a:spcPts val="0"/>
               </a:spcAft>
               <a:buNone/>
+              <a:defRPr/>
             </a:lvl9pPr>
           </a:lstStyle>
           <a:p xmlns:a="http://schemas.openxmlformats.org/drawingml/2006/main"/>
@@ -2323,7 +2377,7 @@
           <p:cNvPr id="2" name="Left column">
             <a:extLst xmlns:a="http://schemas.openxmlformats.org/drawingml/2006/main">
               <a:ext uri="{FF2B5EF4-FFF2-40B4-BE49-F238E27FC236}">
-                <a16:creationId xmlns:a16="http://schemas.microsoft.com/office/drawing/2014/main" id="{B6820C06-C09B-43C4-BA64-1BFC11043113}"/>
+                <a16:creationId xmlns:a16="http://schemas.microsoft.com/office/drawing/2014/main" id="{3F6624D7-229A-4C46-9624-5AD1F1F50645}"/>
               </a:ext>
             </a:extLst>
           </p:cNvPr>
@@ -2374,6 +2428,7 @@
                 <a:spcPts val="1200"/>
               </a:spcAft>
               <a:buChar char="•"/>
+              <a:defRPr/>
             </a:lvl1pPr>
             <a:lvl2pPr marL="533400" indent="-228600">
               <a:lnSpc>
@@ -2386,6 +2441,7 @@
                 <a:spcPts val="1200"/>
               </a:spcAft>
               <a:buChar char="•"/>
+              <a:defRPr/>
             </a:lvl2pPr>
             <a:lvl3pPr marL="838200" indent="-228600">
               <a:lnSpc>
@@ -2398,6 +2454,7 @@
                 <a:spcPts val="1200"/>
               </a:spcAft>
               <a:buChar char="•"/>
+              <a:defRPr/>
             </a:lvl3pPr>
             <a:lvl4pPr marL="1143000" indent="-228600">
               <a:lnSpc>
@@ -2410,6 +2467,7 @@
                 <a:spcPts val="1200"/>
               </a:spcAft>
               <a:buChar char="•"/>
+              <a:defRPr/>
             </a:lvl4pPr>
             <a:lvl5pPr marL="1447800" indent="-228600">
               <a:lnSpc>
@@ -2422,6 +2480,7 @@
                 <a:spcPts val="1200"/>
               </a:spcAft>
               <a:buChar char="•"/>
+              <a:defRPr/>
             </a:lvl5pPr>
             <a:lvl6pPr marL="1752600" indent="-228600">
               <a:lnSpc>
@@ -2434,6 +2493,7 @@
                 <a:spcPts val="1200"/>
               </a:spcAft>
               <a:buChar char="•"/>
+              <a:defRPr/>
             </a:lvl6pPr>
             <a:lvl7pPr marL="2057400" indent="-228600">
               <a:lnSpc>
@@ -2446,6 +2506,7 @@
                 <a:spcPts val="1200"/>
               </a:spcAft>
               <a:buChar char="•"/>
+              <a:defRPr/>
             </a:lvl7pPr>
             <a:lvl8pPr marL="2362200" indent="-228600">
               <a:lnSpc>
@@ -2458,6 +2519,7 @@
                 <a:spcPts val="1200"/>
               </a:spcAft>
               <a:buChar char="•"/>
+              <a:defRPr/>
             </a:lvl8pPr>
             <a:lvl9pPr marL="2667000" indent="-228600">
               <a:lnSpc>
@@ -2470,6 +2532,7 @@
                 <a:spcPts val="1200"/>
               </a:spcAft>
               <a:buChar char="•"/>
+              <a:defRPr/>
             </a:lvl9pPr>
           </a:lstStyle>
           <a:p xmlns:a="http://schemas.openxmlformats.org/drawingml/2006/main"/>
@@ -2480,7 +2543,7 @@
           <p:cNvPr id="3" name="Right column">
             <a:extLst xmlns:a="http://schemas.openxmlformats.org/drawingml/2006/main">
               <a:ext uri="{FF2B5EF4-FFF2-40B4-BE49-F238E27FC236}">
-                <a16:creationId xmlns:a16="http://schemas.microsoft.com/office/drawing/2014/main" id="{75965FCD-895B-4B86-87C3-E479FB858832}"/>
+                <a16:creationId xmlns:a16="http://schemas.microsoft.com/office/drawing/2014/main" id="{ACA06F98-2843-4F39-852A-72C46F90F4EB}"/>
               </a:ext>
             </a:extLst>
           </p:cNvPr>
@@ -2531,6 +2594,7 @@
                 <a:spcPts val="1200"/>
               </a:spcAft>
               <a:buChar char="•"/>
+              <a:defRPr/>
             </a:lvl1pPr>
             <a:lvl2pPr marL="533400" indent="-228600">
               <a:lnSpc>
@@ -2543,6 +2607,7 @@
                 <a:spcPts val="1200"/>
               </a:spcAft>
               <a:buChar char="•"/>
+              <a:defRPr/>
             </a:lvl2pPr>
             <a:lvl3pPr marL="838200" indent="-228600">
               <a:lnSpc>
@@ -2555,6 +2620,7 @@
                 <a:spcPts val="1200"/>
               </a:spcAft>
               <a:buChar char="•"/>
+              <a:defRPr/>
             </a:lvl3pPr>
             <a:lvl4pPr marL="1143000" indent="-228600">
               <a:lnSpc>
@@ -2567,6 +2633,7 @@
                 <a:spcPts val="1200"/>
               </a:spcAft>
               <a:buChar char="•"/>
+              <a:defRPr/>
             </a:lvl4pPr>
             <a:lvl5pPr marL="1447800" indent="-228600">
               <a:lnSpc>
@@ -2579,6 +2646,7 @@
                 <a:spcPts val="1200"/>
               </a:spcAft>
               <a:buChar char="•"/>
+              <a:defRPr/>
             </a:lvl5pPr>
             <a:lvl6pPr marL="1752600" indent="-228600">
               <a:lnSpc>
@@ -2591,6 +2659,7 @@
                 <a:spcPts val="1200"/>
               </a:spcAft>
               <a:buChar char="•"/>
+              <a:defRPr/>
             </a:lvl6pPr>
             <a:lvl7pPr marL="2057400" indent="-228600">
               <a:lnSpc>
@@ -2603,6 +2672,7 @@
                 <a:spcPts val="1200"/>
               </a:spcAft>
               <a:buChar char="•"/>
+              <a:defRPr/>
             </a:lvl7pPr>
             <a:lvl8pPr marL="2362200" indent="-228600">
               <a:lnSpc>
@@ -2615,6 +2685,7 @@
                 <a:spcPts val="1200"/>
               </a:spcAft>
               <a:buChar char="•"/>
+              <a:defRPr/>
             </a:lvl8pPr>
             <a:lvl9pPr marL="2667000" indent="-228600">
               <a:lnSpc>
@@ -2627,6 +2698,7 @@
                 <a:spcPts val="1200"/>
               </a:spcAft>
               <a:buChar char="•"/>
+              <a:defRPr/>
             </a:lvl9pPr>
           </a:lstStyle>
           <a:p xmlns:a="http://schemas.openxmlformats.org/drawingml/2006/main"/>
@@ -2654,7 +2726,7 @@
           <p:cNvPr id="3" name="Title">
             <a:extLst xmlns:a="http://schemas.openxmlformats.org/drawingml/2006/main">
               <a:ext uri="{FF2B5EF4-FFF2-40B4-BE49-F238E27FC236}">
-                <a16:creationId xmlns:a16="http://schemas.microsoft.com/office/drawing/2014/main" id="{4B6EC008-8520-423A-BD53-6FBF79D02AAA}"/>
+                <a16:creationId xmlns:a16="http://schemas.microsoft.com/office/drawing/2014/main" id="{97543824-B102-4332-A8A4-2A11B4BFA07E}"/>
               </a:ext>
             </a:extLst>
           </p:cNvPr>
@@ -2705,6 +2777,7 @@
                 <a:spcPts val="0"/>
               </a:spcAft>
               <a:buNone/>
+              <a:defRPr/>
             </a:lvl1pPr>
             <a:lvl2pPr marL="0" indent="0">
               <a:lnSpc>
@@ -2717,6 +2790,7 @@
                 <a:spcPts val="0"/>
               </a:spcAft>
               <a:buNone/>
+              <a:defRPr/>
             </a:lvl2pPr>
             <a:lvl3pPr marL="0" indent="0">
               <a:lnSpc>
@@ -2729,6 +2803,7 @@
                 <a:spcPts val="0"/>
               </a:spcAft>
               <a:buNone/>
+              <a:defRPr/>
             </a:lvl3pPr>
             <a:lvl4pPr marL="0" indent="0">
               <a:lnSpc>
@@ -2741,6 +2816,7 @@
                 <a:spcPts val="0"/>
               </a:spcAft>
               <a:buNone/>
+              <a:defRPr/>
             </a:lvl4pPr>
             <a:lvl5pPr marL="0" indent="0">
               <a:lnSpc>
@@ -2753,6 +2829,7 @@
                 <a:spcPts val="0"/>
               </a:spcAft>
               <a:buNone/>
+              <a:defRPr/>
             </a:lvl5pPr>
             <a:lvl6pPr marL="0" indent="0">
               <a:lnSpc>
@@ -2765,6 +2842,7 @@
                 <a:spcPts val="0"/>
               </a:spcAft>
               <a:buNone/>
+              <a:defRPr/>
             </a:lvl6pPr>
             <a:lvl7pPr marL="0" indent="0">
               <a:lnSpc>
@@ -2777,6 +2855,7 @@
                 <a:spcPts val="0"/>
               </a:spcAft>
               <a:buNone/>
+              <a:defRPr/>
             </a:lvl7pPr>
             <a:lvl8pPr marL="0" indent="0">
               <a:lnSpc>
@@ -2789,6 +2868,7 @@
                 <a:spcPts val="0"/>
               </a:spcAft>
               <a:buNone/>
+              <a:defRPr/>
             </a:lvl8pPr>
             <a:lvl9pPr marL="0" indent="0">
               <a:lnSpc>
@@ -2801,6 +2881,7 @@
                 <a:spcPts val="0"/>
               </a:spcAft>
               <a:buNone/>
+              <a:defRPr/>
             </a:lvl9pPr>
           </a:lstStyle>
           <a:p xmlns:a="http://schemas.openxmlformats.org/drawingml/2006/main"/>
@@ -2811,7 +2892,7 @@
           <p:cNvPr id="2" name="Left column">
             <a:extLst xmlns:a="http://schemas.openxmlformats.org/drawingml/2006/main">
               <a:ext uri="{FF2B5EF4-FFF2-40B4-BE49-F238E27FC236}">
-                <a16:creationId xmlns:a16="http://schemas.microsoft.com/office/drawing/2014/main" id="{018AAA3E-DC5A-4D1C-BE01-FA6777DE1438}"/>
+                <a16:creationId xmlns:a16="http://schemas.microsoft.com/office/drawing/2014/main" id="{D21578B8-C63C-420A-B973-011D580C8E7C}"/>
               </a:ext>
             </a:extLst>
           </p:cNvPr>
@@ -2862,6 +2943,7 @@
                 <a:spcPts val="1200"/>
               </a:spcAft>
               <a:buChar char="•"/>
+              <a:defRPr/>
             </a:lvl1pPr>
             <a:lvl2pPr marL="533400" indent="-228600">
               <a:lnSpc>
@@ -2874,6 +2956,7 @@
                 <a:spcPts val="1200"/>
               </a:spcAft>
               <a:buChar char="•"/>
+              <a:defRPr/>
             </a:lvl2pPr>
             <a:lvl3pPr marL="838200" indent="-228600">
               <a:lnSpc>
@@ -2886,6 +2969,7 @@
                 <a:spcPts val="1200"/>
               </a:spcAft>
               <a:buChar char="•"/>
+              <a:defRPr/>
             </a:lvl3pPr>
             <a:lvl4pPr marL="1143000" indent="-228600">
               <a:lnSpc>
@@ -2898,6 +2982,7 @@
                 <a:spcPts val="1200"/>
               </a:spcAft>
               <a:buChar char="•"/>
+              <a:defRPr/>
             </a:lvl4pPr>
             <a:lvl5pPr marL="1447800" indent="-228600">
               <a:lnSpc>
@@ -2910,6 +2995,7 @@
                 <a:spcPts val="1200"/>
               </a:spcAft>
               <a:buChar char="•"/>
+              <a:defRPr/>
             </a:lvl5pPr>
             <a:lvl6pPr marL="1752600" indent="-228600">
               <a:lnSpc>
@@ -2922,6 +3008,7 @@
                 <a:spcPts val="1200"/>
               </a:spcAft>
               <a:buChar char="•"/>
+              <a:defRPr/>
             </a:lvl6pPr>
             <a:lvl7pPr marL="2057400" indent="-228600">
               <a:lnSpc>
@@ -2934,6 +3021,7 @@
                 <a:spcPts val="1200"/>
               </a:spcAft>
               <a:buChar char="•"/>
+              <a:defRPr/>
             </a:lvl7pPr>
             <a:lvl8pPr marL="2362200" indent="-228600">
               <a:lnSpc>
@@ -2946,6 +3034,7 @@
                 <a:spcPts val="1200"/>
               </a:spcAft>
               <a:buChar char="•"/>
+              <a:defRPr/>
             </a:lvl8pPr>
             <a:lvl9pPr marL="2667000" indent="-228600">
               <a:lnSpc>
@@ -2958,6 +3047,7 @@
                 <a:spcPts val="1200"/>
               </a:spcAft>
               <a:buChar char="•"/>
+              <a:defRPr/>
             </a:lvl9pPr>
           </a:lstStyle>
           <a:p xmlns:a="http://schemas.openxmlformats.org/drawingml/2006/main"/>
@@ -3006,12 +3096,12 @@
   </p:cSld>
   <p:clrMap bg1="lt1" tx1="dk1" bg2="lt2" tx2="dk2" accent1="accent1" accent2="accent2" accent3="accent3" accent4="accent4" accent5="accent5" accent6="accent6" hlink="hlink" folHlink="folHlink"/>
   <p:sldLayoutIdLst>
-    <p:sldLayoutId xmlns:r="http://schemas.openxmlformats.org/officeDocument/2006/relationships" id="2147483649" r:id="R574a24bf91354821"/>
-    <p:sldLayoutId xmlns:r="http://schemas.openxmlformats.org/officeDocument/2006/relationships" id="2147483650" r:id="R9e29d66b16834e1a"/>
-    <p:sldLayoutId xmlns:r="http://schemas.openxmlformats.org/officeDocument/2006/relationships" id="2147483651" r:id="Rb7f5fa4cb24f439a"/>
-    <p:sldLayoutId xmlns:r="http://schemas.openxmlformats.org/officeDocument/2006/relationships" id="2147483652" r:id="R48f32a2f06674395"/>
-    <p:sldLayoutId xmlns:r="http://schemas.openxmlformats.org/officeDocument/2006/relationships" id="2147483653" r:id="Rd83ed97b59fd4521"/>
-    <p:sldLayoutId xmlns:r="http://schemas.openxmlformats.org/officeDocument/2006/relationships" id="2147483654" r:id="R9a921f819d034631"/>
+    <p:sldLayoutId xmlns:r="http://schemas.openxmlformats.org/officeDocument/2006/relationships" id="2147483649" r:id="R097c93bbbeec433d"/>
+    <p:sldLayoutId xmlns:r="http://schemas.openxmlformats.org/officeDocument/2006/relationships" id="2147483650" r:id="Rc493137d6e6e492f"/>
+    <p:sldLayoutId xmlns:r="http://schemas.openxmlformats.org/officeDocument/2006/relationships" id="2147483651" r:id="Rab77c39b35d44316"/>
+    <p:sldLayoutId xmlns:r="http://schemas.openxmlformats.org/officeDocument/2006/relationships" id="2147483652" r:id="R26542f41e1e2449d"/>
+    <p:sldLayoutId xmlns:r="http://schemas.openxmlformats.org/officeDocument/2006/relationships" id="2147483653" r:id="Rfd0dd7112dbc446a"/>
+    <p:sldLayoutId xmlns:r="http://schemas.openxmlformats.org/officeDocument/2006/relationships" id="2147483654" r:id="Rcec98640960f45b2"/>
   </p:sldLayoutIdLst>
   <p:txStyles>
     <p:titleStyle>
@@ -3294,9 +3384,9 @@
 </file>
 
 <file path=ppt/slideMasters/theme/theme2.xml><?xml version="1.0" encoding="utf-8"?>
-<a:theme xmlns:a="http://schemas.openxmlformats.org/drawingml/2006/main" name="ChatGPT">
+<a:theme xmlns:a="http://schemas.openxmlformats.org/drawingml/2006/main" name="AlphaVault">
   <a:themeElements>
-    <a:clrScheme name="ChatGPT">
+    <a:clrScheme name="AlphaVault">
       <a:dk1>
         <a:srgbClr val="000000"/>
       </a:dk1>
@@ -3346,7 +3436,7 @@
         <a:cs typeface=""/>
       </a:minorFont>
     </a:fontScheme>
-    <a:fmtScheme name="ChatGPT">
+    <a:fmtScheme name="AlphaVault">
       <a:fillStyleLst>
         <a:solidFill>
           <a:schemeClr val="phClr"/>
@@ -5771,7 +5861,7 @@
           <p:cNvPr id="6" name="">
             <a:extLst xmlns:a="http://schemas.openxmlformats.org/drawingml/2006/main">
               <a:ext uri="{FF2B5EF4-FFF2-40B4-BE49-F238E27FC236}">
-                <a16:creationId xmlns:a16="http://schemas.microsoft.com/office/drawing/2014/main" id="{FA07DF03-45C4-4D56-8004-4107CD4B7288}"/>
+                <a16:creationId xmlns:a16="http://schemas.microsoft.com/office/drawing/2014/main" id="{33480117-C91C-4DBB-916E-FE86581F9FEE}"/>
               </a:ext>
             </a:extLst>
           </p:cNvPr>
@@ -5809,6 +5899,7 @@
           </a:lstStyle>
           <a:p xmlns:a="http://schemas.openxmlformats.org/drawingml/2006/main">
             <a:pPr>
+              <a:buNone/>
               <a:defRPr sz="3150" b="1">
                 <a:solidFill>
                   <a:srgbClr val="173F50"/>
@@ -5837,7 +5928,7 @@
           <p:cNvPr id="2" name="">
             <a:extLst xmlns:a="http://schemas.openxmlformats.org/drawingml/2006/main">
               <a:ext uri="{FF2B5EF4-FFF2-40B4-BE49-F238E27FC236}">
-                <a16:creationId xmlns:a16="http://schemas.microsoft.com/office/drawing/2014/main" id="{58337263-B639-4CBA-A558-44CBB3B398B4}"/>
+                <a16:creationId xmlns:a16="http://schemas.microsoft.com/office/drawing/2014/main" id="{87FFB964-690B-4D40-B39C-A0139A5C4E96}"/>
               </a:ext>
             </a:extLst>
           </p:cNvPr>
@@ -5875,6 +5966,7 @@
           </a:lstStyle>
           <a:p xmlns:a="http://schemas.openxmlformats.org/drawingml/2006/main">
             <a:pPr>
+              <a:buNone/>
               <a:defRPr sz="1275" b="0">
                 <a:solidFill>
                   <a:srgbClr val="173F50"/>
@@ -5893,7 +5985,7 @@
                 <a:ea typeface="Arial"/>
                 <a:cs typeface="Arial"/>
               </a:rPr>
-              <a:t>AlphaVault  /  Du zhuotong  /  1 of 12</a:t>
+              <a:t>1 of 12</a:t>
             </a:r>
           </a:p>
         </p:txBody>
@@ -5903,7 +5995,7 @@
           <p:cNvPr id="3" name="">
             <a:extLst xmlns:a="http://schemas.openxmlformats.org/drawingml/2006/main">
               <a:ext uri="{FF2B5EF4-FFF2-40B4-BE49-F238E27FC236}">
-                <a16:creationId xmlns:a16="http://schemas.microsoft.com/office/drawing/2014/main" id="{01E2B7B0-F77C-45F3-B1B4-E470F452EDFC}"/>
+                <a16:creationId xmlns:a16="http://schemas.microsoft.com/office/drawing/2014/main" id="{3348060B-DF21-4BA2-9778-7E9FD1C633B7}"/>
               </a:ext>
             </a:extLst>
           </p:cNvPr>
@@ -5941,6 +6033,7 @@
           </a:lstStyle>
           <a:p xmlns:a="http://schemas.openxmlformats.org/drawingml/2006/main">
             <a:pPr>
+              <a:buNone/>
               <a:defRPr sz="4125" b="1">
                 <a:solidFill>
                   <a:srgbClr val="173F50"/>
@@ -5964,6 +6057,7 @@
           </a:p>
           <a:p xmlns:a="http://schemas.openxmlformats.org/drawingml/2006/main">
             <a:pPr>
+              <a:buNone/>
               <a:defRPr sz="4125" b="1">
                 <a:solidFill>
                   <a:srgbClr val="173F50"/>
@@ -5992,7 +6086,7 @@
           <p:cNvPr id="4" name="">
             <a:extLst xmlns:a="http://schemas.openxmlformats.org/drawingml/2006/main">
               <a:ext uri="{FF2B5EF4-FFF2-40B4-BE49-F238E27FC236}">
-                <a16:creationId xmlns:a16="http://schemas.microsoft.com/office/drawing/2014/main" id="{2AEBD797-55AB-4B2F-BF97-5D4E1EDDA80B}"/>
+                <a16:creationId xmlns:a16="http://schemas.microsoft.com/office/drawing/2014/main" id="{6060064A-58E9-4BEA-ACD6-AE8EAFE49FDD}"/>
               </a:ext>
             </a:extLst>
           </p:cNvPr>
@@ -6030,6 +6124,7 @@
           </a:lstStyle>
           <a:p xmlns:a="http://schemas.openxmlformats.org/drawingml/2006/main">
             <a:pPr>
+              <a:buNone/>
               <a:defRPr sz="2400" b="0">
                 <a:solidFill>
                   <a:srgbClr val="173F50"/>
@@ -6058,7 +6153,7 @@
           <p:cNvPr id="5" name="">
             <a:extLst xmlns:a="http://schemas.openxmlformats.org/drawingml/2006/main">
               <a:ext uri="{FF2B5EF4-FFF2-40B4-BE49-F238E27FC236}">
-                <a16:creationId xmlns:a16="http://schemas.microsoft.com/office/drawing/2014/main" id="{9CA01499-12F1-484C-B9CD-4A8E9E211D44}"/>
+                <a16:creationId xmlns:a16="http://schemas.microsoft.com/office/drawing/2014/main" id="{6BE71989-7980-435F-B39E-FB7CB9A98F66}"/>
               </a:ext>
             </a:extLst>
           </p:cNvPr>
@@ -6096,6 +6191,7 @@
           </a:lstStyle>
           <a:p xmlns:a="http://schemas.openxmlformats.org/drawingml/2006/main">
             <a:pPr>
+              <a:buNone/>
               <a:defRPr sz="2100" b="0">
                 <a:solidFill>
                   <a:srgbClr val="173F50"/>
@@ -6114,7 +6210,7 @@
                 <a:ea typeface="Arial"/>
                 <a:cs typeface="Arial"/>
               </a:rPr>
-              <a:t>Du zhuotong  |  SC6113</a:t>
+              <a:t>Du Zhuotong  |  SC6113</a:t>
             </a:r>
           </a:p>
         </p:txBody>
@@ -6122,7 +6218,7 @@
     </p:spTree>
     <p:extLst>
       <p:ext uri="{BB962C8B-B14F-4D97-AF65-F5344CB8AC3E}">
-        <p14:creationId xmlns:p14="http://schemas.microsoft.com/office/powerpoint/2010/main" val="716744108"/>
+        <p14:creationId xmlns:p14="http://schemas.microsoft.com/office/powerpoint/2010/main" val="55216392"/>
       </p:ext>
     </p:extLst>
   </p:cSld>
@@ -6153,7 +6249,7 @@
           <p:cNvPr id="4" name="">
             <a:extLst xmlns:a="http://schemas.openxmlformats.org/drawingml/2006/main">
               <a:ext uri="{FF2B5EF4-FFF2-40B4-BE49-F238E27FC236}">
-                <a16:creationId xmlns:a16="http://schemas.microsoft.com/office/drawing/2014/main" id="{376662A6-48E4-4251-9329-E576257AB1F5}"/>
+                <a16:creationId xmlns:a16="http://schemas.microsoft.com/office/drawing/2014/main" id="{743D0E54-53EA-4FAF-A58C-C1E918F90467}"/>
               </a:ext>
             </a:extLst>
           </p:cNvPr>
@@ -6191,6 +6287,7 @@
           </a:lstStyle>
           <a:p xmlns:a="http://schemas.openxmlformats.org/drawingml/2006/main">
             <a:pPr>
+              <a:buNone/>
               <a:defRPr sz="3150" b="1">
                 <a:solidFill>
                   <a:srgbClr val="173F50"/>
@@ -6219,7 +6316,7 @@
           <p:cNvPr id="2" name="">
             <a:extLst xmlns:a="http://schemas.openxmlformats.org/drawingml/2006/main">
               <a:ext uri="{FF2B5EF4-FFF2-40B4-BE49-F238E27FC236}">
-                <a16:creationId xmlns:a16="http://schemas.microsoft.com/office/drawing/2014/main" id="{365367DA-8A36-4598-A965-7ACCA2F7C12B}"/>
+                <a16:creationId xmlns:a16="http://schemas.microsoft.com/office/drawing/2014/main" id="{E28CCDEF-76E0-47F5-83C3-E1688A31EFFA}"/>
               </a:ext>
             </a:extLst>
           </p:cNvPr>
@@ -6257,6 +6354,7 @@
           </a:lstStyle>
           <a:p xmlns:a="http://schemas.openxmlformats.org/drawingml/2006/main">
             <a:pPr>
+              <a:buNone/>
               <a:defRPr sz="1275" b="0">
                 <a:solidFill>
                   <a:srgbClr val="173F50"/>
@@ -6275,7 +6373,7 @@
                 <a:ea typeface="Arial"/>
                 <a:cs typeface="Arial"/>
               </a:rPr>
-              <a:t>AlphaVault  /  Du zhuotong  /  10 of 12</a:t>
+              <a:t>10 of 12</a:t>
             </a:r>
           </a:p>
         </p:txBody>
@@ -6285,7 +6383,7 @@
           <p:cNvPr id="3" name="">
             <a:extLst xmlns:a="http://schemas.openxmlformats.org/drawingml/2006/main">
               <a:ext uri="{FF2B5EF4-FFF2-40B4-BE49-F238E27FC236}">
-                <a16:creationId xmlns:a16="http://schemas.microsoft.com/office/drawing/2014/main" id="{5D4F5C1E-1CA8-4D4B-9E70-B65E2E11E7E6}"/>
+                <a16:creationId xmlns:a16="http://schemas.microsoft.com/office/drawing/2014/main" id="{4F473174-18D3-4CAE-9DE9-0DD2F905AC03}"/>
               </a:ext>
             </a:extLst>
           </p:cNvPr>
@@ -6369,7 +6467,7 @@
                           <a:ea typeface="Arial"/>
                           <a:cs typeface="Arial"/>
                         </a:rPr>
-                        <a:t>Latest full suite</a:t>
+                        <a:t>Automated suites</a:t>
                       </a:r>
                     </a:p>
                   </a:txBody>
@@ -6393,7 +6491,7 @@
                           <a:ea typeface="Arial"/>
                           <a:cs typeface="Arial"/>
                         </a:rPr>
-                        <a:t>64 passed / 0 failed</a:t>
+                        <a:t>36 Flask + 64 regression tests passed</a:t>
                       </a:r>
                     </a:p>
                   </a:txBody>
@@ -6443,7 +6541,7 @@
                           <a:ea typeface="Arial"/>
                           <a:cs typeface="Arial"/>
                         </a:rPr>
-                        <a:t>Wallet mode / PostgreSQL / expected Sepolia vault</a:t>
+                        <a:t>Flask / PostgreSQL / expected Sepolia vault</a:t>
                       </a:r>
                     </a:p>
                   </a:txBody>
@@ -6611,7 +6709,7 @@
     </p:spTree>
     <p:extLst>
       <p:ext uri="{BB962C8B-B14F-4D97-AF65-F5344CB8AC3E}">
-        <p14:creationId xmlns:p14="http://schemas.microsoft.com/office/powerpoint/2010/main" val="2118534275"/>
+        <p14:creationId xmlns:p14="http://schemas.microsoft.com/office/powerpoint/2010/main" val="695340833"/>
       </p:ext>
     </p:extLst>
   </p:cSld>
@@ -6642,7 +6740,7 @@
           <p:cNvPr id="5" name="">
             <a:extLst xmlns:a="http://schemas.openxmlformats.org/drawingml/2006/main">
               <a:ext uri="{FF2B5EF4-FFF2-40B4-BE49-F238E27FC236}">
-                <a16:creationId xmlns:a16="http://schemas.microsoft.com/office/drawing/2014/main" id="{13AB003C-960C-416F-9EB4-3DD1E8B42CBB}"/>
+                <a16:creationId xmlns:a16="http://schemas.microsoft.com/office/drawing/2014/main" id="{1B719456-BD19-4EA3-89FC-0681F076F706}"/>
               </a:ext>
             </a:extLst>
           </p:cNvPr>
@@ -6680,6 +6778,7 @@
           </a:lstStyle>
           <a:p xmlns:a="http://schemas.openxmlformats.org/drawingml/2006/main">
             <a:pPr>
+              <a:buNone/>
               <a:defRPr sz="3150" b="1">
                 <a:solidFill>
                   <a:srgbClr val="173F50"/>
@@ -6708,7 +6807,7 @@
           <p:cNvPr id="2" name="">
             <a:extLst xmlns:a="http://schemas.openxmlformats.org/drawingml/2006/main">
               <a:ext uri="{FF2B5EF4-FFF2-40B4-BE49-F238E27FC236}">
-                <a16:creationId xmlns:a16="http://schemas.microsoft.com/office/drawing/2014/main" id="{AB747BF9-A620-4E7A-96CB-A6D9EEDF92C8}"/>
+                <a16:creationId xmlns:a16="http://schemas.microsoft.com/office/drawing/2014/main" id="{26FEF94F-4948-48E3-B57D-B3D6C109F074}"/>
               </a:ext>
             </a:extLst>
           </p:cNvPr>
@@ -6746,6 +6845,7 @@
           </a:lstStyle>
           <a:p xmlns:a="http://schemas.openxmlformats.org/drawingml/2006/main">
             <a:pPr>
+              <a:buNone/>
               <a:defRPr sz="1275" b="0">
                 <a:solidFill>
                   <a:srgbClr val="173F50"/>
@@ -6764,7 +6864,7 @@
                 <a:ea typeface="Arial"/>
                 <a:cs typeface="Arial"/>
               </a:rPr>
-              <a:t>AlphaVault  /  Du zhuotong  /  11 of 12</a:t>
+              <a:t>11 of 12</a:t>
             </a:r>
           </a:p>
         </p:txBody>
@@ -6774,7 +6874,7 @@
           <p:cNvPr id="3" name="">
             <a:extLst xmlns:a="http://schemas.openxmlformats.org/drawingml/2006/main">
               <a:ext uri="{FF2B5EF4-FFF2-40B4-BE49-F238E27FC236}">
-                <a16:creationId xmlns:a16="http://schemas.microsoft.com/office/drawing/2014/main" id="{1430A4ED-BD32-410C-B5A8-D843ACAE2A44}"/>
+                <a16:creationId xmlns:a16="http://schemas.microsoft.com/office/drawing/2014/main" id="{5EAFF6F4-E782-41B1-A259-C9A40957B359}"/>
               </a:ext>
             </a:extLst>
           </p:cNvPr>
@@ -7052,7 +7152,7 @@
           <p:cNvPr id="4" name="">
             <a:extLst xmlns:a="http://schemas.openxmlformats.org/drawingml/2006/main">
               <a:ext uri="{FF2B5EF4-FFF2-40B4-BE49-F238E27FC236}">
-                <a16:creationId xmlns:a16="http://schemas.microsoft.com/office/drawing/2014/main" id="{FAD78490-9152-4A4D-8A11-5E26A4AEB88D}"/>
+                <a16:creationId xmlns:a16="http://schemas.microsoft.com/office/drawing/2014/main" id="{9B5E686B-25A1-4339-B6EB-BBADD10BAD10}"/>
               </a:ext>
             </a:extLst>
           </p:cNvPr>
@@ -7090,6 +7190,7 @@
           </a:lstStyle>
           <a:p xmlns:a="http://schemas.openxmlformats.org/drawingml/2006/main">
             <a:pPr>
+              <a:buNone/>
               <a:defRPr sz="2100" b="0">
                 <a:solidFill>
                   <a:srgbClr val="173F50"/>
@@ -7116,7 +7217,7 @@
     </p:spTree>
     <p:extLst>
       <p:ext uri="{BB962C8B-B14F-4D97-AF65-F5344CB8AC3E}">
-        <p14:creationId xmlns:p14="http://schemas.microsoft.com/office/powerpoint/2010/main" val="2118817506"/>
+        <p14:creationId xmlns:p14="http://schemas.microsoft.com/office/powerpoint/2010/main" val="931790703"/>
       </p:ext>
     </p:extLst>
   </p:cSld>
@@ -7147,7 +7248,7 @@
           <p:cNvPr id="7" name="">
             <a:extLst xmlns:a="http://schemas.openxmlformats.org/drawingml/2006/main">
               <a:ext uri="{FF2B5EF4-FFF2-40B4-BE49-F238E27FC236}">
-                <a16:creationId xmlns:a16="http://schemas.microsoft.com/office/drawing/2014/main" id="{1FF62769-75A3-447B-BFA9-D97F5FB18D6E}"/>
+                <a16:creationId xmlns:a16="http://schemas.microsoft.com/office/drawing/2014/main" id="{27222899-5060-4CE3-8322-AA16D9B41B38}"/>
               </a:ext>
             </a:extLst>
           </p:cNvPr>
@@ -7185,6 +7286,7 @@
           </a:lstStyle>
           <a:p xmlns:a="http://schemas.openxmlformats.org/drawingml/2006/main">
             <a:pPr>
+              <a:buNone/>
               <a:defRPr sz="3150" b="1">
                 <a:solidFill>
                   <a:srgbClr val="173F50"/>
@@ -7213,7 +7315,7 @@
           <p:cNvPr id="2" name="">
             <a:extLst xmlns:a="http://schemas.openxmlformats.org/drawingml/2006/main">
               <a:ext uri="{FF2B5EF4-FFF2-40B4-BE49-F238E27FC236}">
-                <a16:creationId xmlns:a16="http://schemas.microsoft.com/office/drawing/2014/main" id="{159BF2E5-5C8C-484F-AFE7-E8BA3DABA9BA}"/>
+                <a16:creationId xmlns:a16="http://schemas.microsoft.com/office/drawing/2014/main" id="{B2202D99-C77C-40A9-8D49-FE912C2FDF38}"/>
               </a:ext>
             </a:extLst>
           </p:cNvPr>
@@ -7251,6 +7353,7 @@
           </a:lstStyle>
           <a:p xmlns:a="http://schemas.openxmlformats.org/drawingml/2006/main">
             <a:pPr>
+              <a:buNone/>
               <a:defRPr sz="1275" b="0">
                 <a:solidFill>
                   <a:srgbClr val="173F50"/>
@@ -7269,7 +7372,7 @@
                 <a:ea typeface="Arial"/>
                 <a:cs typeface="Arial"/>
               </a:rPr>
-              <a:t>AlphaVault  /  Du zhuotong  /  12 of 12</a:t>
+              <a:t>12 of 12</a:t>
             </a:r>
           </a:p>
         </p:txBody>
@@ -7279,7 +7382,7 @@
           <p:cNvPr id="3" name="">
             <a:extLst xmlns:a="http://schemas.openxmlformats.org/drawingml/2006/main">
               <a:ext uri="{FF2B5EF4-FFF2-40B4-BE49-F238E27FC236}">
-                <a16:creationId xmlns:a16="http://schemas.microsoft.com/office/drawing/2014/main" id="{6CFFBAA9-90EE-4393-9EFA-F446A6312245}"/>
+                <a16:creationId xmlns:a16="http://schemas.microsoft.com/office/drawing/2014/main" id="{E6A988CA-BF81-45C4-A0F4-914513217E5B}"/>
               </a:ext>
             </a:extLst>
           </p:cNvPr>
@@ -7317,6 +7420,7 @@
           </a:lstStyle>
           <a:p xmlns:a="http://schemas.openxmlformats.org/drawingml/2006/main">
             <a:pPr>
+              <a:buNone/>
               <a:defRPr sz="2400" b="1">
                 <a:solidFill>
                   <a:srgbClr val="173F50"/>
@@ -7345,7 +7449,7 @@
           <p:cNvPr id="4" name="">
             <a:extLst xmlns:a="http://schemas.openxmlformats.org/drawingml/2006/main">
               <a:ext uri="{FF2B5EF4-FFF2-40B4-BE49-F238E27FC236}">
-                <a16:creationId xmlns:a16="http://schemas.microsoft.com/office/drawing/2014/main" id="{929C84EE-E440-4BD3-AAC3-85270F61AA92}"/>
+                <a16:creationId xmlns:a16="http://schemas.microsoft.com/office/drawing/2014/main" id="{2AC7799D-F7DF-4E5E-AB0C-C1DF51F08048}"/>
               </a:ext>
             </a:extLst>
           </p:cNvPr>
@@ -7383,6 +7487,7 @@
           </a:lstStyle>
           <a:p xmlns:a="http://schemas.openxmlformats.org/drawingml/2006/main">
             <a:pPr>
+              <a:buNone/>
               <a:defRPr sz="2175" b="0">
                 <a:solidFill>
                   <a:srgbClr val="173F50"/>
@@ -7406,6 +7511,7 @@
           </a:p>
           <a:p xmlns:a="http://schemas.openxmlformats.org/drawingml/2006/main">
             <a:pPr>
+              <a:buNone/>
               <a:defRPr sz="2175" b="0">
                 <a:solidFill>
                   <a:srgbClr val="173F50"/>
@@ -7429,6 +7535,7 @@
           </a:p>
           <a:p xmlns:a="http://schemas.openxmlformats.org/drawingml/2006/main">
             <a:pPr>
+              <a:buNone/>
               <a:defRPr sz="2175" b="0">
                 <a:solidFill>
                   <a:srgbClr val="173F50"/>
@@ -7447,7 +7554,7 @@
                 <a:ea typeface="Arial"/>
                 <a:cs typeface="Arial"/>
               </a:rPr>
-              <a:t>Source, tests, deployment evidence and ten-minute video</a:t>
+              <a:t>Solidity, ABI, Flask, HTML/CSS/JS, tests and video</a:t>
             </a:r>
           </a:p>
         </p:txBody>
@@ -7457,7 +7564,7 @@
           <p:cNvPr id="5" name="">
             <a:extLst xmlns:a="http://schemas.openxmlformats.org/drawingml/2006/main">
               <a:ext uri="{FF2B5EF4-FFF2-40B4-BE49-F238E27FC236}">
-                <a16:creationId xmlns:a16="http://schemas.microsoft.com/office/drawing/2014/main" id="{86D3133E-D3AC-4B70-B35D-B8B2CBFFBEB2}"/>
+                <a16:creationId xmlns:a16="http://schemas.microsoft.com/office/drawing/2014/main" id="{29895771-2DE0-4503-A405-0F2F9C219112}"/>
               </a:ext>
             </a:extLst>
           </p:cNvPr>
@@ -7495,6 +7602,7 @@
           </a:lstStyle>
           <a:p xmlns:a="http://schemas.openxmlformats.org/drawingml/2006/main">
             <a:pPr>
+              <a:buNone/>
               <a:defRPr sz="2175" b="0">
                 <a:solidFill>
                   <a:srgbClr val="173F50"/>
@@ -7518,6 +7626,7 @@
           </a:p>
           <a:p xmlns:a="http://schemas.openxmlformats.org/drawingml/2006/main">
             <a:pPr>
+              <a:buNone/>
               <a:defRPr sz="2175" b="0">
                 <a:solidFill>
                   <a:srgbClr val="173F50"/>
@@ -7546,7 +7655,7 @@
           <p:cNvPr id="6" name="">
             <a:extLst xmlns:a="http://schemas.openxmlformats.org/drawingml/2006/main">
               <a:ext uri="{FF2B5EF4-FFF2-40B4-BE49-F238E27FC236}">
-                <a16:creationId xmlns:a16="http://schemas.microsoft.com/office/drawing/2014/main" id="{3306AEB2-1F10-4225-832B-69B0A8382F7A}"/>
+                <a16:creationId xmlns:a16="http://schemas.microsoft.com/office/drawing/2014/main" id="{55A630EF-6151-4442-B91D-D87A8F2E82C9}"/>
               </a:ext>
             </a:extLst>
           </p:cNvPr>
@@ -7584,6 +7693,7 @@
           </a:lstStyle>
           <a:p xmlns:a="http://schemas.openxmlformats.org/drawingml/2006/main">
             <a:pPr>
+              <a:buNone/>
               <a:defRPr sz="1800" b="0">
                 <a:solidFill>
                   <a:srgbClr val="173F50"/>
@@ -7610,7 +7720,7 @@
     </p:spTree>
     <p:extLst>
       <p:ext uri="{BB962C8B-B14F-4D97-AF65-F5344CB8AC3E}">
-        <p14:creationId xmlns:p14="http://schemas.microsoft.com/office/powerpoint/2010/main" val="2109374202"/>
+        <p14:creationId xmlns:p14="http://schemas.microsoft.com/office/powerpoint/2010/main" val="509706240"/>
       </p:ext>
     </p:extLst>
   </p:cSld>
@@ -7641,7 +7751,7 @@
           <p:cNvPr id="6" name="">
             <a:extLst xmlns:a="http://schemas.openxmlformats.org/drawingml/2006/main">
               <a:ext uri="{FF2B5EF4-FFF2-40B4-BE49-F238E27FC236}">
-                <a16:creationId xmlns:a16="http://schemas.microsoft.com/office/drawing/2014/main" id="{B607A217-EF57-4F81-A82E-0C7A8E40BB0F}"/>
+                <a16:creationId xmlns:a16="http://schemas.microsoft.com/office/drawing/2014/main" id="{57B40992-59B9-46D9-ADDF-9FC8F64F733A}"/>
               </a:ext>
             </a:extLst>
           </p:cNvPr>
@@ -7679,6 +7789,7 @@
           </a:lstStyle>
           <a:p xmlns:a="http://schemas.openxmlformats.org/drawingml/2006/main">
             <a:pPr>
+              <a:buNone/>
               <a:defRPr sz="3150" b="1">
                 <a:solidFill>
                   <a:srgbClr val="173F50"/>
@@ -7707,7 +7818,7 @@
           <p:cNvPr id="2" name="">
             <a:extLst xmlns:a="http://schemas.openxmlformats.org/drawingml/2006/main">
               <a:ext uri="{FF2B5EF4-FFF2-40B4-BE49-F238E27FC236}">
-                <a16:creationId xmlns:a16="http://schemas.microsoft.com/office/drawing/2014/main" id="{7A5B61CC-EC38-4969-BF3E-B9ED74DBD1D6}"/>
+                <a16:creationId xmlns:a16="http://schemas.microsoft.com/office/drawing/2014/main" id="{EA60B86A-EEFD-4EC0-8BB0-907C2F99BB5C}"/>
               </a:ext>
             </a:extLst>
           </p:cNvPr>
@@ -7745,6 +7856,7 @@
           </a:lstStyle>
           <a:p xmlns:a="http://schemas.openxmlformats.org/drawingml/2006/main">
             <a:pPr>
+              <a:buNone/>
               <a:defRPr sz="1275" b="0">
                 <a:solidFill>
                   <a:srgbClr val="173F50"/>
@@ -7763,7 +7875,7 @@
                 <a:ea typeface="Arial"/>
                 <a:cs typeface="Arial"/>
               </a:rPr>
-              <a:t>AlphaVault  /  Du zhuotong  /  2 of 12</a:t>
+              <a:t>2 of 12</a:t>
             </a:r>
           </a:p>
         </p:txBody>
@@ -7773,7 +7885,7 @@
           <p:cNvPr id="3" name="">
             <a:extLst xmlns:a="http://schemas.openxmlformats.org/drawingml/2006/main">
               <a:ext uri="{FF2B5EF4-FFF2-40B4-BE49-F238E27FC236}">
-                <a16:creationId xmlns:a16="http://schemas.microsoft.com/office/drawing/2014/main" id="{2D54F241-BB2A-4A12-BC9E-D58F480EFE9F}"/>
+                <a16:creationId xmlns:a16="http://schemas.microsoft.com/office/drawing/2014/main" id="{763D697C-59F4-4E3F-BF3C-27680B0F2882}"/>
               </a:ext>
             </a:extLst>
           </p:cNvPr>
@@ -7811,6 +7923,7 @@
           </a:lstStyle>
           <a:p xmlns:a="http://schemas.openxmlformats.org/drawingml/2006/main">
             <a:pPr>
+              <a:buNone/>
               <a:defRPr sz="2325" b="0">
                 <a:solidFill>
                   <a:srgbClr val="173F50"/>
@@ -7839,7 +7952,7 @@
           <p:cNvPr id="4" name="">
             <a:extLst xmlns:a="http://schemas.openxmlformats.org/drawingml/2006/main">
               <a:ext uri="{FF2B5EF4-FFF2-40B4-BE49-F238E27FC236}">
-                <a16:creationId xmlns:a16="http://schemas.microsoft.com/office/drawing/2014/main" id="{F89E3A2B-5D58-420D-8A44-9C81017C9354}"/>
+                <a16:creationId xmlns:a16="http://schemas.microsoft.com/office/drawing/2014/main" id="{3780FF50-52CB-4E5F-AF4B-6EDAA8A61C6C}"/>
               </a:ext>
             </a:extLst>
           </p:cNvPr>
@@ -8238,7 +8351,7 @@
           <p:cNvPr id="5" name="">
             <a:extLst xmlns:a="http://schemas.openxmlformats.org/drawingml/2006/main">
               <a:ext uri="{FF2B5EF4-FFF2-40B4-BE49-F238E27FC236}">
-                <a16:creationId xmlns:a16="http://schemas.microsoft.com/office/drawing/2014/main" id="{A61A8D73-7E10-4915-BF97-74623B960D6F}"/>
+                <a16:creationId xmlns:a16="http://schemas.microsoft.com/office/drawing/2014/main" id="{4A16E31D-A9EC-4D1A-BC72-C895C8C00F36}"/>
               </a:ext>
             </a:extLst>
           </p:cNvPr>
@@ -8276,6 +8389,7 @@
           </a:lstStyle>
           <a:p xmlns:a="http://schemas.openxmlformats.org/drawingml/2006/main">
             <a:pPr>
+              <a:buNone/>
               <a:defRPr sz="1875" b="0">
                 <a:solidFill>
                   <a:srgbClr val="173F50"/>
@@ -8302,7 +8416,7 @@
     </p:spTree>
     <p:extLst>
       <p:ext uri="{BB962C8B-B14F-4D97-AF65-F5344CB8AC3E}">
-        <p14:creationId xmlns:p14="http://schemas.microsoft.com/office/powerpoint/2010/main" val="2133195321"/>
+        <p14:creationId xmlns:p14="http://schemas.microsoft.com/office/powerpoint/2010/main" val="275932110"/>
       </p:ext>
     </p:extLst>
   </p:cSld>
@@ -8333,7 +8447,7 @@
           <p:cNvPr id="4" name="">
             <a:extLst xmlns:a="http://schemas.openxmlformats.org/drawingml/2006/main">
               <a:ext uri="{FF2B5EF4-FFF2-40B4-BE49-F238E27FC236}">
-                <a16:creationId xmlns:a16="http://schemas.microsoft.com/office/drawing/2014/main" id="{CA846238-02FA-44A9-934A-5CEA4833196F}"/>
+                <a16:creationId xmlns:a16="http://schemas.microsoft.com/office/drawing/2014/main" id="{B448848D-A159-410D-B1F9-75BB062CC9EB}"/>
               </a:ext>
             </a:extLst>
           </p:cNvPr>
@@ -8371,6 +8485,7 @@
           </a:lstStyle>
           <a:p xmlns:a="http://schemas.openxmlformats.org/drawingml/2006/main">
             <a:pPr>
+              <a:buNone/>
               <a:defRPr sz="3150" b="1">
                 <a:solidFill>
                   <a:srgbClr val="173F50"/>
@@ -8399,7 +8514,7 @@
           <p:cNvPr id="2" name="">
             <a:extLst xmlns:a="http://schemas.openxmlformats.org/drawingml/2006/main">
               <a:ext uri="{FF2B5EF4-FFF2-40B4-BE49-F238E27FC236}">
-                <a16:creationId xmlns:a16="http://schemas.microsoft.com/office/drawing/2014/main" id="{4E5966B3-44FF-44B9-B88E-F69424C1F0CA}"/>
+                <a16:creationId xmlns:a16="http://schemas.microsoft.com/office/drawing/2014/main" id="{3238731A-C398-4348-9384-19C55F60A4A5}"/>
               </a:ext>
             </a:extLst>
           </p:cNvPr>
@@ -8437,6 +8552,7 @@
           </a:lstStyle>
           <a:p xmlns:a="http://schemas.openxmlformats.org/drawingml/2006/main">
             <a:pPr>
+              <a:buNone/>
               <a:defRPr sz="1275" b="0">
                 <a:solidFill>
                   <a:srgbClr val="173F50"/>
@@ -8455,7 +8571,7 @@
                 <a:ea typeface="Arial"/>
                 <a:cs typeface="Arial"/>
               </a:rPr>
-              <a:t>AlphaVault  /  Du zhuotong  /  3 of 12</a:t>
+              <a:t>3 of 12</a:t>
             </a:r>
           </a:p>
         </p:txBody>
@@ -8465,7 +8581,7 @@
           <p:cNvPr id="3" name="">
             <a:extLst xmlns:a="http://schemas.openxmlformats.org/drawingml/2006/main">
               <a:ext uri="{FF2B5EF4-FFF2-40B4-BE49-F238E27FC236}">
-                <a16:creationId xmlns:a16="http://schemas.microsoft.com/office/drawing/2014/main" id="{A73CFBFC-89AC-4E02-B594-DF5721A17A02}"/>
+                <a16:creationId xmlns:a16="http://schemas.microsoft.com/office/drawing/2014/main" id="{1B581599-CFDB-4AA4-B320-13B3D28C06DE}"/>
               </a:ext>
             </a:extLst>
           </p:cNvPr>
@@ -8475,8 +8591,11 @@
           <p:nvPr/>
         </p:nvPicPr>
         <p:blipFill>
-          <a:blip xmlns:r="http://schemas.openxmlformats.org/officeDocument/2006/relationships" xmlns:a="http://schemas.openxmlformats.org/drawingml/2006/main" r:embed="Rf4be8d3056bb43c8"/>
-          <a:stretch xmlns:a="http://schemas.openxmlformats.org/drawingml/2006/main"/>
+          <a:blip xmlns:r="http://schemas.openxmlformats.org/officeDocument/2006/relationships" xmlns:a="http://schemas.openxmlformats.org/drawingml/2006/main" r:embed="R6fda511d996740ba"/>
+          <a:srcRect xmlns:a="http://schemas.openxmlformats.org/drawingml/2006/main" l="0" t="0" r="0" b="0"/>
+          <a:stretch xmlns:a="http://schemas.openxmlformats.org/drawingml/2006/main">
+            <a:fillRect l="0" t="0" r="0" b="0"/>
+          </a:stretch>
         </p:blipFill>
         <p:spPr>
           <a:xfrm xmlns:a="http://schemas.openxmlformats.org/drawingml/2006/main">
@@ -8491,7 +8610,7 @@
     </p:spTree>
     <p:extLst>
       <p:ext uri="{BB962C8B-B14F-4D97-AF65-F5344CB8AC3E}">
-        <p14:creationId xmlns:p14="http://schemas.microsoft.com/office/powerpoint/2010/main" val="1549362706"/>
+        <p14:creationId xmlns:p14="http://schemas.microsoft.com/office/powerpoint/2010/main" val="1437699212"/>
       </p:ext>
     </p:extLst>
   </p:cSld>
@@ -8522,7 +8641,7 @@
           <p:cNvPr id="4" name="">
             <a:extLst xmlns:a="http://schemas.openxmlformats.org/drawingml/2006/main">
               <a:ext uri="{FF2B5EF4-FFF2-40B4-BE49-F238E27FC236}">
-                <a16:creationId xmlns:a16="http://schemas.microsoft.com/office/drawing/2014/main" id="{695579E5-5F21-468D-8B11-010C6EE0222F}"/>
+                <a16:creationId xmlns:a16="http://schemas.microsoft.com/office/drawing/2014/main" id="{9CA53284-8CEE-4F06-8D47-E41BB5054802}"/>
               </a:ext>
             </a:extLst>
           </p:cNvPr>
@@ -8560,6 +8679,7 @@
           </a:lstStyle>
           <a:p xmlns:a="http://schemas.openxmlformats.org/drawingml/2006/main">
             <a:pPr>
+              <a:buNone/>
               <a:defRPr sz="3150" b="1">
                 <a:solidFill>
                   <a:srgbClr val="173F50"/>
@@ -8588,7 +8708,7 @@
           <p:cNvPr id="2" name="">
             <a:extLst xmlns:a="http://schemas.openxmlformats.org/drawingml/2006/main">
               <a:ext uri="{FF2B5EF4-FFF2-40B4-BE49-F238E27FC236}">
-                <a16:creationId xmlns:a16="http://schemas.microsoft.com/office/drawing/2014/main" id="{9DBD8525-DF91-4417-8D26-7DC150061606}"/>
+                <a16:creationId xmlns:a16="http://schemas.microsoft.com/office/drawing/2014/main" id="{77594C66-1116-4308-8D14-1A47AC41D4A3}"/>
               </a:ext>
             </a:extLst>
           </p:cNvPr>
@@ -8626,6 +8746,7 @@
           </a:lstStyle>
           <a:p xmlns:a="http://schemas.openxmlformats.org/drawingml/2006/main">
             <a:pPr>
+              <a:buNone/>
               <a:defRPr sz="1275" b="0">
                 <a:solidFill>
                   <a:srgbClr val="173F50"/>
@@ -8644,7 +8765,7 @@
                 <a:ea typeface="Arial"/>
                 <a:cs typeface="Arial"/>
               </a:rPr>
-              <a:t>AlphaVault  /  Du zhuotong  /  4 of 12</a:t>
+              <a:t>4 of 12</a:t>
             </a:r>
           </a:p>
         </p:txBody>
@@ -8654,7 +8775,7 @@
           <p:cNvPr id="3" name="">
             <a:extLst xmlns:a="http://schemas.openxmlformats.org/drawingml/2006/main">
               <a:ext uri="{FF2B5EF4-FFF2-40B4-BE49-F238E27FC236}">
-                <a16:creationId xmlns:a16="http://schemas.microsoft.com/office/drawing/2014/main" id="{596BB8E3-1E82-4D93-8DF8-EFC26ADD66B6}"/>
+                <a16:creationId xmlns:a16="http://schemas.microsoft.com/office/drawing/2014/main" id="{2B03C54E-E263-4C91-A9A6-A4A766598F1E}"/>
               </a:ext>
             </a:extLst>
           </p:cNvPr>
@@ -8664,7 +8785,7 @@
           <p:nvPr/>
         </p:nvPicPr>
         <p:blipFill>
-          <a:blip xmlns:r="http://schemas.openxmlformats.org/officeDocument/2006/relationships" xmlns:a="http://schemas.openxmlformats.org/drawingml/2006/main" r:embed="Rea0675274145406f"/>
+          <a:blip xmlns:r="http://schemas.openxmlformats.org/officeDocument/2006/relationships" xmlns:a="http://schemas.openxmlformats.org/drawingml/2006/main" r:embed="R770a21d2c3e84f53"/>
           <a:stretch xmlns:a="http://schemas.openxmlformats.org/drawingml/2006/main"/>
         </p:blipFill>
         <p:spPr>
@@ -8680,7 +8801,7 @@
     </p:spTree>
     <p:extLst>
       <p:ext uri="{BB962C8B-B14F-4D97-AF65-F5344CB8AC3E}">
-        <p14:creationId xmlns:p14="http://schemas.microsoft.com/office/powerpoint/2010/main" val="579562243"/>
+        <p14:creationId xmlns:p14="http://schemas.microsoft.com/office/powerpoint/2010/main" val="1389828653"/>
       </p:ext>
     </p:extLst>
   </p:cSld>
@@ -8711,7 +8832,7 @@
           <p:cNvPr id="4" name="">
             <a:extLst xmlns:a="http://schemas.openxmlformats.org/drawingml/2006/main">
               <a:ext uri="{FF2B5EF4-FFF2-40B4-BE49-F238E27FC236}">
-                <a16:creationId xmlns:a16="http://schemas.microsoft.com/office/drawing/2014/main" id="{FEC4B659-2D22-40FE-B7BD-976D1A2A4251}"/>
+                <a16:creationId xmlns:a16="http://schemas.microsoft.com/office/drawing/2014/main" id="{CF2E62E2-D243-4B0A-8526-E5F429C3EEE3}"/>
               </a:ext>
             </a:extLst>
           </p:cNvPr>
@@ -8749,6 +8870,7 @@
           </a:lstStyle>
           <a:p xmlns:a="http://schemas.openxmlformats.org/drawingml/2006/main">
             <a:pPr>
+              <a:buNone/>
               <a:defRPr sz="3150" b="1">
                 <a:solidFill>
                   <a:srgbClr val="173F50"/>
@@ -8777,7 +8899,7 @@
           <p:cNvPr id="2" name="">
             <a:extLst xmlns:a="http://schemas.openxmlformats.org/drawingml/2006/main">
               <a:ext uri="{FF2B5EF4-FFF2-40B4-BE49-F238E27FC236}">
-                <a16:creationId xmlns:a16="http://schemas.microsoft.com/office/drawing/2014/main" id="{1A65C9F7-5DE8-4093-A834-7B7C87267D42}"/>
+                <a16:creationId xmlns:a16="http://schemas.microsoft.com/office/drawing/2014/main" id="{9B447AEF-3376-4A28-9231-659BD660C512}"/>
               </a:ext>
             </a:extLst>
           </p:cNvPr>
@@ -8815,6 +8937,7 @@
           </a:lstStyle>
           <a:p xmlns:a="http://schemas.openxmlformats.org/drawingml/2006/main">
             <a:pPr>
+              <a:buNone/>
               <a:defRPr sz="1275" b="0">
                 <a:solidFill>
                   <a:srgbClr val="173F50"/>
@@ -8833,7 +8956,7 @@
                 <a:ea typeface="Arial"/>
                 <a:cs typeface="Arial"/>
               </a:rPr>
-              <a:t>AlphaVault  /  Du zhuotong  /  5 of 12</a:t>
+              <a:t>5 of 12</a:t>
             </a:r>
           </a:p>
         </p:txBody>
@@ -8843,7 +8966,7 @@
           <p:cNvPr id="3" name="">
             <a:extLst xmlns:a="http://schemas.openxmlformats.org/drawingml/2006/main">
               <a:ext uri="{FF2B5EF4-FFF2-40B4-BE49-F238E27FC236}">
-                <a16:creationId xmlns:a16="http://schemas.microsoft.com/office/drawing/2014/main" id="{F5E9F3D8-74F1-4908-9C19-8A5B50707EF2}"/>
+                <a16:creationId xmlns:a16="http://schemas.microsoft.com/office/drawing/2014/main" id="{59206142-BDDD-4965-8C02-F234B1E91F2E}"/>
               </a:ext>
             </a:extLst>
           </p:cNvPr>
@@ -8853,7 +8976,7 @@
           <p:nvPr/>
         </p:nvPicPr>
         <p:blipFill>
-          <a:blip xmlns:r="http://schemas.openxmlformats.org/officeDocument/2006/relationships" xmlns:a="http://schemas.openxmlformats.org/drawingml/2006/main" r:embed="Rb738d4e2f8314c9e"/>
+          <a:blip xmlns:r="http://schemas.openxmlformats.org/officeDocument/2006/relationships" xmlns:a="http://schemas.openxmlformats.org/drawingml/2006/main" r:embed="Rba2d4d09be64487c"/>
           <a:stretch xmlns:a="http://schemas.openxmlformats.org/drawingml/2006/main"/>
         </p:blipFill>
         <p:spPr>
@@ -8869,7 +8992,7 @@
     </p:spTree>
     <p:extLst>
       <p:ext uri="{BB962C8B-B14F-4D97-AF65-F5344CB8AC3E}">
-        <p14:creationId xmlns:p14="http://schemas.microsoft.com/office/powerpoint/2010/main" val="642832048"/>
+        <p14:creationId xmlns:p14="http://schemas.microsoft.com/office/powerpoint/2010/main" val="444935995"/>
       </p:ext>
     </p:extLst>
   </p:cSld>
@@ -8900,7 +9023,7 @@
           <p:cNvPr id="4" name="">
             <a:extLst xmlns:a="http://schemas.openxmlformats.org/drawingml/2006/main">
               <a:ext uri="{FF2B5EF4-FFF2-40B4-BE49-F238E27FC236}">
-                <a16:creationId xmlns:a16="http://schemas.microsoft.com/office/drawing/2014/main" id="{E448EAD9-201C-4C83-A00A-A464B53E6D67}"/>
+                <a16:creationId xmlns:a16="http://schemas.microsoft.com/office/drawing/2014/main" id="{792BA565-E76D-4463-AE57-CF32778850BC}"/>
               </a:ext>
             </a:extLst>
           </p:cNvPr>
@@ -8938,6 +9061,7 @@
           </a:lstStyle>
           <a:p xmlns:a="http://schemas.openxmlformats.org/drawingml/2006/main">
             <a:pPr>
+              <a:buNone/>
               <a:defRPr sz="3150" b="1">
                 <a:solidFill>
                   <a:srgbClr val="173F50"/>
@@ -8966,7 +9090,7 @@
           <p:cNvPr id="2" name="">
             <a:extLst xmlns:a="http://schemas.openxmlformats.org/drawingml/2006/main">
               <a:ext uri="{FF2B5EF4-FFF2-40B4-BE49-F238E27FC236}">
-                <a16:creationId xmlns:a16="http://schemas.microsoft.com/office/drawing/2014/main" id="{81357DD9-05F4-484D-9EEB-A931FE15B3BB}"/>
+                <a16:creationId xmlns:a16="http://schemas.microsoft.com/office/drawing/2014/main" id="{CC7E8D74-B3AE-4583-845B-65F56B0ECE37}"/>
               </a:ext>
             </a:extLst>
           </p:cNvPr>
@@ -9004,6 +9128,7 @@
           </a:lstStyle>
           <a:p xmlns:a="http://schemas.openxmlformats.org/drawingml/2006/main">
             <a:pPr>
+              <a:buNone/>
               <a:defRPr sz="1275" b="0">
                 <a:solidFill>
                   <a:srgbClr val="173F50"/>
@@ -9022,7 +9147,7 @@
                 <a:ea typeface="Arial"/>
                 <a:cs typeface="Arial"/>
               </a:rPr>
-              <a:t>AlphaVault  /  Du zhuotong  /  6 of 12</a:t>
+              <a:t>6 of 12</a:t>
             </a:r>
           </a:p>
         </p:txBody>
@@ -9032,7 +9157,7 @@
           <p:cNvPr id="3" name="">
             <a:extLst xmlns:a="http://schemas.openxmlformats.org/drawingml/2006/main">
               <a:ext uri="{FF2B5EF4-FFF2-40B4-BE49-F238E27FC236}">
-                <a16:creationId xmlns:a16="http://schemas.microsoft.com/office/drawing/2014/main" id="{4F0B614A-3811-4FEB-A2DA-AAB71FFE6515}"/>
+                <a16:creationId xmlns:a16="http://schemas.microsoft.com/office/drawing/2014/main" id="{3AD82179-5806-476D-B309-92375FB28D77}"/>
               </a:ext>
             </a:extLst>
           </p:cNvPr>
@@ -9042,7 +9167,7 @@
           <p:nvPr/>
         </p:nvPicPr>
         <p:blipFill>
-          <a:blip xmlns:r="http://schemas.openxmlformats.org/officeDocument/2006/relationships" xmlns:a="http://schemas.openxmlformats.org/drawingml/2006/main" r:embed="R5caaa120b1da4f32"/>
+          <a:blip xmlns:r="http://schemas.openxmlformats.org/officeDocument/2006/relationships" xmlns:a="http://schemas.openxmlformats.org/drawingml/2006/main" r:embed="R7b5d8ebb196b402a"/>
           <a:stretch xmlns:a="http://schemas.openxmlformats.org/drawingml/2006/main"/>
         </p:blipFill>
         <p:spPr>
@@ -9058,7 +9183,7 @@
     </p:spTree>
     <p:extLst>
       <p:ext uri="{BB962C8B-B14F-4D97-AF65-F5344CB8AC3E}">
-        <p14:creationId xmlns:p14="http://schemas.microsoft.com/office/powerpoint/2010/main" val="1902113514"/>
+        <p14:creationId xmlns:p14="http://schemas.microsoft.com/office/powerpoint/2010/main" val="1040127978"/>
       </p:ext>
     </p:extLst>
   </p:cSld>
@@ -9089,7 +9214,7 @@
           <p:cNvPr id="4" name="">
             <a:extLst xmlns:a="http://schemas.openxmlformats.org/drawingml/2006/main">
               <a:ext uri="{FF2B5EF4-FFF2-40B4-BE49-F238E27FC236}">
-                <a16:creationId xmlns:a16="http://schemas.microsoft.com/office/drawing/2014/main" id="{37390D7D-9B4F-4668-86E1-895F91C5B30F}"/>
+                <a16:creationId xmlns:a16="http://schemas.microsoft.com/office/drawing/2014/main" id="{4F7EFB8A-63FD-4245-953F-BD330DDCD254}"/>
               </a:ext>
             </a:extLst>
           </p:cNvPr>
@@ -9127,6 +9252,7 @@
           </a:lstStyle>
           <a:p xmlns:a="http://schemas.openxmlformats.org/drawingml/2006/main">
             <a:pPr>
+              <a:buNone/>
               <a:defRPr sz="3150" b="1">
                 <a:solidFill>
                   <a:srgbClr val="173F50"/>
@@ -9155,7 +9281,7 @@
           <p:cNvPr id="2" name="">
             <a:extLst xmlns:a="http://schemas.openxmlformats.org/drawingml/2006/main">
               <a:ext uri="{FF2B5EF4-FFF2-40B4-BE49-F238E27FC236}">
-                <a16:creationId xmlns:a16="http://schemas.microsoft.com/office/drawing/2014/main" id="{9E1215D9-D31C-4F2D-90A0-0CA45F887C49}"/>
+                <a16:creationId xmlns:a16="http://schemas.microsoft.com/office/drawing/2014/main" id="{5A6EB0F8-8840-4F46-93E5-2E2A75C6E7C2}"/>
               </a:ext>
             </a:extLst>
           </p:cNvPr>
@@ -9193,6 +9319,7 @@
           </a:lstStyle>
           <a:p xmlns:a="http://schemas.openxmlformats.org/drawingml/2006/main">
             <a:pPr>
+              <a:buNone/>
               <a:defRPr sz="1275" b="0">
                 <a:solidFill>
                   <a:srgbClr val="173F50"/>
@@ -9211,7 +9338,7 @@
                 <a:ea typeface="Arial"/>
                 <a:cs typeface="Arial"/>
               </a:rPr>
-              <a:t>AlphaVault  /  Du zhuotong  /  7 of 12</a:t>
+              <a:t>7 of 12</a:t>
             </a:r>
           </a:p>
         </p:txBody>
@@ -9221,7 +9348,7 @@
           <p:cNvPr id="3" name="">
             <a:extLst xmlns:a="http://schemas.openxmlformats.org/drawingml/2006/main">
               <a:ext uri="{FF2B5EF4-FFF2-40B4-BE49-F238E27FC236}">
-                <a16:creationId xmlns:a16="http://schemas.microsoft.com/office/drawing/2014/main" id="{00765441-7EFD-4E43-B128-572D0C83365C}"/>
+                <a16:creationId xmlns:a16="http://schemas.microsoft.com/office/drawing/2014/main" id="{966F6C19-DDF8-41EF-8FFB-D62C62FC660F}"/>
               </a:ext>
             </a:extLst>
           </p:cNvPr>
@@ -9231,7 +9358,7 @@
           <p:nvPr/>
         </p:nvPicPr>
         <p:blipFill>
-          <a:blip xmlns:r="http://schemas.openxmlformats.org/officeDocument/2006/relationships" xmlns:a="http://schemas.openxmlformats.org/drawingml/2006/main" r:embed="R175dfccffde949ec"/>
+          <a:blip xmlns:r="http://schemas.openxmlformats.org/officeDocument/2006/relationships" xmlns:a="http://schemas.openxmlformats.org/drawingml/2006/main" r:embed="R1f8b70effd3647a2"/>
           <a:stretch xmlns:a="http://schemas.openxmlformats.org/drawingml/2006/main"/>
         </p:blipFill>
         <p:spPr>
@@ -9247,7 +9374,7 @@
     </p:spTree>
     <p:extLst>
       <p:ext uri="{BB962C8B-B14F-4D97-AF65-F5344CB8AC3E}">
-        <p14:creationId xmlns:p14="http://schemas.microsoft.com/office/powerpoint/2010/main" val="1547733013"/>
+        <p14:creationId xmlns:p14="http://schemas.microsoft.com/office/powerpoint/2010/main" val="1096453579"/>
       </p:ext>
     </p:extLst>
   </p:cSld>
@@ -9278,7 +9405,7 @@
           <p:cNvPr id="5" name="">
             <a:extLst xmlns:a="http://schemas.openxmlformats.org/drawingml/2006/main">
               <a:ext uri="{FF2B5EF4-FFF2-40B4-BE49-F238E27FC236}">
-                <a16:creationId xmlns:a16="http://schemas.microsoft.com/office/drawing/2014/main" id="{1F7E19A0-3425-463E-99C7-DE2F49183143}"/>
+                <a16:creationId xmlns:a16="http://schemas.microsoft.com/office/drawing/2014/main" id="{7431D4DF-F8D4-474E-85F9-9531FA19608B}"/>
               </a:ext>
             </a:extLst>
           </p:cNvPr>
@@ -9316,6 +9443,7 @@
           </a:lstStyle>
           <a:p xmlns:a="http://schemas.openxmlformats.org/drawingml/2006/main">
             <a:pPr>
+              <a:buNone/>
               <a:defRPr sz="3150" b="1">
                 <a:solidFill>
                   <a:srgbClr val="173F50"/>
@@ -9344,7 +9472,7 @@
           <p:cNvPr id="2" name="">
             <a:extLst xmlns:a="http://schemas.openxmlformats.org/drawingml/2006/main">
               <a:ext uri="{FF2B5EF4-FFF2-40B4-BE49-F238E27FC236}">
-                <a16:creationId xmlns:a16="http://schemas.microsoft.com/office/drawing/2014/main" id="{8009FFAC-B425-46E0-826C-58119D28B62F}"/>
+                <a16:creationId xmlns:a16="http://schemas.microsoft.com/office/drawing/2014/main" id="{9BD14C7E-2090-4E00-9859-3BF29B4B0692}"/>
               </a:ext>
             </a:extLst>
           </p:cNvPr>
@@ -9382,6 +9510,7 @@
           </a:lstStyle>
           <a:p xmlns:a="http://schemas.openxmlformats.org/drawingml/2006/main">
             <a:pPr>
+              <a:buNone/>
               <a:defRPr sz="1275" b="0">
                 <a:solidFill>
                   <a:srgbClr val="173F50"/>
@@ -9400,7 +9529,7 @@
                 <a:ea typeface="Arial"/>
                 <a:cs typeface="Arial"/>
               </a:rPr>
-              <a:t>AlphaVault  /  Du zhuotong  /  8 of 12</a:t>
+              <a:t>8 of 12</a:t>
             </a:r>
           </a:p>
         </p:txBody>
@@ -9410,7 +9539,7 @@
           <p:cNvPr id="3" name="">
             <a:extLst xmlns:a="http://schemas.openxmlformats.org/drawingml/2006/main">
               <a:ext uri="{FF2B5EF4-FFF2-40B4-BE49-F238E27FC236}">
-                <a16:creationId xmlns:a16="http://schemas.microsoft.com/office/drawing/2014/main" id="{2D6EBD2D-350E-45BB-AA0E-96B3ABB9AC63}"/>
+                <a16:creationId xmlns:a16="http://schemas.microsoft.com/office/drawing/2014/main" id="{3B974791-778B-4DA1-967B-D864CE68605A}"/>
               </a:ext>
             </a:extLst>
           </p:cNvPr>
@@ -9688,7 +9817,7 @@
           <p:cNvPr id="4" name="">
             <a:extLst xmlns:a="http://schemas.openxmlformats.org/drawingml/2006/main">
               <a:ext uri="{FF2B5EF4-FFF2-40B4-BE49-F238E27FC236}">
-                <a16:creationId xmlns:a16="http://schemas.microsoft.com/office/drawing/2014/main" id="{BCF79EAE-F9C7-4E11-B368-447C99428F2E}"/>
+                <a16:creationId xmlns:a16="http://schemas.microsoft.com/office/drawing/2014/main" id="{FC739FA6-7F08-40DD-8D7D-5D1637A8FA33}"/>
               </a:ext>
             </a:extLst>
           </p:cNvPr>
@@ -9726,6 +9855,7 @@
           </a:lstStyle>
           <a:p xmlns:a="http://schemas.openxmlformats.org/drawingml/2006/main">
             <a:pPr>
+              <a:buNone/>
               <a:defRPr sz="2025" b="0">
                 <a:solidFill>
                   <a:srgbClr val="173F50"/>
@@ -9752,7 +9882,7 @@
     </p:spTree>
     <p:extLst>
       <p:ext uri="{BB962C8B-B14F-4D97-AF65-F5344CB8AC3E}">
-        <p14:creationId xmlns:p14="http://schemas.microsoft.com/office/powerpoint/2010/main" val="1303080640"/>
+        <p14:creationId xmlns:p14="http://schemas.microsoft.com/office/powerpoint/2010/main" val="511823044"/>
       </p:ext>
     </p:extLst>
   </p:cSld>
@@ -9783,7 +9913,7 @@
           <p:cNvPr id="8" name="">
             <a:extLst xmlns:a="http://schemas.openxmlformats.org/drawingml/2006/main">
               <a:ext uri="{FF2B5EF4-FFF2-40B4-BE49-F238E27FC236}">
-                <a16:creationId xmlns:a16="http://schemas.microsoft.com/office/drawing/2014/main" id="{0AB3978F-718F-48DE-9822-A7EFB59B882C}"/>
+                <a16:creationId xmlns:a16="http://schemas.microsoft.com/office/drawing/2014/main" id="{D4FCEB2E-177E-43C4-818A-2D4AD2FD4C5A}"/>
               </a:ext>
             </a:extLst>
           </p:cNvPr>
@@ -9821,6 +9951,7 @@
           </a:lstStyle>
           <a:p xmlns:a="http://schemas.openxmlformats.org/drawingml/2006/main">
             <a:pPr>
+              <a:buNone/>
               <a:defRPr sz="3150" b="1">
                 <a:solidFill>
                   <a:srgbClr val="173F50"/>
@@ -9849,7 +9980,7 @@
           <p:cNvPr id="2" name="">
             <a:extLst xmlns:a="http://schemas.openxmlformats.org/drawingml/2006/main">
               <a:ext uri="{FF2B5EF4-FFF2-40B4-BE49-F238E27FC236}">
-                <a16:creationId xmlns:a16="http://schemas.microsoft.com/office/drawing/2014/main" id="{D6A6915B-10B2-4F2F-B3EC-F342DB6F87F3}"/>
+                <a16:creationId xmlns:a16="http://schemas.microsoft.com/office/drawing/2014/main" id="{6E887DE1-D472-4744-AE5D-639A6FF130A8}"/>
               </a:ext>
             </a:extLst>
           </p:cNvPr>
@@ -9887,6 +10018,7 @@
           </a:lstStyle>
           <a:p xmlns:a="http://schemas.openxmlformats.org/drawingml/2006/main">
             <a:pPr>
+              <a:buNone/>
               <a:defRPr sz="1275" b="0">
                 <a:solidFill>
                   <a:srgbClr val="173F50"/>
@@ -9905,7 +10037,7 @@
                 <a:ea typeface="Arial"/>
                 <a:cs typeface="Arial"/>
               </a:rPr>
-              <a:t>AlphaVault  /  Du zhuotong  /  9 of 12</a:t>
+              <a:t>9 of 12</a:t>
             </a:r>
           </a:p>
         </p:txBody>
@@ -9915,7 +10047,7 @@
           <p:cNvPr id="3" name="Chart">
             <a:extLst xmlns:a="http://schemas.openxmlformats.org/drawingml/2006/main">
               <a:ext uri="{FF2B5EF4-FFF2-40B4-BE49-F238E27FC236}">
-                <a16:creationId xmlns:a16="http://schemas.microsoft.com/office/drawing/2014/main" id="{0E4F35ED-482B-438F-8643-98CE7E94DC7F}"/>
+                <a16:creationId xmlns:a16="http://schemas.microsoft.com/office/drawing/2014/main" id="{D4E8E970-921A-4F97-883C-3B2AB6BB81C4}"/>
               </a:ext>
             </a:extLst>
           </p:cNvPr>
@@ -9928,7 +10060,7 @@
         </p:xfrm>
         <a:graphic xmlns:a="http://schemas.openxmlformats.org/drawingml/2006/main">
           <a:graphicData uri="http://schemas.openxmlformats.org/drawingml/2006/chart">
-            <c:chart xmlns:r="http://schemas.openxmlformats.org/officeDocument/2006/relationships" xmlns:c="http://schemas.openxmlformats.org/drawingml/2006/chart" r:id="R6cc0ac5a66294808"/>
+            <c:chart xmlns:r="http://schemas.openxmlformats.org/officeDocument/2006/relationships" xmlns:c="http://schemas.openxmlformats.org/drawingml/2006/chart" r:id="R1e8ca2b5abcd4cf1"/>
           </a:graphicData>
         </a:graphic>
       </p:graphicFrame>
@@ -9937,7 +10069,7 @@
           <p:cNvPr id="4" name="">
             <a:extLst xmlns:a="http://schemas.openxmlformats.org/drawingml/2006/main">
               <a:ext uri="{FF2B5EF4-FFF2-40B4-BE49-F238E27FC236}">
-                <a16:creationId xmlns:a16="http://schemas.microsoft.com/office/drawing/2014/main" id="{CEEF3F1C-5DF8-4C5B-A4E3-7ABC16DE1129}"/>
+                <a16:creationId xmlns:a16="http://schemas.microsoft.com/office/drawing/2014/main" id="{98D300EB-77E3-4268-9D20-33227E4F8356}"/>
               </a:ext>
             </a:extLst>
           </p:cNvPr>
@@ -9975,6 +10107,7 @@
           </a:lstStyle>
           <a:p xmlns:a="http://schemas.openxmlformats.org/drawingml/2006/main">
             <a:pPr>
+              <a:buNone/>
               <a:defRPr sz="2100" b="1">
                 <a:solidFill>
                   <a:srgbClr val="173F50"/>
@@ -10003,7 +10136,7 @@
           <p:cNvPr id="5" name="">
             <a:extLst xmlns:a="http://schemas.openxmlformats.org/drawingml/2006/main">
               <a:ext uri="{FF2B5EF4-FFF2-40B4-BE49-F238E27FC236}">
-                <a16:creationId xmlns:a16="http://schemas.microsoft.com/office/drawing/2014/main" id="{2A48E8B5-D784-4523-8F0C-9EB3303C7782}"/>
+                <a16:creationId xmlns:a16="http://schemas.microsoft.com/office/drawing/2014/main" id="{CB1B8872-1A4C-4389-AFCD-6F937032F9B1}"/>
               </a:ext>
             </a:extLst>
           </p:cNvPr>
@@ -10041,6 +10174,7 @@
           </a:lstStyle>
           <a:p xmlns:a="http://schemas.openxmlformats.org/drawingml/2006/main">
             <a:pPr>
+              <a:buNone/>
               <a:defRPr sz="2025" b="0">
                 <a:solidFill>
                   <a:srgbClr val="173F50"/>
@@ -10064,6 +10198,7 @@
           </a:p>
           <a:p xmlns:a="http://schemas.openxmlformats.org/drawingml/2006/main">
             <a:pPr>
+              <a:buNone/>
               <a:defRPr sz="2025" b="0">
                 <a:solidFill>
                   <a:srgbClr val="173F50"/>
@@ -10087,6 +10222,7 @@
           </a:p>
           <a:p xmlns:a="http://schemas.openxmlformats.org/drawingml/2006/main">
             <a:pPr>
+              <a:buNone/>
               <a:defRPr sz="2025" b="0">
                 <a:solidFill>
                   <a:srgbClr val="173F50"/>
@@ -10115,7 +10251,7 @@
           <p:cNvPr id="6" name="">
             <a:extLst xmlns:a="http://schemas.openxmlformats.org/drawingml/2006/main">
               <a:ext uri="{FF2B5EF4-FFF2-40B4-BE49-F238E27FC236}">
-                <a16:creationId xmlns:a16="http://schemas.microsoft.com/office/drawing/2014/main" id="{8AC8DF61-AFF6-45E3-80EA-8E7D97B45855}"/>
+                <a16:creationId xmlns:a16="http://schemas.microsoft.com/office/drawing/2014/main" id="{83D43ECC-FC09-471A-AC8C-15DD64821542}"/>
               </a:ext>
             </a:extLst>
           </p:cNvPr>
@@ -10153,6 +10289,7 @@
           </a:lstStyle>
           <a:p xmlns:a="http://schemas.openxmlformats.org/drawingml/2006/main">
             <a:pPr>
+              <a:buNone/>
               <a:defRPr sz="1875" b="0">
                 <a:solidFill>
                   <a:srgbClr val="173F50"/>
@@ -10176,6 +10313,7 @@
           </a:p>
           <a:p xmlns:a="http://schemas.openxmlformats.org/drawingml/2006/main">
             <a:pPr>
+              <a:buNone/>
               <a:defRPr sz="1875" b="0">
                 <a:solidFill>
                   <a:srgbClr val="173F50"/>
@@ -10204,7 +10342,7 @@
           <p:cNvPr id="7" name="">
             <a:extLst xmlns:a="http://schemas.openxmlformats.org/drawingml/2006/main">
               <a:ext uri="{FF2B5EF4-FFF2-40B4-BE49-F238E27FC236}">
-                <a16:creationId xmlns:a16="http://schemas.microsoft.com/office/drawing/2014/main" id="{AA5A2DF1-B71D-479A-A07F-DB683B5D0E74}"/>
+                <a16:creationId xmlns:a16="http://schemas.microsoft.com/office/drawing/2014/main" id="{7EA1EB5A-9CE5-44EF-8E71-71DEC507CBFA}"/>
               </a:ext>
             </a:extLst>
           </p:cNvPr>
@@ -10242,6 +10380,7 @@
           </a:lstStyle>
           <a:p xmlns:a="http://schemas.openxmlformats.org/drawingml/2006/main">
             <a:pPr>
+              <a:buNone/>
               <a:defRPr sz="1875" b="0">
                 <a:solidFill>
                   <a:srgbClr val="173F50"/>
@@ -10268,7 +10407,7 @@
     </p:spTree>
     <p:extLst>
       <p:ext uri="{BB962C8B-B14F-4D97-AF65-F5344CB8AC3E}">
-        <p14:creationId xmlns:p14="http://schemas.microsoft.com/office/powerpoint/2010/main" val="1906100928"/>
+        <p14:creationId xmlns:p14="http://schemas.microsoft.com/office/powerpoint/2010/main" val="653509106"/>
       </p:ext>
     </p:extLst>
   </p:cSld>
@@ -10276,9 +10415,9 @@
 </file>
 
 <file path=ppt/theme/theme1.xml><?xml version="1.0" encoding="utf-8"?>
-<a:theme xmlns:a="http://schemas.openxmlformats.org/drawingml/2006/main" name="ChatGPT">
+<a:theme xmlns:a="http://schemas.openxmlformats.org/drawingml/2006/main" name="AlphaVault">
   <a:themeElements>
-    <a:clrScheme name="ChatGPT">
+    <a:clrScheme name="AlphaVault">
       <a:dk1>
         <a:srgbClr val="000000"/>
       </a:dk1>
@@ -10328,7 +10467,7 @@
         <a:cs typeface=""/>
       </a:minorFont>
     </a:fontScheme>
-    <a:fmtScheme name="ChatGPT">
+    <a:fmtScheme name="AlphaVault">
       <a:fillStyleLst>
         <a:solidFill>
           <a:schemeClr val="phClr"/>

--- a/submission/AlphaVault-Presentation.pptx
+++ b/submission/AlphaVault-Presentation.pptx
@@ -533,7 +533,7 @@
           </a:p>
           <a:p xmlns:a="http://schemas.openxmlformats.org/drawingml/2006/main">
             <a:r>
-              <a:t>Source: evidence/current-tests.tap, submission-hosted-check.json, hosted-jobs-*.json.</a:t>
+              <a:t>Source: evidence/flask-tests-final.txt; evidence/flask-migration-node-regression.tap; evidence/flask-hosted-acceptance.json; evidence/hosted-jobs-before-restart.json and evidence/hosted-jobs-after-restart.json.</a:t>
             </a:r>
           </a:p>
         </p:txBody>
